--- a/sunumlar/5-sinif-unite1-bilisim-temelleri-DETAYLI.pptx
+++ b/sunumlar/5-sinif-unite1-bilisim-temelleri-DETAYLI.pptx
@@ -523,6 +523,78 @@
               <a:t>Bu ünite 9 hafta sürecek ve bilişim teknolojilerinin temellerini kapsar.</a:t>
             </a:r>
           </a:p>
+          <a:p/>
+          <a:p>
+            <a:r>
+              <a:t>🎨 GÖRSELLEŞTİRME ÖNERİLERİ:</a:t>
+            </a:r>
+          </a:p>
+          <a:p/>
+          <a:p>
+            <a:r>
+              <a:t>📸 Görsel: CPU, RAM ve anakart fotoğrafları</a:t>
+            </a:r>
+          </a:p>
+          <a:p>
+            <a:r>
+              <a:t>🎬 Video: Bilgisayar donanımı tanıtım videosu (1-2 dk)</a:t>
+            </a:r>
+          </a:p>
+          <a:p>
+            <a:r>
+              <a:t>💡 İnfografik: Bilgisayar bileşenleri şeması</a:t>
+            </a:r>
+          </a:p>
+          <a:p>
+            <a:r>
+              <a:t>📸 Görsel: HDD vs SSD karşılaştırması</a:t>
+            </a:r>
+          </a:p>
+          <a:p>
+            <a:r>
+              <a:t>🎬 Video: Depolama birimleri animasyonu</a:t>
+            </a:r>
+          </a:p>
+          <a:p>
+            <a:r>
+              <a:t>💡 İnfografik: Depolama kapasiteleri karşılaştırma tablosu</a:t>
+            </a:r>
+          </a:p>
+          <a:p>
+            <a:r>
+              <a:t>📸 Görsel: Farklı işletim sistemleri logoları ve ekran görüntüleri</a:t>
+            </a:r>
+          </a:p>
+          <a:p>
+            <a:r>
+              <a:t>🎬 Video: İşletim sistemi nedir? Animasyonlu anlatım</a:t>
+            </a:r>
+          </a:p>
+          <a:p>
+            <a:r>
+              <a:t>📸 Görsel: LAN ve WAN ağ topolojileri şeması</a:t>
+            </a:r>
+          </a:p>
+          <a:p>
+            <a:r>
+              <a:t>🎬 Video: İnternet nasıl çalışır? Animasyonlu anlatım</a:t>
+            </a:r>
+          </a:p>
+          <a:p>
+            <a:r>
+              <a:t>💡 İnfografik: Ev ağı kurulumu diyagramı</a:t>
+            </a:r>
+          </a:p>
+          <a:p>
+            <a:r>
+              <a:t>📸 Görsel: Dijital çağ görselleri ve teknoloji örnekleri</a:t>
+            </a:r>
+          </a:p>
+          <a:p>
+            <a:r>
+              <a:t>🎬 Video: Bilişim teknolojilerinin tarihçesi</a:t>
+            </a:r>
+          </a:p>
         </p:txBody>
       </p:sp>
       <p:sp>
@@ -593,6 +665,38 @@
               <a:t>Uygulama: Öğrencilere kısayolları denetin</a:t>
             </a:r>
           </a:p>
+          <a:p/>
+          <a:p>
+            <a:r>
+              <a:t>🎨 GÖRSELLEŞTİRME ÖNERİLERİ:</a:t>
+            </a:r>
+          </a:p>
+          <a:p/>
+          <a:p>
+            <a:r>
+              <a:t>📸 Görsel: Farklı işletim sistemleri logoları ve ekran görüntüleri</a:t>
+            </a:r>
+          </a:p>
+          <a:p>
+            <a:r>
+              <a:t>🎬 Video: İşletim sistemi nedir? Animasyonlu anlatım</a:t>
+            </a:r>
+          </a:p>
+          <a:p>
+            <a:r>
+              <a:t>📸 Görsel: LAN ve WAN ağ topolojileri şeması</a:t>
+            </a:r>
+          </a:p>
+          <a:p>
+            <a:r>
+              <a:t>🎬 Video: İnternet nasıl çalışır? Animasyonlu anlatım</a:t>
+            </a:r>
+          </a:p>
+          <a:p>
+            <a:r>
+              <a:t>💡 İnfografik: Ev ağı kurulumu diyagramı</a:t>
+            </a:r>
+          </a:p>
         </p:txBody>
       </p:sp>
       <p:sp>
@@ -663,6 +767,113 @@
               <a:t>Görseller: Farklı dosya türleri ve ikonları</a:t>
             </a:r>
           </a:p>
+          <a:p/>
+          <a:p>
+            <a:r>
+              <a:t>🎨 GÖRSELLEŞTİRME ÖNERİLERİ:</a:t>
+            </a:r>
+          </a:p>
+          <a:p/>
+          <a:p>
+            <a:r>
+              <a:t>📸 Görsel: CPU, RAM ve anakart fotoğrafları</a:t>
+            </a:r>
+          </a:p>
+          <a:p>
+            <a:r>
+              <a:t>🎬 Video: Bilgisayar donanımı tanıtım videosu (1-2 dk)</a:t>
+            </a:r>
+          </a:p>
+          <a:p>
+            <a:r>
+              <a:t>💡 İnfografik: Bilgisayar bileşenleri şeması</a:t>
+            </a:r>
+          </a:p>
+          <a:p>
+            <a:r>
+              <a:t>📸 Görsel: MS Word arayüz ekran görüntüsü</a:t>
+            </a:r>
+          </a:p>
+          <a:p>
+            <a:r>
+              <a:t>🎬 Video: Word temel özellikleri demo (2-3 dk)</a:t>
+            </a:r>
+          </a:p>
+          <a:p>
+            <a:r>
+              <a:t>💡 Ekran kaydı: Biçimlendirme araçları kullanımı</a:t>
+            </a:r>
+          </a:p>
+          <a:p>
+            <a:r>
+              <a:t>📸 Görsel: LAN ve WAN ağ topolojileri şeması</a:t>
+            </a:r>
+          </a:p>
+          <a:p>
+            <a:r>
+              <a:t>🎬 Video: İnternet nasıl çalışır? Animasyonlu anlatım</a:t>
+            </a:r>
+          </a:p>
+          <a:p>
+            <a:r>
+              <a:t>💡 İnfografik: Ev ağı kurulumu diyagramı</a:t>
+            </a:r>
+          </a:p>
+          <a:p>
+            <a:r>
+              <a:t>📸 Görsel: Farklı grafik türleri örnekleri</a:t>
+            </a:r>
+          </a:p>
+          <a:p>
+            <a:r>
+              <a:t>🎬 Video: Veri görselleştirme önemi</a:t>
+            </a:r>
+          </a:p>
+          <a:p>
+            <a:r>
+              <a:t>💡 İnfografik: Grafik türleri ve kullanım alanları</a:t>
+            </a:r>
+          </a:p>
+          <a:p>
+            <a:r>
+              <a:t>📸 Görsel: Excel arayüzü ekran görüntüsü</a:t>
+            </a:r>
+          </a:p>
+          <a:p>
+            <a:r>
+              <a:t>🎬 Video: Excel temel işlemler (2-3 dk)</a:t>
+            </a:r>
+          </a:p>
+          <a:p>
+            <a:r>
+              <a:t>💡 Ekran kaydı: Formül kullanımı demo</a:t>
+            </a:r>
+          </a:p>
+          <a:p>
+            <a:r>
+              <a:t>📸 Görsel: Paint araçları ekran görüntüsü</a:t>
+            </a:r>
+          </a:p>
+          <a:p>
+            <a:r>
+              <a:t>🎬 Video: Paint ile basit çizim teknikleri</a:t>
+            </a:r>
+          </a:p>
+          <a:p>
+            <a:r>
+              <a:t>📸 Görsel: PowerPoint arayüzü ve araçları</a:t>
+            </a:r>
+          </a:p>
+          <a:p>
+            <a:r>
+              <a:t>🎬 Video: Etkili sunum hazırlama ipuçları</a:t>
+            </a:r>
+          </a:p>
+          <a:p>
+            <a:r>
+              <a:t>💡 Ekran kaydı: PowerPoint temel özellikler</a:t>
+            </a:r>
+          </a:p>
         </p:txBody>
       </p:sp>
       <p:sp>
@@ -733,6 +944,825 @@
               <a:t>Uygulama: Öğrencilerle birlikte bu işlemleri yapın</a:t>
             </a:r>
           </a:p>
+          <a:p/>
+          <a:p>
+            <a:r>
+              <a:t>🎨 GÖRSELLEŞTİRME ÖNERİLERİ:</a:t>
+            </a:r>
+          </a:p>
+          <a:p/>
+          <a:p>
+            <a:r>
+              <a:t>📸 Görsel: CPU, RAM ve anakart fotoğrafları</a:t>
+            </a:r>
+          </a:p>
+          <a:p>
+            <a:r>
+              <a:t>🎬 Video: Bilgisayar donanımı tanıtım videosu (1-2 dk)</a:t>
+            </a:r>
+          </a:p>
+          <a:p>
+            <a:r>
+              <a:t>💡 İnfografik: Bilgisayar bileşenleri şeması</a:t>
+            </a:r>
+          </a:p>
+          <a:p>
+            <a:r>
+              <a:t>📸 Görsel: LAN ve WAN ağ topolojileri şeması</a:t>
+            </a:r>
+          </a:p>
+          <a:p>
+            <a:r>
+              <a:t>🎬 Video: İnternet nasıl çalışır? Animasyonlu anlatım</a:t>
+            </a:r>
+          </a:p>
+          <a:p>
+            <a:r>
+              <a:t>💡 İnfografik: Ev ağı kurulumu diyagramı</a:t>
+            </a:r>
+          </a:p>
+          <a:p>
+            <a:r>
+              <a:t>📸 Görsel: Koşullu yapılar akış diyagramı</a:t>
+            </a:r>
+          </a:p>
+          <a:p>
+            <a:r>
+              <a:t>🎬 Video: Koşullu ifadeler Scratch'te</a:t>
+            </a:r>
+          </a:p>
+        </p:txBody>
+      </p:sp>
+      <p:sp>
+        <p:nvSpPr>
+          <p:cNvPr id="4" name="Slide Number Placeholder 3"/>
+          <p:cNvSpPr>
+            <a:spLocks noGrp="1"/>
+          </p:cNvSpPr>
+          <p:nvPr>
+            <p:ph type="sldNum" idx="5" sz="quarter"/>
+          </p:nvPr>
+        </p:nvSpPr>
+        <p:spPr/>
+      </p:sp>
+    </p:spTree>
+  </p:cSld>
+  <p:clrMapOvr>
+    <a:masterClrMapping/>
+  </p:clrMapOvr>
+</p:notes>
+</file>
+
+<file path=ppt/notesSlides/notesSlide13.xml><?xml version="1.0" encoding="utf-8"?>
+<p:notes xmlns:a="http://schemas.openxmlformats.org/drawingml/2006/main" xmlns:p="http://schemas.openxmlformats.org/presentationml/2006/main" xmlns:r="http://schemas.openxmlformats.org/officeDocument/2006/relationships">
+  <p:cSld>
+    <p:spTree>
+      <p:nvGrpSpPr>
+        <p:cNvPr id="1" name=""/>
+        <p:cNvGrpSpPr/>
+        <p:nvPr/>
+      </p:nvGrpSpPr>
+      <p:grpSpPr>
+        <a:xfrm>
+          <a:off x="0" y="0"/>
+          <a:ext cx="0" cy="0"/>
+          <a:chOff x="0" y="0"/>
+          <a:chExt cx="0" cy="0"/>
+        </a:xfrm>
+      </p:grpSpPr>
+      <p:sp>
+        <p:nvSpPr>
+          <p:cNvPr id="2" name="Slide Image Placeholder 1"/>
+          <p:cNvSpPr>
+            <a:spLocks noGrp="1"/>
+          </p:cNvSpPr>
+          <p:nvPr>
+            <p:ph type="sldImg" idx="2"/>
+          </p:nvPr>
+        </p:nvSpPr>
+        <p:spPr/>
+      </p:sp>
+      <p:sp>
+        <p:nvSpPr>
+          <p:cNvPr id="3" name="Notes Placeholder 2"/>
+          <p:cNvSpPr>
+            <a:spLocks noGrp="1"/>
+          </p:cNvSpPr>
+          <p:nvPr>
+            <p:ph type="body" idx="3" sz="quarter"/>
+          </p:nvPr>
+        </p:nvSpPr>
+        <p:spPr/>
+        <p:txBody>
+          <a:bodyPr/>
+          <a:lstStyle/>
+          <a:p>
+            <a:r>
+              <a:t>🎨 GÖRSELLEŞTİRME ÖNERİLERİ:</a:t>
+            </a:r>
+          </a:p>
+          <a:p/>
+          <a:p>
+            <a:r>
+              <a:t>📸 Görsel: CPU, RAM ve anakart fotoğrafları</a:t>
+            </a:r>
+          </a:p>
+          <a:p>
+            <a:r>
+              <a:t>🎬 Video: Bilgisayar donanımı tanıtım videosu (1-2 dk)</a:t>
+            </a:r>
+          </a:p>
+          <a:p>
+            <a:r>
+              <a:t>💡 İnfografik: Bilgisayar bileşenleri şeması</a:t>
+            </a:r>
+          </a:p>
+        </p:txBody>
+      </p:sp>
+      <p:sp>
+        <p:nvSpPr>
+          <p:cNvPr id="4" name="Slide Number Placeholder 3"/>
+          <p:cNvSpPr>
+            <a:spLocks noGrp="1"/>
+          </p:cNvSpPr>
+          <p:nvPr>
+            <p:ph type="sldNum" idx="5" sz="quarter"/>
+          </p:nvPr>
+        </p:nvSpPr>
+        <p:spPr/>
+      </p:sp>
+    </p:spTree>
+  </p:cSld>
+  <p:clrMapOvr>
+    <a:masterClrMapping/>
+  </p:clrMapOvr>
+</p:notes>
+</file>
+
+<file path=ppt/notesSlides/notesSlide14.xml><?xml version="1.0" encoding="utf-8"?>
+<p:notes xmlns:a="http://schemas.openxmlformats.org/drawingml/2006/main" xmlns:p="http://schemas.openxmlformats.org/presentationml/2006/main" xmlns:r="http://schemas.openxmlformats.org/officeDocument/2006/relationships">
+  <p:cSld>
+    <p:spTree>
+      <p:nvGrpSpPr>
+        <p:cNvPr id="1" name=""/>
+        <p:cNvGrpSpPr/>
+        <p:nvPr/>
+      </p:nvGrpSpPr>
+      <p:grpSpPr>
+        <a:xfrm>
+          <a:off x="0" y="0"/>
+          <a:ext cx="0" cy="0"/>
+          <a:chOff x="0" y="0"/>
+          <a:chExt cx="0" cy="0"/>
+        </a:xfrm>
+      </p:grpSpPr>
+      <p:sp>
+        <p:nvSpPr>
+          <p:cNvPr id="2" name="Slide Image Placeholder 1"/>
+          <p:cNvSpPr>
+            <a:spLocks noGrp="1"/>
+          </p:cNvSpPr>
+          <p:nvPr>
+            <p:ph type="sldImg" idx="2"/>
+          </p:nvPr>
+        </p:nvSpPr>
+        <p:spPr/>
+      </p:sp>
+      <p:sp>
+        <p:nvSpPr>
+          <p:cNvPr id="3" name="Notes Placeholder 2"/>
+          <p:cNvSpPr>
+            <a:spLocks noGrp="1"/>
+          </p:cNvSpPr>
+          <p:nvPr>
+            <p:ph type="body" idx="3" sz="quarter"/>
+          </p:nvPr>
+        </p:nvSpPr>
+        <p:spPr/>
+        <p:txBody>
+          <a:bodyPr/>
+          <a:lstStyle/>
+          <a:p>
+            <a:r>
+              <a:t>🎨 GÖRSELLEŞTİRME ÖNERİLERİ:</a:t>
+            </a:r>
+          </a:p>
+          <a:p/>
+          <a:p>
+            <a:r>
+              <a:t>📸 Görsel: LAN ve WAN ağ topolojileri şeması</a:t>
+            </a:r>
+          </a:p>
+          <a:p>
+            <a:r>
+              <a:t>🎬 Video: İnternet nasıl çalışır? Animasyonlu anlatım</a:t>
+            </a:r>
+          </a:p>
+          <a:p>
+            <a:r>
+              <a:t>💡 İnfografik: Ev ağı kurulumu diyagramı</a:t>
+            </a:r>
+          </a:p>
+          <a:p>
+            <a:r>
+              <a:t>📸 Görsel: KVKK logosu ve temel ilkeler</a:t>
+            </a:r>
+          </a:p>
+          <a:p>
+            <a:r>
+              <a:t>🎬 Video: Kişisel veri nedir? Animasyon</a:t>
+            </a:r>
+          </a:p>
+          <a:p>
+            <a:r>
+              <a:t>📸 Görsel: Dijital çağ görselleri ve teknoloji örnekleri</a:t>
+            </a:r>
+          </a:p>
+          <a:p>
+            <a:r>
+              <a:t>🎬 Video: Bilişim teknolojilerinin tarihçesi</a:t>
+            </a:r>
+          </a:p>
+        </p:txBody>
+      </p:sp>
+      <p:sp>
+        <p:nvSpPr>
+          <p:cNvPr id="4" name="Slide Number Placeholder 3"/>
+          <p:cNvSpPr>
+            <a:spLocks noGrp="1"/>
+          </p:cNvSpPr>
+          <p:nvPr>
+            <p:ph type="sldNum" idx="5" sz="quarter"/>
+          </p:nvPr>
+        </p:nvSpPr>
+        <p:spPr/>
+      </p:sp>
+    </p:spTree>
+  </p:cSld>
+  <p:clrMapOvr>
+    <a:masterClrMapping/>
+  </p:clrMapOvr>
+</p:notes>
+</file>
+
+<file path=ppt/notesSlides/notesSlide15.xml><?xml version="1.0" encoding="utf-8"?>
+<p:notes xmlns:a="http://schemas.openxmlformats.org/drawingml/2006/main" xmlns:p="http://schemas.openxmlformats.org/presentationml/2006/main" xmlns:r="http://schemas.openxmlformats.org/officeDocument/2006/relationships">
+  <p:cSld>
+    <p:spTree>
+      <p:nvGrpSpPr>
+        <p:cNvPr id="1" name=""/>
+        <p:cNvGrpSpPr/>
+        <p:nvPr/>
+      </p:nvGrpSpPr>
+      <p:grpSpPr>
+        <a:xfrm>
+          <a:off x="0" y="0"/>
+          <a:ext cx="0" cy="0"/>
+          <a:chOff x="0" y="0"/>
+          <a:chExt cx="0" cy="0"/>
+        </a:xfrm>
+      </p:grpSpPr>
+      <p:sp>
+        <p:nvSpPr>
+          <p:cNvPr id="2" name="Slide Image Placeholder 1"/>
+          <p:cNvSpPr>
+            <a:spLocks noGrp="1"/>
+          </p:cNvSpPr>
+          <p:nvPr>
+            <p:ph type="sldImg" idx="2"/>
+          </p:nvPr>
+        </p:nvSpPr>
+        <p:spPr/>
+      </p:sp>
+      <p:sp>
+        <p:nvSpPr>
+          <p:cNvPr id="3" name="Notes Placeholder 2"/>
+          <p:cNvSpPr>
+            <a:spLocks noGrp="1"/>
+          </p:cNvSpPr>
+          <p:nvPr>
+            <p:ph type="body" idx="3" sz="quarter"/>
+          </p:nvPr>
+        </p:nvSpPr>
+        <p:spPr/>
+        <p:txBody>
+          <a:bodyPr/>
+          <a:lstStyle/>
+          <a:p>
+            <a:r>
+              <a:t>🎨 GÖRSELLEŞTİRME ÖNERİLERİ:</a:t>
+            </a:r>
+          </a:p>
+          <a:p/>
+          <a:p>
+            <a:r>
+              <a:t>📸 Görsel: Çeşitli giriş aygıtları (klavye, fare, mikrofon, kamera)</a:t>
+            </a:r>
+          </a:p>
+          <a:p>
+            <a:r>
+              <a:t>🎬 Video: Giriş aygıtlarının nasıl çalıştığını gösteren animasyon</a:t>
+            </a:r>
+          </a:p>
+          <a:p>
+            <a:r>
+              <a:t>📸 Görsel: Çeşitli çıkış aygıtları fotoğrafları</a:t>
+            </a:r>
+          </a:p>
+          <a:p>
+            <a:r>
+              <a:t>🎬 Video: Monitör ve yazıcı çalışma prensibi</a:t>
+            </a:r>
+          </a:p>
+          <a:p>
+            <a:r>
+              <a:t>📸 Görsel: LAN ve WAN ağ topolojileri şeması</a:t>
+            </a:r>
+          </a:p>
+          <a:p>
+            <a:r>
+              <a:t>🎬 Video: İnternet nasıl çalışır? Animasyonlu anlatım</a:t>
+            </a:r>
+          </a:p>
+          <a:p>
+            <a:r>
+              <a:t>💡 İnfografik: Ev ağı kurulumu diyagramı</a:t>
+            </a:r>
+          </a:p>
+        </p:txBody>
+      </p:sp>
+      <p:sp>
+        <p:nvSpPr>
+          <p:cNvPr id="4" name="Slide Number Placeholder 3"/>
+          <p:cNvSpPr>
+            <a:spLocks noGrp="1"/>
+          </p:cNvSpPr>
+          <p:nvPr>
+            <p:ph type="sldNum" idx="5" sz="quarter"/>
+          </p:nvPr>
+        </p:nvSpPr>
+        <p:spPr/>
+      </p:sp>
+    </p:spTree>
+  </p:cSld>
+  <p:clrMapOvr>
+    <a:masterClrMapping/>
+  </p:clrMapOvr>
+</p:notes>
+</file>
+
+<file path=ppt/notesSlides/notesSlide16.xml><?xml version="1.0" encoding="utf-8"?>
+<p:notes xmlns:a="http://schemas.openxmlformats.org/drawingml/2006/main" xmlns:p="http://schemas.openxmlformats.org/presentationml/2006/main" xmlns:r="http://schemas.openxmlformats.org/officeDocument/2006/relationships">
+  <p:cSld>
+    <p:spTree>
+      <p:nvGrpSpPr>
+        <p:cNvPr id="1" name=""/>
+        <p:cNvGrpSpPr/>
+        <p:nvPr/>
+      </p:nvGrpSpPr>
+      <p:grpSpPr>
+        <a:xfrm>
+          <a:off x="0" y="0"/>
+          <a:ext cx="0" cy="0"/>
+          <a:chOff x="0" y="0"/>
+          <a:chExt cx="0" cy="0"/>
+        </a:xfrm>
+      </p:grpSpPr>
+      <p:sp>
+        <p:nvSpPr>
+          <p:cNvPr id="2" name="Slide Image Placeholder 1"/>
+          <p:cNvSpPr>
+            <a:spLocks noGrp="1"/>
+          </p:cNvSpPr>
+          <p:nvPr>
+            <p:ph type="sldImg" idx="2"/>
+          </p:nvPr>
+        </p:nvSpPr>
+        <p:spPr/>
+      </p:sp>
+      <p:sp>
+        <p:nvSpPr>
+          <p:cNvPr id="3" name="Notes Placeholder 2"/>
+          <p:cNvSpPr>
+            <a:spLocks noGrp="1"/>
+          </p:cNvSpPr>
+          <p:nvPr>
+            <p:ph type="body" idx="3" sz="quarter"/>
+          </p:nvPr>
+        </p:nvSpPr>
+        <p:spPr/>
+        <p:txBody>
+          <a:bodyPr/>
+          <a:lstStyle/>
+          <a:p>
+            <a:r>
+              <a:t>🎨 GÖRSELLEŞTİRME ÖNERİLERİ:</a:t>
+            </a:r>
+          </a:p>
+          <a:p/>
+          <a:p>
+            <a:r>
+              <a:t>📸 Görsel: HDD vs SSD karşılaştırması</a:t>
+            </a:r>
+          </a:p>
+          <a:p>
+            <a:r>
+              <a:t>🎬 Video: Depolama birimleri animasyonu</a:t>
+            </a:r>
+          </a:p>
+          <a:p>
+            <a:r>
+              <a:t>💡 İnfografik: Depolama kapasiteleri karşılaştırma tablosu</a:t>
+            </a:r>
+          </a:p>
+          <a:p>
+            <a:r>
+              <a:t>📸 Görsel: LAN ve WAN ağ topolojileri şeması</a:t>
+            </a:r>
+          </a:p>
+          <a:p>
+            <a:r>
+              <a:t>🎬 Video: İnternet nasıl çalışır? Animasyonlu anlatım</a:t>
+            </a:r>
+          </a:p>
+          <a:p>
+            <a:r>
+              <a:t>💡 İnfografik: Ev ağı kurulumu diyagramı</a:t>
+            </a:r>
+          </a:p>
+          <a:p>
+            <a:r>
+              <a:t>📸 Görsel: Yapay zeka uygulama örnekleri (Siri, Alexa, ChatGPT)</a:t>
+            </a:r>
+          </a:p>
+          <a:p>
+            <a:r>
+              <a:t>🎬 Video: Yapay zeka nedir? Çocuklar için anlatım</a:t>
+            </a:r>
+          </a:p>
+          <a:p>
+            <a:r>
+              <a:t>💡 İnfografik: AI kullanım alanları</a:t>
+            </a:r>
+          </a:p>
+        </p:txBody>
+      </p:sp>
+      <p:sp>
+        <p:nvSpPr>
+          <p:cNvPr id="4" name="Slide Number Placeholder 3"/>
+          <p:cNvSpPr>
+            <a:spLocks noGrp="1"/>
+          </p:cNvSpPr>
+          <p:nvPr>
+            <p:ph type="sldNum" idx="5" sz="quarter"/>
+          </p:nvPr>
+        </p:nvSpPr>
+        <p:spPr/>
+      </p:sp>
+    </p:spTree>
+  </p:cSld>
+  <p:clrMapOvr>
+    <a:masterClrMapping/>
+  </p:clrMapOvr>
+</p:notes>
+</file>
+
+<file path=ppt/notesSlides/notesSlide17.xml><?xml version="1.0" encoding="utf-8"?>
+<p:notes xmlns:a="http://schemas.openxmlformats.org/drawingml/2006/main" xmlns:p="http://schemas.openxmlformats.org/presentationml/2006/main" xmlns:r="http://schemas.openxmlformats.org/officeDocument/2006/relationships">
+  <p:cSld>
+    <p:spTree>
+      <p:nvGrpSpPr>
+        <p:cNvPr id="1" name=""/>
+        <p:cNvGrpSpPr/>
+        <p:nvPr/>
+      </p:nvGrpSpPr>
+      <p:grpSpPr>
+        <a:xfrm>
+          <a:off x="0" y="0"/>
+          <a:ext cx="0" cy="0"/>
+          <a:chOff x="0" y="0"/>
+          <a:chExt cx="0" cy="0"/>
+        </a:xfrm>
+      </p:grpSpPr>
+      <p:sp>
+        <p:nvSpPr>
+          <p:cNvPr id="2" name="Slide Image Placeholder 1"/>
+          <p:cNvSpPr>
+            <a:spLocks noGrp="1"/>
+          </p:cNvSpPr>
+          <p:nvPr>
+            <p:ph type="sldImg" idx="2"/>
+          </p:nvPr>
+        </p:nvSpPr>
+        <p:spPr/>
+      </p:sp>
+      <p:sp>
+        <p:nvSpPr>
+          <p:cNvPr id="3" name="Notes Placeholder 2"/>
+          <p:cNvSpPr>
+            <a:spLocks noGrp="1"/>
+          </p:cNvSpPr>
+          <p:nvPr>
+            <p:ph type="body" idx="3" sz="quarter"/>
+          </p:nvPr>
+        </p:nvSpPr>
+        <p:spPr/>
+        <p:txBody>
+          <a:bodyPr/>
+          <a:lstStyle/>
+          <a:p>
+            <a:r>
+              <a:t>🎨 GÖRSELLEŞTİRME ÖNERİLERİ:</a:t>
+            </a:r>
+          </a:p>
+          <a:p/>
+          <a:p>
+            <a:r>
+              <a:t>📸 Görsel: CPU, RAM ve anakart fotoğrafları</a:t>
+            </a:r>
+          </a:p>
+          <a:p>
+            <a:r>
+              <a:t>🎬 Video: Bilgisayar donanımı tanıtım videosu (1-2 dk)</a:t>
+            </a:r>
+          </a:p>
+          <a:p>
+            <a:r>
+              <a:t>💡 İnfografik: Bilgisayar bileşenleri şeması</a:t>
+            </a:r>
+          </a:p>
+          <a:p>
+            <a:r>
+              <a:t>📸 Görsel: HDD vs SSD karşılaştırması</a:t>
+            </a:r>
+          </a:p>
+          <a:p>
+            <a:r>
+              <a:t>🎬 Video: Depolama birimleri animasyonu</a:t>
+            </a:r>
+          </a:p>
+          <a:p>
+            <a:r>
+              <a:t>💡 İnfografik: Depolama kapasiteleri karşılaştırma tablosu</a:t>
+            </a:r>
+          </a:p>
+          <a:p>
+            <a:r>
+              <a:t>📸 Görsel: Farklı işletim sistemleri logoları ve ekran görüntüleri</a:t>
+            </a:r>
+          </a:p>
+          <a:p>
+            <a:r>
+              <a:t>🎬 Video: İşletim sistemi nedir? Animasyonlu anlatım</a:t>
+            </a:r>
+          </a:p>
+          <a:p>
+            <a:r>
+              <a:t>📸 Görsel: LAN ve WAN ağ topolojileri şeması</a:t>
+            </a:r>
+          </a:p>
+          <a:p>
+            <a:r>
+              <a:t>🎬 Video: İnternet nasıl çalışır? Animasyonlu anlatım</a:t>
+            </a:r>
+          </a:p>
+          <a:p>
+            <a:r>
+              <a:t>💡 İnfografik: Ev ağı kurulumu diyagramı</a:t>
+            </a:r>
+          </a:p>
+          <a:p>
+            <a:r>
+              <a:t>📸 Görsel: Dijital çağ görselleri ve teknoloji örnekleri</a:t>
+            </a:r>
+          </a:p>
+          <a:p>
+            <a:r>
+              <a:t>🎬 Video: Bilişim teknolojilerinin tarihçesi</a:t>
+            </a:r>
+          </a:p>
+        </p:txBody>
+      </p:sp>
+      <p:sp>
+        <p:nvSpPr>
+          <p:cNvPr id="4" name="Slide Number Placeholder 3"/>
+          <p:cNvSpPr>
+            <a:spLocks noGrp="1"/>
+          </p:cNvSpPr>
+          <p:nvPr>
+            <p:ph type="sldNum" idx="5" sz="quarter"/>
+          </p:nvPr>
+        </p:nvSpPr>
+        <p:spPr/>
+      </p:sp>
+    </p:spTree>
+  </p:cSld>
+  <p:clrMapOvr>
+    <a:masterClrMapping/>
+  </p:clrMapOvr>
+</p:notes>
+</file>
+
+<file path=ppt/notesSlides/notesSlide18.xml><?xml version="1.0" encoding="utf-8"?>
+<p:notes xmlns:a="http://schemas.openxmlformats.org/drawingml/2006/main" xmlns:p="http://schemas.openxmlformats.org/presentationml/2006/main" xmlns:r="http://schemas.openxmlformats.org/officeDocument/2006/relationships">
+  <p:cSld>
+    <p:spTree>
+      <p:nvGrpSpPr>
+        <p:cNvPr id="1" name=""/>
+        <p:cNvGrpSpPr/>
+        <p:nvPr/>
+      </p:nvGrpSpPr>
+      <p:grpSpPr>
+        <a:xfrm>
+          <a:off x="0" y="0"/>
+          <a:ext cx="0" cy="0"/>
+          <a:chOff x="0" y="0"/>
+          <a:chExt cx="0" cy="0"/>
+        </a:xfrm>
+      </p:grpSpPr>
+      <p:sp>
+        <p:nvSpPr>
+          <p:cNvPr id="2" name="Slide Image Placeholder 1"/>
+          <p:cNvSpPr>
+            <a:spLocks noGrp="1"/>
+          </p:cNvSpPr>
+          <p:nvPr>
+            <p:ph type="sldImg" idx="2"/>
+          </p:nvPr>
+        </p:nvSpPr>
+        <p:spPr/>
+      </p:sp>
+      <p:sp>
+        <p:nvSpPr>
+          <p:cNvPr id="3" name="Notes Placeholder 2"/>
+          <p:cNvSpPr>
+            <a:spLocks noGrp="1"/>
+          </p:cNvSpPr>
+          <p:nvPr>
+            <p:ph type="body" idx="3" sz="quarter"/>
+          </p:nvPr>
+        </p:nvSpPr>
+        <p:spPr/>
+        <p:txBody>
+          <a:bodyPr/>
+          <a:lstStyle/>
+          <a:p>
+            <a:r>
+              <a:t>🎨 GÖRSELLEŞTİRME ÖNERİLERİ:</a:t>
+            </a:r>
+          </a:p>
+          <a:p/>
+          <a:p>
+            <a:r>
+              <a:t>📸 Görsel: CPU, RAM ve anakart fotoğrafları</a:t>
+            </a:r>
+          </a:p>
+          <a:p>
+            <a:r>
+              <a:t>🎬 Video: Bilgisayar donanımı tanıtım videosu (1-2 dk)</a:t>
+            </a:r>
+          </a:p>
+          <a:p>
+            <a:r>
+              <a:t>💡 İnfografik: Bilgisayar bileşenleri şeması</a:t>
+            </a:r>
+          </a:p>
+          <a:p>
+            <a:r>
+              <a:t>📸 Görsel: HDD vs SSD karşılaştırması</a:t>
+            </a:r>
+          </a:p>
+          <a:p>
+            <a:r>
+              <a:t>🎬 Video: Depolama birimleri animasyonu</a:t>
+            </a:r>
+          </a:p>
+          <a:p>
+            <a:r>
+              <a:t>💡 İnfografik: Depolama kapasiteleri karşılaştırma tablosu</a:t>
+            </a:r>
+          </a:p>
+          <a:p>
+            <a:r>
+              <a:t>📸 Görsel: LAN ve WAN ağ topolojileri şeması</a:t>
+            </a:r>
+          </a:p>
+          <a:p>
+            <a:r>
+              <a:t>🎬 Video: İnternet nasıl çalışır? Animasyonlu anlatım</a:t>
+            </a:r>
+          </a:p>
+          <a:p>
+            <a:r>
+              <a:t>💡 İnfografik: Ev ağı kurulumu diyagramı</a:t>
+            </a:r>
+          </a:p>
+          <a:p>
+            <a:r>
+              <a:t>📸 Görsel: Scratch arayüzü ekran görüntüsü</a:t>
+            </a:r>
+          </a:p>
+          <a:p>
+            <a:r>
+              <a:t>🎬 Video: Scratch ile basit oyun yapımı (3-5 dk)</a:t>
+            </a:r>
+          </a:p>
+          <a:p>
+            <a:r>
+              <a:t>💡 Ekran kaydı: Adım adım Scratch projesi</a:t>
+            </a:r>
+          </a:p>
+          <a:p>
+            <a:r>
+              <a:t>📸 Görsel: Dijital çağ görselleri ve teknoloji örnekleri</a:t>
+            </a:r>
+          </a:p>
+          <a:p>
+            <a:r>
+              <a:t>🎬 Video: Bilişim teknolojilerinin tarihçesi</a:t>
+            </a:r>
+          </a:p>
+        </p:txBody>
+      </p:sp>
+      <p:sp>
+        <p:nvSpPr>
+          <p:cNvPr id="4" name="Slide Number Placeholder 3"/>
+          <p:cNvSpPr>
+            <a:spLocks noGrp="1"/>
+          </p:cNvSpPr>
+          <p:nvPr>
+            <p:ph type="sldNum" idx="5" sz="quarter"/>
+          </p:nvPr>
+        </p:nvSpPr>
+        <p:spPr/>
+      </p:sp>
+    </p:spTree>
+  </p:cSld>
+  <p:clrMapOvr>
+    <a:masterClrMapping/>
+  </p:clrMapOvr>
+</p:notes>
+</file>
+
+<file path=ppt/notesSlides/notesSlide19.xml><?xml version="1.0" encoding="utf-8"?>
+<p:notes xmlns:a="http://schemas.openxmlformats.org/drawingml/2006/main" xmlns:p="http://schemas.openxmlformats.org/presentationml/2006/main" xmlns:r="http://schemas.openxmlformats.org/officeDocument/2006/relationships">
+  <p:cSld>
+    <p:spTree>
+      <p:nvGrpSpPr>
+        <p:cNvPr id="1" name=""/>
+        <p:cNvGrpSpPr/>
+        <p:nvPr/>
+      </p:nvGrpSpPr>
+      <p:grpSpPr>
+        <a:xfrm>
+          <a:off x="0" y="0"/>
+          <a:ext cx="0" cy="0"/>
+          <a:chOff x="0" y="0"/>
+          <a:chExt cx="0" cy="0"/>
+        </a:xfrm>
+      </p:grpSpPr>
+      <p:sp>
+        <p:nvSpPr>
+          <p:cNvPr id="2" name="Slide Image Placeholder 1"/>
+          <p:cNvSpPr>
+            <a:spLocks noGrp="1"/>
+          </p:cNvSpPr>
+          <p:nvPr>
+            <p:ph type="sldImg" idx="2"/>
+          </p:nvPr>
+        </p:nvSpPr>
+        <p:spPr/>
+      </p:sp>
+      <p:sp>
+        <p:nvSpPr>
+          <p:cNvPr id="3" name="Notes Placeholder 2"/>
+          <p:cNvSpPr>
+            <a:spLocks noGrp="1"/>
+          </p:cNvSpPr>
+          <p:nvPr>
+            <p:ph type="body" idx="3" sz="quarter"/>
+          </p:nvPr>
+        </p:nvSpPr>
+        <p:spPr/>
+        <p:txBody>
+          <a:bodyPr/>
+          <a:lstStyle/>
+          <a:p>
+            <a:r>
+              <a:t>🎨 GÖRSELLEŞTİRME ÖNERİLERİ:</a:t>
+            </a:r>
+          </a:p>
+          <a:p/>
+          <a:p>
+            <a:r>
+              <a:t>📸 Görsel: Konuyla ilgili görsel içerik eklenebilir</a:t>
+            </a:r>
+          </a:p>
+          <a:p>
+            <a:r>
+              <a:t>💡 İlgili ekran görüntüleri veya şemalar eklenebilir</a:t>
+            </a:r>
+          </a:p>
         </p:txBody>
       </p:sp>
       <p:sp>
@@ -803,6 +1833,53 @@
               <a:t>Video önerisi: 'Bilişim Teknolojileri Nedir?' - YouTube'da aratın</a:t>
             </a:r>
           </a:p>
+          <a:p/>
+          <a:p>
+            <a:r>
+              <a:t>🎨 GÖRSELLEŞTİRME ÖNERİLERİ:</a:t>
+            </a:r>
+          </a:p>
+          <a:p/>
+          <a:p>
+            <a:r>
+              <a:t>📸 Görsel: LAN ve WAN ağ topolojileri şeması</a:t>
+            </a:r>
+          </a:p>
+          <a:p>
+            <a:r>
+              <a:t>🎬 Video: İnternet nasıl çalışır? Animasyonlu anlatım</a:t>
+            </a:r>
+          </a:p>
+          <a:p>
+            <a:r>
+              <a:t>💡 İnfografik: Ev ağı kurulumu diyagramı</a:t>
+            </a:r>
+          </a:p>
+          <a:p>
+            <a:r>
+              <a:t>📸 Görsel: Farklı grafik türleri örnekleri</a:t>
+            </a:r>
+          </a:p>
+          <a:p>
+            <a:r>
+              <a:t>🎬 Video: Veri görselleştirme önemi</a:t>
+            </a:r>
+          </a:p>
+          <a:p>
+            <a:r>
+              <a:t>💡 İnfografik: Grafik türleri ve kullanım alanları</a:t>
+            </a:r>
+          </a:p>
+          <a:p>
+            <a:r>
+              <a:t>📸 Görsel: Dijital çağ görselleri ve teknoloji örnekleri</a:t>
+            </a:r>
+          </a:p>
+          <a:p>
+            <a:r>
+              <a:t>🎬 Video: Bilişim teknolojilerinin tarihçesi</a:t>
+            </a:r>
+          </a:p>
         </p:txBody>
       </p:sp>
       <p:sp>
@@ -873,6 +1950,98 @@
               <a:t>Görseller: Her kategori için örnek resimler ekleyin</a:t>
             </a:r>
           </a:p>
+          <a:p/>
+          <a:p>
+            <a:r>
+              <a:t>🎨 GÖRSELLEŞTİRME ÖNERİLERİ:</a:t>
+            </a:r>
+          </a:p>
+          <a:p/>
+          <a:p>
+            <a:r>
+              <a:t>📸 Görsel: CPU, RAM ve anakart fotoğrafları</a:t>
+            </a:r>
+          </a:p>
+          <a:p>
+            <a:r>
+              <a:t>🎬 Video: Bilgisayar donanımı tanıtım videosu (1-2 dk)</a:t>
+            </a:r>
+          </a:p>
+          <a:p>
+            <a:r>
+              <a:t>💡 İnfografik: Bilgisayar bileşenleri şeması</a:t>
+            </a:r>
+          </a:p>
+          <a:p>
+            <a:r>
+              <a:t>📸 Görsel: HDD vs SSD karşılaştırması</a:t>
+            </a:r>
+          </a:p>
+          <a:p>
+            <a:r>
+              <a:t>🎬 Video: Depolama birimleri animasyonu</a:t>
+            </a:r>
+          </a:p>
+          <a:p>
+            <a:r>
+              <a:t>💡 İnfografik: Depolama kapasiteleri karşılaştırma tablosu</a:t>
+            </a:r>
+          </a:p>
+          <a:p>
+            <a:r>
+              <a:t>📸 Görsel: LAN ve WAN ağ topolojileri şeması</a:t>
+            </a:r>
+          </a:p>
+          <a:p>
+            <a:r>
+              <a:t>🎬 Video: İnternet nasıl çalışır? Animasyonlu anlatım</a:t>
+            </a:r>
+          </a:p>
+          <a:p>
+            <a:r>
+              <a:t>💡 İnfografik: Ev ağı kurulumu diyagramı</a:t>
+            </a:r>
+          </a:p>
+          <a:p>
+            <a:r>
+              <a:t>📸 Görsel: Scratch arayüzü ekran görüntüsü</a:t>
+            </a:r>
+          </a:p>
+          <a:p>
+            <a:r>
+              <a:t>🎬 Video: Scratch ile basit oyun yapımı (3-5 dk)</a:t>
+            </a:r>
+          </a:p>
+          <a:p>
+            <a:r>
+              <a:t>💡 Ekran kaydı: Adım adım Scratch projesi</a:t>
+            </a:r>
+          </a:p>
+          <a:p>
+            <a:r>
+              <a:t>📸 Görsel: Farklı grafik türleri örnekleri</a:t>
+            </a:r>
+          </a:p>
+          <a:p>
+            <a:r>
+              <a:t>🎬 Video: Veri görselleştirme önemi</a:t>
+            </a:r>
+          </a:p>
+          <a:p>
+            <a:r>
+              <a:t>💡 İnfografik: Grafik türleri ve kullanım alanları</a:t>
+            </a:r>
+          </a:p>
+          <a:p>
+            <a:r>
+              <a:t>📸 Görsel: Dijital çağ görselleri ve teknoloji örnekleri</a:t>
+            </a:r>
+          </a:p>
+          <a:p>
+            <a:r>
+              <a:t>🎬 Video: Bilişim teknolojilerinin tarihçesi</a:t>
+            </a:r>
+          </a:p>
         </p:txBody>
       </p:sp>
       <p:sp>
@@ -943,6 +2112,78 @@
               <a:t>Görseller: Donanım ve yazılım karşılaştırma görselleri</a:t>
             </a:r>
           </a:p>
+          <a:p/>
+          <a:p>
+            <a:r>
+              <a:t>🎨 GÖRSELLEŞTİRME ÖNERİLERİ:</a:t>
+            </a:r>
+          </a:p>
+          <a:p/>
+          <a:p>
+            <a:r>
+              <a:t>📸 Görsel: CPU, RAM ve anakart fotoğrafları</a:t>
+            </a:r>
+          </a:p>
+          <a:p>
+            <a:r>
+              <a:t>🎬 Video: Bilgisayar donanımı tanıtım videosu (1-2 dk)</a:t>
+            </a:r>
+          </a:p>
+          <a:p>
+            <a:r>
+              <a:t>💡 İnfografik: Bilgisayar bileşenleri şeması</a:t>
+            </a:r>
+          </a:p>
+          <a:p>
+            <a:r>
+              <a:t>📸 Görsel: Çeşitli giriş aygıtları (klavye, fare, mikrofon, kamera)</a:t>
+            </a:r>
+          </a:p>
+          <a:p>
+            <a:r>
+              <a:t>🎬 Video: Giriş aygıtlarının nasıl çalıştığını gösteren animasyon</a:t>
+            </a:r>
+          </a:p>
+          <a:p>
+            <a:r>
+              <a:t>📸 Görsel: Farklı işletim sistemleri logoları ve ekran görüntüleri</a:t>
+            </a:r>
+          </a:p>
+          <a:p>
+            <a:r>
+              <a:t>🎬 Video: İşletim sistemi nedir? Animasyonlu anlatım</a:t>
+            </a:r>
+          </a:p>
+          <a:p>
+            <a:r>
+              <a:t>📸 Görsel: MS Word arayüz ekran görüntüsü</a:t>
+            </a:r>
+          </a:p>
+          <a:p>
+            <a:r>
+              <a:t>🎬 Video: Word temel özellikleri demo (2-3 dk)</a:t>
+            </a:r>
+          </a:p>
+          <a:p>
+            <a:r>
+              <a:t>💡 Ekran kaydı: Biçimlendirme araçları kullanımı</a:t>
+            </a:r>
+          </a:p>
+          <a:p>
+            <a:r>
+              <a:t>📸 Görsel: Scratch arayüzü ekran görüntüsü</a:t>
+            </a:r>
+          </a:p>
+          <a:p>
+            <a:r>
+              <a:t>🎬 Video: Scratch ile basit oyun yapımı (3-5 dk)</a:t>
+            </a:r>
+          </a:p>
+          <a:p>
+            <a:r>
+              <a:t>💡 Ekran kaydı: Adım adım Scratch projesi</a:t>
+            </a:r>
+          </a:p>
         </p:txBody>
       </p:sp>
       <p:sp>
@@ -1013,6 +2254,43 @@
               <a:t>Video: 'CPU Nasıl Çalışır?' animasyonu izletin</a:t>
             </a:r>
           </a:p>
+          <a:p/>
+          <a:p>
+            <a:r>
+              <a:t>🎨 GÖRSELLEŞTİRME ÖNERİLERİ:</a:t>
+            </a:r>
+          </a:p>
+          <a:p/>
+          <a:p>
+            <a:r>
+              <a:t>📸 Görsel: CPU, RAM ve anakart fotoğrafları</a:t>
+            </a:r>
+          </a:p>
+          <a:p>
+            <a:r>
+              <a:t>🎬 Video: Bilgisayar donanımı tanıtım videosu (1-2 dk)</a:t>
+            </a:r>
+          </a:p>
+          <a:p>
+            <a:r>
+              <a:t>💡 İnfografik: Bilgisayar bileşenleri şeması</a:t>
+            </a:r>
+          </a:p>
+          <a:p>
+            <a:r>
+              <a:t>📸 Görsel: Farklı grafik türleri örnekleri</a:t>
+            </a:r>
+          </a:p>
+          <a:p>
+            <a:r>
+              <a:t>🎬 Video: Veri görselleştirme önemi</a:t>
+            </a:r>
+          </a:p>
+          <a:p>
+            <a:r>
+              <a:t>💡 İnfografik: Grafik türleri ve kullanım alanları</a:t>
+            </a:r>
+          </a:p>
         </p:txBody>
       </p:sp>
       <p:sp>
@@ -1083,6 +2361,88 @@
               <a:t>Görseller: RAM kartı fotoğrafı ve çalışma masası analojisi</a:t>
             </a:r>
           </a:p>
+          <a:p/>
+          <a:p>
+            <a:r>
+              <a:t>🎨 GÖRSELLEŞTİRME ÖNERİLERİ:</a:t>
+            </a:r>
+          </a:p>
+          <a:p/>
+          <a:p>
+            <a:r>
+              <a:t>📸 Görsel: CPU, RAM ve anakart fotoğrafları</a:t>
+            </a:r>
+          </a:p>
+          <a:p>
+            <a:r>
+              <a:t>🎬 Video: Bilgisayar donanımı tanıtım videosu (1-2 dk)</a:t>
+            </a:r>
+          </a:p>
+          <a:p>
+            <a:r>
+              <a:t>💡 İnfografik: Bilgisayar bileşenleri şeması</a:t>
+            </a:r>
+          </a:p>
+          <a:p>
+            <a:r>
+              <a:t>📸 Görsel: LAN ve WAN ağ topolojileri şeması</a:t>
+            </a:r>
+          </a:p>
+          <a:p>
+            <a:r>
+              <a:t>🎬 Video: İnternet nasıl çalışır? Animasyonlu anlatım</a:t>
+            </a:r>
+          </a:p>
+          <a:p>
+            <a:r>
+              <a:t>💡 İnfografik: Ev ağı kurulumu diyagramı</a:t>
+            </a:r>
+          </a:p>
+          <a:p>
+            <a:r>
+              <a:t>📸 Görsel: Scratch arayüzü ekran görüntüsü</a:t>
+            </a:r>
+          </a:p>
+          <a:p>
+            <a:r>
+              <a:t>🎬 Video: Scratch ile basit oyun yapımı (3-5 dk)</a:t>
+            </a:r>
+          </a:p>
+          <a:p>
+            <a:r>
+              <a:t>💡 Ekran kaydı: Adım adım Scratch projesi</a:t>
+            </a:r>
+          </a:p>
+          <a:p>
+            <a:r>
+              <a:t>📸 Görsel: Farklı grafik türleri örnekleri</a:t>
+            </a:r>
+          </a:p>
+          <a:p>
+            <a:r>
+              <a:t>🎬 Video: Veri görselleştirme önemi</a:t>
+            </a:r>
+          </a:p>
+          <a:p>
+            <a:r>
+              <a:t>💡 İnfografik: Grafik türleri ve kullanım alanları</a:t>
+            </a:r>
+          </a:p>
+          <a:p>
+            <a:r>
+              <a:t>📸 Görsel: Temel tasarım prensipleri</a:t>
+            </a:r>
+          </a:p>
+          <a:p>
+            <a:r>
+              <a:t>🎬 Video: Dijital tasarıma giriş</a:t>
+            </a:r>
+          </a:p>
+          <a:p>
+            <a:r>
+              <a:t>💡 İnfografik: Renk teorisi ve uyumu</a:t>
+            </a:r>
+          </a:p>
         </p:txBody>
       </p:sp>
       <p:sp>
@@ -1153,6 +2513,58 @@
               <a:t>Video: 'HDD vs SSD Karşılaştırması' izletin</a:t>
             </a:r>
           </a:p>
+          <a:p/>
+          <a:p>
+            <a:r>
+              <a:t>🎨 GÖRSELLEŞTİRME ÖNERİLERİ:</a:t>
+            </a:r>
+          </a:p>
+          <a:p/>
+          <a:p>
+            <a:r>
+              <a:t>📸 Görsel: CPU, RAM ve anakart fotoğrafları</a:t>
+            </a:r>
+          </a:p>
+          <a:p>
+            <a:r>
+              <a:t>🎬 Video: Bilgisayar donanımı tanıtım videosu (1-2 dk)</a:t>
+            </a:r>
+          </a:p>
+          <a:p>
+            <a:r>
+              <a:t>💡 İnfografik: Bilgisayar bileşenleri şeması</a:t>
+            </a:r>
+          </a:p>
+          <a:p>
+            <a:r>
+              <a:t>📸 Görsel: HDD vs SSD karşılaştırması</a:t>
+            </a:r>
+          </a:p>
+          <a:p>
+            <a:r>
+              <a:t>🎬 Video: Depolama birimleri animasyonu</a:t>
+            </a:r>
+          </a:p>
+          <a:p>
+            <a:r>
+              <a:t>💡 İnfografik: Depolama kapasiteleri karşılaştırma tablosu</a:t>
+            </a:r>
+          </a:p>
+          <a:p>
+            <a:r>
+              <a:t>📸 Görsel: Farklı grafik türleri örnekleri</a:t>
+            </a:r>
+          </a:p>
+          <a:p>
+            <a:r>
+              <a:t>🎬 Video: Veri görselleştirme önemi</a:t>
+            </a:r>
+          </a:p>
+          <a:p>
+            <a:r>
+              <a:t>💡 İnfografik: Grafik türleri ve kullanım alanları</a:t>
+            </a:r>
+          </a:p>
         </p:txBody>
       </p:sp>
       <p:sp>
@@ -1223,6 +2635,58 @@
               <a:t>Görseller: Anakart fotoğrafı ve etiketli diyagram</a:t>
             </a:r>
           </a:p>
+          <a:p/>
+          <a:p>
+            <a:r>
+              <a:t>🎨 GÖRSELLEŞTİRME ÖNERİLERİ:</a:t>
+            </a:r>
+          </a:p>
+          <a:p/>
+          <a:p>
+            <a:r>
+              <a:t>📸 Görsel: CPU, RAM ve anakart fotoğrafları</a:t>
+            </a:r>
+          </a:p>
+          <a:p>
+            <a:r>
+              <a:t>🎬 Video: Bilgisayar donanımı tanıtım videosu (1-2 dk)</a:t>
+            </a:r>
+          </a:p>
+          <a:p>
+            <a:r>
+              <a:t>💡 İnfografik: Bilgisayar bileşenleri şeması</a:t>
+            </a:r>
+          </a:p>
+          <a:p>
+            <a:r>
+              <a:t>📸 Görsel: HDD vs SSD karşılaştırması</a:t>
+            </a:r>
+          </a:p>
+          <a:p>
+            <a:r>
+              <a:t>🎬 Video: Depolama birimleri animasyonu</a:t>
+            </a:r>
+          </a:p>
+          <a:p>
+            <a:r>
+              <a:t>💡 İnfografik: Depolama kapasiteleri karşılaştırma tablosu</a:t>
+            </a:r>
+          </a:p>
+          <a:p>
+            <a:r>
+              <a:t>📸 Görsel: LAN ve WAN ağ topolojileri şeması</a:t>
+            </a:r>
+          </a:p>
+          <a:p>
+            <a:r>
+              <a:t>🎬 Video: İnternet nasıl çalışır? Animasyonlu anlatım</a:t>
+            </a:r>
+          </a:p>
+          <a:p>
+            <a:r>
+              <a:t>💡 İnfografik: Ev ağı kurulumu diyagramı</a:t>
+            </a:r>
+          </a:p>
         </p:txBody>
       </p:sp>
       <p:sp>
@@ -1291,6 +2755,68 @@
           <a:p>
             <a:r>
               <a:t>Video: 'İşletim Sistemleri Tanıtımı'</a:t>
+            </a:r>
+          </a:p>
+          <a:p/>
+          <a:p>
+            <a:r>
+              <a:t>🎨 GÖRSELLEŞTİRME ÖNERİLERİ:</a:t>
+            </a:r>
+          </a:p>
+          <a:p/>
+          <a:p>
+            <a:r>
+              <a:t>📸 Görsel: CPU, RAM ve anakart fotoğrafları</a:t>
+            </a:r>
+          </a:p>
+          <a:p>
+            <a:r>
+              <a:t>🎬 Video: Bilgisayar donanımı tanıtım videosu (1-2 dk)</a:t>
+            </a:r>
+          </a:p>
+          <a:p>
+            <a:r>
+              <a:t>💡 İnfografik: Bilgisayar bileşenleri şeması</a:t>
+            </a:r>
+          </a:p>
+          <a:p>
+            <a:r>
+              <a:t>📸 Görsel: Farklı işletim sistemleri logoları ve ekran görüntüleri</a:t>
+            </a:r>
+          </a:p>
+          <a:p>
+            <a:r>
+              <a:t>🎬 Video: İşletim sistemi nedir? Animasyonlu anlatım</a:t>
+            </a:r>
+          </a:p>
+          <a:p>
+            <a:r>
+              <a:t>📸 Görsel: LAN ve WAN ağ topolojileri şeması</a:t>
+            </a:r>
+          </a:p>
+          <a:p>
+            <a:r>
+              <a:t>🎬 Video: İnternet nasıl çalışır? Animasyonlu anlatım</a:t>
+            </a:r>
+          </a:p>
+          <a:p>
+            <a:r>
+              <a:t>💡 İnfografik: Ev ağı kurulumu diyagramı</a:t>
+            </a:r>
+          </a:p>
+          <a:p>
+            <a:r>
+              <a:t>📸 Görsel: Scratch arayüzü ekran görüntüsü</a:t>
+            </a:r>
+          </a:p>
+          <a:p>
+            <a:r>
+              <a:t>🎬 Video: Scratch ile basit oyun yapımı (3-5 dk)</a:t>
+            </a:r>
+          </a:p>
+          <a:p>
+            <a:r>
+              <a:t>💡 Ekran kaydı: Adım adım Scratch projesi</a:t>
             </a:r>
           </a:p>
         </p:txBody>
@@ -5248,6 +6774,7 @@
               <a:defRPr sz="2000"/>
             </a:pPr>
             <a:r>
+              <a:rPr sz="1600"/>
               <a:t>Microsoft tarafından geliştirilmiş en popüler OS</a:t>
             </a:r>
           </a:p>
@@ -5267,6 +6794,7 @@
               <a:defRPr sz="2000"/>
             </a:pPr>
             <a:r>
+              <a:rPr sz="1600"/>
               <a:t>✅ Önemli Özellikler:</a:t>
             </a:r>
           </a:p>
@@ -5278,6 +6806,7 @@
               <a:defRPr sz="2000"/>
             </a:pPr>
             <a:r>
+              <a:rPr sz="1600"/>
               <a:t>    • Kullanıcı dostu arayüz</a:t>
             </a:r>
           </a:p>
@@ -5289,6 +6818,7 @@
               <a:defRPr sz="2000"/>
             </a:pPr>
             <a:r>
+              <a:rPr sz="1600"/>
               <a:t>    • Başlat menüsü</a:t>
             </a:r>
           </a:p>
@@ -5300,6 +6830,7 @@
               <a:defRPr sz="2000"/>
             </a:pPr>
             <a:r>
+              <a:rPr sz="1600"/>
               <a:t>    • Görev çubuğu</a:t>
             </a:r>
           </a:p>
@@ -5311,6 +6842,7 @@
               <a:defRPr sz="2000"/>
             </a:pPr>
             <a:r>
+              <a:rPr sz="1600"/>
               <a:t>    • Masaüstü (Desktop)</a:t>
             </a:r>
           </a:p>
@@ -5322,6 +6854,7 @@
               <a:defRPr sz="2000"/>
             </a:pPr>
             <a:r>
+              <a:rPr sz="1600"/>
               <a:t>    • Dosya Gezgini (File Explorer)</a:t>
             </a:r>
           </a:p>
@@ -5341,6 +6874,7 @@
               <a:defRPr sz="2000"/>
             </a:pPr>
             <a:r>
+              <a:rPr sz="1600"/>
               <a:t>✅ Sürümler:</a:t>
             </a:r>
           </a:p>
@@ -5352,6 +6886,7 @@
               <a:defRPr sz="2000"/>
             </a:pPr>
             <a:r>
+              <a:rPr sz="1600"/>
               <a:t>    • Windows 10</a:t>
             </a:r>
           </a:p>
@@ -5363,6 +6898,7 @@
               <a:defRPr sz="2000"/>
             </a:pPr>
             <a:r>
+              <a:rPr sz="1600"/>
               <a:t>    • Windows 11 (En yeni)</a:t>
             </a:r>
           </a:p>
@@ -5382,6 +6918,7 @@
               <a:defRPr sz="2000"/>
             </a:pPr>
             <a:r>
+              <a:rPr sz="1600"/>
               <a:t>✅ Temel Kısayollar:</a:t>
             </a:r>
           </a:p>
@@ -5393,6 +6930,7 @@
               <a:defRPr sz="2000"/>
             </a:pPr>
             <a:r>
+              <a:rPr sz="1600"/>
               <a:t>    • Windows tuşu - Başlat menüsü</a:t>
             </a:r>
           </a:p>
@@ -5404,6 +6942,7 @@
               <a:defRPr sz="2000"/>
             </a:pPr>
             <a:r>
+              <a:rPr sz="1600"/>
               <a:t>    • Windows + E - Dosya Gezgini</a:t>
             </a:r>
           </a:p>
@@ -5415,6 +6954,7 @@
               <a:defRPr sz="2000"/>
             </a:pPr>
             <a:r>
+              <a:rPr sz="1600"/>
               <a:t>    • Alt + Tab - Pencereler arası geçiş</a:t>
             </a:r>
           </a:p>
@@ -5426,6 +6966,7 @@
               <a:defRPr sz="2000"/>
             </a:pPr>
             <a:r>
+              <a:rPr sz="1600"/>
               <a:t>    • Ctrl + Alt + Delete - Görev yöneticisi</a:t>
             </a:r>
           </a:p>
@@ -5524,6 +7065,7 @@
               <a:defRPr sz="2000"/>
             </a:pPr>
             <a:r>
+              <a:rPr sz="1600"/>
               <a:t>📄 DOSYA (File):</a:t>
             </a:r>
           </a:p>
@@ -5535,6 +7077,7 @@
               <a:defRPr sz="2000"/>
             </a:pPr>
             <a:r>
+              <a:rPr sz="1600"/>
               <a:t>    • Bilgisayarda saklanan her türlü bilgi</a:t>
             </a:r>
           </a:p>
@@ -5546,6 +7089,7 @@
               <a:defRPr sz="2000"/>
             </a:pPr>
             <a:r>
+              <a:rPr sz="1600"/>
               <a:t>    • Örnekler: Resim, video, müzik, belge</a:t>
             </a:r>
           </a:p>
@@ -5565,6 +7109,7 @@
               <a:defRPr sz="2000"/>
             </a:pPr>
             <a:r>
+              <a:rPr sz="1600"/>
               <a:t>📁 KLASÖR (Folder):</a:t>
             </a:r>
           </a:p>
@@ -5576,6 +7121,7 @@
               <a:defRPr sz="2000"/>
             </a:pPr>
             <a:r>
+              <a:rPr sz="1600"/>
               <a:t>    • Dosyaları düzenli tutmak için sanal çekmece</a:t>
             </a:r>
           </a:p>
@@ -5587,6 +7133,7 @@
               <a:defRPr sz="2000"/>
             </a:pPr>
             <a:r>
+              <a:rPr sz="1600"/>
               <a:t>    • İçinde dosya ve alt klasörler olabilir</a:t>
             </a:r>
           </a:p>
@@ -5606,6 +7153,7 @@
               <a:defRPr sz="2000"/>
             </a:pPr>
             <a:r>
+              <a:rPr sz="1600"/>
               <a:t>✅ Dosya Uzantıları:</a:t>
             </a:r>
           </a:p>
@@ -5617,6 +7165,7 @@
               <a:defRPr sz="2000"/>
             </a:pPr>
             <a:r>
+              <a:rPr sz="1600"/>
               <a:t>    • .docx - Word belgesi</a:t>
             </a:r>
           </a:p>
@@ -5628,6 +7177,7 @@
               <a:defRPr sz="2000"/>
             </a:pPr>
             <a:r>
+              <a:rPr sz="1600"/>
               <a:t>    • .xlsx - Excel tablosu</a:t>
             </a:r>
           </a:p>
@@ -5639,6 +7189,7 @@
               <a:defRPr sz="2000"/>
             </a:pPr>
             <a:r>
+              <a:rPr sz="1600"/>
               <a:t>    • .pptx - PowerPoint sunumu</a:t>
             </a:r>
           </a:p>
@@ -5650,6 +7201,7 @@
               <a:defRPr sz="2000"/>
             </a:pPr>
             <a:r>
+              <a:rPr sz="1600"/>
               <a:t>    • .jpg, .png - Resim</a:t>
             </a:r>
           </a:p>
@@ -5661,6 +7213,7 @@
               <a:defRPr sz="2000"/>
             </a:pPr>
             <a:r>
+              <a:rPr sz="1600"/>
               <a:t>    • .mp4, .avi - Video</a:t>
             </a:r>
           </a:p>
@@ -5672,6 +7225,7 @@
               <a:defRPr sz="2000"/>
             </a:pPr>
             <a:r>
+              <a:rPr sz="1600"/>
               <a:t>    • .mp3 - Müzik</a:t>
             </a:r>
           </a:p>
@@ -5683,6 +7237,7 @@
               <a:defRPr sz="2000"/>
             </a:pPr>
             <a:r>
+              <a:rPr sz="1600"/>
               <a:t>    • .pdf - PDF belgesi</a:t>
             </a:r>
           </a:p>
@@ -5694,6 +7249,7 @@
               <a:defRPr sz="2000"/>
             </a:pPr>
             <a:r>
+              <a:rPr sz="1600"/>
               <a:t>    • .exe - Program dosyası</a:t>
             </a:r>
           </a:p>
@@ -6081,6 +7637,7 @@
               <a:defRPr sz="2000"/>
             </a:pPr>
             <a:r>
+              <a:rPr sz="1600"/>
               <a:t>✅ Anlamlı İsimler Kullanın:</a:t>
             </a:r>
           </a:p>
@@ -6092,6 +7649,7 @@
               <a:defRPr sz="2000"/>
             </a:pPr>
             <a:r>
+              <a:rPr sz="1600"/>
               <a:t>    ❌ Yanlış: Belge1.docx, 12345.jpg</a:t>
             </a:r>
           </a:p>
@@ -6103,6 +7661,7 @@
               <a:defRPr sz="2000"/>
             </a:pPr>
             <a:r>
+              <a:rPr sz="1600"/>
               <a:t>    ✅ Doğru: Matematik_Odevi.docx, Aile_Tatili_2025.jpg</a:t>
             </a:r>
           </a:p>
@@ -6122,6 +7681,7 @@
               <a:defRPr sz="2000"/>
             </a:pPr>
             <a:r>
+              <a:rPr sz="1600"/>
               <a:t>✅ Klasör Yapısı Oluşturun:</a:t>
             </a:r>
           </a:p>
@@ -6133,6 +7693,7 @@
               <a:defRPr sz="2000"/>
             </a:pPr>
             <a:r>
+              <a:rPr sz="1600"/>
               <a:t>    📁 Belgeler</a:t>
             </a:r>
           </a:p>
@@ -6144,6 +7705,7 @@
               <a:defRPr sz="2000"/>
             </a:pPr>
             <a:r>
+              <a:rPr sz="1600"/>
               <a:t>        📁 Okulİşleri</a:t>
             </a:r>
           </a:p>
@@ -6155,6 +7717,7 @@
               <a:defRPr sz="2000"/>
             </a:pPr>
             <a:r>
+              <a:rPr sz="1600"/>
               <a:t>            📁 Matematik</a:t>
             </a:r>
           </a:p>
@@ -6166,6 +7729,7 @@
               <a:defRPr sz="2000"/>
             </a:pPr>
             <a:r>
+              <a:rPr sz="1600"/>
               <a:t>            📁 Türkçe</a:t>
             </a:r>
           </a:p>
@@ -6177,6 +7741,7 @@
               <a:defRPr sz="2000"/>
             </a:pPr>
             <a:r>
+              <a:rPr sz="1600"/>
               <a:t>        📁 Kişisel</a:t>
             </a:r>
           </a:p>
@@ -6196,6 +7761,7 @@
               <a:defRPr sz="2000"/>
             </a:pPr>
             <a:r>
+              <a:rPr sz="1600"/>
               <a:t>✅ Düzenli Yedekleme:</a:t>
             </a:r>
           </a:p>
@@ -6207,6 +7773,7 @@
               <a:defRPr sz="2000"/>
             </a:pPr>
             <a:r>
+              <a:rPr sz="1600"/>
               <a:t>    • Önemli dosyaları USB veya buluta yedekleyin</a:t>
             </a:r>
           </a:p>
@@ -6218,6 +7785,7 @@
               <a:defRPr sz="2000"/>
             </a:pPr>
             <a:r>
+              <a:rPr sz="1600"/>
               <a:t>    • Haftalık yedekleme alışkanlığı</a:t>
             </a:r>
           </a:p>
@@ -6237,6 +7805,7 @@
               <a:defRPr sz="2000"/>
             </a:pPr>
             <a:r>
+              <a:rPr sz="1600"/>
               <a:t>✅ Gereksizleri Silin:</a:t>
             </a:r>
           </a:p>
@@ -6248,6 +7817,7 @@
               <a:defRPr sz="2000"/>
             </a:pPr>
             <a:r>
+              <a:rPr sz="1600"/>
               <a:t>    • İndirilenler klasörünü temizleyin</a:t>
             </a:r>
           </a:p>
@@ -6259,6 +7829,7 @@
               <a:defRPr sz="2000"/>
             </a:pPr>
             <a:r>
+              <a:rPr sz="1600"/>
               <a:t>    • Eski dosyaları arşivleyin</a:t>
             </a:r>
           </a:p>
@@ -6357,6 +7928,7 @@
               <a:defRPr sz="2000"/>
             </a:pPr>
             <a:r>
+              <a:rPr sz="1600"/>
               <a:t>Bu ünitede öğrendiklerimiz:</a:t>
             </a:r>
           </a:p>
@@ -6376,6 +7948,7 @@
               <a:defRPr sz="2000"/>
             </a:pPr>
             <a:r>
+              <a:rPr sz="1600"/>
               <a:t>✅ Bilişim teknolojilerinin sınıflandırılması</a:t>
             </a:r>
           </a:p>
@@ -6387,6 +7960,7 @@
               <a:defRPr sz="2000"/>
             </a:pPr>
             <a:r>
+              <a:rPr sz="1600"/>
               <a:t>✅ Bilgisayar bileşenleri:</a:t>
             </a:r>
           </a:p>
@@ -6398,6 +7972,7 @@
               <a:defRPr sz="2000"/>
             </a:pPr>
             <a:r>
+              <a:rPr sz="1600"/>
               <a:t>    • İşlemci (CPU) - Beyin</a:t>
             </a:r>
           </a:p>
@@ -6409,6 +7984,7 @@
               <a:defRPr sz="2000"/>
             </a:pPr>
             <a:r>
+              <a:rPr sz="1600"/>
               <a:t>    • RAM - Geçici hafıza</a:t>
             </a:r>
           </a:p>
@@ -6420,6 +7996,7 @@
               <a:defRPr sz="2000"/>
             </a:pPr>
             <a:r>
+              <a:rPr sz="1600"/>
               <a:t>    • Hard Disk/SSD - Kalıcı hafıza</a:t>
             </a:r>
           </a:p>
@@ -6431,6 +8008,7 @@
               <a:defRPr sz="2000"/>
             </a:pPr>
             <a:r>
+              <a:rPr sz="1600"/>
               <a:t>    • Anakart - Bağlantı merkezi</a:t>
             </a:r>
           </a:p>
@@ -6442,6 +8020,7 @@
               <a:defRPr sz="2000"/>
             </a:pPr>
             <a:r>
+              <a:rPr sz="1600"/>
               <a:t>✅ İşletim sistemleri (Windows, Linux, macOS)</a:t>
             </a:r>
           </a:p>
@@ -6453,6 +8032,7 @@
               <a:defRPr sz="2000"/>
             </a:pPr>
             <a:r>
+              <a:rPr sz="1600"/>
               <a:t>✅ Dosya ve klasör yönetimi</a:t>
             </a:r>
           </a:p>
@@ -6464,6 +8044,7 @@
               <a:defRPr sz="2000"/>
             </a:pPr>
             <a:r>
+              <a:rPr sz="1600"/>
               <a:t>✅ Dosya uzantıları ve türleri</a:t>
             </a:r>
           </a:p>
@@ -6475,6 +8056,7 @@
               <a:defRPr sz="2000"/>
             </a:pPr>
             <a:r>
+              <a:rPr sz="1600"/>
               <a:t>✅ İyi düzenleme alışkanlıkları</a:t>
             </a:r>
           </a:p>
@@ -6494,6 +8076,7 @@
               <a:defRPr sz="2000"/>
             </a:pPr>
             <a:r>
+              <a:rPr sz="1600"/>
               <a:t>💡 Unutmayın:</a:t>
             </a:r>
           </a:p>
@@ -6505,6 +8088,7 @@
               <a:defRPr sz="2000"/>
             </a:pPr>
             <a:r>
+              <a:rPr sz="1600"/>
               <a:t>Teknoloji hayatımızı kolaylaştırır,</a:t>
             </a:r>
           </a:p>
@@ -6516,6 +8100,7 @@
               <a:defRPr sz="2000"/>
             </a:pPr>
             <a:r>
+              <a:rPr sz="1600"/>
               <a:t>ama sorumlu kullanılmalıdır!</a:t>
             </a:r>
           </a:p>
@@ -6614,6 +8199,7 @@
               <a:defRPr sz="2000"/>
             </a:pPr>
             <a:r>
+              <a:rPr sz="1600"/>
               <a:t>📺 İzlemeniz Gereken Videolar:</a:t>
             </a:r>
           </a:p>
@@ -6625,6 +8211,7 @@
               <a:defRPr sz="2000"/>
             </a:pPr>
             <a:r>
+              <a:rPr sz="1600"/>
               <a:t>    • 'Bilgisayar Nasıl Çalışır?' (YouTube)</a:t>
             </a:r>
           </a:p>
@@ -6636,6 +8223,7 @@
               <a:defRPr sz="2000"/>
             </a:pPr>
             <a:r>
+              <a:rPr sz="1600"/>
               <a:t>    • 'CPU Animasyonu' (YouTube)</a:t>
             </a:r>
           </a:p>
@@ -6647,6 +8235,7 @@
               <a:defRPr sz="2000"/>
             </a:pPr>
             <a:r>
+              <a:rPr sz="1600"/>
               <a:t>    • 'HDD vs SSD Karşılaştırması' (YouTube)</a:t>
             </a:r>
           </a:p>
@@ -6658,6 +8247,7 @@
               <a:defRPr sz="2000"/>
             </a:pPr>
             <a:r>
+              <a:rPr sz="1600"/>
               <a:t>    • 'İşletim Sistemleri Nedir?' (YouTube)</a:t>
             </a:r>
           </a:p>
@@ -6677,6 +8267,7 @@
               <a:defRPr sz="2000"/>
             </a:pPr>
             <a:r>
+              <a:rPr sz="1600"/>
               <a:t>🌐 Faydalı Web Siteleri:</a:t>
             </a:r>
           </a:p>
@@ -6688,6 +8279,7 @@
               <a:defRPr sz="2000"/>
             </a:pPr>
             <a:r>
+              <a:rPr sz="1600"/>
               <a:t>    • code.org - Programlama öğren</a:t>
             </a:r>
           </a:p>
@@ -6699,6 +8291,7 @@
               <a:defRPr sz="2000"/>
             </a:pPr>
             <a:r>
+              <a:rPr sz="1600"/>
               <a:t>    • scratch.mit.edu - Blok programlama</a:t>
             </a:r>
           </a:p>
@@ -6710,6 +8303,7 @@
               <a:defRPr sz="2000"/>
             </a:pPr>
             <a:r>
+              <a:rPr sz="1600"/>
               <a:t>    • khanacademy.org/tr - Ücretsiz eğitim</a:t>
             </a:r>
           </a:p>
@@ -6729,6 +8323,7 @@
               <a:defRPr sz="2000"/>
             </a:pPr>
             <a:r>
+              <a:rPr sz="1600"/>
               <a:t>📚 Okuma Kaynakları:</a:t>
             </a:r>
           </a:p>
@@ -6740,6 +8335,7 @@
               <a:defRPr sz="2000"/>
             </a:pPr>
             <a:r>
+              <a:rPr sz="1600"/>
               <a:t>    • MEB Ders Kitabı</a:t>
             </a:r>
           </a:p>
@@ -6751,6 +8347,7 @@
               <a:defRPr sz="2000"/>
             </a:pPr>
             <a:r>
+              <a:rPr sz="1600"/>
               <a:t>    • EBA (Eğitim Bilişim Ağı)</a:t>
             </a:r>
           </a:p>
@@ -6770,6 +8367,7 @@
               <a:defRPr sz="2000"/>
             </a:pPr>
             <a:r>
+              <a:rPr sz="1600"/>
               <a:t>❓ Sorularınız için:</a:t>
             </a:r>
           </a:p>
@@ -6781,6 +8379,7 @@
               <a:defRPr sz="2000"/>
             </a:pPr>
             <a:r>
+              <a:rPr sz="1600"/>
               <a:t>    • Öğretmeninizle iletişime geçin!</a:t>
             </a:r>
           </a:p>
@@ -6975,6 +8574,7 @@
               <a:defRPr sz="2000"/>
             </a:pPr>
             <a:r>
+              <a:rPr sz="1600"/>
               <a:t>🖥️ 1. Bilişim Teknolojilerinin Hayatımızdaki Yeri</a:t>
             </a:r>
           </a:p>
@@ -6986,6 +8586,7 @@
               <a:defRPr sz="2000"/>
             </a:pPr>
             <a:r>
+              <a:rPr sz="1600"/>
               <a:t>    • Bilişim Teknolojilerinin Sınıflandırılması</a:t>
             </a:r>
           </a:p>
@@ -6997,6 +8598,7 @@
               <a:defRPr sz="2000"/>
             </a:pPr>
             <a:r>
+              <a:rPr sz="1600"/>
               <a:t>    • Etkileri ve Dijital Sağlık</a:t>
             </a:r>
           </a:p>
@@ -7016,6 +8618,7 @@
               <a:defRPr sz="2000"/>
             </a:pPr>
             <a:r>
+              <a:rPr sz="1600"/>
               <a:t>💻 2. Bilgisayar Sistemleri</a:t>
             </a:r>
           </a:p>
@@ -7027,6 +8630,7 @@
               <a:defRPr sz="2000"/>
             </a:pPr>
             <a:r>
+              <a:rPr sz="1600"/>
               <a:t>    • Donanım Bileşenleri (CPU, RAM, Hard Disk, Anakart)</a:t>
             </a:r>
           </a:p>
@@ -7038,6 +8642,7 @@
               <a:defRPr sz="2000"/>
             </a:pPr>
             <a:r>
+              <a:rPr sz="1600"/>
               <a:t>    • Giriş ve Çıkış Birimleri</a:t>
             </a:r>
           </a:p>
@@ -7057,6 +8662,7 @@
               <a:defRPr sz="2000"/>
             </a:pPr>
             <a:r>
+              <a:rPr sz="1600"/>
               <a:t>⚙️ 3. İşletim Sistemleri</a:t>
             </a:r>
           </a:p>
@@ -7068,6 +8674,7 @@
               <a:defRPr sz="2000"/>
             </a:pPr>
             <a:r>
+              <a:rPr sz="1600"/>
               <a:t>    • Windows, Linux, macOS</a:t>
             </a:r>
           </a:p>
@@ -7079,6 +8686,7 @@
               <a:defRPr sz="2000"/>
             </a:pPr>
             <a:r>
+              <a:rPr sz="1600"/>
               <a:t>    • Temel Görevler ve Kullanım</a:t>
             </a:r>
           </a:p>
@@ -7098,6 +8706,7 @@
               <a:defRPr sz="2000"/>
             </a:pPr>
             <a:r>
+              <a:rPr sz="1600"/>
               <a:t>📁 4. Dosya ve Klasör Yönetimi</a:t>
             </a:r>
           </a:p>
@@ -7109,6 +8718,7 @@
               <a:defRPr sz="2000"/>
             </a:pPr>
             <a:r>
+              <a:rPr sz="1600"/>
               <a:t>    • Dosya Uzantıları</a:t>
             </a:r>
           </a:p>
@@ -7120,6 +8730,7 @@
               <a:defRPr sz="2000"/>
             </a:pPr>
             <a:r>
+              <a:rPr sz="1600"/>
               <a:t>    • Düzenleme ve Yönetim İşlemleri</a:t>
             </a:r>
           </a:p>
@@ -8207,6 +9818,7 @@
               <a:defRPr sz="2000"/>
             </a:pPr>
             <a:r>
+              <a:rPr sz="1600"/>
               <a:t>CPU = Central Processing Unit (Merkezi İşlem Birimi)</a:t>
             </a:r>
           </a:p>
@@ -8226,6 +9838,7 @@
               <a:defRPr sz="2000"/>
             </a:pPr>
             <a:r>
+              <a:rPr sz="1600"/>
               <a:t>✅ Görevleri:</a:t>
             </a:r>
           </a:p>
@@ -8237,6 +9850,7 @@
               <a:defRPr sz="2000"/>
             </a:pPr>
             <a:r>
+              <a:rPr sz="1600"/>
               <a:t>    • Tüm hesaplamaları yapar</a:t>
             </a:r>
           </a:p>
@@ -8248,6 +9862,7 @@
               <a:defRPr sz="2000"/>
             </a:pPr>
             <a:r>
+              <a:rPr sz="1600"/>
               <a:t>    • Komutları işler</a:t>
             </a:r>
           </a:p>
@@ -8259,6 +9874,7 @@
               <a:defRPr sz="2000"/>
             </a:pPr>
             <a:r>
+              <a:rPr sz="1600"/>
               <a:t>    • Verileri işleyip sonuç üretir</a:t>
             </a:r>
           </a:p>
@@ -8278,6 +9894,7 @@
               <a:defRPr sz="2000"/>
             </a:pPr>
             <a:r>
+              <a:rPr sz="1600"/>
               <a:t>✅ Önemli Özellikler:</a:t>
             </a:r>
           </a:p>
@@ -8289,6 +9906,7 @@
               <a:defRPr sz="2000"/>
             </a:pPr>
             <a:r>
+              <a:rPr sz="1600"/>
               <a:t>    • GHz (Gigahertz) - Hız birimi</a:t>
             </a:r>
           </a:p>
@@ -8300,6 +9918,7 @@
               <a:defRPr sz="2000"/>
             </a:pPr>
             <a:r>
+              <a:rPr sz="1600"/>
               <a:t>    • Çekirdek sayısı (2, 4, 8 çekirdek...)</a:t>
             </a:r>
           </a:p>
@@ -8311,6 +9930,7 @@
               <a:defRPr sz="2000"/>
             </a:pPr>
             <a:r>
+              <a:rPr sz="1600"/>
               <a:t>    • Önbellek (Cache)</a:t>
             </a:r>
           </a:p>
@@ -8330,6 +9950,7 @@
               <a:defRPr sz="2000"/>
             </a:pPr>
             <a:r>
+              <a:rPr sz="1600"/>
               <a:t>📌 Popüler Markalar:</a:t>
             </a:r>
           </a:p>
@@ -8341,6 +9962,7 @@
               <a:defRPr sz="2000"/>
             </a:pPr>
             <a:r>
+              <a:rPr sz="1600"/>
               <a:t>Intel (i3, i5, i7, i9) ve AMD (Ryzen)</a:t>
             </a:r>
           </a:p>
@@ -8360,6 +9982,7 @@
               <a:defRPr sz="2000"/>
             </a:pPr>
             <a:r>
+              <a:rPr sz="1600"/>
               <a:t>💡 Analoji: İşlemci = İnsan beyni</a:t>
             </a:r>
           </a:p>
@@ -8371,6 +9994,7 @@
               <a:defRPr sz="2000"/>
             </a:pPr>
             <a:r>
+              <a:rPr sz="1600"/>
               <a:t>Ne kadar hızlı düşünürsen, işleri o kadar çabuk bitirirsin!</a:t>
             </a:r>
           </a:p>
@@ -8469,6 +10093,7 @@
               <a:defRPr sz="2000"/>
             </a:pPr>
             <a:r>
+              <a:rPr sz="1600"/>
               <a:t>RAM = Random Access Memory (Rastgele Erişimli Bellek)</a:t>
             </a:r>
           </a:p>
@@ -8488,6 +10113,7 @@
               <a:defRPr sz="2000"/>
             </a:pPr>
             <a:r>
+              <a:rPr sz="1600"/>
               <a:t>✅ Görevleri:</a:t>
             </a:r>
           </a:p>
@@ -8499,6 +10125,7 @@
               <a:defRPr sz="2000"/>
             </a:pPr>
             <a:r>
+              <a:rPr sz="1600"/>
               <a:t>    • Açık programların verilerini tutar</a:t>
             </a:r>
           </a:p>
@@ -8510,6 +10137,7 @@
               <a:defRPr sz="2000"/>
             </a:pPr>
             <a:r>
+              <a:rPr sz="1600"/>
               <a:t>    • Geçici çalışma alanı sağlar</a:t>
             </a:r>
           </a:p>
@@ -8521,6 +10149,7 @@
               <a:defRPr sz="2000"/>
             </a:pPr>
             <a:r>
+              <a:rPr sz="1600"/>
               <a:t>    • İşlemciye hızlı veri erişimi</a:t>
             </a:r>
           </a:p>
@@ -8540,6 +10169,7 @@
               <a:defRPr sz="2000"/>
             </a:pPr>
             <a:r>
+              <a:rPr sz="1600"/>
               <a:t>⚠️ Önemli Özelliği:</a:t>
             </a:r>
           </a:p>
@@ -8551,6 +10181,7 @@
               <a:defRPr sz="2000"/>
             </a:pPr>
             <a:r>
+              <a:rPr sz="1600"/>
               <a:t>Bilgisayar kapatıldığında içindeki</a:t>
             </a:r>
           </a:p>
@@ -8562,6 +10193,7 @@
               <a:defRPr sz="2000"/>
             </a:pPr>
             <a:r>
+              <a:rPr sz="1600"/>
               <a:t>TÜM VERİLER SİLİNİR!</a:t>
             </a:r>
           </a:p>
@@ -8581,6 +10213,7 @@
               <a:defRPr sz="2000"/>
             </a:pPr>
             <a:r>
+              <a:rPr sz="1600"/>
               <a:t>📊 Kapasiteler:</a:t>
             </a:r>
           </a:p>
@@ -8592,6 +10225,7 @@
               <a:defRPr sz="2000"/>
             </a:pPr>
             <a:r>
+              <a:rPr sz="1600"/>
               <a:t>    • 4 GB - Temel kullanım</a:t>
             </a:r>
           </a:p>
@@ -8603,6 +10237,7 @@
               <a:defRPr sz="2000"/>
             </a:pPr>
             <a:r>
+              <a:rPr sz="1600"/>
               <a:t>    • 8 GB - Günlük kullanım</a:t>
             </a:r>
           </a:p>
@@ -8614,6 +10249,7 @@
               <a:defRPr sz="2000"/>
             </a:pPr>
             <a:r>
+              <a:rPr sz="1600"/>
               <a:t>    • 16 GB+ - Oyun/Tasarım</a:t>
             </a:r>
           </a:p>
@@ -8633,6 +10269,7 @@
               <a:defRPr sz="2000"/>
             </a:pPr>
             <a:r>
+              <a:rPr sz="1600"/>
               <a:t>💡 Analoji: RAM = Çalışma masası</a:t>
             </a:r>
           </a:p>
@@ -8644,6 +10281,7 @@
               <a:defRPr sz="2000"/>
             </a:pPr>
             <a:r>
+              <a:rPr sz="1600"/>
               <a:t>Masası büyük olan daha çok iş yapabilir!</a:t>
             </a:r>
           </a:p>

--- a/sunumlar/5-sinif-unite1-bilisim-temelleri-DETAYLI.pptx
+++ b/sunumlar/5-sinif-unite1-bilisim-temelleri-DETAYLI.pptx
@@ -5847,7 +5847,7 @@
           <a:noFill/>
         </p:spPr>
         <p:txBody>
-          <a:bodyPr wrap="none">
+          <a:bodyPr wrap="square">
             <a:spAutoFit/>
           </a:bodyPr>
           <a:lstStyle/>
@@ -5882,7 +5882,7 @@
           <a:noFill/>
         </p:spPr>
         <p:txBody>
-          <a:bodyPr wrap="none">
+          <a:bodyPr wrap="square">
             <a:spAutoFit/>
           </a:bodyPr>
           <a:lstStyle/>
@@ -5935,7 +5935,7 @@
         </p:nvSpPr>
         <p:spPr/>
         <p:txBody>
-          <a:bodyPr/>
+          <a:bodyPr wrap="square"/>
           <a:lstStyle/>
           <a:p>
             <a:pPr>
@@ -5989,182 +5989,256 @@
             <a:spAutoFit/>
           </a:bodyPr>
           <a:lstStyle/>
-          <a:p/>
-          <a:p>
-            <a:pPr>
-              <a:spcAft>
-                <a:spcPts val="1200"/>
-              </a:spcAft>
-              <a:defRPr sz="2000"/>
-            </a:pPr>
-            <a:r>
+          <a:p>
+            <a:pPr>
+              <a:lnSpc>
+                <a:spcPct val="90000"/>
+              </a:lnSpc>
+              <a:spcAft>
+                <a:spcPts val="300"/>
+              </a:spcAft>
+            </a:pPr>
+          </a:p>
+          <a:p>
+            <a:pPr>
+              <a:lnSpc>
+                <a:spcPct val="90000"/>
+              </a:lnSpc>
+              <a:spcAft>
+                <a:spcPts val="300"/>
+              </a:spcAft>
+              <a:defRPr sz="2000"/>
+            </a:pPr>
+            <a:r>
+              <a:rPr sz="1500"/>
               <a:t>Motherboard = Tüm parçaları birleştiren ana devre kartı</a:t>
             </a:r>
           </a:p>
           <a:p>
             <a:pPr>
-              <a:spcAft>
-                <a:spcPts val="1200"/>
-              </a:spcAft>
-              <a:defRPr sz="2000"/>
-            </a:pPr>
-          </a:p>
-          <a:p>
-            <a:pPr>
-              <a:spcAft>
-                <a:spcPts val="1200"/>
-              </a:spcAft>
-              <a:defRPr sz="2000"/>
-            </a:pPr>
-            <a:r>
+              <a:lnSpc>
+                <a:spcPct val="90000"/>
+              </a:lnSpc>
+              <a:spcAft>
+                <a:spcPts val="300"/>
+              </a:spcAft>
+              <a:defRPr sz="2000"/>
+            </a:pPr>
+          </a:p>
+          <a:p>
+            <a:pPr>
+              <a:lnSpc>
+                <a:spcPct val="90000"/>
+              </a:lnSpc>
+              <a:spcAft>
+                <a:spcPts val="300"/>
+              </a:spcAft>
+              <a:defRPr sz="2000"/>
+            </a:pPr>
+            <a:r>
+              <a:rPr sz="1500"/>
               <a:t>✅ Bağlanan Parçalar:</a:t>
             </a:r>
           </a:p>
           <a:p>
             <a:pPr>
-              <a:spcAft>
-                <a:spcPts val="1200"/>
-              </a:spcAft>
-              <a:defRPr sz="2000"/>
-            </a:pPr>
-            <a:r>
+              <a:lnSpc>
+                <a:spcPct val="90000"/>
+              </a:lnSpc>
+              <a:spcAft>
+                <a:spcPts val="300"/>
+              </a:spcAft>
+              <a:defRPr sz="2000"/>
+            </a:pPr>
+            <a:r>
+              <a:rPr sz="1500"/>
               <a:t>    • İşlemci (CPU)</a:t>
             </a:r>
           </a:p>
           <a:p>
             <a:pPr>
-              <a:spcAft>
-                <a:spcPts val="1200"/>
-              </a:spcAft>
-              <a:defRPr sz="2000"/>
-            </a:pPr>
-            <a:r>
+              <a:lnSpc>
+                <a:spcPct val="90000"/>
+              </a:lnSpc>
+              <a:spcAft>
+                <a:spcPts val="300"/>
+              </a:spcAft>
+              <a:defRPr sz="2000"/>
+            </a:pPr>
+            <a:r>
+              <a:rPr sz="1500"/>
               <a:t>    • RAM</a:t>
             </a:r>
           </a:p>
           <a:p>
             <a:pPr>
-              <a:spcAft>
-                <a:spcPts val="1200"/>
-              </a:spcAft>
-              <a:defRPr sz="2000"/>
-            </a:pPr>
-            <a:r>
+              <a:lnSpc>
+                <a:spcPct val="90000"/>
+              </a:lnSpc>
+              <a:spcAft>
+                <a:spcPts val="300"/>
+              </a:spcAft>
+              <a:defRPr sz="2000"/>
+            </a:pPr>
+            <a:r>
+              <a:rPr sz="1500"/>
               <a:t>    • Ekran kartı</a:t>
             </a:r>
           </a:p>
           <a:p>
             <a:pPr>
-              <a:spcAft>
-                <a:spcPts val="1200"/>
-              </a:spcAft>
-              <a:defRPr sz="2000"/>
-            </a:pPr>
-            <a:r>
+              <a:lnSpc>
+                <a:spcPct val="90000"/>
+              </a:lnSpc>
+              <a:spcAft>
+                <a:spcPts val="300"/>
+              </a:spcAft>
+              <a:defRPr sz="2000"/>
+            </a:pPr>
+            <a:r>
+              <a:rPr sz="1500"/>
               <a:t>    • Hard disk/SSD</a:t>
             </a:r>
           </a:p>
           <a:p>
             <a:pPr>
-              <a:spcAft>
-                <a:spcPts val="1200"/>
-              </a:spcAft>
-              <a:defRPr sz="2000"/>
-            </a:pPr>
-            <a:r>
+              <a:lnSpc>
+                <a:spcPct val="90000"/>
+              </a:lnSpc>
+              <a:spcAft>
+                <a:spcPts val="300"/>
+              </a:spcAft>
+              <a:defRPr sz="2000"/>
+            </a:pPr>
+            <a:r>
+              <a:rPr sz="1500"/>
               <a:t>    • Güç kaynağı</a:t>
             </a:r>
           </a:p>
           <a:p>
             <a:pPr>
-              <a:spcAft>
-                <a:spcPts val="1200"/>
-              </a:spcAft>
-              <a:defRPr sz="2000"/>
-            </a:pPr>
-          </a:p>
-          <a:p>
-            <a:pPr>
-              <a:spcAft>
-                <a:spcPts val="1200"/>
-              </a:spcAft>
-              <a:defRPr sz="2000"/>
-            </a:pPr>
-            <a:r>
+              <a:lnSpc>
+                <a:spcPct val="90000"/>
+              </a:lnSpc>
+              <a:spcAft>
+                <a:spcPts val="300"/>
+              </a:spcAft>
+              <a:defRPr sz="2000"/>
+            </a:pPr>
+          </a:p>
+          <a:p>
+            <a:pPr>
+              <a:lnSpc>
+                <a:spcPct val="90000"/>
+              </a:lnSpc>
+              <a:spcAft>
+                <a:spcPts val="300"/>
+              </a:spcAft>
+              <a:defRPr sz="2000"/>
+            </a:pPr>
+            <a:r>
+              <a:rPr sz="1500"/>
               <a:t>✅ Üzerindeki Bağlantılar:</a:t>
             </a:r>
           </a:p>
           <a:p>
             <a:pPr>
-              <a:spcAft>
-                <a:spcPts val="1200"/>
-              </a:spcAft>
-              <a:defRPr sz="2000"/>
-            </a:pPr>
-            <a:r>
+              <a:lnSpc>
+                <a:spcPct val="90000"/>
+              </a:lnSpc>
+              <a:spcAft>
+                <a:spcPts val="300"/>
+              </a:spcAft>
+              <a:defRPr sz="2000"/>
+            </a:pPr>
+            <a:r>
+              <a:rPr sz="1500"/>
               <a:t>    • USB portları</a:t>
             </a:r>
           </a:p>
           <a:p>
             <a:pPr>
-              <a:spcAft>
-                <a:spcPts val="1200"/>
-              </a:spcAft>
-              <a:defRPr sz="2000"/>
-            </a:pPr>
-            <a:r>
+              <a:lnSpc>
+                <a:spcPct val="90000"/>
+              </a:lnSpc>
+              <a:spcAft>
+                <a:spcPts val="300"/>
+              </a:spcAft>
+              <a:defRPr sz="2000"/>
+            </a:pPr>
+            <a:r>
+              <a:rPr sz="1500"/>
               <a:t>    • Ses girişi/çıkışı</a:t>
             </a:r>
           </a:p>
           <a:p>
             <a:pPr>
-              <a:spcAft>
-                <a:spcPts val="1200"/>
-              </a:spcAft>
-              <a:defRPr sz="2000"/>
-            </a:pPr>
-            <a:r>
+              <a:lnSpc>
+                <a:spcPct val="90000"/>
+              </a:lnSpc>
+              <a:spcAft>
+                <a:spcPts val="300"/>
+              </a:spcAft>
+              <a:defRPr sz="2000"/>
+            </a:pPr>
+            <a:r>
+              <a:rPr sz="1500"/>
               <a:t>    • Ethernet (İnternet kablosu)</a:t>
             </a:r>
           </a:p>
           <a:p>
             <a:pPr>
-              <a:spcAft>
-                <a:spcPts val="1200"/>
-              </a:spcAft>
-              <a:defRPr sz="2000"/>
-            </a:pPr>
-            <a:r>
+              <a:lnSpc>
+                <a:spcPct val="90000"/>
+              </a:lnSpc>
+              <a:spcAft>
+                <a:spcPts val="300"/>
+              </a:spcAft>
+              <a:defRPr sz="2000"/>
+            </a:pPr>
+            <a:r>
+              <a:rPr sz="1500"/>
               <a:t>    • HDMI/DisplayPort (Ekran)</a:t>
             </a:r>
           </a:p>
           <a:p>
             <a:pPr>
-              <a:spcAft>
-                <a:spcPts val="1200"/>
-              </a:spcAft>
-              <a:defRPr sz="2000"/>
-            </a:pPr>
-          </a:p>
-          <a:p>
-            <a:pPr>
-              <a:spcAft>
-                <a:spcPts val="1200"/>
-              </a:spcAft>
-              <a:defRPr sz="2000"/>
-            </a:pPr>
-            <a:r>
+              <a:lnSpc>
+                <a:spcPct val="90000"/>
+              </a:lnSpc>
+              <a:spcAft>
+                <a:spcPts val="300"/>
+              </a:spcAft>
+              <a:defRPr sz="2000"/>
+            </a:pPr>
+          </a:p>
+          <a:p>
+            <a:pPr>
+              <a:lnSpc>
+                <a:spcPct val="90000"/>
+              </a:lnSpc>
+              <a:spcAft>
+                <a:spcPts val="300"/>
+              </a:spcAft>
+              <a:defRPr sz="2000"/>
+            </a:pPr>
+            <a:r>
+              <a:rPr sz="1500"/>
               <a:t>💡 Analoji: Anakart = Şehir yolları</a:t>
             </a:r>
           </a:p>
           <a:p>
             <a:pPr>
-              <a:spcAft>
-                <a:spcPts val="1200"/>
-              </a:spcAft>
-              <a:defRPr sz="2000"/>
-            </a:pPr>
-            <a:r>
+              <a:lnSpc>
+                <a:spcPct val="90000"/>
+              </a:lnSpc>
+              <a:spcAft>
+                <a:spcPts val="300"/>
+              </a:spcAft>
+              <a:defRPr sz="2000"/>
+            </a:pPr>
+            <a:r>
+              <a:rPr sz="1500"/>
               <a:t>Tüm mahalleleri (parçaları) birbirine bağlar!</a:t>
             </a:r>
           </a:p>
@@ -6200,7 +6274,7 @@
         </p:nvSpPr>
         <p:spPr/>
         <p:txBody>
-          <a:bodyPr/>
+          <a:bodyPr wrap="square"/>
           <a:lstStyle/>
           <a:p>
             <a:pPr>
@@ -6254,174 +6328,245 @@
             <a:spAutoFit/>
           </a:bodyPr>
           <a:lstStyle/>
-          <a:p/>
-          <a:p>
-            <a:pPr>
-              <a:spcAft>
-                <a:spcPts val="1200"/>
-              </a:spcAft>
-              <a:defRPr sz="2000"/>
-            </a:pPr>
-            <a:r>
+          <a:p>
+            <a:pPr>
+              <a:lnSpc>
+                <a:spcPct val="90000"/>
+              </a:lnSpc>
+              <a:spcAft>
+                <a:spcPts val="300"/>
+              </a:spcAft>
+            </a:pPr>
+          </a:p>
+          <a:p>
+            <a:pPr>
+              <a:lnSpc>
+                <a:spcPct val="90000"/>
+              </a:lnSpc>
+              <a:spcAft>
+                <a:spcPts val="300"/>
+              </a:spcAft>
+              <a:defRPr sz="2000"/>
+            </a:pPr>
+            <a:r>
+              <a:rPr sz="1500"/>
               <a:t>📥 GİRİŞ BİRİMLERİ (Input):</a:t>
             </a:r>
           </a:p>
           <a:p>
             <a:pPr>
-              <a:spcAft>
-                <a:spcPts val="1200"/>
-              </a:spcAft>
-              <a:defRPr sz="2000"/>
-            </a:pPr>
-            <a:r>
+              <a:lnSpc>
+                <a:spcPct val="90000"/>
+              </a:lnSpc>
+              <a:spcAft>
+                <a:spcPts val="300"/>
+              </a:spcAft>
+              <a:defRPr sz="2000"/>
+            </a:pPr>
+            <a:r>
+              <a:rPr sz="1500"/>
               <a:t>    • Klavye - Metin girişi</a:t>
             </a:r>
           </a:p>
           <a:p>
             <a:pPr>
-              <a:spcAft>
-                <a:spcPts val="1200"/>
-              </a:spcAft>
-              <a:defRPr sz="2000"/>
-            </a:pPr>
-            <a:r>
+              <a:lnSpc>
+                <a:spcPct val="90000"/>
+              </a:lnSpc>
+              <a:spcAft>
+                <a:spcPts val="300"/>
+              </a:spcAft>
+              <a:defRPr sz="2000"/>
+            </a:pPr>
+            <a:r>
+              <a:rPr sz="1500"/>
               <a:t>    • Mouse - İşaretleme ve tıklama</a:t>
             </a:r>
           </a:p>
           <a:p>
             <a:pPr>
-              <a:spcAft>
-                <a:spcPts val="1200"/>
-              </a:spcAft>
-              <a:defRPr sz="2000"/>
-            </a:pPr>
-            <a:r>
+              <a:lnSpc>
+                <a:spcPct val="90000"/>
+              </a:lnSpc>
+              <a:spcAft>
+                <a:spcPts val="300"/>
+              </a:spcAft>
+              <a:defRPr sz="2000"/>
+            </a:pPr>
+            <a:r>
+              <a:rPr sz="1500"/>
               <a:t>    • Mikrofon - Ses girişi</a:t>
             </a:r>
           </a:p>
           <a:p>
             <a:pPr>
-              <a:spcAft>
-                <a:spcPts val="1200"/>
-              </a:spcAft>
-              <a:defRPr sz="2000"/>
-            </a:pPr>
-            <a:r>
+              <a:lnSpc>
+                <a:spcPct val="90000"/>
+              </a:lnSpc>
+              <a:spcAft>
+                <a:spcPts val="300"/>
+              </a:spcAft>
+              <a:defRPr sz="2000"/>
+            </a:pPr>
+            <a:r>
+              <a:rPr sz="1500"/>
               <a:t>    • Webcam - Görüntü girişi</a:t>
             </a:r>
           </a:p>
           <a:p>
             <a:pPr>
-              <a:spcAft>
-                <a:spcPts val="1200"/>
-              </a:spcAft>
-              <a:defRPr sz="2000"/>
-            </a:pPr>
-            <a:r>
+              <a:lnSpc>
+                <a:spcPct val="90000"/>
+              </a:lnSpc>
+              <a:spcAft>
+                <a:spcPts val="300"/>
+              </a:spcAft>
+              <a:defRPr sz="2000"/>
+            </a:pPr>
+            <a:r>
+              <a:rPr sz="1500"/>
               <a:t>    • Tarayıcı (Scanner) - Belge/fotoğraf</a:t>
             </a:r>
           </a:p>
           <a:p>
             <a:pPr>
-              <a:spcAft>
-                <a:spcPts val="1200"/>
-              </a:spcAft>
-              <a:defRPr sz="2000"/>
-            </a:pPr>
-          </a:p>
-          <a:p>
-            <a:pPr>
-              <a:spcAft>
-                <a:spcPts val="1200"/>
-              </a:spcAft>
-              <a:defRPr sz="2000"/>
-            </a:pPr>
-            <a:r>
+              <a:lnSpc>
+                <a:spcPct val="90000"/>
+              </a:lnSpc>
+              <a:spcAft>
+                <a:spcPts val="300"/>
+              </a:spcAft>
+              <a:defRPr sz="2000"/>
+            </a:pPr>
+          </a:p>
+          <a:p>
+            <a:pPr>
+              <a:lnSpc>
+                <a:spcPct val="90000"/>
+              </a:lnSpc>
+              <a:spcAft>
+                <a:spcPts val="300"/>
+              </a:spcAft>
+              <a:defRPr sz="2000"/>
+            </a:pPr>
+            <a:r>
+              <a:rPr sz="1500"/>
               <a:t>📤 ÇIKIŞ BİRİMLERİ (Output):</a:t>
             </a:r>
           </a:p>
           <a:p>
             <a:pPr>
-              <a:spcAft>
-                <a:spcPts val="1200"/>
-              </a:spcAft>
-              <a:defRPr sz="2000"/>
-            </a:pPr>
-            <a:r>
+              <a:lnSpc>
+                <a:spcPct val="90000"/>
+              </a:lnSpc>
+              <a:spcAft>
+                <a:spcPts val="300"/>
+              </a:spcAft>
+              <a:defRPr sz="2000"/>
+            </a:pPr>
+            <a:r>
+              <a:rPr sz="1500"/>
               <a:t>    • Ekran (Monitor) - Görüntü çıkışı</a:t>
             </a:r>
           </a:p>
           <a:p>
             <a:pPr>
-              <a:spcAft>
-                <a:spcPts val="1200"/>
-              </a:spcAft>
-              <a:defRPr sz="2000"/>
-            </a:pPr>
-            <a:r>
+              <a:lnSpc>
+                <a:spcPct val="90000"/>
+              </a:lnSpc>
+              <a:spcAft>
+                <a:spcPts val="300"/>
+              </a:spcAft>
+              <a:defRPr sz="2000"/>
+            </a:pPr>
+            <a:r>
+              <a:rPr sz="1500"/>
               <a:t>    • Hoparlör - Ses çıkışı</a:t>
             </a:r>
           </a:p>
           <a:p>
             <a:pPr>
-              <a:spcAft>
-                <a:spcPts val="1200"/>
-              </a:spcAft>
-              <a:defRPr sz="2000"/>
-            </a:pPr>
-            <a:r>
+              <a:lnSpc>
+                <a:spcPct val="90000"/>
+              </a:lnSpc>
+              <a:spcAft>
+                <a:spcPts val="300"/>
+              </a:spcAft>
+              <a:defRPr sz="2000"/>
+            </a:pPr>
+            <a:r>
+              <a:rPr sz="1500"/>
               <a:t>    • Yazıcı (Printer) - Kağıt çıktısı</a:t>
             </a:r>
           </a:p>
           <a:p>
             <a:pPr>
-              <a:spcAft>
-                <a:spcPts val="1200"/>
-              </a:spcAft>
-              <a:defRPr sz="2000"/>
-            </a:pPr>
-            <a:r>
+              <a:lnSpc>
+                <a:spcPct val="90000"/>
+              </a:lnSpc>
+              <a:spcAft>
+                <a:spcPts val="300"/>
+              </a:spcAft>
+              <a:defRPr sz="2000"/>
+            </a:pPr>
+            <a:r>
+              <a:rPr sz="1500"/>
               <a:t>    • Projektör - Büyük ekran</a:t>
             </a:r>
           </a:p>
           <a:p>
             <a:pPr>
-              <a:spcAft>
-                <a:spcPts val="1200"/>
-              </a:spcAft>
-              <a:defRPr sz="2000"/>
-            </a:pPr>
-          </a:p>
-          <a:p>
-            <a:pPr>
-              <a:spcAft>
-                <a:spcPts val="1200"/>
-              </a:spcAft>
-              <a:defRPr sz="2000"/>
-            </a:pPr>
-            <a:r>
+              <a:lnSpc>
+                <a:spcPct val="90000"/>
+              </a:lnSpc>
+              <a:spcAft>
+                <a:spcPts val="300"/>
+              </a:spcAft>
+              <a:defRPr sz="2000"/>
+            </a:pPr>
+          </a:p>
+          <a:p>
+            <a:pPr>
+              <a:lnSpc>
+                <a:spcPct val="90000"/>
+              </a:lnSpc>
+              <a:spcAft>
+                <a:spcPts val="300"/>
+              </a:spcAft>
+              <a:defRPr sz="2000"/>
+            </a:pPr>
+            <a:r>
+              <a:rPr sz="1500"/>
               <a:t>🔄 HER İKİSİ:</a:t>
             </a:r>
           </a:p>
           <a:p>
             <a:pPr>
-              <a:spcAft>
-                <a:spcPts val="1200"/>
-              </a:spcAft>
-              <a:defRPr sz="2000"/>
-            </a:pPr>
-            <a:r>
+              <a:lnSpc>
+                <a:spcPct val="90000"/>
+              </a:lnSpc>
+              <a:spcAft>
+                <a:spcPts val="300"/>
+              </a:spcAft>
+              <a:defRPr sz="2000"/>
+            </a:pPr>
+            <a:r>
+              <a:rPr sz="1500"/>
               <a:t>    • Dokunmatik ekran</a:t>
             </a:r>
           </a:p>
           <a:p>
             <a:pPr>
-              <a:spcAft>
-                <a:spcPts val="1200"/>
-              </a:spcAft>
-              <a:defRPr sz="2000"/>
-            </a:pPr>
-            <a:r>
+              <a:lnSpc>
+                <a:spcPct val="90000"/>
+              </a:lnSpc>
+              <a:spcAft>
+                <a:spcPts val="300"/>
+              </a:spcAft>
+              <a:defRPr sz="2000"/>
+            </a:pPr>
+            <a:r>
+              <a:rPr sz="1500"/>
               <a:t>    • Akıllı telefon</a:t>
             </a:r>
           </a:p>
@@ -6457,7 +6602,7 @@
         </p:nvSpPr>
         <p:spPr/>
         <p:txBody>
-          <a:bodyPr/>
+          <a:bodyPr wrap="square"/>
           <a:lstStyle/>
           <a:p>
             <a:pPr>
@@ -6511,171 +6656,241 @@
             <a:spAutoFit/>
           </a:bodyPr>
           <a:lstStyle/>
-          <a:p/>
-          <a:p>
-            <a:pPr>
-              <a:spcAft>
-                <a:spcPts val="1200"/>
-              </a:spcAft>
-              <a:defRPr sz="2000"/>
-            </a:pPr>
-            <a:r>
+          <a:p>
+            <a:pPr>
+              <a:lnSpc>
+                <a:spcPct val="90000"/>
+              </a:lnSpc>
+              <a:spcAft>
+                <a:spcPts val="300"/>
+              </a:spcAft>
+            </a:pPr>
+          </a:p>
+          <a:p>
+            <a:pPr>
+              <a:lnSpc>
+                <a:spcPct val="90000"/>
+              </a:lnSpc>
+              <a:spcAft>
+                <a:spcPts val="300"/>
+              </a:spcAft>
+              <a:defRPr sz="2000"/>
+            </a:pPr>
+            <a:r>
+              <a:rPr sz="1500"/>
               <a:t>Operating System (OS) = Bilgisayarı yöneten ana yazılım</a:t>
             </a:r>
           </a:p>
           <a:p>
             <a:pPr>
-              <a:spcAft>
-                <a:spcPts val="1200"/>
-              </a:spcAft>
-              <a:defRPr sz="2000"/>
-            </a:pPr>
-          </a:p>
-          <a:p>
-            <a:pPr>
-              <a:spcAft>
-                <a:spcPts val="1200"/>
-              </a:spcAft>
-              <a:defRPr sz="2000"/>
-            </a:pPr>
-            <a:r>
+              <a:lnSpc>
+                <a:spcPct val="90000"/>
+              </a:lnSpc>
+              <a:spcAft>
+                <a:spcPts val="300"/>
+              </a:spcAft>
+              <a:defRPr sz="2000"/>
+            </a:pPr>
+          </a:p>
+          <a:p>
+            <a:pPr>
+              <a:lnSpc>
+                <a:spcPct val="90000"/>
+              </a:lnSpc>
+              <a:spcAft>
+                <a:spcPts val="300"/>
+              </a:spcAft>
+              <a:defRPr sz="2000"/>
+            </a:pPr>
+            <a:r>
+              <a:rPr sz="1500"/>
               <a:t>✅ Temel Görevleri:</a:t>
             </a:r>
           </a:p>
           <a:p>
             <a:pPr>
-              <a:spcAft>
-                <a:spcPts val="1200"/>
-              </a:spcAft>
-              <a:defRPr sz="2000"/>
-            </a:pPr>
-            <a:r>
+              <a:lnSpc>
+                <a:spcPct val="90000"/>
+              </a:lnSpc>
+              <a:spcAft>
+                <a:spcPts val="300"/>
+              </a:spcAft>
+              <a:defRPr sz="2000"/>
+            </a:pPr>
+            <a:r>
+              <a:rPr sz="1500"/>
               <a:t>    • Donanımı yönetir</a:t>
             </a:r>
           </a:p>
           <a:p>
             <a:pPr>
-              <a:spcAft>
-                <a:spcPts val="1200"/>
-              </a:spcAft>
-              <a:defRPr sz="2000"/>
-            </a:pPr>
-            <a:r>
+              <a:lnSpc>
+                <a:spcPct val="90000"/>
+              </a:lnSpc>
+              <a:spcAft>
+                <a:spcPts val="300"/>
+              </a:spcAft>
+              <a:defRPr sz="2000"/>
+            </a:pPr>
+            <a:r>
+              <a:rPr sz="1500"/>
               <a:t>    • Programları çalıştırır</a:t>
             </a:r>
           </a:p>
           <a:p>
             <a:pPr>
-              <a:spcAft>
-                <a:spcPts val="1200"/>
-              </a:spcAft>
-              <a:defRPr sz="2000"/>
-            </a:pPr>
-            <a:r>
+              <a:lnSpc>
+                <a:spcPct val="90000"/>
+              </a:lnSpc>
+              <a:spcAft>
+                <a:spcPts val="300"/>
+              </a:spcAft>
+              <a:defRPr sz="2000"/>
+            </a:pPr>
+            <a:r>
+              <a:rPr sz="1500"/>
               <a:t>    • Dosyaları organize eder</a:t>
             </a:r>
           </a:p>
           <a:p>
             <a:pPr>
-              <a:spcAft>
-                <a:spcPts val="1200"/>
-              </a:spcAft>
-              <a:defRPr sz="2000"/>
-            </a:pPr>
-            <a:r>
+              <a:lnSpc>
+                <a:spcPct val="90000"/>
+              </a:lnSpc>
+              <a:spcAft>
+                <a:spcPts val="300"/>
+              </a:spcAft>
+              <a:defRPr sz="2000"/>
+            </a:pPr>
+            <a:r>
+              <a:rPr sz="1500"/>
               <a:t>    • Kullanıcı ile iletişim sağlar</a:t>
             </a:r>
           </a:p>
           <a:p>
             <a:pPr>
-              <a:spcAft>
-                <a:spcPts val="1200"/>
-              </a:spcAft>
-              <a:defRPr sz="2000"/>
-            </a:pPr>
-          </a:p>
-          <a:p>
-            <a:pPr>
-              <a:spcAft>
-                <a:spcPts val="1200"/>
-              </a:spcAft>
-              <a:defRPr sz="2000"/>
-            </a:pPr>
-            <a:r>
+              <a:lnSpc>
+                <a:spcPct val="90000"/>
+              </a:lnSpc>
+              <a:spcAft>
+                <a:spcPts val="300"/>
+              </a:spcAft>
+              <a:defRPr sz="2000"/>
+            </a:pPr>
+          </a:p>
+          <a:p>
+            <a:pPr>
+              <a:lnSpc>
+                <a:spcPct val="90000"/>
+              </a:lnSpc>
+              <a:spcAft>
+                <a:spcPts val="300"/>
+              </a:spcAft>
+              <a:defRPr sz="2000"/>
+            </a:pPr>
+            <a:r>
+              <a:rPr sz="1500"/>
               <a:t>💡 Önemli:</a:t>
             </a:r>
           </a:p>
           <a:p>
             <a:pPr>
-              <a:spcAft>
-                <a:spcPts val="1200"/>
-              </a:spcAft>
-              <a:defRPr sz="2000"/>
-            </a:pPr>
-            <a:r>
+              <a:lnSpc>
+                <a:spcPct val="90000"/>
+              </a:lnSpc>
+              <a:spcAft>
+                <a:spcPts val="300"/>
+              </a:spcAft>
+              <a:defRPr sz="2000"/>
+            </a:pPr>
+            <a:r>
+              <a:rPr sz="1500"/>
               <a:t>İşletim sistemi olmadan bilgisayar ÇALIŞAMAZ!</a:t>
             </a:r>
           </a:p>
           <a:p>
             <a:pPr>
-              <a:spcAft>
-                <a:spcPts val="1200"/>
-              </a:spcAft>
-              <a:defRPr sz="2000"/>
-            </a:pPr>
-          </a:p>
-          <a:p>
-            <a:pPr>
-              <a:spcAft>
-                <a:spcPts val="1200"/>
-              </a:spcAft>
-              <a:defRPr sz="2000"/>
-            </a:pPr>
-            <a:r>
+              <a:lnSpc>
+                <a:spcPct val="90000"/>
+              </a:lnSpc>
+              <a:spcAft>
+                <a:spcPts val="300"/>
+              </a:spcAft>
+              <a:defRPr sz="2000"/>
+            </a:pPr>
+          </a:p>
+          <a:p>
+            <a:pPr>
+              <a:lnSpc>
+                <a:spcPct val="90000"/>
+              </a:lnSpc>
+              <a:spcAft>
+                <a:spcPts val="300"/>
+              </a:spcAft>
+              <a:defRPr sz="2000"/>
+            </a:pPr>
+            <a:r>
+              <a:rPr sz="1500"/>
               <a:t>✅ Popüler İşletim Sistemleri:</a:t>
             </a:r>
           </a:p>
           <a:p>
             <a:pPr>
-              <a:spcAft>
-                <a:spcPts val="1200"/>
-              </a:spcAft>
-              <a:defRPr sz="2000"/>
-            </a:pPr>
-            <a:r>
+              <a:lnSpc>
+                <a:spcPct val="90000"/>
+              </a:lnSpc>
+              <a:spcAft>
+                <a:spcPts val="300"/>
+              </a:spcAft>
+              <a:defRPr sz="2000"/>
+            </a:pPr>
+            <a:r>
+              <a:rPr sz="1500"/>
               <a:t>    • Windows (En yaygın)</a:t>
             </a:r>
           </a:p>
           <a:p>
             <a:pPr>
-              <a:spcAft>
-                <a:spcPts val="1200"/>
-              </a:spcAft>
-              <a:defRPr sz="2000"/>
-            </a:pPr>
-            <a:r>
+              <a:lnSpc>
+                <a:spcPct val="90000"/>
+              </a:lnSpc>
+              <a:spcAft>
+                <a:spcPts val="300"/>
+              </a:spcAft>
+              <a:defRPr sz="2000"/>
+            </a:pPr>
+            <a:r>
+              <a:rPr sz="1500"/>
               <a:t>    • macOS (Apple bilgisayarlar)</a:t>
             </a:r>
           </a:p>
           <a:p>
             <a:pPr>
-              <a:spcAft>
-                <a:spcPts val="1200"/>
-              </a:spcAft>
-              <a:defRPr sz="2000"/>
-            </a:pPr>
-            <a:r>
+              <a:lnSpc>
+                <a:spcPct val="90000"/>
+              </a:lnSpc>
+              <a:spcAft>
+                <a:spcPts val="300"/>
+              </a:spcAft>
+              <a:defRPr sz="2000"/>
+            </a:pPr>
+            <a:r>
+              <a:rPr sz="1500"/>
               <a:t>    • Linux (Açık kaynak, ücretsiz)</a:t>
             </a:r>
           </a:p>
           <a:p>
             <a:pPr>
-              <a:spcAft>
-                <a:spcPts val="1200"/>
-              </a:spcAft>
-              <a:defRPr sz="2000"/>
-            </a:pPr>
-            <a:r>
+              <a:lnSpc>
+                <a:spcPct val="90000"/>
+              </a:lnSpc>
+              <a:spcAft>
+                <a:spcPts val="300"/>
+              </a:spcAft>
+              <a:defRPr sz="2000"/>
+            </a:pPr>
+            <a:r>
+              <a:rPr sz="1500"/>
               <a:t>    • Android/iOS (Mobil cihazlar)</a:t>
             </a:r>
           </a:p>
@@ -6711,7 +6926,7 @@
         </p:nvSpPr>
         <p:spPr/>
         <p:txBody>
-          <a:bodyPr/>
+          <a:bodyPr wrap="square"/>
           <a:lstStyle/>
           <a:p>
             <a:pPr>
@@ -6765,208 +6980,271 @@
             <a:spAutoFit/>
           </a:bodyPr>
           <a:lstStyle/>
-          <a:p/>
-          <a:p>
-            <a:pPr>
-              <a:spcAft>
-                <a:spcPts val="1200"/>
-              </a:spcAft>
-              <a:defRPr sz="2000"/>
-            </a:pPr>
-            <a:r>
-              <a:rPr sz="1600"/>
+          <a:p>
+            <a:pPr>
+              <a:lnSpc>
+                <a:spcPct val="90000"/>
+              </a:lnSpc>
+              <a:spcAft>
+                <a:spcPts val="300"/>
+              </a:spcAft>
+            </a:pPr>
+          </a:p>
+          <a:p>
+            <a:pPr>
+              <a:lnSpc>
+                <a:spcPct val="90000"/>
+              </a:lnSpc>
+              <a:spcAft>
+                <a:spcPts val="300"/>
+              </a:spcAft>
+              <a:defRPr sz="2000"/>
+            </a:pPr>
+            <a:r>
+              <a:rPr sz="1400"/>
               <a:t>Microsoft tarafından geliştirilmiş en popüler OS</a:t>
             </a:r>
           </a:p>
           <a:p>
             <a:pPr>
-              <a:spcAft>
-                <a:spcPts val="1200"/>
-              </a:spcAft>
-              <a:defRPr sz="2000"/>
-            </a:pPr>
-          </a:p>
-          <a:p>
-            <a:pPr>
-              <a:spcAft>
-                <a:spcPts val="1200"/>
-              </a:spcAft>
-              <a:defRPr sz="2000"/>
-            </a:pPr>
-            <a:r>
-              <a:rPr sz="1600"/>
+              <a:lnSpc>
+                <a:spcPct val="90000"/>
+              </a:lnSpc>
+              <a:spcAft>
+                <a:spcPts val="300"/>
+              </a:spcAft>
+              <a:defRPr sz="2000"/>
+            </a:pPr>
+          </a:p>
+          <a:p>
+            <a:pPr>
+              <a:lnSpc>
+                <a:spcPct val="90000"/>
+              </a:lnSpc>
+              <a:spcAft>
+                <a:spcPts val="300"/>
+              </a:spcAft>
+              <a:defRPr sz="2000"/>
+            </a:pPr>
+            <a:r>
+              <a:rPr sz="1400"/>
               <a:t>✅ Önemli Özellikler:</a:t>
             </a:r>
           </a:p>
           <a:p>
             <a:pPr>
-              <a:spcAft>
-                <a:spcPts val="1200"/>
-              </a:spcAft>
-              <a:defRPr sz="2000"/>
-            </a:pPr>
-            <a:r>
-              <a:rPr sz="1600"/>
+              <a:lnSpc>
+                <a:spcPct val="90000"/>
+              </a:lnSpc>
+              <a:spcAft>
+                <a:spcPts val="300"/>
+              </a:spcAft>
+              <a:defRPr sz="2000"/>
+            </a:pPr>
+            <a:r>
+              <a:rPr sz="1400"/>
               <a:t>    • Kullanıcı dostu arayüz</a:t>
             </a:r>
           </a:p>
           <a:p>
             <a:pPr>
-              <a:spcAft>
-                <a:spcPts val="1200"/>
-              </a:spcAft>
-              <a:defRPr sz="2000"/>
-            </a:pPr>
-            <a:r>
-              <a:rPr sz="1600"/>
+              <a:lnSpc>
+                <a:spcPct val="90000"/>
+              </a:lnSpc>
+              <a:spcAft>
+                <a:spcPts val="300"/>
+              </a:spcAft>
+              <a:defRPr sz="2000"/>
+            </a:pPr>
+            <a:r>
+              <a:rPr sz="1400"/>
               <a:t>    • Başlat menüsü</a:t>
             </a:r>
           </a:p>
           <a:p>
             <a:pPr>
-              <a:spcAft>
-                <a:spcPts val="1200"/>
-              </a:spcAft>
-              <a:defRPr sz="2000"/>
-            </a:pPr>
-            <a:r>
-              <a:rPr sz="1600"/>
+              <a:lnSpc>
+                <a:spcPct val="90000"/>
+              </a:lnSpc>
+              <a:spcAft>
+                <a:spcPts val="300"/>
+              </a:spcAft>
+              <a:defRPr sz="2000"/>
+            </a:pPr>
+            <a:r>
+              <a:rPr sz="1400"/>
               <a:t>    • Görev çubuğu</a:t>
             </a:r>
           </a:p>
           <a:p>
             <a:pPr>
-              <a:spcAft>
-                <a:spcPts val="1200"/>
-              </a:spcAft>
-              <a:defRPr sz="2000"/>
-            </a:pPr>
-            <a:r>
-              <a:rPr sz="1600"/>
+              <a:lnSpc>
+                <a:spcPct val="90000"/>
+              </a:lnSpc>
+              <a:spcAft>
+                <a:spcPts val="300"/>
+              </a:spcAft>
+              <a:defRPr sz="2000"/>
+            </a:pPr>
+            <a:r>
+              <a:rPr sz="1400"/>
               <a:t>    • Masaüstü (Desktop)</a:t>
             </a:r>
           </a:p>
           <a:p>
             <a:pPr>
-              <a:spcAft>
-                <a:spcPts val="1200"/>
-              </a:spcAft>
-              <a:defRPr sz="2000"/>
-            </a:pPr>
-            <a:r>
-              <a:rPr sz="1600"/>
+              <a:lnSpc>
+                <a:spcPct val="90000"/>
+              </a:lnSpc>
+              <a:spcAft>
+                <a:spcPts val="300"/>
+              </a:spcAft>
+              <a:defRPr sz="2000"/>
+            </a:pPr>
+            <a:r>
+              <a:rPr sz="1400"/>
               <a:t>    • Dosya Gezgini (File Explorer)</a:t>
             </a:r>
           </a:p>
           <a:p>
             <a:pPr>
-              <a:spcAft>
-                <a:spcPts val="1200"/>
-              </a:spcAft>
-              <a:defRPr sz="2000"/>
-            </a:pPr>
-          </a:p>
-          <a:p>
-            <a:pPr>
-              <a:spcAft>
-                <a:spcPts val="1200"/>
-              </a:spcAft>
-              <a:defRPr sz="2000"/>
-            </a:pPr>
-            <a:r>
-              <a:rPr sz="1600"/>
+              <a:lnSpc>
+                <a:spcPct val="90000"/>
+              </a:lnSpc>
+              <a:spcAft>
+                <a:spcPts val="300"/>
+              </a:spcAft>
+              <a:defRPr sz="2000"/>
+            </a:pPr>
+          </a:p>
+          <a:p>
+            <a:pPr>
+              <a:lnSpc>
+                <a:spcPct val="90000"/>
+              </a:lnSpc>
+              <a:spcAft>
+                <a:spcPts val="300"/>
+              </a:spcAft>
+              <a:defRPr sz="2000"/>
+            </a:pPr>
+            <a:r>
+              <a:rPr sz="1400"/>
               <a:t>✅ Sürümler:</a:t>
             </a:r>
           </a:p>
           <a:p>
             <a:pPr>
-              <a:spcAft>
-                <a:spcPts val="1200"/>
-              </a:spcAft>
-              <a:defRPr sz="2000"/>
-            </a:pPr>
-            <a:r>
-              <a:rPr sz="1600"/>
+              <a:lnSpc>
+                <a:spcPct val="90000"/>
+              </a:lnSpc>
+              <a:spcAft>
+                <a:spcPts val="300"/>
+              </a:spcAft>
+              <a:defRPr sz="2000"/>
+            </a:pPr>
+            <a:r>
+              <a:rPr sz="1400"/>
               <a:t>    • Windows 10</a:t>
             </a:r>
           </a:p>
           <a:p>
             <a:pPr>
-              <a:spcAft>
-                <a:spcPts val="1200"/>
-              </a:spcAft>
-              <a:defRPr sz="2000"/>
-            </a:pPr>
-            <a:r>
-              <a:rPr sz="1600"/>
+              <a:lnSpc>
+                <a:spcPct val="90000"/>
+              </a:lnSpc>
+              <a:spcAft>
+                <a:spcPts val="300"/>
+              </a:spcAft>
+              <a:defRPr sz="2000"/>
+            </a:pPr>
+            <a:r>
+              <a:rPr sz="1400"/>
               <a:t>    • Windows 11 (En yeni)</a:t>
             </a:r>
           </a:p>
           <a:p>
             <a:pPr>
-              <a:spcAft>
-                <a:spcPts val="1200"/>
-              </a:spcAft>
-              <a:defRPr sz="2000"/>
-            </a:pPr>
-          </a:p>
-          <a:p>
-            <a:pPr>
-              <a:spcAft>
-                <a:spcPts val="1200"/>
-              </a:spcAft>
-              <a:defRPr sz="2000"/>
-            </a:pPr>
-            <a:r>
-              <a:rPr sz="1600"/>
+              <a:lnSpc>
+                <a:spcPct val="90000"/>
+              </a:lnSpc>
+              <a:spcAft>
+                <a:spcPts val="300"/>
+              </a:spcAft>
+              <a:defRPr sz="2000"/>
+            </a:pPr>
+          </a:p>
+          <a:p>
+            <a:pPr>
+              <a:lnSpc>
+                <a:spcPct val="90000"/>
+              </a:lnSpc>
+              <a:spcAft>
+                <a:spcPts val="300"/>
+              </a:spcAft>
+              <a:defRPr sz="2000"/>
+            </a:pPr>
+            <a:r>
+              <a:rPr sz="1400"/>
               <a:t>✅ Temel Kısayollar:</a:t>
             </a:r>
           </a:p>
           <a:p>
             <a:pPr>
-              <a:spcAft>
-                <a:spcPts val="1200"/>
-              </a:spcAft>
-              <a:defRPr sz="2000"/>
-            </a:pPr>
-            <a:r>
-              <a:rPr sz="1600"/>
+              <a:lnSpc>
+                <a:spcPct val="90000"/>
+              </a:lnSpc>
+              <a:spcAft>
+                <a:spcPts val="300"/>
+              </a:spcAft>
+              <a:defRPr sz="2000"/>
+            </a:pPr>
+            <a:r>
+              <a:rPr sz="1400"/>
               <a:t>    • Windows tuşu - Başlat menüsü</a:t>
             </a:r>
           </a:p>
           <a:p>
             <a:pPr>
-              <a:spcAft>
-                <a:spcPts val="1200"/>
-              </a:spcAft>
-              <a:defRPr sz="2000"/>
-            </a:pPr>
-            <a:r>
-              <a:rPr sz="1600"/>
+              <a:lnSpc>
+                <a:spcPct val="90000"/>
+              </a:lnSpc>
+              <a:spcAft>
+                <a:spcPts val="300"/>
+              </a:spcAft>
+              <a:defRPr sz="2000"/>
+            </a:pPr>
+            <a:r>
+              <a:rPr sz="1400"/>
               <a:t>    • Windows + E - Dosya Gezgini</a:t>
             </a:r>
           </a:p>
           <a:p>
             <a:pPr>
-              <a:spcAft>
-                <a:spcPts val="1200"/>
-              </a:spcAft>
-              <a:defRPr sz="2000"/>
-            </a:pPr>
-            <a:r>
-              <a:rPr sz="1600"/>
+              <a:lnSpc>
+                <a:spcPct val="90000"/>
+              </a:lnSpc>
+              <a:spcAft>
+                <a:spcPts val="300"/>
+              </a:spcAft>
+              <a:defRPr sz="2000"/>
+            </a:pPr>
+            <a:r>
+              <a:rPr sz="1400"/>
               <a:t>    • Alt + Tab - Pencereler arası geçiş</a:t>
             </a:r>
           </a:p>
           <a:p>
             <a:pPr>
-              <a:spcAft>
-                <a:spcPts val="1200"/>
-              </a:spcAft>
-              <a:defRPr sz="2000"/>
-            </a:pPr>
-            <a:r>
-              <a:rPr sz="1600"/>
+              <a:lnSpc>
+                <a:spcPct val="90000"/>
+              </a:lnSpc>
+              <a:spcAft>
+                <a:spcPts val="300"/>
+              </a:spcAft>
+              <a:defRPr sz="2000"/>
+            </a:pPr>
+            <a:r>
+              <a:rPr sz="1400"/>
               <a:t>    • Ctrl + Alt + Delete - Görev yöneticisi</a:t>
             </a:r>
           </a:p>
@@ -7002,7 +7280,7 @@
         </p:nvSpPr>
         <p:spPr/>
         <p:txBody>
-          <a:bodyPr/>
+          <a:bodyPr wrap="square"/>
           <a:lstStyle/>
           <a:p>
             <a:pPr>
@@ -7056,200 +7334,260 @@
             <a:spAutoFit/>
           </a:bodyPr>
           <a:lstStyle/>
-          <a:p/>
-          <a:p>
-            <a:pPr>
-              <a:spcAft>
-                <a:spcPts val="1200"/>
-              </a:spcAft>
-              <a:defRPr sz="2000"/>
-            </a:pPr>
-            <a:r>
-              <a:rPr sz="1600"/>
+          <a:p>
+            <a:pPr>
+              <a:lnSpc>
+                <a:spcPct val="90000"/>
+              </a:lnSpc>
+              <a:spcAft>
+                <a:spcPts val="300"/>
+              </a:spcAft>
+            </a:pPr>
+          </a:p>
+          <a:p>
+            <a:pPr>
+              <a:lnSpc>
+                <a:spcPct val="90000"/>
+              </a:lnSpc>
+              <a:spcAft>
+                <a:spcPts val="300"/>
+              </a:spcAft>
+              <a:defRPr sz="2000"/>
+            </a:pPr>
+            <a:r>
+              <a:rPr sz="1400"/>
               <a:t>📄 DOSYA (File):</a:t>
             </a:r>
           </a:p>
           <a:p>
             <a:pPr>
-              <a:spcAft>
-                <a:spcPts val="1200"/>
-              </a:spcAft>
-              <a:defRPr sz="2000"/>
-            </a:pPr>
-            <a:r>
-              <a:rPr sz="1600"/>
+              <a:lnSpc>
+                <a:spcPct val="90000"/>
+              </a:lnSpc>
+              <a:spcAft>
+                <a:spcPts val="300"/>
+              </a:spcAft>
+              <a:defRPr sz="2000"/>
+            </a:pPr>
+            <a:r>
+              <a:rPr sz="1400"/>
               <a:t>    • Bilgisayarda saklanan her türlü bilgi</a:t>
             </a:r>
           </a:p>
           <a:p>
             <a:pPr>
-              <a:spcAft>
-                <a:spcPts val="1200"/>
-              </a:spcAft>
-              <a:defRPr sz="2000"/>
-            </a:pPr>
-            <a:r>
-              <a:rPr sz="1600"/>
+              <a:lnSpc>
+                <a:spcPct val="90000"/>
+              </a:lnSpc>
+              <a:spcAft>
+                <a:spcPts val="300"/>
+              </a:spcAft>
+              <a:defRPr sz="2000"/>
+            </a:pPr>
+            <a:r>
+              <a:rPr sz="1400"/>
               <a:t>    • Örnekler: Resim, video, müzik, belge</a:t>
             </a:r>
           </a:p>
           <a:p>
             <a:pPr>
-              <a:spcAft>
-                <a:spcPts val="1200"/>
-              </a:spcAft>
-              <a:defRPr sz="2000"/>
-            </a:pPr>
-          </a:p>
-          <a:p>
-            <a:pPr>
-              <a:spcAft>
-                <a:spcPts val="1200"/>
-              </a:spcAft>
-              <a:defRPr sz="2000"/>
-            </a:pPr>
-            <a:r>
-              <a:rPr sz="1600"/>
+              <a:lnSpc>
+                <a:spcPct val="90000"/>
+              </a:lnSpc>
+              <a:spcAft>
+                <a:spcPts val="300"/>
+              </a:spcAft>
+              <a:defRPr sz="2000"/>
+            </a:pPr>
+          </a:p>
+          <a:p>
+            <a:pPr>
+              <a:lnSpc>
+                <a:spcPct val="90000"/>
+              </a:lnSpc>
+              <a:spcAft>
+                <a:spcPts val="300"/>
+              </a:spcAft>
+              <a:defRPr sz="2000"/>
+            </a:pPr>
+            <a:r>
+              <a:rPr sz="1400"/>
               <a:t>📁 KLASÖR (Folder):</a:t>
             </a:r>
           </a:p>
           <a:p>
             <a:pPr>
-              <a:spcAft>
-                <a:spcPts val="1200"/>
-              </a:spcAft>
-              <a:defRPr sz="2000"/>
-            </a:pPr>
-            <a:r>
-              <a:rPr sz="1600"/>
+              <a:lnSpc>
+                <a:spcPct val="90000"/>
+              </a:lnSpc>
+              <a:spcAft>
+                <a:spcPts val="300"/>
+              </a:spcAft>
+              <a:defRPr sz="2000"/>
+            </a:pPr>
+            <a:r>
+              <a:rPr sz="1400"/>
               <a:t>    • Dosyaları düzenli tutmak için sanal çekmece</a:t>
             </a:r>
           </a:p>
           <a:p>
             <a:pPr>
-              <a:spcAft>
-                <a:spcPts val="1200"/>
-              </a:spcAft>
-              <a:defRPr sz="2000"/>
-            </a:pPr>
-            <a:r>
-              <a:rPr sz="1600"/>
+              <a:lnSpc>
+                <a:spcPct val="90000"/>
+              </a:lnSpc>
+              <a:spcAft>
+                <a:spcPts val="300"/>
+              </a:spcAft>
+              <a:defRPr sz="2000"/>
+            </a:pPr>
+            <a:r>
+              <a:rPr sz="1400"/>
               <a:t>    • İçinde dosya ve alt klasörler olabilir</a:t>
             </a:r>
           </a:p>
           <a:p>
             <a:pPr>
-              <a:spcAft>
-                <a:spcPts val="1200"/>
-              </a:spcAft>
-              <a:defRPr sz="2000"/>
-            </a:pPr>
-          </a:p>
-          <a:p>
-            <a:pPr>
-              <a:spcAft>
-                <a:spcPts val="1200"/>
-              </a:spcAft>
-              <a:defRPr sz="2000"/>
-            </a:pPr>
-            <a:r>
-              <a:rPr sz="1600"/>
+              <a:lnSpc>
+                <a:spcPct val="90000"/>
+              </a:lnSpc>
+              <a:spcAft>
+                <a:spcPts val="300"/>
+              </a:spcAft>
+              <a:defRPr sz="2000"/>
+            </a:pPr>
+          </a:p>
+          <a:p>
+            <a:pPr>
+              <a:lnSpc>
+                <a:spcPct val="90000"/>
+              </a:lnSpc>
+              <a:spcAft>
+                <a:spcPts val="300"/>
+              </a:spcAft>
+              <a:defRPr sz="2000"/>
+            </a:pPr>
+            <a:r>
+              <a:rPr sz="1400"/>
               <a:t>✅ Dosya Uzantıları:</a:t>
             </a:r>
           </a:p>
           <a:p>
             <a:pPr>
-              <a:spcAft>
-                <a:spcPts val="1200"/>
-              </a:spcAft>
-              <a:defRPr sz="2000"/>
-            </a:pPr>
-            <a:r>
-              <a:rPr sz="1600"/>
+              <a:lnSpc>
+                <a:spcPct val="90000"/>
+              </a:lnSpc>
+              <a:spcAft>
+                <a:spcPts val="300"/>
+              </a:spcAft>
+              <a:defRPr sz="2000"/>
+            </a:pPr>
+            <a:r>
+              <a:rPr sz="1400"/>
               <a:t>    • .docx - Word belgesi</a:t>
             </a:r>
           </a:p>
           <a:p>
             <a:pPr>
-              <a:spcAft>
-                <a:spcPts val="1200"/>
-              </a:spcAft>
-              <a:defRPr sz="2000"/>
-            </a:pPr>
-            <a:r>
-              <a:rPr sz="1600"/>
+              <a:lnSpc>
+                <a:spcPct val="90000"/>
+              </a:lnSpc>
+              <a:spcAft>
+                <a:spcPts val="300"/>
+              </a:spcAft>
+              <a:defRPr sz="2000"/>
+            </a:pPr>
+            <a:r>
+              <a:rPr sz="1400"/>
               <a:t>    • .xlsx - Excel tablosu</a:t>
             </a:r>
           </a:p>
           <a:p>
             <a:pPr>
-              <a:spcAft>
-                <a:spcPts val="1200"/>
-              </a:spcAft>
-              <a:defRPr sz="2000"/>
-            </a:pPr>
-            <a:r>
-              <a:rPr sz="1600"/>
+              <a:lnSpc>
+                <a:spcPct val="90000"/>
+              </a:lnSpc>
+              <a:spcAft>
+                <a:spcPts val="300"/>
+              </a:spcAft>
+              <a:defRPr sz="2000"/>
+            </a:pPr>
+            <a:r>
+              <a:rPr sz="1400"/>
               <a:t>    • .pptx - PowerPoint sunumu</a:t>
             </a:r>
           </a:p>
           <a:p>
             <a:pPr>
-              <a:spcAft>
-                <a:spcPts val="1200"/>
-              </a:spcAft>
-              <a:defRPr sz="2000"/>
-            </a:pPr>
-            <a:r>
-              <a:rPr sz="1600"/>
+              <a:lnSpc>
+                <a:spcPct val="90000"/>
+              </a:lnSpc>
+              <a:spcAft>
+                <a:spcPts val="300"/>
+              </a:spcAft>
+              <a:defRPr sz="2000"/>
+            </a:pPr>
+            <a:r>
+              <a:rPr sz="1400"/>
               <a:t>    • .jpg, .png - Resim</a:t>
             </a:r>
           </a:p>
           <a:p>
             <a:pPr>
-              <a:spcAft>
-                <a:spcPts val="1200"/>
-              </a:spcAft>
-              <a:defRPr sz="2000"/>
-            </a:pPr>
-            <a:r>
-              <a:rPr sz="1600"/>
+              <a:lnSpc>
+                <a:spcPct val="90000"/>
+              </a:lnSpc>
+              <a:spcAft>
+                <a:spcPts val="300"/>
+              </a:spcAft>
+              <a:defRPr sz="2000"/>
+            </a:pPr>
+            <a:r>
+              <a:rPr sz="1400"/>
               <a:t>    • .mp4, .avi - Video</a:t>
             </a:r>
           </a:p>
           <a:p>
             <a:pPr>
-              <a:spcAft>
-                <a:spcPts val="1200"/>
-              </a:spcAft>
-              <a:defRPr sz="2000"/>
-            </a:pPr>
-            <a:r>
-              <a:rPr sz="1600"/>
+              <a:lnSpc>
+                <a:spcPct val="90000"/>
+              </a:lnSpc>
+              <a:spcAft>
+                <a:spcPts val="300"/>
+              </a:spcAft>
+              <a:defRPr sz="2000"/>
+            </a:pPr>
+            <a:r>
+              <a:rPr sz="1400"/>
               <a:t>    • .mp3 - Müzik</a:t>
             </a:r>
           </a:p>
           <a:p>
             <a:pPr>
-              <a:spcAft>
-                <a:spcPts val="1200"/>
-              </a:spcAft>
-              <a:defRPr sz="2000"/>
-            </a:pPr>
-            <a:r>
-              <a:rPr sz="1600"/>
+              <a:lnSpc>
+                <a:spcPct val="90000"/>
+              </a:lnSpc>
+              <a:spcAft>
+                <a:spcPts val="300"/>
+              </a:spcAft>
+              <a:defRPr sz="2000"/>
+            </a:pPr>
+            <a:r>
+              <a:rPr sz="1400"/>
               <a:t>    • .pdf - PDF belgesi</a:t>
             </a:r>
           </a:p>
           <a:p>
             <a:pPr>
-              <a:spcAft>
-                <a:spcPts val="1200"/>
-              </a:spcAft>
-              <a:defRPr sz="2000"/>
-            </a:pPr>
-            <a:r>
-              <a:rPr sz="1600"/>
+              <a:lnSpc>
+                <a:spcPct val="90000"/>
+              </a:lnSpc>
+              <a:spcAft>
+                <a:spcPts val="300"/>
+              </a:spcAft>
+              <a:defRPr sz="2000"/>
+            </a:pPr>
+            <a:r>
+              <a:rPr sz="1400"/>
               <a:t>    • .exe - Program dosyası</a:t>
             </a:r>
           </a:p>
@@ -7285,7 +7623,7 @@
         </p:nvSpPr>
         <p:spPr/>
         <p:txBody>
-          <a:bodyPr/>
+          <a:bodyPr wrap="square"/>
           <a:lstStyle/>
           <a:p>
             <a:pPr>
@@ -7339,206 +7677,289 @@
             <a:spAutoFit/>
           </a:bodyPr>
           <a:lstStyle/>
-          <a:p/>
-          <a:p>
-            <a:pPr>
-              <a:spcAft>
-                <a:spcPts val="1200"/>
-              </a:spcAft>
-              <a:defRPr sz="2000"/>
-            </a:pPr>
-            <a:r>
+          <a:p>
+            <a:pPr>
+              <a:lnSpc>
+                <a:spcPct val="90000"/>
+              </a:lnSpc>
+              <a:spcAft>
+                <a:spcPts val="300"/>
+              </a:spcAft>
+            </a:pPr>
+          </a:p>
+          <a:p>
+            <a:pPr>
+              <a:lnSpc>
+                <a:spcPct val="90000"/>
+              </a:lnSpc>
+              <a:spcAft>
+                <a:spcPts val="300"/>
+              </a:spcAft>
+              <a:defRPr sz="2000"/>
+            </a:pPr>
+            <a:r>
+              <a:rPr sz="1500"/>
               <a:t>✅ Temel İşlemler:</a:t>
             </a:r>
           </a:p>
           <a:p>
             <a:pPr>
-              <a:spcAft>
-                <a:spcPts val="1200"/>
-              </a:spcAft>
-              <a:defRPr sz="2000"/>
-            </a:pPr>
-          </a:p>
-          <a:p>
-            <a:pPr>
-              <a:spcAft>
-                <a:spcPts val="1200"/>
-              </a:spcAft>
-              <a:defRPr sz="2000"/>
-            </a:pPr>
-            <a:r>
+              <a:lnSpc>
+                <a:spcPct val="90000"/>
+              </a:lnSpc>
+              <a:spcAft>
+                <a:spcPts val="300"/>
+              </a:spcAft>
+              <a:defRPr sz="2000"/>
+            </a:pPr>
+          </a:p>
+          <a:p>
+            <a:pPr>
+              <a:lnSpc>
+                <a:spcPct val="90000"/>
+              </a:lnSpc>
+              <a:spcAft>
+                <a:spcPts val="300"/>
+              </a:spcAft>
+              <a:defRPr sz="2000"/>
+            </a:pPr>
+            <a:r>
+              <a:rPr sz="1500"/>
               <a:t>📂 OLUŞTURMA:</a:t>
             </a:r>
           </a:p>
           <a:p>
             <a:pPr>
-              <a:spcAft>
-                <a:spcPts val="1200"/>
-              </a:spcAft>
-              <a:defRPr sz="2000"/>
-            </a:pPr>
-            <a:r>
+              <a:lnSpc>
+                <a:spcPct val="90000"/>
+              </a:lnSpc>
+              <a:spcAft>
+                <a:spcPts val="300"/>
+              </a:spcAft>
+              <a:defRPr sz="2000"/>
+            </a:pPr>
+            <a:r>
+              <a:rPr sz="1500"/>
               <a:t>    • Sağ tık → Yeni → Klasör/Dosya</a:t>
             </a:r>
           </a:p>
           <a:p>
             <a:pPr>
-              <a:spcAft>
-                <a:spcPts val="1200"/>
-              </a:spcAft>
-              <a:defRPr sz="2000"/>
-            </a:pPr>
-          </a:p>
-          <a:p>
-            <a:pPr>
-              <a:spcAft>
-                <a:spcPts val="1200"/>
-              </a:spcAft>
-              <a:defRPr sz="2000"/>
-            </a:pPr>
-            <a:r>
+              <a:lnSpc>
+                <a:spcPct val="90000"/>
+              </a:lnSpc>
+              <a:spcAft>
+                <a:spcPts val="300"/>
+              </a:spcAft>
+              <a:defRPr sz="2000"/>
+            </a:pPr>
+          </a:p>
+          <a:p>
+            <a:pPr>
+              <a:lnSpc>
+                <a:spcPct val="90000"/>
+              </a:lnSpc>
+              <a:spcAft>
+                <a:spcPts val="300"/>
+              </a:spcAft>
+              <a:defRPr sz="2000"/>
+            </a:pPr>
+            <a:r>
+              <a:rPr sz="1500"/>
               <a:t>✏️ YENİDEN ADLANDIRMA:</a:t>
             </a:r>
           </a:p>
           <a:p>
             <a:pPr>
-              <a:spcAft>
-                <a:spcPts val="1200"/>
-              </a:spcAft>
-              <a:defRPr sz="2000"/>
-            </a:pPr>
-            <a:r>
+              <a:lnSpc>
+                <a:spcPct val="90000"/>
+              </a:lnSpc>
+              <a:spcAft>
+                <a:spcPts val="300"/>
+              </a:spcAft>
+              <a:defRPr sz="2000"/>
+            </a:pPr>
+            <a:r>
+              <a:rPr sz="1500"/>
               <a:t>    • Sağ tık → Yeniden Adlandır (F2)</a:t>
             </a:r>
           </a:p>
           <a:p>
             <a:pPr>
-              <a:spcAft>
-                <a:spcPts val="1200"/>
-              </a:spcAft>
-              <a:defRPr sz="2000"/>
-            </a:pPr>
-          </a:p>
-          <a:p>
-            <a:pPr>
-              <a:spcAft>
-                <a:spcPts val="1200"/>
-              </a:spcAft>
-              <a:defRPr sz="2000"/>
-            </a:pPr>
-            <a:r>
+              <a:lnSpc>
+                <a:spcPct val="90000"/>
+              </a:lnSpc>
+              <a:spcAft>
+                <a:spcPts val="300"/>
+              </a:spcAft>
+              <a:defRPr sz="2000"/>
+            </a:pPr>
+          </a:p>
+          <a:p>
+            <a:pPr>
+              <a:lnSpc>
+                <a:spcPct val="90000"/>
+              </a:lnSpc>
+              <a:spcAft>
+                <a:spcPts val="300"/>
+              </a:spcAft>
+              <a:defRPr sz="2000"/>
+            </a:pPr>
+            <a:r>
+              <a:rPr sz="1500"/>
               <a:t>📋 KOPYALAMA:</a:t>
             </a:r>
           </a:p>
           <a:p>
             <a:pPr>
-              <a:spcAft>
-                <a:spcPts val="1200"/>
-              </a:spcAft>
-              <a:defRPr sz="2000"/>
-            </a:pPr>
-            <a:r>
+              <a:lnSpc>
+                <a:spcPct val="90000"/>
+              </a:lnSpc>
+              <a:spcAft>
+                <a:spcPts val="300"/>
+              </a:spcAft>
+              <a:defRPr sz="2000"/>
+            </a:pPr>
+            <a:r>
+              <a:rPr sz="1500"/>
               <a:t>    • Ctrl + C (Kopyala) → Ctrl + V (Yapıştır)</a:t>
             </a:r>
           </a:p>
           <a:p>
             <a:pPr>
-              <a:spcAft>
-                <a:spcPts val="1200"/>
-              </a:spcAft>
-              <a:defRPr sz="2000"/>
-            </a:pPr>
-          </a:p>
-          <a:p>
-            <a:pPr>
-              <a:spcAft>
-                <a:spcPts val="1200"/>
-              </a:spcAft>
-              <a:defRPr sz="2000"/>
-            </a:pPr>
-            <a:r>
+              <a:lnSpc>
+                <a:spcPct val="90000"/>
+              </a:lnSpc>
+              <a:spcAft>
+                <a:spcPts val="300"/>
+              </a:spcAft>
+              <a:defRPr sz="2000"/>
+            </a:pPr>
+          </a:p>
+          <a:p>
+            <a:pPr>
+              <a:lnSpc>
+                <a:spcPct val="90000"/>
+              </a:lnSpc>
+              <a:spcAft>
+                <a:spcPts val="300"/>
+              </a:spcAft>
+              <a:defRPr sz="2000"/>
+            </a:pPr>
+            <a:r>
+              <a:rPr sz="1500"/>
               <a:t>✂️ KESME/TAŞIMA:</a:t>
             </a:r>
           </a:p>
           <a:p>
             <a:pPr>
-              <a:spcAft>
-                <a:spcPts val="1200"/>
-              </a:spcAft>
-              <a:defRPr sz="2000"/>
-            </a:pPr>
-            <a:r>
+              <a:lnSpc>
+                <a:spcPct val="90000"/>
+              </a:lnSpc>
+              <a:spcAft>
+                <a:spcPts val="300"/>
+              </a:spcAft>
+              <a:defRPr sz="2000"/>
+            </a:pPr>
+            <a:r>
+              <a:rPr sz="1500"/>
               <a:t>    • Ctrl + X (Kes) → Ctrl + V (Yapıştır)</a:t>
             </a:r>
           </a:p>
           <a:p>
             <a:pPr>
-              <a:spcAft>
-                <a:spcPts val="1200"/>
-              </a:spcAft>
-              <a:defRPr sz="2000"/>
-            </a:pPr>
-          </a:p>
-          <a:p>
-            <a:pPr>
-              <a:spcAft>
-                <a:spcPts val="1200"/>
-              </a:spcAft>
-              <a:defRPr sz="2000"/>
-            </a:pPr>
-            <a:r>
+              <a:lnSpc>
+                <a:spcPct val="90000"/>
+              </a:lnSpc>
+              <a:spcAft>
+                <a:spcPts val="300"/>
+              </a:spcAft>
+              <a:defRPr sz="2000"/>
+            </a:pPr>
+          </a:p>
+          <a:p>
+            <a:pPr>
+              <a:lnSpc>
+                <a:spcPct val="90000"/>
+              </a:lnSpc>
+              <a:spcAft>
+                <a:spcPts val="300"/>
+              </a:spcAft>
+              <a:defRPr sz="2000"/>
+            </a:pPr>
+            <a:r>
+              <a:rPr sz="1500"/>
               <a:t>🗑️ SİLME:</a:t>
             </a:r>
           </a:p>
           <a:p>
             <a:pPr>
-              <a:spcAft>
-                <a:spcPts val="1200"/>
-              </a:spcAft>
-              <a:defRPr sz="2000"/>
-            </a:pPr>
-            <a:r>
+              <a:lnSpc>
+                <a:spcPct val="90000"/>
+              </a:lnSpc>
+              <a:spcAft>
+                <a:spcPts val="300"/>
+              </a:spcAft>
+              <a:defRPr sz="2000"/>
+            </a:pPr>
+            <a:r>
+              <a:rPr sz="1500"/>
               <a:t>    • Delete tuşu → Geri Dönüşüm Kutusu</a:t>
             </a:r>
           </a:p>
           <a:p>
             <a:pPr>
-              <a:spcAft>
-                <a:spcPts val="1200"/>
-              </a:spcAft>
-              <a:defRPr sz="2000"/>
-            </a:pPr>
-            <a:r>
+              <a:lnSpc>
+                <a:spcPct val="90000"/>
+              </a:lnSpc>
+              <a:spcAft>
+                <a:spcPts val="300"/>
+              </a:spcAft>
+              <a:defRPr sz="2000"/>
+            </a:pPr>
+            <a:r>
+              <a:rPr sz="1500"/>
               <a:t>    • Shift + Delete → Kalıcı silme!</a:t>
             </a:r>
           </a:p>
           <a:p>
             <a:pPr>
-              <a:spcAft>
-                <a:spcPts val="1200"/>
-              </a:spcAft>
-              <a:defRPr sz="2000"/>
-            </a:pPr>
-          </a:p>
-          <a:p>
-            <a:pPr>
-              <a:spcAft>
-                <a:spcPts val="1200"/>
-              </a:spcAft>
-              <a:defRPr sz="2000"/>
-            </a:pPr>
-            <a:r>
+              <a:lnSpc>
+                <a:spcPct val="90000"/>
+              </a:lnSpc>
+              <a:spcAft>
+                <a:spcPts val="300"/>
+              </a:spcAft>
+              <a:defRPr sz="2000"/>
+            </a:pPr>
+          </a:p>
+          <a:p>
+            <a:pPr>
+              <a:lnSpc>
+                <a:spcPct val="90000"/>
+              </a:lnSpc>
+              <a:spcAft>
+                <a:spcPts val="300"/>
+              </a:spcAft>
+              <a:defRPr sz="2000"/>
+            </a:pPr>
+            <a:r>
+              <a:rPr sz="1500"/>
               <a:t>🔍 ARAMA:</a:t>
             </a:r>
           </a:p>
           <a:p>
             <a:pPr>
-              <a:spcAft>
-                <a:spcPts val="1200"/>
-              </a:spcAft>
-              <a:defRPr sz="2000"/>
-            </a:pPr>
-            <a:r>
+              <a:lnSpc>
+                <a:spcPct val="90000"/>
+              </a:lnSpc>
+              <a:spcAft>
+                <a:spcPts val="300"/>
+              </a:spcAft>
+              <a:defRPr sz="2000"/>
+            </a:pPr>
+            <a:r>
+              <a:rPr sz="1500"/>
               <a:t>    • Dosya Gezgini'nde arama kutusu</a:t>
             </a:r>
           </a:p>
@@ -7574,7 +7995,7 @@
         </p:nvSpPr>
         <p:spPr/>
         <p:txBody>
-          <a:bodyPr/>
+          <a:bodyPr wrap="square"/>
           <a:lstStyle/>
           <a:p>
             <a:pPr>
@@ -7628,208 +8049,271 @@
             <a:spAutoFit/>
           </a:bodyPr>
           <a:lstStyle/>
-          <a:p/>
-          <a:p>
-            <a:pPr>
-              <a:spcAft>
-                <a:spcPts val="1200"/>
-              </a:spcAft>
-              <a:defRPr sz="2000"/>
-            </a:pPr>
-            <a:r>
-              <a:rPr sz="1600"/>
+          <a:p>
+            <a:pPr>
+              <a:lnSpc>
+                <a:spcPct val="90000"/>
+              </a:lnSpc>
+              <a:spcAft>
+                <a:spcPts val="300"/>
+              </a:spcAft>
+            </a:pPr>
+          </a:p>
+          <a:p>
+            <a:pPr>
+              <a:lnSpc>
+                <a:spcPct val="90000"/>
+              </a:lnSpc>
+              <a:spcAft>
+                <a:spcPts val="300"/>
+              </a:spcAft>
+              <a:defRPr sz="2000"/>
+            </a:pPr>
+            <a:r>
+              <a:rPr sz="1400"/>
               <a:t>✅ Anlamlı İsimler Kullanın:</a:t>
             </a:r>
           </a:p>
           <a:p>
             <a:pPr>
-              <a:spcAft>
-                <a:spcPts val="1200"/>
-              </a:spcAft>
-              <a:defRPr sz="2000"/>
-            </a:pPr>
-            <a:r>
-              <a:rPr sz="1600"/>
+              <a:lnSpc>
+                <a:spcPct val="90000"/>
+              </a:lnSpc>
+              <a:spcAft>
+                <a:spcPts val="300"/>
+              </a:spcAft>
+              <a:defRPr sz="2000"/>
+            </a:pPr>
+            <a:r>
+              <a:rPr sz="1400"/>
               <a:t>    ❌ Yanlış: Belge1.docx, 12345.jpg</a:t>
             </a:r>
           </a:p>
           <a:p>
             <a:pPr>
-              <a:spcAft>
-                <a:spcPts val="1200"/>
-              </a:spcAft>
-              <a:defRPr sz="2000"/>
-            </a:pPr>
-            <a:r>
-              <a:rPr sz="1600"/>
+              <a:lnSpc>
+                <a:spcPct val="90000"/>
+              </a:lnSpc>
+              <a:spcAft>
+                <a:spcPts val="300"/>
+              </a:spcAft>
+              <a:defRPr sz="2000"/>
+            </a:pPr>
+            <a:r>
+              <a:rPr sz="1400"/>
               <a:t>    ✅ Doğru: Matematik_Odevi.docx, Aile_Tatili_2025.jpg</a:t>
             </a:r>
           </a:p>
           <a:p>
             <a:pPr>
-              <a:spcAft>
-                <a:spcPts val="1200"/>
-              </a:spcAft>
-              <a:defRPr sz="2000"/>
-            </a:pPr>
-          </a:p>
-          <a:p>
-            <a:pPr>
-              <a:spcAft>
-                <a:spcPts val="1200"/>
-              </a:spcAft>
-              <a:defRPr sz="2000"/>
-            </a:pPr>
-            <a:r>
-              <a:rPr sz="1600"/>
+              <a:lnSpc>
+                <a:spcPct val="90000"/>
+              </a:lnSpc>
+              <a:spcAft>
+                <a:spcPts val="300"/>
+              </a:spcAft>
+              <a:defRPr sz="2000"/>
+            </a:pPr>
+          </a:p>
+          <a:p>
+            <a:pPr>
+              <a:lnSpc>
+                <a:spcPct val="90000"/>
+              </a:lnSpc>
+              <a:spcAft>
+                <a:spcPts val="300"/>
+              </a:spcAft>
+              <a:defRPr sz="2000"/>
+            </a:pPr>
+            <a:r>
+              <a:rPr sz="1400"/>
               <a:t>✅ Klasör Yapısı Oluşturun:</a:t>
             </a:r>
           </a:p>
           <a:p>
             <a:pPr>
-              <a:spcAft>
-                <a:spcPts val="1200"/>
-              </a:spcAft>
-              <a:defRPr sz="2000"/>
-            </a:pPr>
-            <a:r>
-              <a:rPr sz="1600"/>
+              <a:lnSpc>
+                <a:spcPct val="90000"/>
+              </a:lnSpc>
+              <a:spcAft>
+                <a:spcPts val="300"/>
+              </a:spcAft>
+              <a:defRPr sz="2000"/>
+            </a:pPr>
+            <a:r>
+              <a:rPr sz="1400"/>
               <a:t>    📁 Belgeler</a:t>
             </a:r>
           </a:p>
           <a:p>
             <a:pPr>
-              <a:spcAft>
-                <a:spcPts val="1200"/>
-              </a:spcAft>
-              <a:defRPr sz="2000"/>
-            </a:pPr>
-            <a:r>
-              <a:rPr sz="1600"/>
+              <a:lnSpc>
+                <a:spcPct val="90000"/>
+              </a:lnSpc>
+              <a:spcAft>
+                <a:spcPts val="300"/>
+              </a:spcAft>
+              <a:defRPr sz="2000"/>
+            </a:pPr>
+            <a:r>
+              <a:rPr sz="1400"/>
               <a:t>        📁 Okulİşleri</a:t>
             </a:r>
           </a:p>
           <a:p>
             <a:pPr>
-              <a:spcAft>
-                <a:spcPts val="1200"/>
-              </a:spcAft>
-              <a:defRPr sz="2000"/>
-            </a:pPr>
-            <a:r>
-              <a:rPr sz="1600"/>
+              <a:lnSpc>
+                <a:spcPct val="90000"/>
+              </a:lnSpc>
+              <a:spcAft>
+                <a:spcPts val="300"/>
+              </a:spcAft>
+              <a:defRPr sz="2000"/>
+            </a:pPr>
+            <a:r>
+              <a:rPr sz="1400"/>
               <a:t>            📁 Matematik</a:t>
             </a:r>
           </a:p>
           <a:p>
             <a:pPr>
-              <a:spcAft>
-                <a:spcPts val="1200"/>
-              </a:spcAft>
-              <a:defRPr sz="2000"/>
-            </a:pPr>
-            <a:r>
-              <a:rPr sz="1600"/>
+              <a:lnSpc>
+                <a:spcPct val="90000"/>
+              </a:lnSpc>
+              <a:spcAft>
+                <a:spcPts val="300"/>
+              </a:spcAft>
+              <a:defRPr sz="2000"/>
+            </a:pPr>
+            <a:r>
+              <a:rPr sz="1400"/>
               <a:t>            📁 Türkçe</a:t>
             </a:r>
           </a:p>
           <a:p>
             <a:pPr>
-              <a:spcAft>
-                <a:spcPts val="1200"/>
-              </a:spcAft>
-              <a:defRPr sz="2000"/>
-            </a:pPr>
-            <a:r>
-              <a:rPr sz="1600"/>
+              <a:lnSpc>
+                <a:spcPct val="90000"/>
+              </a:lnSpc>
+              <a:spcAft>
+                <a:spcPts val="300"/>
+              </a:spcAft>
+              <a:defRPr sz="2000"/>
+            </a:pPr>
+            <a:r>
+              <a:rPr sz="1400"/>
               <a:t>        📁 Kişisel</a:t>
             </a:r>
           </a:p>
           <a:p>
             <a:pPr>
-              <a:spcAft>
-                <a:spcPts val="1200"/>
-              </a:spcAft>
-              <a:defRPr sz="2000"/>
-            </a:pPr>
-          </a:p>
-          <a:p>
-            <a:pPr>
-              <a:spcAft>
-                <a:spcPts val="1200"/>
-              </a:spcAft>
-              <a:defRPr sz="2000"/>
-            </a:pPr>
-            <a:r>
-              <a:rPr sz="1600"/>
+              <a:lnSpc>
+                <a:spcPct val="90000"/>
+              </a:lnSpc>
+              <a:spcAft>
+                <a:spcPts val="300"/>
+              </a:spcAft>
+              <a:defRPr sz="2000"/>
+            </a:pPr>
+          </a:p>
+          <a:p>
+            <a:pPr>
+              <a:lnSpc>
+                <a:spcPct val="90000"/>
+              </a:lnSpc>
+              <a:spcAft>
+                <a:spcPts val="300"/>
+              </a:spcAft>
+              <a:defRPr sz="2000"/>
+            </a:pPr>
+            <a:r>
+              <a:rPr sz="1400"/>
               <a:t>✅ Düzenli Yedekleme:</a:t>
             </a:r>
           </a:p>
           <a:p>
             <a:pPr>
-              <a:spcAft>
-                <a:spcPts val="1200"/>
-              </a:spcAft>
-              <a:defRPr sz="2000"/>
-            </a:pPr>
-            <a:r>
-              <a:rPr sz="1600"/>
+              <a:lnSpc>
+                <a:spcPct val="90000"/>
+              </a:lnSpc>
+              <a:spcAft>
+                <a:spcPts val="300"/>
+              </a:spcAft>
+              <a:defRPr sz="2000"/>
+            </a:pPr>
+            <a:r>
+              <a:rPr sz="1400"/>
               <a:t>    • Önemli dosyaları USB veya buluta yedekleyin</a:t>
             </a:r>
           </a:p>
           <a:p>
             <a:pPr>
-              <a:spcAft>
-                <a:spcPts val="1200"/>
-              </a:spcAft>
-              <a:defRPr sz="2000"/>
-            </a:pPr>
-            <a:r>
-              <a:rPr sz="1600"/>
+              <a:lnSpc>
+                <a:spcPct val="90000"/>
+              </a:lnSpc>
+              <a:spcAft>
+                <a:spcPts val="300"/>
+              </a:spcAft>
+              <a:defRPr sz="2000"/>
+            </a:pPr>
+            <a:r>
+              <a:rPr sz="1400"/>
               <a:t>    • Haftalık yedekleme alışkanlığı</a:t>
             </a:r>
           </a:p>
           <a:p>
             <a:pPr>
-              <a:spcAft>
-                <a:spcPts val="1200"/>
-              </a:spcAft>
-              <a:defRPr sz="2000"/>
-            </a:pPr>
-          </a:p>
-          <a:p>
-            <a:pPr>
-              <a:spcAft>
-                <a:spcPts val="1200"/>
-              </a:spcAft>
-              <a:defRPr sz="2000"/>
-            </a:pPr>
-            <a:r>
-              <a:rPr sz="1600"/>
+              <a:lnSpc>
+                <a:spcPct val="90000"/>
+              </a:lnSpc>
+              <a:spcAft>
+                <a:spcPts val="300"/>
+              </a:spcAft>
+              <a:defRPr sz="2000"/>
+            </a:pPr>
+          </a:p>
+          <a:p>
+            <a:pPr>
+              <a:lnSpc>
+                <a:spcPct val="90000"/>
+              </a:lnSpc>
+              <a:spcAft>
+                <a:spcPts val="300"/>
+              </a:spcAft>
+              <a:defRPr sz="2000"/>
+            </a:pPr>
+            <a:r>
+              <a:rPr sz="1400"/>
               <a:t>✅ Gereksizleri Silin:</a:t>
             </a:r>
           </a:p>
           <a:p>
             <a:pPr>
-              <a:spcAft>
-                <a:spcPts val="1200"/>
-              </a:spcAft>
-              <a:defRPr sz="2000"/>
-            </a:pPr>
-            <a:r>
-              <a:rPr sz="1600"/>
+              <a:lnSpc>
+                <a:spcPct val="90000"/>
+              </a:lnSpc>
+              <a:spcAft>
+                <a:spcPts val="300"/>
+              </a:spcAft>
+              <a:defRPr sz="2000"/>
+            </a:pPr>
+            <a:r>
+              <a:rPr sz="1400"/>
               <a:t>    • İndirilenler klasörünü temizleyin</a:t>
             </a:r>
           </a:p>
           <a:p>
             <a:pPr>
-              <a:spcAft>
-                <a:spcPts val="1200"/>
-              </a:spcAft>
-              <a:defRPr sz="2000"/>
-            </a:pPr>
-            <a:r>
-              <a:rPr sz="1600"/>
+              <a:lnSpc>
+                <a:spcPct val="90000"/>
+              </a:lnSpc>
+              <a:spcAft>
+                <a:spcPts val="300"/>
+              </a:spcAft>
+              <a:defRPr sz="2000"/>
+            </a:pPr>
+            <a:r>
+              <a:rPr sz="1400"/>
               <a:t>    • Eski dosyaları arşivleyin</a:t>
             </a:r>
           </a:p>
@@ -7865,7 +8349,7 @@
         </p:nvSpPr>
         <p:spPr/>
         <p:txBody>
-          <a:bodyPr/>
+          <a:bodyPr wrap="square"/>
           <a:lstStyle/>
           <a:p>
             <a:pPr>
@@ -7919,188 +8403,245 @@
             <a:spAutoFit/>
           </a:bodyPr>
           <a:lstStyle/>
-          <a:p/>
-          <a:p>
-            <a:pPr>
-              <a:spcAft>
-                <a:spcPts val="1200"/>
-              </a:spcAft>
-              <a:defRPr sz="2000"/>
-            </a:pPr>
-            <a:r>
-              <a:rPr sz="1600"/>
+          <a:p>
+            <a:pPr>
+              <a:lnSpc>
+                <a:spcPct val="90000"/>
+              </a:lnSpc>
+              <a:spcAft>
+                <a:spcPts val="300"/>
+              </a:spcAft>
+            </a:pPr>
+          </a:p>
+          <a:p>
+            <a:pPr>
+              <a:lnSpc>
+                <a:spcPct val="90000"/>
+              </a:lnSpc>
+              <a:spcAft>
+                <a:spcPts val="300"/>
+              </a:spcAft>
+              <a:defRPr sz="2000"/>
+            </a:pPr>
+            <a:r>
+              <a:rPr sz="1400"/>
               <a:t>Bu ünitede öğrendiklerimiz:</a:t>
             </a:r>
           </a:p>
           <a:p>
             <a:pPr>
-              <a:spcAft>
-                <a:spcPts val="1200"/>
-              </a:spcAft>
-              <a:defRPr sz="2000"/>
-            </a:pPr>
-          </a:p>
-          <a:p>
-            <a:pPr>
-              <a:spcAft>
-                <a:spcPts val="1200"/>
-              </a:spcAft>
-              <a:defRPr sz="2000"/>
-            </a:pPr>
-            <a:r>
-              <a:rPr sz="1600"/>
+              <a:lnSpc>
+                <a:spcPct val="90000"/>
+              </a:lnSpc>
+              <a:spcAft>
+                <a:spcPts val="300"/>
+              </a:spcAft>
+              <a:defRPr sz="2000"/>
+            </a:pPr>
+          </a:p>
+          <a:p>
+            <a:pPr>
+              <a:lnSpc>
+                <a:spcPct val="90000"/>
+              </a:lnSpc>
+              <a:spcAft>
+                <a:spcPts val="300"/>
+              </a:spcAft>
+              <a:defRPr sz="2000"/>
+            </a:pPr>
+            <a:r>
+              <a:rPr sz="1400"/>
               <a:t>✅ Bilişim teknolojilerinin sınıflandırılması</a:t>
             </a:r>
           </a:p>
           <a:p>
             <a:pPr>
-              <a:spcAft>
-                <a:spcPts val="1200"/>
-              </a:spcAft>
-              <a:defRPr sz="2000"/>
-            </a:pPr>
-            <a:r>
-              <a:rPr sz="1600"/>
+              <a:lnSpc>
+                <a:spcPct val="90000"/>
+              </a:lnSpc>
+              <a:spcAft>
+                <a:spcPts val="300"/>
+              </a:spcAft>
+              <a:defRPr sz="2000"/>
+            </a:pPr>
+            <a:r>
+              <a:rPr sz="1400"/>
               <a:t>✅ Bilgisayar bileşenleri:</a:t>
             </a:r>
           </a:p>
           <a:p>
             <a:pPr>
-              <a:spcAft>
-                <a:spcPts val="1200"/>
-              </a:spcAft>
-              <a:defRPr sz="2000"/>
-            </a:pPr>
-            <a:r>
-              <a:rPr sz="1600"/>
+              <a:lnSpc>
+                <a:spcPct val="90000"/>
+              </a:lnSpc>
+              <a:spcAft>
+                <a:spcPts val="300"/>
+              </a:spcAft>
+              <a:defRPr sz="2000"/>
+            </a:pPr>
+            <a:r>
+              <a:rPr sz="1400"/>
               <a:t>    • İşlemci (CPU) - Beyin</a:t>
             </a:r>
           </a:p>
           <a:p>
             <a:pPr>
-              <a:spcAft>
-                <a:spcPts val="1200"/>
-              </a:spcAft>
-              <a:defRPr sz="2000"/>
-            </a:pPr>
-            <a:r>
-              <a:rPr sz="1600"/>
+              <a:lnSpc>
+                <a:spcPct val="90000"/>
+              </a:lnSpc>
+              <a:spcAft>
+                <a:spcPts val="300"/>
+              </a:spcAft>
+              <a:defRPr sz="2000"/>
+            </a:pPr>
+            <a:r>
+              <a:rPr sz="1400"/>
               <a:t>    • RAM - Geçici hafıza</a:t>
             </a:r>
           </a:p>
           <a:p>
             <a:pPr>
-              <a:spcAft>
-                <a:spcPts val="1200"/>
-              </a:spcAft>
-              <a:defRPr sz="2000"/>
-            </a:pPr>
-            <a:r>
-              <a:rPr sz="1600"/>
+              <a:lnSpc>
+                <a:spcPct val="90000"/>
+              </a:lnSpc>
+              <a:spcAft>
+                <a:spcPts val="300"/>
+              </a:spcAft>
+              <a:defRPr sz="2000"/>
+            </a:pPr>
+            <a:r>
+              <a:rPr sz="1400"/>
               <a:t>    • Hard Disk/SSD - Kalıcı hafıza</a:t>
             </a:r>
           </a:p>
           <a:p>
             <a:pPr>
-              <a:spcAft>
-                <a:spcPts val="1200"/>
-              </a:spcAft>
-              <a:defRPr sz="2000"/>
-            </a:pPr>
-            <a:r>
-              <a:rPr sz="1600"/>
+              <a:lnSpc>
+                <a:spcPct val="90000"/>
+              </a:lnSpc>
+              <a:spcAft>
+                <a:spcPts val="300"/>
+              </a:spcAft>
+              <a:defRPr sz="2000"/>
+            </a:pPr>
+            <a:r>
+              <a:rPr sz="1400"/>
               <a:t>    • Anakart - Bağlantı merkezi</a:t>
             </a:r>
           </a:p>
           <a:p>
             <a:pPr>
-              <a:spcAft>
-                <a:spcPts val="1200"/>
-              </a:spcAft>
-              <a:defRPr sz="2000"/>
-            </a:pPr>
-            <a:r>
-              <a:rPr sz="1600"/>
+              <a:lnSpc>
+                <a:spcPct val="90000"/>
+              </a:lnSpc>
+              <a:spcAft>
+                <a:spcPts val="300"/>
+              </a:spcAft>
+              <a:defRPr sz="2000"/>
+            </a:pPr>
+            <a:r>
+              <a:rPr sz="1400"/>
               <a:t>✅ İşletim sistemleri (Windows, Linux, macOS)</a:t>
             </a:r>
           </a:p>
           <a:p>
             <a:pPr>
-              <a:spcAft>
-                <a:spcPts val="1200"/>
-              </a:spcAft>
-              <a:defRPr sz="2000"/>
-            </a:pPr>
-            <a:r>
-              <a:rPr sz="1600"/>
+              <a:lnSpc>
+                <a:spcPct val="90000"/>
+              </a:lnSpc>
+              <a:spcAft>
+                <a:spcPts val="300"/>
+              </a:spcAft>
+              <a:defRPr sz="2000"/>
+            </a:pPr>
+            <a:r>
+              <a:rPr sz="1400"/>
               <a:t>✅ Dosya ve klasör yönetimi</a:t>
             </a:r>
           </a:p>
           <a:p>
             <a:pPr>
-              <a:spcAft>
-                <a:spcPts val="1200"/>
-              </a:spcAft>
-              <a:defRPr sz="2000"/>
-            </a:pPr>
-            <a:r>
-              <a:rPr sz="1600"/>
+              <a:lnSpc>
+                <a:spcPct val="90000"/>
+              </a:lnSpc>
+              <a:spcAft>
+                <a:spcPts val="300"/>
+              </a:spcAft>
+              <a:defRPr sz="2000"/>
+            </a:pPr>
+            <a:r>
+              <a:rPr sz="1400"/>
               <a:t>✅ Dosya uzantıları ve türleri</a:t>
             </a:r>
           </a:p>
           <a:p>
             <a:pPr>
-              <a:spcAft>
-                <a:spcPts val="1200"/>
-              </a:spcAft>
-              <a:defRPr sz="2000"/>
-            </a:pPr>
-            <a:r>
-              <a:rPr sz="1600"/>
+              <a:lnSpc>
+                <a:spcPct val="90000"/>
+              </a:lnSpc>
+              <a:spcAft>
+                <a:spcPts val="300"/>
+              </a:spcAft>
+              <a:defRPr sz="2000"/>
+            </a:pPr>
+            <a:r>
+              <a:rPr sz="1400"/>
               <a:t>✅ İyi düzenleme alışkanlıkları</a:t>
             </a:r>
           </a:p>
           <a:p>
             <a:pPr>
-              <a:spcAft>
-                <a:spcPts val="1200"/>
-              </a:spcAft>
-              <a:defRPr sz="2000"/>
-            </a:pPr>
-          </a:p>
-          <a:p>
-            <a:pPr>
-              <a:spcAft>
-                <a:spcPts val="1200"/>
-              </a:spcAft>
-              <a:defRPr sz="2000"/>
-            </a:pPr>
-            <a:r>
-              <a:rPr sz="1600"/>
+              <a:lnSpc>
+                <a:spcPct val="90000"/>
+              </a:lnSpc>
+              <a:spcAft>
+                <a:spcPts val="300"/>
+              </a:spcAft>
+              <a:defRPr sz="2000"/>
+            </a:pPr>
+          </a:p>
+          <a:p>
+            <a:pPr>
+              <a:lnSpc>
+                <a:spcPct val="90000"/>
+              </a:lnSpc>
+              <a:spcAft>
+                <a:spcPts val="300"/>
+              </a:spcAft>
+              <a:defRPr sz="2000"/>
+            </a:pPr>
+            <a:r>
+              <a:rPr sz="1400"/>
               <a:t>💡 Unutmayın:</a:t>
             </a:r>
           </a:p>
           <a:p>
             <a:pPr>
-              <a:spcAft>
-                <a:spcPts val="1200"/>
-              </a:spcAft>
-              <a:defRPr sz="2000"/>
-            </a:pPr>
-            <a:r>
-              <a:rPr sz="1600"/>
+              <a:lnSpc>
+                <a:spcPct val="90000"/>
+              </a:lnSpc>
+              <a:spcAft>
+                <a:spcPts val="300"/>
+              </a:spcAft>
+              <a:defRPr sz="2000"/>
+            </a:pPr>
+            <a:r>
+              <a:rPr sz="1400"/>
               <a:t>Teknoloji hayatımızı kolaylaştırır,</a:t>
             </a:r>
           </a:p>
           <a:p>
             <a:pPr>
-              <a:spcAft>
-                <a:spcPts val="1200"/>
-              </a:spcAft>
-              <a:defRPr sz="2000"/>
-            </a:pPr>
-            <a:r>
-              <a:rPr sz="1600"/>
+              <a:lnSpc>
+                <a:spcPct val="90000"/>
+              </a:lnSpc>
+              <a:spcAft>
+                <a:spcPts val="300"/>
+              </a:spcAft>
+              <a:defRPr sz="2000"/>
+            </a:pPr>
+            <a:r>
+              <a:rPr sz="1400"/>
               <a:t>ama sorumlu kullanılmalıdır!</a:t>
             </a:r>
           </a:p>
@@ -8136,7 +8677,7 @@
         </p:nvSpPr>
         <p:spPr/>
         <p:txBody>
-          <a:bodyPr/>
+          <a:bodyPr wrap="square"/>
           <a:lstStyle/>
           <a:p>
             <a:pPr>
@@ -8190,196 +8731,256 @@
             <a:spAutoFit/>
           </a:bodyPr>
           <a:lstStyle/>
-          <a:p/>
-          <a:p>
-            <a:pPr>
-              <a:spcAft>
-                <a:spcPts val="1200"/>
-              </a:spcAft>
-              <a:defRPr sz="2000"/>
-            </a:pPr>
-            <a:r>
-              <a:rPr sz="1600"/>
+          <a:p>
+            <a:pPr>
+              <a:lnSpc>
+                <a:spcPct val="90000"/>
+              </a:lnSpc>
+              <a:spcAft>
+                <a:spcPts val="300"/>
+              </a:spcAft>
+            </a:pPr>
+          </a:p>
+          <a:p>
+            <a:pPr>
+              <a:lnSpc>
+                <a:spcPct val="90000"/>
+              </a:lnSpc>
+              <a:spcAft>
+                <a:spcPts val="300"/>
+              </a:spcAft>
+              <a:defRPr sz="2000"/>
+            </a:pPr>
+            <a:r>
+              <a:rPr sz="1400"/>
               <a:t>📺 İzlemeniz Gereken Videolar:</a:t>
             </a:r>
           </a:p>
           <a:p>
             <a:pPr>
-              <a:spcAft>
-                <a:spcPts val="1200"/>
-              </a:spcAft>
-              <a:defRPr sz="2000"/>
-            </a:pPr>
-            <a:r>
-              <a:rPr sz="1600"/>
+              <a:lnSpc>
+                <a:spcPct val="90000"/>
+              </a:lnSpc>
+              <a:spcAft>
+                <a:spcPts val="300"/>
+              </a:spcAft>
+              <a:defRPr sz="2000"/>
+            </a:pPr>
+            <a:r>
+              <a:rPr sz="1400"/>
               <a:t>    • 'Bilgisayar Nasıl Çalışır?' (YouTube)</a:t>
             </a:r>
           </a:p>
           <a:p>
             <a:pPr>
-              <a:spcAft>
-                <a:spcPts val="1200"/>
-              </a:spcAft>
-              <a:defRPr sz="2000"/>
-            </a:pPr>
-            <a:r>
-              <a:rPr sz="1600"/>
+              <a:lnSpc>
+                <a:spcPct val="90000"/>
+              </a:lnSpc>
+              <a:spcAft>
+                <a:spcPts val="300"/>
+              </a:spcAft>
+              <a:defRPr sz="2000"/>
+            </a:pPr>
+            <a:r>
+              <a:rPr sz="1400"/>
               <a:t>    • 'CPU Animasyonu' (YouTube)</a:t>
             </a:r>
           </a:p>
           <a:p>
             <a:pPr>
-              <a:spcAft>
-                <a:spcPts val="1200"/>
-              </a:spcAft>
-              <a:defRPr sz="2000"/>
-            </a:pPr>
-            <a:r>
-              <a:rPr sz="1600"/>
+              <a:lnSpc>
+                <a:spcPct val="90000"/>
+              </a:lnSpc>
+              <a:spcAft>
+                <a:spcPts val="300"/>
+              </a:spcAft>
+              <a:defRPr sz="2000"/>
+            </a:pPr>
+            <a:r>
+              <a:rPr sz="1400"/>
               <a:t>    • 'HDD vs SSD Karşılaştırması' (YouTube)</a:t>
             </a:r>
           </a:p>
           <a:p>
             <a:pPr>
-              <a:spcAft>
-                <a:spcPts val="1200"/>
-              </a:spcAft>
-              <a:defRPr sz="2000"/>
-            </a:pPr>
-            <a:r>
-              <a:rPr sz="1600"/>
+              <a:lnSpc>
+                <a:spcPct val="90000"/>
+              </a:lnSpc>
+              <a:spcAft>
+                <a:spcPts val="300"/>
+              </a:spcAft>
+              <a:defRPr sz="2000"/>
+            </a:pPr>
+            <a:r>
+              <a:rPr sz="1400"/>
               <a:t>    • 'İşletim Sistemleri Nedir?' (YouTube)</a:t>
             </a:r>
           </a:p>
           <a:p>
             <a:pPr>
-              <a:spcAft>
-                <a:spcPts val="1200"/>
-              </a:spcAft>
-              <a:defRPr sz="2000"/>
-            </a:pPr>
-          </a:p>
-          <a:p>
-            <a:pPr>
-              <a:spcAft>
-                <a:spcPts val="1200"/>
-              </a:spcAft>
-              <a:defRPr sz="2000"/>
-            </a:pPr>
-            <a:r>
-              <a:rPr sz="1600"/>
+              <a:lnSpc>
+                <a:spcPct val="90000"/>
+              </a:lnSpc>
+              <a:spcAft>
+                <a:spcPts val="300"/>
+              </a:spcAft>
+              <a:defRPr sz="2000"/>
+            </a:pPr>
+          </a:p>
+          <a:p>
+            <a:pPr>
+              <a:lnSpc>
+                <a:spcPct val="90000"/>
+              </a:lnSpc>
+              <a:spcAft>
+                <a:spcPts val="300"/>
+              </a:spcAft>
+              <a:defRPr sz="2000"/>
+            </a:pPr>
+            <a:r>
+              <a:rPr sz="1400"/>
               <a:t>🌐 Faydalı Web Siteleri:</a:t>
             </a:r>
           </a:p>
           <a:p>
             <a:pPr>
-              <a:spcAft>
-                <a:spcPts val="1200"/>
-              </a:spcAft>
-              <a:defRPr sz="2000"/>
-            </a:pPr>
-            <a:r>
-              <a:rPr sz="1600"/>
+              <a:lnSpc>
+                <a:spcPct val="90000"/>
+              </a:lnSpc>
+              <a:spcAft>
+                <a:spcPts val="300"/>
+              </a:spcAft>
+              <a:defRPr sz="2000"/>
+            </a:pPr>
+            <a:r>
+              <a:rPr sz="1400"/>
               <a:t>    • code.org - Programlama öğren</a:t>
             </a:r>
           </a:p>
           <a:p>
             <a:pPr>
-              <a:spcAft>
-                <a:spcPts val="1200"/>
-              </a:spcAft>
-              <a:defRPr sz="2000"/>
-            </a:pPr>
-            <a:r>
-              <a:rPr sz="1600"/>
+              <a:lnSpc>
+                <a:spcPct val="90000"/>
+              </a:lnSpc>
+              <a:spcAft>
+                <a:spcPts val="300"/>
+              </a:spcAft>
+              <a:defRPr sz="2000"/>
+            </a:pPr>
+            <a:r>
+              <a:rPr sz="1400"/>
               <a:t>    • scratch.mit.edu - Blok programlama</a:t>
             </a:r>
           </a:p>
           <a:p>
             <a:pPr>
-              <a:spcAft>
-                <a:spcPts val="1200"/>
-              </a:spcAft>
-              <a:defRPr sz="2000"/>
-            </a:pPr>
-            <a:r>
-              <a:rPr sz="1600"/>
+              <a:lnSpc>
+                <a:spcPct val="90000"/>
+              </a:lnSpc>
+              <a:spcAft>
+                <a:spcPts val="300"/>
+              </a:spcAft>
+              <a:defRPr sz="2000"/>
+            </a:pPr>
+            <a:r>
+              <a:rPr sz="1400"/>
               <a:t>    • khanacademy.org/tr - Ücretsiz eğitim</a:t>
             </a:r>
           </a:p>
           <a:p>
             <a:pPr>
-              <a:spcAft>
-                <a:spcPts val="1200"/>
-              </a:spcAft>
-              <a:defRPr sz="2000"/>
-            </a:pPr>
-          </a:p>
-          <a:p>
-            <a:pPr>
-              <a:spcAft>
-                <a:spcPts val="1200"/>
-              </a:spcAft>
-              <a:defRPr sz="2000"/>
-            </a:pPr>
-            <a:r>
-              <a:rPr sz="1600"/>
+              <a:lnSpc>
+                <a:spcPct val="90000"/>
+              </a:lnSpc>
+              <a:spcAft>
+                <a:spcPts val="300"/>
+              </a:spcAft>
+              <a:defRPr sz="2000"/>
+            </a:pPr>
+          </a:p>
+          <a:p>
+            <a:pPr>
+              <a:lnSpc>
+                <a:spcPct val="90000"/>
+              </a:lnSpc>
+              <a:spcAft>
+                <a:spcPts val="300"/>
+              </a:spcAft>
+              <a:defRPr sz="2000"/>
+            </a:pPr>
+            <a:r>
+              <a:rPr sz="1400"/>
               <a:t>📚 Okuma Kaynakları:</a:t>
             </a:r>
           </a:p>
           <a:p>
             <a:pPr>
-              <a:spcAft>
-                <a:spcPts val="1200"/>
-              </a:spcAft>
-              <a:defRPr sz="2000"/>
-            </a:pPr>
-            <a:r>
-              <a:rPr sz="1600"/>
+              <a:lnSpc>
+                <a:spcPct val="90000"/>
+              </a:lnSpc>
+              <a:spcAft>
+                <a:spcPts val="300"/>
+              </a:spcAft>
+              <a:defRPr sz="2000"/>
+            </a:pPr>
+            <a:r>
+              <a:rPr sz="1400"/>
               <a:t>    • MEB Ders Kitabı</a:t>
             </a:r>
           </a:p>
           <a:p>
             <a:pPr>
-              <a:spcAft>
-                <a:spcPts val="1200"/>
-              </a:spcAft>
-              <a:defRPr sz="2000"/>
-            </a:pPr>
-            <a:r>
-              <a:rPr sz="1600"/>
+              <a:lnSpc>
+                <a:spcPct val="90000"/>
+              </a:lnSpc>
+              <a:spcAft>
+                <a:spcPts val="300"/>
+              </a:spcAft>
+              <a:defRPr sz="2000"/>
+            </a:pPr>
+            <a:r>
+              <a:rPr sz="1400"/>
               <a:t>    • EBA (Eğitim Bilişim Ağı)</a:t>
             </a:r>
           </a:p>
           <a:p>
             <a:pPr>
-              <a:spcAft>
-                <a:spcPts val="1200"/>
-              </a:spcAft>
-              <a:defRPr sz="2000"/>
-            </a:pPr>
-          </a:p>
-          <a:p>
-            <a:pPr>
-              <a:spcAft>
-                <a:spcPts val="1200"/>
-              </a:spcAft>
-              <a:defRPr sz="2000"/>
-            </a:pPr>
-            <a:r>
-              <a:rPr sz="1600"/>
+              <a:lnSpc>
+                <a:spcPct val="90000"/>
+              </a:lnSpc>
+              <a:spcAft>
+                <a:spcPts val="300"/>
+              </a:spcAft>
+              <a:defRPr sz="2000"/>
+            </a:pPr>
+          </a:p>
+          <a:p>
+            <a:pPr>
+              <a:lnSpc>
+                <a:spcPct val="90000"/>
+              </a:lnSpc>
+              <a:spcAft>
+                <a:spcPts val="300"/>
+              </a:spcAft>
+              <a:defRPr sz="2000"/>
+            </a:pPr>
+            <a:r>
+              <a:rPr sz="1400"/>
               <a:t>❓ Sorularınız için:</a:t>
             </a:r>
           </a:p>
           <a:p>
             <a:pPr>
-              <a:spcAft>
-                <a:spcPts val="1200"/>
-              </a:spcAft>
-              <a:defRPr sz="2000"/>
-            </a:pPr>
-            <a:r>
-              <a:rPr sz="1600"/>
+              <a:lnSpc>
+                <a:spcPct val="90000"/>
+              </a:lnSpc>
+              <a:spcAft>
+                <a:spcPts val="300"/>
+              </a:spcAft>
+              <a:defRPr sz="2000"/>
+            </a:pPr>
+            <a:r>
+              <a:rPr sz="1400"/>
               <a:t>    • Öğretmeninizle iletişime geçin!</a:t>
             </a:r>
           </a:p>
@@ -8428,7 +9029,7 @@
           <a:noFill/>
         </p:spPr>
         <p:txBody>
-          <a:bodyPr wrap="none">
+          <a:bodyPr wrap="square">
             <a:spAutoFit/>
           </a:bodyPr>
           <a:lstStyle/>
@@ -8463,7 +9064,7 @@
           <a:noFill/>
         </p:spPr>
         <p:txBody>
-          <a:bodyPr wrap="none">
+          <a:bodyPr wrap="square">
             <a:spAutoFit/>
           </a:bodyPr>
           <a:lstStyle/>
@@ -8511,7 +9112,7 @@
         </p:nvSpPr>
         <p:spPr/>
         <p:txBody>
-          <a:bodyPr/>
+          <a:bodyPr wrap="square"/>
           <a:lstStyle/>
           <a:p>
             <a:pPr>
@@ -8565,172 +9166,226 @@
             <a:spAutoFit/>
           </a:bodyPr>
           <a:lstStyle/>
-          <a:p/>
-          <a:p>
-            <a:pPr>
-              <a:spcAft>
-                <a:spcPts val="1200"/>
-              </a:spcAft>
-              <a:defRPr sz="2000"/>
-            </a:pPr>
-            <a:r>
-              <a:rPr sz="1600"/>
+          <a:p>
+            <a:pPr>
+              <a:lnSpc>
+                <a:spcPct val="90000"/>
+              </a:lnSpc>
+              <a:spcAft>
+                <a:spcPts val="300"/>
+              </a:spcAft>
+            </a:pPr>
+          </a:p>
+          <a:p>
+            <a:pPr>
+              <a:lnSpc>
+                <a:spcPct val="90000"/>
+              </a:lnSpc>
+              <a:spcAft>
+                <a:spcPts val="300"/>
+              </a:spcAft>
+              <a:defRPr sz="2000"/>
+            </a:pPr>
+            <a:r>
+              <a:rPr sz="1400"/>
               <a:t>🖥️ 1. Bilişim Teknolojilerinin Hayatımızdaki Yeri</a:t>
             </a:r>
           </a:p>
           <a:p>
             <a:pPr>
-              <a:spcAft>
-                <a:spcPts val="1200"/>
-              </a:spcAft>
-              <a:defRPr sz="2000"/>
-            </a:pPr>
-            <a:r>
-              <a:rPr sz="1600"/>
+              <a:lnSpc>
+                <a:spcPct val="90000"/>
+              </a:lnSpc>
+              <a:spcAft>
+                <a:spcPts val="300"/>
+              </a:spcAft>
+              <a:defRPr sz="2000"/>
+            </a:pPr>
+            <a:r>
+              <a:rPr sz="1400"/>
               <a:t>    • Bilişim Teknolojilerinin Sınıflandırılması</a:t>
             </a:r>
           </a:p>
           <a:p>
             <a:pPr>
-              <a:spcAft>
-                <a:spcPts val="1200"/>
-              </a:spcAft>
-              <a:defRPr sz="2000"/>
-            </a:pPr>
-            <a:r>
-              <a:rPr sz="1600"/>
+              <a:lnSpc>
+                <a:spcPct val="90000"/>
+              </a:lnSpc>
+              <a:spcAft>
+                <a:spcPts val="300"/>
+              </a:spcAft>
+              <a:defRPr sz="2000"/>
+            </a:pPr>
+            <a:r>
+              <a:rPr sz="1400"/>
               <a:t>    • Etkileri ve Dijital Sağlık</a:t>
             </a:r>
           </a:p>
           <a:p>
             <a:pPr>
-              <a:spcAft>
-                <a:spcPts val="1200"/>
-              </a:spcAft>
-              <a:defRPr sz="2000"/>
-            </a:pPr>
-          </a:p>
-          <a:p>
-            <a:pPr>
-              <a:spcAft>
-                <a:spcPts val="1200"/>
-              </a:spcAft>
-              <a:defRPr sz="2000"/>
-            </a:pPr>
-            <a:r>
-              <a:rPr sz="1600"/>
+              <a:lnSpc>
+                <a:spcPct val="90000"/>
+              </a:lnSpc>
+              <a:spcAft>
+                <a:spcPts val="300"/>
+              </a:spcAft>
+              <a:defRPr sz="2000"/>
+            </a:pPr>
+          </a:p>
+          <a:p>
+            <a:pPr>
+              <a:lnSpc>
+                <a:spcPct val="90000"/>
+              </a:lnSpc>
+              <a:spcAft>
+                <a:spcPts val="300"/>
+              </a:spcAft>
+              <a:defRPr sz="2000"/>
+            </a:pPr>
+            <a:r>
+              <a:rPr sz="1400"/>
               <a:t>💻 2. Bilgisayar Sistemleri</a:t>
             </a:r>
           </a:p>
           <a:p>
             <a:pPr>
-              <a:spcAft>
-                <a:spcPts val="1200"/>
-              </a:spcAft>
-              <a:defRPr sz="2000"/>
-            </a:pPr>
-            <a:r>
-              <a:rPr sz="1600"/>
+              <a:lnSpc>
+                <a:spcPct val="90000"/>
+              </a:lnSpc>
+              <a:spcAft>
+                <a:spcPts val="300"/>
+              </a:spcAft>
+              <a:defRPr sz="2000"/>
+            </a:pPr>
+            <a:r>
+              <a:rPr sz="1400"/>
               <a:t>    • Donanım Bileşenleri (CPU, RAM, Hard Disk, Anakart)</a:t>
             </a:r>
           </a:p>
           <a:p>
             <a:pPr>
-              <a:spcAft>
-                <a:spcPts val="1200"/>
-              </a:spcAft>
-              <a:defRPr sz="2000"/>
-            </a:pPr>
-            <a:r>
-              <a:rPr sz="1600"/>
+              <a:lnSpc>
+                <a:spcPct val="90000"/>
+              </a:lnSpc>
+              <a:spcAft>
+                <a:spcPts val="300"/>
+              </a:spcAft>
+              <a:defRPr sz="2000"/>
+            </a:pPr>
+            <a:r>
+              <a:rPr sz="1400"/>
               <a:t>    • Giriş ve Çıkış Birimleri</a:t>
             </a:r>
           </a:p>
           <a:p>
             <a:pPr>
-              <a:spcAft>
-                <a:spcPts val="1200"/>
-              </a:spcAft>
-              <a:defRPr sz="2000"/>
-            </a:pPr>
-          </a:p>
-          <a:p>
-            <a:pPr>
-              <a:spcAft>
-                <a:spcPts val="1200"/>
-              </a:spcAft>
-              <a:defRPr sz="2000"/>
-            </a:pPr>
-            <a:r>
-              <a:rPr sz="1600"/>
+              <a:lnSpc>
+                <a:spcPct val="90000"/>
+              </a:lnSpc>
+              <a:spcAft>
+                <a:spcPts val="300"/>
+              </a:spcAft>
+              <a:defRPr sz="2000"/>
+            </a:pPr>
+          </a:p>
+          <a:p>
+            <a:pPr>
+              <a:lnSpc>
+                <a:spcPct val="90000"/>
+              </a:lnSpc>
+              <a:spcAft>
+                <a:spcPts val="300"/>
+              </a:spcAft>
+              <a:defRPr sz="2000"/>
+            </a:pPr>
+            <a:r>
+              <a:rPr sz="1400"/>
               <a:t>⚙️ 3. İşletim Sistemleri</a:t>
             </a:r>
           </a:p>
           <a:p>
             <a:pPr>
-              <a:spcAft>
-                <a:spcPts val="1200"/>
-              </a:spcAft>
-              <a:defRPr sz="2000"/>
-            </a:pPr>
-            <a:r>
-              <a:rPr sz="1600"/>
+              <a:lnSpc>
+                <a:spcPct val="90000"/>
+              </a:lnSpc>
+              <a:spcAft>
+                <a:spcPts val="300"/>
+              </a:spcAft>
+              <a:defRPr sz="2000"/>
+            </a:pPr>
+            <a:r>
+              <a:rPr sz="1400"/>
               <a:t>    • Windows, Linux, macOS</a:t>
             </a:r>
           </a:p>
           <a:p>
             <a:pPr>
-              <a:spcAft>
-                <a:spcPts val="1200"/>
-              </a:spcAft>
-              <a:defRPr sz="2000"/>
-            </a:pPr>
-            <a:r>
-              <a:rPr sz="1600"/>
+              <a:lnSpc>
+                <a:spcPct val="90000"/>
+              </a:lnSpc>
+              <a:spcAft>
+                <a:spcPts val="300"/>
+              </a:spcAft>
+              <a:defRPr sz="2000"/>
+            </a:pPr>
+            <a:r>
+              <a:rPr sz="1400"/>
               <a:t>    • Temel Görevler ve Kullanım</a:t>
             </a:r>
           </a:p>
           <a:p>
             <a:pPr>
-              <a:spcAft>
-                <a:spcPts val="1200"/>
-              </a:spcAft>
-              <a:defRPr sz="2000"/>
-            </a:pPr>
-          </a:p>
-          <a:p>
-            <a:pPr>
-              <a:spcAft>
-                <a:spcPts val="1200"/>
-              </a:spcAft>
-              <a:defRPr sz="2000"/>
-            </a:pPr>
-            <a:r>
-              <a:rPr sz="1600"/>
+              <a:lnSpc>
+                <a:spcPct val="90000"/>
+              </a:lnSpc>
+              <a:spcAft>
+                <a:spcPts val="300"/>
+              </a:spcAft>
+              <a:defRPr sz="2000"/>
+            </a:pPr>
+          </a:p>
+          <a:p>
+            <a:pPr>
+              <a:lnSpc>
+                <a:spcPct val="90000"/>
+              </a:lnSpc>
+              <a:spcAft>
+                <a:spcPts val="300"/>
+              </a:spcAft>
+              <a:defRPr sz="2000"/>
+            </a:pPr>
+            <a:r>
+              <a:rPr sz="1400"/>
               <a:t>📁 4. Dosya ve Klasör Yönetimi</a:t>
             </a:r>
           </a:p>
           <a:p>
             <a:pPr>
-              <a:spcAft>
-                <a:spcPts val="1200"/>
-              </a:spcAft>
-              <a:defRPr sz="2000"/>
-            </a:pPr>
-            <a:r>
-              <a:rPr sz="1600"/>
+              <a:lnSpc>
+                <a:spcPct val="90000"/>
+              </a:lnSpc>
+              <a:spcAft>
+                <a:spcPts val="300"/>
+              </a:spcAft>
+              <a:defRPr sz="2000"/>
+            </a:pPr>
+            <a:r>
+              <a:rPr sz="1400"/>
               <a:t>    • Dosya Uzantıları</a:t>
             </a:r>
           </a:p>
           <a:p>
             <a:pPr>
-              <a:spcAft>
-                <a:spcPts val="1200"/>
-              </a:spcAft>
-              <a:defRPr sz="2000"/>
-            </a:pPr>
-            <a:r>
-              <a:rPr sz="1600"/>
+              <a:lnSpc>
+                <a:spcPct val="90000"/>
+              </a:lnSpc>
+              <a:spcAft>
+                <a:spcPts val="300"/>
+              </a:spcAft>
+              <a:defRPr sz="2000"/>
+            </a:pPr>
+            <a:r>
+              <a:rPr sz="1400"/>
               <a:t>    • Düzenleme ve Yönetim İşlemleri</a:t>
             </a:r>
           </a:p>
@@ -8766,7 +9421,7 @@
         </p:nvSpPr>
         <p:spPr/>
         <p:txBody>
-          <a:bodyPr/>
+          <a:bodyPr wrap="square"/>
           <a:lstStyle/>
           <a:p>
             <a:pPr>
@@ -8820,11 +9475,23 @@
             <a:spAutoFit/>
           </a:bodyPr>
           <a:lstStyle/>
-          <a:p/>
-          <a:p>
-            <a:pPr>
-              <a:spcAft>
-                <a:spcPts val="1200"/>
+          <a:p>
+            <a:pPr>
+              <a:lnSpc>
+                <a:spcPct val="90000"/>
+              </a:lnSpc>
+              <a:spcAft>
+                <a:spcPts val="300"/>
+              </a:spcAft>
+            </a:pPr>
+          </a:p>
+          <a:p>
+            <a:pPr>
+              <a:lnSpc>
+                <a:spcPct val="90000"/>
+              </a:lnSpc>
+              <a:spcAft>
+                <a:spcPts val="300"/>
               </a:spcAft>
               <a:defRPr sz="2000"/>
             </a:pPr>
@@ -8834,8 +9501,11 @@
           </a:p>
           <a:p>
             <a:pPr>
-              <a:spcAft>
-                <a:spcPts val="1200"/>
+              <a:lnSpc>
+                <a:spcPct val="90000"/>
+              </a:lnSpc>
+              <a:spcAft>
+                <a:spcPts val="300"/>
               </a:spcAft>
               <a:defRPr sz="2000"/>
             </a:pPr>
@@ -8845,16 +9515,22 @@
           </a:p>
           <a:p>
             <a:pPr>
-              <a:spcAft>
-                <a:spcPts val="1200"/>
-              </a:spcAft>
-              <a:defRPr sz="2000"/>
-            </a:pPr>
-          </a:p>
-          <a:p>
-            <a:pPr>
-              <a:spcAft>
-                <a:spcPts val="1200"/>
+              <a:lnSpc>
+                <a:spcPct val="90000"/>
+              </a:lnSpc>
+              <a:spcAft>
+                <a:spcPts val="300"/>
+              </a:spcAft>
+              <a:defRPr sz="2000"/>
+            </a:pPr>
+          </a:p>
+          <a:p>
+            <a:pPr>
+              <a:lnSpc>
+                <a:spcPct val="90000"/>
+              </a:lnSpc>
+              <a:spcAft>
+                <a:spcPts val="300"/>
               </a:spcAft>
               <a:defRPr sz="2000"/>
             </a:pPr>
@@ -8864,8 +9540,11 @@
           </a:p>
           <a:p>
             <a:pPr>
-              <a:spcAft>
-                <a:spcPts val="1200"/>
+              <a:lnSpc>
+                <a:spcPct val="90000"/>
+              </a:lnSpc>
+              <a:spcAft>
+                <a:spcPts val="300"/>
               </a:spcAft>
               <a:defRPr sz="2000"/>
             </a:pPr>
@@ -8875,8 +9554,11 @@
           </a:p>
           <a:p>
             <a:pPr>
-              <a:spcAft>
-                <a:spcPts val="1200"/>
+              <a:lnSpc>
+                <a:spcPct val="90000"/>
+              </a:lnSpc>
+              <a:spcAft>
+                <a:spcPts val="300"/>
               </a:spcAft>
               <a:defRPr sz="2000"/>
             </a:pPr>
@@ -8886,8 +9568,11 @@
           </a:p>
           <a:p>
             <a:pPr>
-              <a:spcAft>
-                <a:spcPts val="1200"/>
+              <a:lnSpc>
+                <a:spcPct val="90000"/>
+              </a:lnSpc>
+              <a:spcAft>
+                <a:spcPts val="300"/>
               </a:spcAft>
               <a:defRPr sz="2000"/>
             </a:pPr>
@@ -8897,8 +9582,11 @@
           </a:p>
           <a:p>
             <a:pPr>
-              <a:spcAft>
-                <a:spcPts val="1200"/>
+              <a:lnSpc>
+                <a:spcPct val="90000"/>
+              </a:lnSpc>
+              <a:spcAft>
+                <a:spcPts val="300"/>
               </a:spcAft>
               <a:defRPr sz="2000"/>
             </a:pPr>
@@ -8908,16 +9596,22 @@
           </a:p>
           <a:p>
             <a:pPr>
-              <a:spcAft>
-                <a:spcPts val="1200"/>
-              </a:spcAft>
-              <a:defRPr sz="2000"/>
-            </a:pPr>
-          </a:p>
-          <a:p>
-            <a:pPr>
-              <a:spcAft>
-                <a:spcPts val="1200"/>
+              <a:lnSpc>
+                <a:spcPct val="90000"/>
+              </a:lnSpc>
+              <a:spcAft>
+                <a:spcPts val="300"/>
+              </a:spcAft>
+              <a:defRPr sz="2000"/>
+            </a:pPr>
+          </a:p>
+          <a:p>
+            <a:pPr>
+              <a:lnSpc>
+                <a:spcPct val="90000"/>
+              </a:lnSpc>
+              <a:spcAft>
+                <a:spcPts val="300"/>
               </a:spcAft>
               <a:defRPr sz="2000"/>
             </a:pPr>
@@ -8927,8 +9621,11 @@
           </a:p>
           <a:p>
             <a:pPr>
-              <a:spcAft>
-                <a:spcPts val="1200"/>
+              <a:lnSpc>
+                <a:spcPct val="90000"/>
+              </a:lnSpc>
+              <a:spcAft>
+                <a:spcPts val="300"/>
               </a:spcAft>
               <a:defRPr sz="2000"/>
             </a:pPr>
@@ -8938,8 +9635,11 @@
           </a:p>
           <a:p>
             <a:pPr>
-              <a:spcAft>
-                <a:spcPts val="1200"/>
+              <a:lnSpc>
+                <a:spcPct val="90000"/>
+              </a:lnSpc>
+              <a:spcAft>
+                <a:spcPts val="300"/>
               </a:spcAft>
               <a:defRPr sz="2000"/>
             </a:pPr>
@@ -8949,8 +9649,11 @@
           </a:p>
           <a:p>
             <a:pPr>
-              <a:spcAft>
-                <a:spcPts val="1200"/>
+              <a:lnSpc>
+                <a:spcPct val="90000"/>
+              </a:lnSpc>
+              <a:spcAft>
+                <a:spcPts val="300"/>
               </a:spcAft>
               <a:defRPr sz="2000"/>
             </a:pPr>
@@ -8960,8 +9663,11 @@
           </a:p>
           <a:p>
             <a:pPr>
-              <a:spcAft>
-                <a:spcPts val="1200"/>
+              <a:lnSpc>
+                <a:spcPct val="90000"/>
+              </a:lnSpc>
+              <a:spcAft>
+                <a:spcPts val="300"/>
               </a:spcAft>
               <a:defRPr sz="2000"/>
             </a:pPr>
@@ -8971,8 +9677,11 @@
           </a:p>
           <a:p>
             <a:pPr>
-              <a:spcAft>
-                <a:spcPts val="1200"/>
+              <a:lnSpc>
+                <a:spcPct val="90000"/>
+              </a:lnSpc>
+              <a:spcAft>
+                <a:spcPts val="300"/>
               </a:spcAft>
               <a:defRPr sz="2000"/>
             </a:pPr>
@@ -9012,7 +9721,7 @@
         </p:nvSpPr>
         <p:spPr/>
         <p:txBody>
-          <a:bodyPr/>
+          <a:bodyPr wrap="square"/>
           <a:lstStyle/>
           <a:p>
             <a:pPr>
@@ -9066,182 +9775,256 @@
             <a:spAutoFit/>
           </a:bodyPr>
           <a:lstStyle/>
-          <a:p/>
-          <a:p>
-            <a:pPr>
-              <a:spcAft>
-                <a:spcPts val="1200"/>
-              </a:spcAft>
-              <a:defRPr sz="2000"/>
-            </a:pPr>
-            <a:r>
+          <a:p>
+            <a:pPr>
+              <a:lnSpc>
+                <a:spcPct val="90000"/>
+              </a:lnSpc>
+              <a:spcAft>
+                <a:spcPts val="300"/>
+              </a:spcAft>
+            </a:pPr>
+          </a:p>
+          <a:p>
+            <a:pPr>
+              <a:lnSpc>
+                <a:spcPct val="90000"/>
+              </a:lnSpc>
+              <a:spcAft>
+                <a:spcPts val="300"/>
+              </a:spcAft>
+              <a:defRPr sz="2000"/>
+            </a:pPr>
+            <a:r>
+              <a:rPr sz="1500"/>
               <a:t>1️⃣ Donanım Teknolojileri</a:t>
             </a:r>
           </a:p>
           <a:p>
             <a:pPr>
-              <a:spcAft>
-                <a:spcPts val="1200"/>
-              </a:spcAft>
-              <a:defRPr sz="2000"/>
-            </a:pPr>
-            <a:r>
+              <a:lnSpc>
+                <a:spcPct val="90000"/>
+              </a:lnSpc>
+              <a:spcAft>
+                <a:spcPts val="300"/>
+              </a:spcAft>
+              <a:defRPr sz="2000"/>
+            </a:pPr>
+            <a:r>
+              <a:rPr sz="1500"/>
               <a:t>    • Bilgisayarlar, tabletler, akıllı telefonlar</a:t>
             </a:r>
           </a:p>
           <a:p>
             <a:pPr>
-              <a:spcAft>
-                <a:spcPts val="1200"/>
-              </a:spcAft>
-              <a:defRPr sz="2000"/>
-            </a:pPr>
-            <a:r>
+              <a:lnSpc>
+                <a:spcPct val="90000"/>
+              </a:lnSpc>
+              <a:spcAft>
+                <a:spcPts val="300"/>
+              </a:spcAft>
+              <a:defRPr sz="2000"/>
+            </a:pPr>
+            <a:r>
+              <a:rPr sz="1500"/>
               <a:t>    • Sunucular, ağ cihazları</a:t>
             </a:r>
           </a:p>
           <a:p>
             <a:pPr>
-              <a:spcAft>
-                <a:spcPts val="1200"/>
-              </a:spcAft>
-              <a:defRPr sz="2000"/>
-            </a:pPr>
-          </a:p>
-          <a:p>
-            <a:pPr>
-              <a:spcAft>
-                <a:spcPts val="1200"/>
-              </a:spcAft>
-              <a:defRPr sz="2000"/>
-            </a:pPr>
-            <a:r>
+              <a:lnSpc>
+                <a:spcPct val="90000"/>
+              </a:lnSpc>
+              <a:spcAft>
+                <a:spcPts val="300"/>
+              </a:spcAft>
+              <a:defRPr sz="2000"/>
+            </a:pPr>
+          </a:p>
+          <a:p>
+            <a:pPr>
+              <a:lnSpc>
+                <a:spcPct val="90000"/>
+              </a:lnSpc>
+              <a:spcAft>
+                <a:spcPts val="300"/>
+              </a:spcAft>
+              <a:defRPr sz="2000"/>
+            </a:pPr>
+            <a:r>
+              <a:rPr sz="1500"/>
               <a:t>2️⃣ Yazılım Teknolojileri</a:t>
             </a:r>
           </a:p>
           <a:p>
             <a:pPr>
-              <a:spcAft>
-                <a:spcPts val="1200"/>
-              </a:spcAft>
-              <a:defRPr sz="2000"/>
-            </a:pPr>
-            <a:r>
+              <a:lnSpc>
+                <a:spcPct val="90000"/>
+              </a:lnSpc>
+              <a:spcAft>
+                <a:spcPts val="300"/>
+              </a:spcAft>
+              <a:defRPr sz="2000"/>
+            </a:pPr>
+            <a:r>
+              <a:rPr sz="1500"/>
               <a:t>    • İşletim sistemleri</a:t>
             </a:r>
           </a:p>
           <a:p>
             <a:pPr>
-              <a:spcAft>
-                <a:spcPts val="1200"/>
-              </a:spcAft>
-              <a:defRPr sz="2000"/>
-            </a:pPr>
-            <a:r>
+              <a:lnSpc>
+                <a:spcPct val="90000"/>
+              </a:lnSpc>
+              <a:spcAft>
+                <a:spcPts val="300"/>
+              </a:spcAft>
+              <a:defRPr sz="2000"/>
+            </a:pPr>
+            <a:r>
+              <a:rPr sz="1500"/>
               <a:t>    • Uygulama programları</a:t>
             </a:r>
           </a:p>
           <a:p>
             <a:pPr>
-              <a:spcAft>
-                <a:spcPts val="1200"/>
-              </a:spcAft>
-              <a:defRPr sz="2000"/>
-            </a:pPr>
-            <a:r>
+              <a:lnSpc>
+                <a:spcPct val="90000"/>
+              </a:lnSpc>
+              <a:spcAft>
+                <a:spcPts val="300"/>
+              </a:spcAft>
+              <a:defRPr sz="2000"/>
+            </a:pPr>
+            <a:r>
+              <a:rPr sz="1500"/>
               <a:t>    • Web tarayıcıları</a:t>
             </a:r>
           </a:p>
           <a:p>
             <a:pPr>
-              <a:spcAft>
-                <a:spcPts val="1200"/>
-              </a:spcAft>
-              <a:defRPr sz="2000"/>
-            </a:pPr>
-          </a:p>
-          <a:p>
-            <a:pPr>
-              <a:spcAft>
-                <a:spcPts val="1200"/>
-              </a:spcAft>
-              <a:defRPr sz="2000"/>
-            </a:pPr>
-            <a:r>
+              <a:lnSpc>
+                <a:spcPct val="90000"/>
+              </a:lnSpc>
+              <a:spcAft>
+                <a:spcPts val="300"/>
+              </a:spcAft>
+              <a:defRPr sz="2000"/>
+            </a:pPr>
+          </a:p>
+          <a:p>
+            <a:pPr>
+              <a:lnSpc>
+                <a:spcPct val="90000"/>
+              </a:lnSpc>
+              <a:spcAft>
+                <a:spcPts val="300"/>
+              </a:spcAft>
+              <a:defRPr sz="2000"/>
+            </a:pPr>
+            <a:r>
+              <a:rPr sz="1500"/>
               <a:t>3️⃣ İletişim Teknolojileri</a:t>
             </a:r>
           </a:p>
           <a:p>
             <a:pPr>
-              <a:spcAft>
-                <a:spcPts val="1200"/>
-              </a:spcAft>
-              <a:defRPr sz="2000"/>
-            </a:pPr>
-            <a:r>
+              <a:lnSpc>
+                <a:spcPct val="90000"/>
+              </a:lnSpc>
+              <a:spcAft>
+                <a:spcPts val="300"/>
+              </a:spcAft>
+              <a:defRPr sz="2000"/>
+            </a:pPr>
+            <a:r>
+              <a:rPr sz="1500"/>
               <a:t>    • İnternet</a:t>
             </a:r>
           </a:p>
           <a:p>
             <a:pPr>
-              <a:spcAft>
-                <a:spcPts val="1200"/>
-              </a:spcAft>
-              <a:defRPr sz="2000"/>
-            </a:pPr>
-            <a:r>
+              <a:lnSpc>
+                <a:spcPct val="90000"/>
+              </a:lnSpc>
+              <a:spcAft>
+                <a:spcPts val="300"/>
+              </a:spcAft>
+              <a:defRPr sz="2000"/>
+            </a:pPr>
+            <a:r>
+              <a:rPr sz="1500"/>
               <a:t>    • E-posta</a:t>
             </a:r>
           </a:p>
           <a:p>
             <a:pPr>
-              <a:spcAft>
-                <a:spcPts val="1200"/>
-              </a:spcAft>
-              <a:defRPr sz="2000"/>
-            </a:pPr>
-            <a:r>
+              <a:lnSpc>
+                <a:spcPct val="90000"/>
+              </a:lnSpc>
+              <a:spcAft>
+                <a:spcPts val="300"/>
+              </a:spcAft>
+              <a:defRPr sz="2000"/>
+            </a:pPr>
+            <a:r>
+              <a:rPr sz="1500"/>
               <a:t>    • Video konferans</a:t>
             </a:r>
           </a:p>
           <a:p>
             <a:pPr>
-              <a:spcAft>
-                <a:spcPts val="1200"/>
-              </a:spcAft>
-              <a:defRPr sz="2000"/>
-            </a:pPr>
-          </a:p>
-          <a:p>
-            <a:pPr>
-              <a:spcAft>
-                <a:spcPts val="1200"/>
-              </a:spcAft>
-              <a:defRPr sz="2000"/>
-            </a:pPr>
-            <a:r>
+              <a:lnSpc>
+                <a:spcPct val="90000"/>
+              </a:lnSpc>
+              <a:spcAft>
+                <a:spcPts val="300"/>
+              </a:spcAft>
+              <a:defRPr sz="2000"/>
+            </a:pPr>
+          </a:p>
+          <a:p>
+            <a:pPr>
+              <a:lnSpc>
+                <a:spcPct val="90000"/>
+              </a:lnSpc>
+              <a:spcAft>
+                <a:spcPts val="300"/>
+              </a:spcAft>
+              <a:defRPr sz="2000"/>
+            </a:pPr>
+            <a:r>
+              <a:rPr sz="1500"/>
               <a:t>4️⃣ Veri Yönetimi</a:t>
             </a:r>
           </a:p>
           <a:p>
             <a:pPr>
-              <a:spcAft>
-                <a:spcPts val="1200"/>
-              </a:spcAft>
-              <a:defRPr sz="2000"/>
-            </a:pPr>
-            <a:r>
+              <a:lnSpc>
+                <a:spcPct val="90000"/>
+              </a:lnSpc>
+              <a:spcAft>
+                <a:spcPts val="300"/>
+              </a:spcAft>
+              <a:defRPr sz="2000"/>
+            </a:pPr>
+            <a:r>
+              <a:rPr sz="1500"/>
               <a:t>    • Veritabanları</a:t>
             </a:r>
           </a:p>
           <a:p>
             <a:pPr>
-              <a:spcAft>
-                <a:spcPts val="1200"/>
-              </a:spcAft>
-              <a:defRPr sz="2000"/>
-            </a:pPr>
-            <a:r>
+              <a:lnSpc>
+                <a:spcPct val="90000"/>
+              </a:lnSpc>
+              <a:spcAft>
+                <a:spcPts val="300"/>
+              </a:spcAft>
+              <a:defRPr sz="2000"/>
+            </a:pPr>
+            <a:r>
+              <a:rPr sz="1500"/>
               <a:t>    • Bulut depolama</a:t>
             </a:r>
           </a:p>
@@ -9277,7 +10060,7 @@
         </p:nvSpPr>
         <p:spPr/>
         <p:txBody>
-          <a:bodyPr/>
+          <a:bodyPr wrap="square"/>
           <a:lstStyle/>
           <a:p>
             <a:pPr>
@@ -9331,174 +10114,245 @@
             <a:spAutoFit/>
           </a:bodyPr>
           <a:lstStyle/>
-          <a:p/>
-          <a:p>
-            <a:pPr>
-              <a:spcAft>
-                <a:spcPts val="1200"/>
-              </a:spcAft>
-              <a:defRPr sz="2000"/>
-            </a:pPr>
-            <a:r>
+          <a:p>
+            <a:pPr>
+              <a:lnSpc>
+                <a:spcPct val="90000"/>
+              </a:lnSpc>
+              <a:spcAft>
+                <a:spcPts val="300"/>
+              </a:spcAft>
+            </a:pPr>
+          </a:p>
+          <a:p>
+            <a:pPr>
+              <a:lnSpc>
+                <a:spcPct val="90000"/>
+              </a:lnSpc>
+              <a:spcAft>
+                <a:spcPts val="300"/>
+              </a:spcAft>
+              <a:defRPr sz="2000"/>
+            </a:pPr>
+            <a:r>
+              <a:rPr sz="1500"/>
               <a:t>✅ Olumlu Etkiler:</a:t>
             </a:r>
           </a:p>
           <a:p>
             <a:pPr>
-              <a:spcAft>
-                <a:spcPts val="1200"/>
-              </a:spcAft>
-              <a:defRPr sz="2000"/>
-            </a:pPr>
-            <a:r>
+              <a:lnSpc>
+                <a:spcPct val="90000"/>
+              </a:lnSpc>
+              <a:spcAft>
+                <a:spcPts val="300"/>
+              </a:spcAft>
+              <a:defRPr sz="2000"/>
+            </a:pPr>
+            <a:r>
+              <a:rPr sz="1500"/>
               <a:t>    • Hızlı bilgiye erişim</a:t>
             </a:r>
           </a:p>
           <a:p>
             <a:pPr>
-              <a:spcAft>
-                <a:spcPts val="1200"/>
-              </a:spcAft>
-              <a:defRPr sz="2000"/>
-            </a:pPr>
-            <a:r>
+              <a:lnSpc>
+                <a:spcPct val="90000"/>
+              </a:lnSpc>
+              <a:spcAft>
+                <a:spcPts val="300"/>
+              </a:spcAft>
+              <a:defRPr sz="2000"/>
+            </a:pPr>
+            <a:r>
+              <a:rPr sz="1500"/>
               <a:t>    • Uzaktan çalışma/eğitim imkanı</a:t>
             </a:r>
           </a:p>
           <a:p>
             <a:pPr>
-              <a:spcAft>
-                <a:spcPts val="1200"/>
-              </a:spcAft>
-              <a:defRPr sz="2000"/>
-            </a:pPr>
-            <a:r>
+              <a:lnSpc>
+                <a:spcPct val="90000"/>
+              </a:lnSpc>
+              <a:spcAft>
+                <a:spcPts val="300"/>
+              </a:spcAft>
+              <a:defRPr sz="2000"/>
+            </a:pPr>
+            <a:r>
+              <a:rPr sz="1500"/>
               <a:t>    • Sosyal bağlantılar</a:t>
             </a:r>
           </a:p>
           <a:p>
             <a:pPr>
-              <a:spcAft>
-                <a:spcPts val="1200"/>
-              </a:spcAft>
-              <a:defRPr sz="2000"/>
-            </a:pPr>
-            <a:r>
+              <a:lnSpc>
+                <a:spcPct val="90000"/>
+              </a:lnSpc>
+              <a:spcAft>
+                <a:spcPts val="300"/>
+              </a:spcAft>
+              <a:defRPr sz="2000"/>
+            </a:pPr>
+            <a:r>
+              <a:rPr sz="1500"/>
               <a:t>    • Eğlence ve hobi</a:t>
             </a:r>
           </a:p>
           <a:p>
             <a:pPr>
-              <a:spcAft>
-                <a:spcPts val="1200"/>
-              </a:spcAft>
-              <a:defRPr sz="2000"/>
-            </a:pPr>
-          </a:p>
-          <a:p>
-            <a:pPr>
-              <a:spcAft>
-                <a:spcPts val="1200"/>
-              </a:spcAft>
-              <a:defRPr sz="2000"/>
-            </a:pPr>
-            <a:r>
+              <a:lnSpc>
+                <a:spcPct val="90000"/>
+              </a:lnSpc>
+              <a:spcAft>
+                <a:spcPts val="300"/>
+              </a:spcAft>
+              <a:defRPr sz="2000"/>
+            </a:pPr>
+          </a:p>
+          <a:p>
+            <a:pPr>
+              <a:lnSpc>
+                <a:spcPct val="90000"/>
+              </a:lnSpc>
+              <a:spcAft>
+                <a:spcPts val="300"/>
+              </a:spcAft>
+              <a:defRPr sz="2000"/>
+            </a:pPr>
+            <a:r>
+              <a:rPr sz="1500"/>
               <a:t>⚠️ Olumsuz Etkiler:</a:t>
             </a:r>
           </a:p>
           <a:p>
             <a:pPr>
-              <a:spcAft>
-                <a:spcPts val="1200"/>
-              </a:spcAft>
-              <a:defRPr sz="2000"/>
-            </a:pPr>
-            <a:r>
+              <a:lnSpc>
+                <a:spcPct val="90000"/>
+              </a:lnSpc>
+              <a:spcAft>
+                <a:spcPts val="300"/>
+              </a:spcAft>
+              <a:defRPr sz="2000"/>
+            </a:pPr>
+            <a:r>
+              <a:rPr sz="1500"/>
               <a:t>    • Ekran bağımlılığı</a:t>
             </a:r>
           </a:p>
           <a:p>
             <a:pPr>
-              <a:spcAft>
-                <a:spcPts val="1200"/>
-              </a:spcAft>
-              <a:defRPr sz="2000"/>
-            </a:pPr>
-            <a:r>
+              <a:lnSpc>
+                <a:spcPct val="90000"/>
+              </a:lnSpc>
+              <a:spcAft>
+                <a:spcPts val="300"/>
+              </a:spcAft>
+              <a:defRPr sz="2000"/>
+            </a:pPr>
+            <a:r>
+              <a:rPr sz="1500"/>
               <a:t>    • Göz ve sırt problemleri</a:t>
             </a:r>
           </a:p>
           <a:p>
             <a:pPr>
-              <a:spcAft>
-                <a:spcPts val="1200"/>
-              </a:spcAft>
-              <a:defRPr sz="2000"/>
-            </a:pPr>
-            <a:r>
+              <a:lnSpc>
+                <a:spcPct val="90000"/>
+              </a:lnSpc>
+              <a:spcAft>
+                <a:spcPts val="300"/>
+              </a:spcAft>
+              <a:defRPr sz="2000"/>
+            </a:pPr>
+            <a:r>
+              <a:rPr sz="1500"/>
               <a:t>    • Siber zorbalık riski</a:t>
             </a:r>
           </a:p>
           <a:p>
             <a:pPr>
-              <a:spcAft>
-                <a:spcPts val="1200"/>
-              </a:spcAft>
-              <a:defRPr sz="2000"/>
-            </a:pPr>
-            <a:r>
+              <a:lnSpc>
+                <a:spcPct val="90000"/>
+              </a:lnSpc>
+              <a:spcAft>
+                <a:spcPts val="300"/>
+              </a:spcAft>
+              <a:defRPr sz="2000"/>
+            </a:pPr>
+            <a:r>
+              <a:rPr sz="1500"/>
               <a:t>    • Gizlilik endişeleri</a:t>
             </a:r>
           </a:p>
           <a:p>
             <a:pPr>
-              <a:spcAft>
-                <a:spcPts val="1200"/>
-              </a:spcAft>
-              <a:defRPr sz="2000"/>
-            </a:pPr>
-          </a:p>
-          <a:p>
-            <a:pPr>
-              <a:spcAft>
-                <a:spcPts val="1200"/>
-              </a:spcAft>
-              <a:defRPr sz="2000"/>
-            </a:pPr>
-            <a:r>
+              <a:lnSpc>
+                <a:spcPct val="90000"/>
+              </a:lnSpc>
+              <a:spcAft>
+                <a:spcPts val="300"/>
+              </a:spcAft>
+              <a:defRPr sz="2000"/>
+            </a:pPr>
+          </a:p>
+          <a:p>
+            <a:pPr>
+              <a:lnSpc>
+                <a:spcPct val="90000"/>
+              </a:lnSpc>
+              <a:spcAft>
+                <a:spcPts val="300"/>
+              </a:spcAft>
+              <a:defRPr sz="2000"/>
+            </a:pPr>
+            <a:r>
+              <a:rPr sz="1500"/>
               <a:t>💡 Dijital Sağlık:</a:t>
             </a:r>
           </a:p>
           <a:p>
             <a:pPr>
-              <a:spcAft>
-                <a:spcPts val="1200"/>
-              </a:spcAft>
-              <a:defRPr sz="2000"/>
-            </a:pPr>
-            <a:r>
+              <a:lnSpc>
+                <a:spcPct val="90000"/>
+              </a:lnSpc>
+              <a:spcAft>
+                <a:spcPts val="300"/>
+              </a:spcAft>
+              <a:defRPr sz="2000"/>
+            </a:pPr>
+            <a:r>
+              <a:rPr sz="1500"/>
               <a:t>    • 20-20-20 kuralı (20 dk çalış, 20 sn ara, 20 feet uzak)</a:t>
             </a:r>
           </a:p>
           <a:p>
             <a:pPr>
-              <a:spcAft>
-                <a:spcPts val="1200"/>
-              </a:spcAft>
-              <a:defRPr sz="2000"/>
-            </a:pPr>
-            <a:r>
+              <a:lnSpc>
+                <a:spcPct val="90000"/>
+              </a:lnSpc>
+              <a:spcAft>
+                <a:spcPts val="300"/>
+              </a:spcAft>
+              <a:defRPr sz="2000"/>
+            </a:pPr>
+            <a:r>
+              <a:rPr sz="1500"/>
               <a:t>    • Doğru oturuş pozisyonu</a:t>
             </a:r>
           </a:p>
           <a:p>
             <a:pPr>
-              <a:spcAft>
-                <a:spcPts val="1200"/>
-              </a:spcAft>
-              <a:defRPr sz="2000"/>
-            </a:pPr>
-            <a:r>
+              <a:lnSpc>
+                <a:spcPct val="90000"/>
+              </a:lnSpc>
+              <a:spcAft>
+                <a:spcPts val="300"/>
+              </a:spcAft>
+              <a:defRPr sz="2000"/>
+            </a:pPr>
+            <a:r>
+              <a:rPr sz="1500"/>
               <a:t>    • Düzenli molalar</a:t>
             </a:r>
           </a:p>
@@ -9534,7 +10388,7 @@
         </p:nvSpPr>
         <p:spPr/>
         <p:txBody>
-          <a:bodyPr/>
+          <a:bodyPr wrap="square"/>
           <a:lstStyle/>
           <a:p>
             <a:pPr>
@@ -9588,138 +10442,196 @@
             <a:spAutoFit/>
           </a:bodyPr>
           <a:lstStyle/>
-          <a:p/>
-          <a:p>
-            <a:pPr>
-              <a:spcAft>
-                <a:spcPts val="1200"/>
-              </a:spcAft>
-              <a:defRPr sz="2000"/>
-            </a:pPr>
-            <a:r>
+          <a:p>
+            <a:pPr>
+              <a:lnSpc>
+                <a:spcPct val="90000"/>
+              </a:lnSpc>
+              <a:spcAft>
+                <a:spcPts val="300"/>
+              </a:spcAft>
+            </a:pPr>
+          </a:p>
+          <a:p>
+            <a:pPr>
+              <a:lnSpc>
+                <a:spcPct val="90000"/>
+              </a:lnSpc>
+              <a:spcAft>
+                <a:spcPts val="300"/>
+              </a:spcAft>
+              <a:defRPr sz="2000"/>
+            </a:pPr>
+            <a:r>
+              <a:rPr sz="1500"/>
               <a:t>Bir bilgisayar 2 ana bölümden oluşur:</a:t>
             </a:r>
           </a:p>
           <a:p>
             <a:pPr>
-              <a:spcAft>
-                <a:spcPts val="1200"/>
-              </a:spcAft>
-              <a:defRPr sz="2000"/>
-            </a:pPr>
-          </a:p>
-          <a:p>
-            <a:pPr>
-              <a:spcAft>
-                <a:spcPts val="1200"/>
-              </a:spcAft>
-              <a:defRPr sz="2000"/>
-            </a:pPr>
-            <a:r>
+              <a:lnSpc>
+                <a:spcPct val="90000"/>
+              </a:lnSpc>
+              <a:spcAft>
+                <a:spcPts val="300"/>
+              </a:spcAft>
+              <a:defRPr sz="2000"/>
+            </a:pPr>
+          </a:p>
+          <a:p>
+            <a:pPr>
+              <a:lnSpc>
+                <a:spcPct val="90000"/>
+              </a:lnSpc>
+              <a:spcAft>
+                <a:spcPts val="300"/>
+              </a:spcAft>
+              <a:defRPr sz="2000"/>
+            </a:pPr>
+            <a:r>
+              <a:rPr sz="1500"/>
               <a:t>1️⃣ DONANIM (Hardware)</a:t>
             </a:r>
           </a:p>
           <a:p>
             <a:pPr>
-              <a:spcAft>
-                <a:spcPts val="1200"/>
-              </a:spcAft>
-              <a:defRPr sz="2000"/>
-            </a:pPr>
-            <a:r>
+              <a:lnSpc>
+                <a:spcPct val="90000"/>
+              </a:lnSpc>
+              <a:spcAft>
+                <a:spcPts val="300"/>
+              </a:spcAft>
+              <a:defRPr sz="2000"/>
+            </a:pPr>
+            <a:r>
+              <a:rPr sz="1500"/>
               <a:t>    • Elle tutulabilen, fiziksel parçalar</a:t>
             </a:r>
           </a:p>
           <a:p>
             <a:pPr>
-              <a:spcAft>
-                <a:spcPts val="1200"/>
-              </a:spcAft>
-              <a:defRPr sz="2000"/>
-            </a:pPr>
-            <a:r>
+              <a:lnSpc>
+                <a:spcPct val="90000"/>
+              </a:lnSpc>
+              <a:spcAft>
+                <a:spcPts val="300"/>
+              </a:spcAft>
+              <a:defRPr sz="2000"/>
+            </a:pPr>
+            <a:r>
+              <a:rPr sz="1500"/>
               <a:t>    • Örnek: Klavye, mouse, ekran, kasa içi</a:t>
             </a:r>
           </a:p>
           <a:p>
             <a:pPr>
-              <a:spcAft>
-                <a:spcPts val="1200"/>
-              </a:spcAft>
-              <a:defRPr sz="2000"/>
-            </a:pPr>
-          </a:p>
-          <a:p>
-            <a:pPr>
-              <a:spcAft>
-                <a:spcPts val="1200"/>
-              </a:spcAft>
-              <a:defRPr sz="2000"/>
-            </a:pPr>
-            <a:r>
+              <a:lnSpc>
+                <a:spcPct val="90000"/>
+              </a:lnSpc>
+              <a:spcAft>
+                <a:spcPts val="300"/>
+              </a:spcAft>
+              <a:defRPr sz="2000"/>
+            </a:pPr>
+          </a:p>
+          <a:p>
+            <a:pPr>
+              <a:lnSpc>
+                <a:spcPct val="90000"/>
+              </a:lnSpc>
+              <a:spcAft>
+                <a:spcPts val="300"/>
+              </a:spcAft>
+              <a:defRPr sz="2000"/>
+            </a:pPr>
+            <a:r>
+              <a:rPr sz="1500"/>
               <a:t>2️⃣ YAZILIM (Software)</a:t>
             </a:r>
           </a:p>
           <a:p>
             <a:pPr>
-              <a:spcAft>
-                <a:spcPts val="1200"/>
-              </a:spcAft>
-              <a:defRPr sz="2000"/>
-            </a:pPr>
-            <a:r>
+              <a:lnSpc>
+                <a:spcPct val="90000"/>
+              </a:lnSpc>
+              <a:spcAft>
+                <a:spcPts val="300"/>
+              </a:spcAft>
+              <a:defRPr sz="2000"/>
+            </a:pPr>
+            <a:r>
+              <a:rPr sz="1500"/>
               <a:t>    • Programlar ve uygulamalar</a:t>
             </a:r>
           </a:p>
           <a:p>
             <a:pPr>
-              <a:spcAft>
-                <a:spcPts val="1200"/>
-              </a:spcAft>
-              <a:defRPr sz="2000"/>
-            </a:pPr>
-            <a:r>
+              <a:lnSpc>
+                <a:spcPct val="90000"/>
+              </a:lnSpc>
+              <a:spcAft>
+                <a:spcPts val="300"/>
+              </a:spcAft>
+              <a:defRPr sz="2000"/>
+            </a:pPr>
+            <a:r>
+              <a:rPr sz="1500"/>
               <a:t>    • Örnek: Windows, Word, oyunlar</a:t>
             </a:r>
           </a:p>
           <a:p>
             <a:pPr>
-              <a:spcAft>
-                <a:spcPts val="1200"/>
-              </a:spcAft>
-              <a:defRPr sz="2000"/>
-            </a:pPr>
-          </a:p>
-          <a:p>
-            <a:pPr>
-              <a:spcAft>
-                <a:spcPts val="1200"/>
-              </a:spcAft>
-              <a:defRPr sz="2000"/>
-            </a:pPr>
-            <a:r>
+              <a:lnSpc>
+                <a:spcPct val="90000"/>
+              </a:lnSpc>
+              <a:spcAft>
+                <a:spcPts val="300"/>
+              </a:spcAft>
+              <a:defRPr sz="2000"/>
+            </a:pPr>
+          </a:p>
+          <a:p>
+            <a:pPr>
+              <a:lnSpc>
+                <a:spcPct val="90000"/>
+              </a:lnSpc>
+              <a:spcAft>
+                <a:spcPts val="300"/>
+              </a:spcAft>
+              <a:defRPr sz="2000"/>
+            </a:pPr>
+            <a:r>
+              <a:rPr sz="1500"/>
               <a:t>💡 Önemli:</a:t>
             </a:r>
           </a:p>
           <a:p>
             <a:pPr>
-              <a:spcAft>
-                <a:spcPts val="1200"/>
-              </a:spcAft>
-              <a:defRPr sz="2000"/>
-            </a:pPr>
-            <a:r>
+              <a:lnSpc>
+                <a:spcPct val="90000"/>
+              </a:lnSpc>
+              <a:spcAft>
+                <a:spcPts val="300"/>
+              </a:spcAft>
+              <a:defRPr sz="2000"/>
+            </a:pPr>
+            <a:r>
+              <a:rPr sz="1500"/>
               <a:t>Donanım ve yazılım birlikte çalışarak</a:t>
             </a:r>
           </a:p>
           <a:p>
             <a:pPr>
-              <a:spcAft>
-                <a:spcPts val="1200"/>
-              </a:spcAft>
-              <a:defRPr sz="2000"/>
-            </a:pPr>
-            <a:r>
+              <a:lnSpc>
+                <a:spcPct val="90000"/>
+              </a:lnSpc>
+              <a:spcAft>
+                <a:spcPts val="300"/>
+              </a:spcAft>
+              <a:defRPr sz="2000"/>
+            </a:pPr>
+            <a:r>
+              <a:rPr sz="1500"/>
               <a:t>bilgisayarın görevlerini yerine getirir!</a:t>
             </a:r>
           </a:p>
@@ -9755,7 +10667,7 @@
         </p:nvSpPr>
         <p:spPr/>
         <p:txBody>
-          <a:bodyPr/>
+          <a:bodyPr wrap="square"/>
           <a:lstStyle/>
           <a:p>
             <a:pPr>
@@ -9809,192 +10721,252 @@
             <a:spAutoFit/>
           </a:bodyPr>
           <a:lstStyle/>
-          <a:p/>
-          <a:p>
-            <a:pPr>
-              <a:spcAft>
-                <a:spcPts val="1200"/>
-              </a:spcAft>
-              <a:defRPr sz="2000"/>
-            </a:pPr>
-            <a:r>
-              <a:rPr sz="1600"/>
+          <a:p>
+            <a:pPr>
+              <a:lnSpc>
+                <a:spcPct val="90000"/>
+              </a:lnSpc>
+              <a:spcAft>
+                <a:spcPts val="300"/>
+              </a:spcAft>
+            </a:pPr>
+          </a:p>
+          <a:p>
+            <a:pPr>
+              <a:lnSpc>
+                <a:spcPct val="90000"/>
+              </a:lnSpc>
+              <a:spcAft>
+                <a:spcPts val="300"/>
+              </a:spcAft>
+              <a:defRPr sz="2000"/>
+            </a:pPr>
+            <a:r>
+              <a:rPr sz="1400"/>
               <a:t>CPU = Central Processing Unit (Merkezi İşlem Birimi)</a:t>
             </a:r>
           </a:p>
           <a:p>
             <a:pPr>
-              <a:spcAft>
-                <a:spcPts val="1200"/>
-              </a:spcAft>
-              <a:defRPr sz="2000"/>
-            </a:pPr>
-          </a:p>
-          <a:p>
-            <a:pPr>
-              <a:spcAft>
-                <a:spcPts val="1200"/>
-              </a:spcAft>
-              <a:defRPr sz="2000"/>
-            </a:pPr>
-            <a:r>
-              <a:rPr sz="1600"/>
+              <a:lnSpc>
+                <a:spcPct val="90000"/>
+              </a:lnSpc>
+              <a:spcAft>
+                <a:spcPts val="300"/>
+              </a:spcAft>
+              <a:defRPr sz="2000"/>
+            </a:pPr>
+          </a:p>
+          <a:p>
+            <a:pPr>
+              <a:lnSpc>
+                <a:spcPct val="90000"/>
+              </a:lnSpc>
+              <a:spcAft>
+                <a:spcPts val="300"/>
+              </a:spcAft>
+              <a:defRPr sz="2000"/>
+            </a:pPr>
+            <a:r>
+              <a:rPr sz="1400"/>
               <a:t>✅ Görevleri:</a:t>
             </a:r>
           </a:p>
           <a:p>
             <a:pPr>
-              <a:spcAft>
-                <a:spcPts val="1200"/>
-              </a:spcAft>
-              <a:defRPr sz="2000"/>
-            </a:pPr>
-            <a:r>
-              <a:rPr sz="1600"/>
+              <a:lnSpc>
+                <a:spcPct val="90000"/>
+              </a:lnSpc>
+              <a:spcAft>
+                <a:spcPts val="300"/>
+              </a:spcAft>
+              <a:defRPr sz="2000"/>
+            </a:pPr>
+            <a:r>
+              <a:rPr sz="1400"/>
               <a:t>    • Tüm hesaplamaları yapar</a:t>
             </a:r>
           </a:p>
           <a:p>
             <a:pPr>
-              <a:spcAft>
-                <a:spcPts val="1200"/>
-              </a:spcAft>
-              <a:defRPr sz="2000"/>
-            </a:pPr>
-            <a:r>
-              <a:rPr sz="1600"/>
+              <a:lnSpc>
+                <a:spcPct val="90000"/>
+              </a:lnSpc>
+              <a:spcAft>
+                <a:spcPts val="300"/>
+              </a:spcAft>
+              <a:defRPr sz="2000"/>
+            </a:pPr>
+            <a:r>
+              <a:rPr sz="1400"/>
               <a:t>    • Komutları işler</a:t>
             </a:r>
           </a:p>
           <a:p>
             <a:pPr>
-              <a:spcAft>
-                <a:spcPts val="1200"/>
-              </a:spcAft>
-              <a:defRPr sz="2000"/>
-            </a:pPr>
-            <a:r>
-              <a:rPr sz="1600"/>
+              <a:lnSpc>
+                <a:spcPct val="90000"/>
+              </a:lnSpc>
+              <a:spcAft>
+                <a:spcPts val="300"/>
+              </a:spcAft>
+              <a:defRPr sz="2000"/>
+            </a:pPr>
+            <a:r>
+              <a:rPr sz="1400"/>
               <a:t>    • Verileri işleyip sonuç üretir</a:t>
             </a:r>
           </a:p>
           <a:p>
             <a:pPr>
-              <a:spcAft>
-                <a:spcPts val="1200"/>
-              </a:spcAft>
-              <a:defRPr sz="2000"/>
-            </a:pPr>
-          </a:p>
-          <a:p>
-            <a:pPr>
-              <a:spcAft>
-                <a:spcPts val="1200"/>
-              </a:spcAft>
-              <a:defRPr sz="2000"/>
-            </a:pPr>
-            <a:r>
-              <a:rPr sz="1600"/>
+              <a:lnSpc>
+                <a:spcPct val="90000"/>
+              </a:lnSpc>
+              <a:spcAft>
+                <a:spcPts val="300"/>
+              </a:spcAft>
+              <a:defRPr sz="2000"/>
+            </a:pPr>
+          </a:p>
+          <a:p>
+            <a:pPr>
+              <a:lnSpc>
+                <a:spcPct val="90000"/>
+              </a:lnSpc>
+              <a:spcAft>
+                <a:spcPts val="300"/>
+              </a:spcAft>
+              <a:defRPr sz="2000"/>
+            </a:pPr>
+            <a:r>
+              <a:rPr sz="1400"/>
               <a:t>✅ Önemli Özellikler:</a:t>
             </a:r>
           </a:p>
           <a:p>
             <a:pPr>
-              <a:spcAft>
-                <a:spcPts val="1200"/>
-              </a:spcAft>
-              <a:defRPr sz="2000"/>
-            </a:pPr>
-            <a:r>
-              <a:rPr sz="1600"/>
+              <a:lnSpc>
+                <a:spcPct val="90000"/>
+              </a:lnSpc>
+              <a:spcAft>
+                <a:spcPts val="300"/>
+              </a:spcAft>
+              <a:defRPr sz="2000"/>
+            </a:pPr>
+            <a:r>
+              <a:rPr sz="1400"/>
               <a:t>    • GHz (Gigahertz) - Hız birimi</a:t>
             </a:r>
           </a:p>
           <a:p>
             <a:pPr>
-              <a:spcAft>
-                <a:spcPts val="1200"/>
-              </a:spcAft>
-              <a:defRPr sz="2000"/>
-            </a:pPr>
-            <a:r>
-              <a:rPr sz="1600"/>
+              <a:lnSpc>
+                <a:spcPct val="90000"/>
+              </a:lnSpc>
+              <a:spcAft>
+                <a:spcPts val="300"/>
+              </a:spcAft>
+              <a:defRPr sz="2000"/>
+            </a:pPr>
+            <a:r>
+              <a:rPr sz="1400"/>
               <a:t>    • Çekirdek sayısı (2, 4, 8 çekirdek...)</a:t>
             </a:r>
           </a:p>
           <a:p>
             <a:pPr>
-              <a:spcAft>
-                <a:spcPts val="1200"/>
-              </a:spcAft>
-              <a:defRPr sz="2000"/>
-            </a:pPr>
-            <a:r>
-              <a:rPr sz="1600"/>
+              <a:lnSpc>
+                <a:spcPct val="90000"/>
+              </a:lnSpc>
+              <a:spcAft>
+                <a:spcPts val="300"/>
+              </a:spcAft>
+              <a:defRPr sz="2000"/>
+            </a:pPr>
+            <a:r>
+              <a:rPr sz="1400"/>
               <a:t>    • Önbellek (Cache)</a:t>
             </a:r>
           </a:p>
           <a:p>
             <a:pPr>
-              <a:spcAft>
-                <a:spcPts val="1200"/>
-              </a:spcAft>
-              <a:defRPr sz="2000"/>
-            </a:pPr>
-          </a:p>
-          <a:p>
-            <a:pPr>
-              <a:spcAft>
-                <a:spcPts val="1200"/>
-              </a:spcAft>
-              <a:defRPr sz="2000"/>
-            </a:pPr>
-            <a:r>
-              <a:rPr sz="1600"/>
+              <a:lnSpc>
+                <a:spcPct val="90000"/>
+              </a:lnSpc>
+              <a:spcAft>
+                <a:spcPts val="300"/>
+              </a:spcAft>
+              <a:defRPr sz="2000"/>
+            </a:pPr>
+          </a:p>
+          <a:p>
+            <a:pPr>
+              <a:lnSpc>
+                <a:spcPct val="90000"/>
+              </a:lnSpc>
+              <a:spcAft>
+                <a:spcPts val="300"/>
+              </a:spcAft>
+              <a:defRPr sz="2000"/>
+            </a:pPr>
+            <a:r>
+              <a:rPr sz="1400"/>
               <a:t>📌 Popüler Markalar:</a:t>
             </a:r>
           </a:p>
           <a:p>
             <a:pPr>
-              <a:spcAft>
-                <a:spcPts val="1200"/>
-              </a:spcAft>
-              <a:defRPr sz="2000"/>
-            </a:pPr>
-            <a:r>
-              <a:rPr sz="1600"/>
+              <a:lnSpc>
+                <a:spcPct val="90000"/>
+              </a:lnSpc>
+              <a:spcAft>
+                <a:spcPts val="300"/>
+              </a:spcAft>
+              <a:defRPr sz="2000"/>
+            </a:pPr>
+            <a:r>
+              <a:rPr sz="1400"/>
               <a:t>Intel (i3, i5, i7, i9) ve AMD (Ryzen)</a:t>
             </a:r>
           </a:p>
           <a:p>
             <a:pPr>
-              <a:spcAft>
-                <a:spcPts val="1200"/>
-              </a:spcAft>
-              <a:defRPr sz="2000"/>
-            </a:pPr>
-          </a:p>
-          <a:p>
-            <a:pPr>
-              <a:spcAft>
-                <a:spcPts val="1200"/>
-              </a:spcAft>
-              <a:defRPr sz="2000"/>
-            </a:pPr>
-            <a:r>
-              <a:rPr sz="1600"/>
+              <a:lnSpc>
+                <a:spcPct val="90000"/>
+              </a:lnSpc>
+              <a:spcAft>
+                <a:spcPts val="300"/>
+              </a:spcAft>
+              <a:defRPr sz="2000"/>
+            </a:pPr>
+          </a:p>
+          <a:p>
+            <a:pPr>
+              <a:lnSpc>
+                <a:spcPct val="90000"/>
+              </a:lnSpc>
+              <a:spcAft>
+                <a:spcPts val="300"/>
+              </a:spcAft>
+              <a:defRPr sz="2000"/>
+            </a:pPr>
+            <a:r>
+              <a:rPr sz="1400"/>
               <a:t>💡 Analoji: İşlemci = İnsan beyni</a:t>
             </a:r>
           </a:p>
           <a:p>
             <a:pPr>
-              <a:spcAft>
-                <a:spcPts val="1200"/>
-              </a:spcAft>
-              <a:defRPr sz="2000"/>
-            </a:pPr>
-            <a:r>
-              <a:rPr sz="1600"/>
+              <a:lnSpc>
+                <a:spcPct val="90000"/>
+              </a:lnSpc>
+              <a:spcAft>
+                <a:spcPts val="300"/>
+              </a:spcAft>
+              <a:defRPr sz="2000"/>
+            </a:pPr>
+            <a:r>
+              <a:rPr sz="1400"/>
               <a:t>Ne kadar hızlı düşünürsen, işleri o kadar çabuk bitirirsin!</a:t>
             </a:r>
           </a:p>
@@ -10030,7 +11002,7 @@
         </p:nvSpPr>
         <p:spPr/>
         <p:txBody>
-          <a:bodyPr/>
+          <a:bodyPr wrap="square"/>
           <a:lstStyle/>
           <a:p>
             <a:pPr>
@@ -10084,204 +11056,267 @@
             <a:spAutoFit/>
           </a:bodyPr>
           <a:lstStyle/>
-          <a:p/>
-          <a:p>
-            <a:pPr>
-              <a:spcAft>
-                <a:spcPts val="1200"/>
-              </a:spcAft>
-              <a:defRPr sz="2000"/>
-            </a:pPr>
-            <a:r>
-              <a:rPr sz="1600"/>
+          <a:p>
+            <a:pPr>
+              <a:lnSpc>
+                <a:spcPct val="90000"/>
+              </a:lnSpc>
+              <a:spcAft>
+                <a:spcPts val="300"/>
+              </a:spcAft>
+            </a:pPr>
+          </a:p>
+          <a:p>
+            <a:pPr>
+              <a:lnSpc>
+                <a:spcPct val="90000"/>
+              </a:lnSpc>
+              <a:spcAft>
+                <a:spcPts val="300"/>
+              </a:spcAft>
+              <a:defRPr sz="2000"/>
+            </a:pPr>
+            <a:r>
+              <a:rPr sz="1400"/>
               <a:t>RAM = Random Access Memory (Rastgele Erişimli Bellek)</a:t>
             </a:r>
           </a:p>
           <a:p>
             <a:pPr>
-              <a:spcAft>
-                <a:spcPts val="1200"/>
-              </a:spcAft>
-              <a:defRPr sz="2000"/>
-            </a:pPr>
-          </a:p>
-          <a:p>
-            <a:pPr>
-              <a:spcAft>
-                <a:spcPts val="1200"/>
-              </a:spcAft>
-              <a:defRPr sz="2000"/>
-            </a:pPr>
-            <a:r>
-              <a:rPr sz="1600"/>
+              <a:lnSpc>
+                <a:spcPct val="90000"/>
+              </a:lnSpc>
+              <a:spcAft>
+                <a:spcPts val="300"/>
+              </a:spcAft>
+              <a:defRPr sz="2000"/>
+            </a:pPr>
+          </a:p>
+          <a:p>
+            <a:pPr>
+              <a:lnSpc>
+                <a:spcPct val="90000"/>
+              </a:lnSpc>
+              <a:spcAft>
+                <a:spcPts val="300"/>
+              </a:spcAft>
+              <a:defRPr sz="2000"/>
+            </a:pPr>
+            <a:r>
+              <a:rPr sz="1400"/>
               <a:t>✅ Görevleri:</a:t>
             </a:r>
           </a:p>
           <a:p>
             <a:pPr>
-              <a:spcAft>
-                <a:spcPts val="1200"/>
-              </a:spcAft>
-              <a:defRPr sz="2000"/>
-            </a:pPr>
-            <a:r>
-              <a:rPr sz="1600"/>
+              <a:lnSpc>
+                <a:spcPct val="90000"/>
+              </a:lnSpc>
+              <a:spcAft>
+                <a:spcPts val="300"/>
+              </a:spcAft>
+              <a:defRPr sz="2000"/>
+            </a:pPr>
+            <a:r>
+              <a:rPr sz="1400"/>
               <a:t>    • Açık programların verilerini tutar</a:t>
             </a:r>
           </a:p>
           <a:p>
             <a:pPr>
-              <a:spcAft>
-                <a:spcPts val="1200"/>
-              </a:spcAft>
-              <a:defRPr sz="2000"/>
-            </a:pPr>
-            <a:r>
-              <a:rPr sz="1600"/>
+              <a:lnSpc>
+                <a:spcPct val="90000"/>
+              </a:lnSpc>
+              <a:spcAft>
+                <a:spcPts val="300"/>
+              </a:spcAft>
+              <a:defRPr sz="2000"/>
+            </a:pPr>
+            <a:r>
+              <a:rPr sz="1400"/>
               <a:t>    • Geçici çalışma alanı sağlar</a:t>
             </a:r>
           </a:p>
           <a:p>
             <a:pPr>
-              <a:spcAft>
-                <a:spcPts val="1200"/>
-              </a:spcAft>
-              <a:defRPr sz="2000"/>
-            </a:pPr>
-            <a:r>
-              <a:rPr sz="1600"/>
+              <a:lnSpc>
+                <a:spcPct val="90000"/>
+              </a:lnSpc>
+              <a:spcAft>
+                <a:spcPts val="300"/>
+              </a:spcAft>
+              <a:defRPr sz="2000"/>
+            </a:pPr>
+            <a:r>
+              <a:rPr sz="1400"/>
               <a:t>    • İşlemciye hızlı veri erişimi</a:t>
             </a:r>
           </a:p>
           <a:p>
             <a:pPr>
-              <a:spcAft>
-                <a:spcPts val="1200"/>
-              </a:spcAft>
-              <a:defRPr sz="2000"/>
-            </a:pPr>
-          </a:p>
-          <a:p>
-            <a:pPr>
-              <a:spcAft>
-                <a:spcPts val="1200"/>
-              </a:spcAft>
-              <a:defRPr sz="2000"/>
-            </a:pPr>
-            <a:r>
-              <a:rPr sz="1600"/>
+              <a:lnSpc>
+                <a:spcPct val="90000"/>
+              </a:lnSpc>
+              <a:spcAft>
+                <a:spcPts val="300"/>
+              </a:spcAft>
+              <a:defRPr sz="2000"/>
+            </a:pPr>
+          </a:p>
+          <a:p>
+            <a:pPr>
+              <a:lnSpc>
+                <a:spcPct val="90000"/>
+              </a:lnSpc>
+              <a:spcAft>
+                <a:spcPts val="300"/>
+              </a:spcAft>
+              <a:defRPr sz="2000"/>
+            </a:pPr>
+            <a:r>
+              <a:rPr sz="1400"/>
               <a:t>⚠️ Önemli Özelliği:</a:t>
             </a:r>
           </a:p>
           <a:p>
             <a:pPr>
-              <a:spcAft>
-                <a:spcPts val="1200"/>
-              </a:spcAft>
-              <a:defRPr sz="2000"/>
-            </a:pPr>
-            <a:r>
-              <a:rPr sz="1600"/>
+              <a:lnSpc>
+                <a:spcPct val="90000"/>
+              </a:lnSpc>
+              <a:spcAft>
+                <a:spcPts val="300"/>
+              </a:spcAft>
+              <a:defRPr sz="2000"/>
+            </a:pPr>
+            <a:r>
+              <a:rPr sz="1400"/>
               <a:t>Bilgisayar kapatıldığında içindeki</a:t>
             </a:r>
           </a:p>
           <a:p>
             <a:pPr>
-              <a:spcAft>
-                <a:spcPts val="1200"/>
-              </a:spcAft>
-              <a:defRPr sz="2000"/>
-            </a:pPr>
-            <a:r>
-              <a:rPr sz="1600"/>
+              <a:lnSpc>
+                <a:spcPct val="90000"/>
+              </a:lnSpc>
+              <a:spcAft>
+                <a:spcPts val="300"/>
+              </a:spcAft>
+              <a:defRPr sz="2000"/>
+            </a:pPr>
+            <a:r>
+              <a:rPr sz="1400"/>
               <a:t>TÜM VERİLER SİLİNİR!</a:t>
             </a:r>
           </a:p>
           <a:p>
             <a:pPr>
-              <a:spcAft>
-                <a:spcPts val="1200"/>
-              </a:spcAft>
-              <a:defRPr sz="2000"/>
-            </a:pPr>
-          </a:p>
-          <a:p>
-            <a:pPr>
-              <a:spcAft>
-                <a:spcPts val="1200"/>
-              </a:spcAft>
-              <a:defRPr sz="2000"/>
-            </a:pPr>
-            <a:r>
-              <a:rPr sz="1600"/>
+              <a:lnSpc>
+                <a:spcPct val="90000"/>
+              </a:lnSpc>
+              <a:spcAft>
+                <a:spcPts val="300"/>
+              </a:spcAft>
+              <a:defRPr sz="2000"/>
+            </a:pPr>
+          </a:p>
+          <a:p>
+            <a:pPr>
+              <a:lnSpc>
+                <a:spcPct val="90000"/>
+              </a:lnSpc>
+              <a:spcAft>
+                <a:spcPts val="300"/>
+              </a:spcAft>
+              <a:defRPr sz="2000"/>
+            </a:pPr>
+            <a:r>
+              <a:rPr sz="1400"/>
               <a:t>📊 Kapasiteler:</a:t>
             </a:r>
           </a:p>
           <a:p>
             <a:pPr>
-              <a:spcAft>
-                <a:spcPts val="1200"/>
-              </a:spcAft>
-              <a:defRPr sz="2000"/>
-            </a:pPr>
-            <a:r>
-              <a:rPr sz="1600"/>
+              <a:lnSpc>
+                <a:spcPct val="90000"/>
+              </a:lnSpc>
+              <a:spcAft>
+                <a:spcPts val="300"/>
+              </a:spcAft>
+              <a:defRPr sz="2000"/>
+            </a:pPr>
+            <a:r>
+              <a:rPr sz="1400"/>
               <a:t>    • 4 GB - Temel kullanım</a:t>
             </a:r>
           </a:p>
           <a:p>
             <a:pPr>
-              <a:spcAft>
-                <a:spcPts val="1200"/>
-              </a:spcAft>
-              <a:defRPr sz="2000"/>
-            </a:pPr>
-            <a:r>
-              <a:rPr sz="1600"/>
+              <a:lnSpc>
+                <a:spcPct val="90000"/>
+              </a:lnSpc>
+              <a:spcAft>
+                <a:spcPts val="300"/>
+              </a:spcAft>
+              <a:defRPr sz="2000"/>
+            </a:pPr>
+            <a:r>
+              <a:rPr sz="1400"/>
               <a:t>    • 8 GB - Günlük kullanım</a:t>
             </a:r>
           </a:p>
           <a:p>
             <a:pPr>
-              <a:spcAft>
-                <a:spcPts val="1200"/>
-              </a:spcAft>
-              <a:defRPr sz="2000"/>
-            </a:pPr>
-            <a:r>
-              <a:rPr sz="1600"/>
+              <a:lnSpc>
+                <a:spcPct val="90000"/>
+              </a:lnSpc>
+              <a:spcAft>
+                <a:spcPts val="300"/>
+              </a:spcAft>
+              <a:defRPr sz="2000"/>
+            </a:pPr>
+            <a:r>
+              <a:rPr sz="1400"/>
               <a:t>    • 16 GB+ - Oyun/Tasarım</a:t>
             </a:r>
           </a:p>
           <a:p>
             <a:pPr>
-              <a:spcAft>
-                <a:spcPts val="1200"/>
-              </a:spcAft>
-              <a:defRPr sz="2000"/>
-            </a:pPr>
-          </a:p>
-          <a:p>
-            <a:pPr>
-              <a:spcAft>
-                <a:spcPts val="1200"/>
-              </a:spcAft>
-              <a:defRPr sz="2000"/>
-            </a:pPr>
-            <a:r>
-              <a:rPr sz="1600"/>
+              <a:lnSpc>
+                <a:spcPct val="90000"/>
+              </a:lnSpc>
+              <a:spcAft>
+                <a:spcPts val="300"/>
+              </a:spcAft>
+              <a:defRPr sz="2000"/>
+            </a:pPr>
+          </a:p>
+          <a:p>
+            <a:pPr>
+              <a:lnSpc>
+                <a:spcPct val="90000"/>
+              </a:lnSpc>
+              <a:spcAft>
+                <a:spcPts val="300"/>
+              </a:spcAft>
+              <a:defRPr sz="2000"/>
+            </a:pPr>
+            <a:r>
+              <a:rPr sz="1400"/>
               <a:t>💡 Analoji: RAM = Çalışma masası</a:t>
             </a:r>
           </a:p>
           <a:p>
             <a:pPr>
-              <a:spcAft>
-                <a:spcPts val="1200"/>
-              </a:spcAft>
-              <a:defRPr sz="2000"/>
-            </a:pPr>
-            <a:r>
-              <a:rPr sz="1600"/>
+              <a:lnSpc>
+                <a:spcPct val="90000"/>
+              </a:lnSpc>
+              <a:spcAft>
+                <a:spcPts val="300"/>
+              </a:spcAft>
+              <a:defRPr sz="2000"/>
+            </a:pPr>
+            <a:r>
+              <a:rPr sz="1400"/>
               <a:t>Masası büyük olan daha çok iş yapabilir!</a:t>
             </a:r>
           </a:p>
@@ -10317,7 +11352,7 @@
         </p:nvSpPr>
         <p:spPr/>
         <p:txBody>
-          <a:bodyPr/>
+          <a:bodyPr wrap="square"/>
           <a:lstStyle/>
           <a:p>
             <a:pPr>
@@ -10371,179 +11406,252 @@
             <a:spAutoFit/>
           </a:bodyPr>
           <a:lstStyle/>
-          <a:p/>
-          <a:p>
-            <a:pPr>
-              <a:spcAft>
-                <a:spcPts val="1200"/>
-              </a:spcAft>
-              <a:defRPr sz="2000"/>
-            </a:pPr>
-            <a:r>
+          <a:p>
+            <a:pPr>
+              <a:lnSpc>
+                <a:spcPct val="90000"/>
+              </a:lnSpc>
+              <a:spcAft>
+                <a:spcPts val="300"/>
+              </a:spcAft>
+            </a:pPr>
+          </a:p>
+          <a:p>
+            <a:pPr>
+              <a:lnSpc>
+                <a:spcPct val="90000"/>
+              </a:lnSpc>
+              <a:spcAft>
+                <a:spcPts val="300"/>
+              </a:spcAft>
+              <a:defRPr sz="2000"/>
+            </a:pPr>
+            <a:r>
+              <a:rPr sz="1500"/>
               <a:t>✅ Hard Disk (HDD):</a:t>
             </a:r>
           </a:p>
           <a:p>
             <a:pPr>
-              <a:spcAft>
-                <a:spcPts val="1200"/>
-              </a:spcAft>
-              <a:defRPr sz="2000"/>
-            </a:pPr>
-            <a:r>
+              <a:lnSpc>
+                <a:spcPct val="90000"/>
+              </a:lnSpc>
+              <a:spcAft>
+                <a:spcPts val="300"/>
+              </a:spcAft>
+              <a:defRPr sz="2000"/>
+            </a:pPr>
+            <a:r>
+              <a:rPr sz="1500"/>
               <a:t>    • Dönen diskler üzerinde veri saklar</a:t>
             </a:r>
           </a:p>
           <a:p>
             <a:pPr>
-              <a:spcAft>
-                <a:spcPts val="1200"/>
-              </a:spcAft>
-              <a:defRPr sz="2000"/>
-            </a:pPr>
-            <a:r>
+              <a:lnSpc>
+                <a:spcPct val="90000"/>
+              </a:lnSpc>
+              <a:spcAft>
+                <a:spcPts val="300"/>
+              </a:spcAft>
+              <a:defRPr sz="2000"/>
+            </a:pPr>
+            <a:r>
+              <a:rPr sz="1500"/>
               <a:t>    • Daha ucuz, daha büyük kapasiteler</a:t>
             </a:r>
           </a:p>
           <a:p>
             <a:pPr>
-              <a:spcAft>
-                <a:spcPts val="1200"/>
-              </a:spcAft>
-              <a:defRPr sz="2000"/>
-            </a:pPr>
-            <a:r>
+              <a:lnSpc>
+                <a:spcPct val="90000"/>
+              </a:lnSpc>
+              <a:spcAft>
+                <a:spcPts val="300"/>
+              </a:spcAft>
+              <a:defRPr sz="2000"/>
+            </a:pPr>
+            <a:r>
+              <a:rPr sz="1500"/>
               <a:t>    • Daha yavaş</a:t>
             </a:r>
           </a:p>
           <a:p>
             <a:pPr>
-              <a:spcAft>
-                <a:spcPts val="1200"/>
-              </a:spcAft>
-              <a:defRPr sz="2000"/>
-            </a:pPr>
-          </a:p>
-          <a:p>
-            <a:pPr>
-              <a:spcAft>
-                <a:spcPts val="1200"/>
-              </a:spcAft>
-              <a:defRPr sz="2000"/>
-            </a:pPr>
-            <a:r>
+              <a:lnSpc>
+                <a:spcPct val="90000"/>
+              </a:lnSpc>
+              <a:spcAft>
+                <a:spcPts val="300"/>
+              </a:spcAft>
+              <a:defRPr sz="2000"/>
+            </a:pPr>
+          </a:p>
+          <a:p>
+            <a:pPr>
+              <a:lnSpc>
+                <a:spcPct val="90000"/>
+              </a:lnSpc>
+              <a:spcAft>
+                <a:spcPts val="300"/>
+              </a:spcAft>
+              <a:defRPr sz="2000"/>
+            </a:pPr>
+            <a:r>
+              <a:rPr sz="1500"/>
               <a:t>✅ SSD (Solid State Drive):</a:t>
             </a:r>
           </a:p>
           <a:p>
             <a:pPr>
-              <a:spcAft>
-                <a:spcPts val="1200"/>
-              </a:spcAft>
-              <a:defRPr sz="2000"/>
-            </a:pPr>
-            <a:r>
+              <a:lnSpc>
+                <a:spcPct val="90000"/>
+              </a:lnSpc>
+              <a:spcAft>
+                <a:spcPts val="300"/>
+              </a:spcAft>
+              <a:defRPr sz="2000"/>
+            </a:pPr>
+            <a:r>
+              <a:rPr sz="1500"/>
               <a:t>    • Elektronik çipler üzerinde veri saklar</a:t>
             </a:r>
           </a:p>
           <a:p>
             <a:pPr>
-              <a:spcAft>
-                <a:spcPts val="1200"/>
-              </a:spcAft>
-              <a:defRPr sz="2000"/>
-            </a:pPr>
-            <a:r>
+              <a:lnSpc>
+                <a:spcPct val="90000"/>
+              </a:lnSpc>
+              <a:spcAft>
+                <a:spcPts val="300"/>
+              </a:spcAft>
+              <a:defRPr sz="2000"/>
+            </a:pPr>
+            <a:r>
+              <a:rPr sz="1500"/>
               <a:t>    • Çok daha hızlı</a:t>
             </a:r>
           </a:p>
           <a:p>
             <a:pPr>
-              <a:spcAft>
-                <a:spcPts val="1200"/>
-              </a:spcAft>
-              <a:defRPr sz="2000"/>
-            </a:pPr>
-            <a:r>
+              <a:lnSpc>
+                <a:spcPct val="90000"/>
+              </a:lnSpc>
+              <a:spcAft>
+                <a:spcPts val="300"/>
+              </a:spcAft>
+              <a:defRPr sz="2000"/>
+            </a:pPr>
+            <a:r>
+              <a:rPr sz="1500"/>
               <a:t>    • Daha pahalı</a:t>
             </a:r>
           </a:p>
           <a:p>
             <a:pPr>
-              <a:spcAft>
-                <a:spcPts val="1200"/>
-              </a:spcAft>
-              <a:defRPr sz="2000"/>
-            </a:pPr>
-          </a:p>
-          <a:p>
-            <a:pPr>
-              <a:spcAft>
-                <a:spcPts val="1200"/>
-              </a:spcAft>
-              <a:defRPr sz="2000"/>
-            </a:pPr>
-            <a:r>
+              <a:lnSpc>
+                <a:spcPct val="90000"/>
+              </a:lnSpc>
+              <a:spcAft>
+                <a:spcPts val="300"/>
+              </a:spcAft>
+              <a:defRPr sz="2000"/>
+            </a:pPr>
+          </a:p>
+          <a:p>
+            <a:pPr>
+              <a:lnSpc>
+                <a:spcPct val="90000"/>
+              </a:lnSpc>
+              <a:spcAft>
+                <a:spcPts val="300"/>
+              </a:spcAft>
+              <a:defRPr sz="2000"/>
+            </a:pPr>
+            <a:r>
+              <a:rPr sz="1500"/>
               <a:t>📊 Kapasiteler:</a:t>
             </a:r>
           </a:p>
           <a:p>
             <a:pPr>
-              <a:spcAft>
-                <a:spcPts val="1200"/>
-              </a:spcAft>
-              <a:defRPr sz="2000"/>
-            </a:pPr>
-            <a:r>
+              <a:lnSpc>
+                <a:spcPct val="90000"/>
+              </a:lnSpc>
+              <a:spcAft>
+                <a:spcPts val="300"/>
+              </a:spcAft>
+              <a:defRPr sz="2000"/>
+            </a:pPr>
+            <a:r>
+              <a:rPr sz="1500"/>
               <a:t>    • 256 GB - 500 GB - 1 TB - 2 TB...</a:t>
             </a:r>
           </a:p>
           <a:p>
             <a:pPr>
-              <a:spcAft>
-                <a:spcPts val="1200"/>
-              </a:spcAft>
-              <a:defRPr sz="2000"/>
-            </a:pPr>
-          </a:p>
-          <a:p>
-            <a:pPr>
-              <a:spcAft>
-                <a:spcPts val="1200"/>
-              </a:spcAft>
-              <a:defRPr sz="2000"/>
-            </a:pPr>
-            <a:r>
+              <a:lnSpc>
+                <a:spcPct val="90000"/>
+              </a:lnSpc>
+              <a:spcAft>
+                <a:spcPts val="300"/>
+              </a:spcAft>
+              <a:defRPr sz="2000"/>
+            </a:pPr>
+          </a:p>
+          <a:p>
+            <a:pPr>
+              <a:lnSpc>
+                <a:spcPct val="90000"/>
+              </a:lnSpc>
+              <a:spcAft>
+                <a:spcPts val="300"/>
+              </a:spcAft>
+              <a:defRPr sz="2000"/>
+            </a:pPr>
+            <a:r>
+              <a:rPr sz="1500"/>
               <a:t>⚠️ Önemli:</a:t>
             </a:r>
           </a:p>
           <a:p>
             <a:pPr>
-              <a:spcAft>
-                <a:spcPts val="1200"/>
-              </a:spcAft>
-              <a:defRPr sz="2000"/>
-            </a:pPr>
-            <a:r>
+              <a:lnSpc>
+                <a:spcPct val="90000"/>
+              </a:lnSpc>
+              <a:spcAft>
+                <a:spcPts val="300"/>
+              </a:spcAft>
+              <a:defRPr sz="2000"/>
+            </a:pPr>
+            <a:r>
+              <a:rPr sz="1500"/>
               <a:t>Bilgisayar kapatılsa bile veriler KALICI olarak durur!</a:t>
             </a:r>
           </a:p>
           <a:p>
             <a:pPr>
-              <a:spcAft>
-                <a:spcPts val="1200"/>
-              </a:spcAft>
-              <a:defRPr sz="2000"/>
-            </a:pPr>
-          </a:p>
-          <a:p>
-            <a:pPr>
-              <a:spcAft>
-                <a:spcPts val="1200"/>
-              </a:spcAft>
-              <a:defRPr sz="2000"/>
-            </a:pPr>
-            <a:r>
+              <a:lnSpc>
+                <a:spcPct val="90000"/>
+              </a:lnSpc>
+              <a:spcAft>
+                <a:spcPts val="300"/>
+              </a:spcAft>
+              <a:defRPr sz="2000"/>
+            </a:pPr>
+          </a:p>
+          <a:p>
+            <a:pPr>
+              <a:lnSpc>
+                <a:spcPct val="90000"/>
+              </a:lnSpc>
+              <a:spcAft>
+                <a:spcPts val="300"/>
+              </a:spcAft>
+              <a:defRPr sz="2000"/>
+            </a:pPr>
+            <a:r>
+              <a:rPr sz="1500"/>
               <a:t>💡 Fark: RAM geçici, HDD/SSD kalıcı!</a:t>
             </a:r>
           </a:p>

--- a/sunumlar/5-sinif-unite1-bilisim-temelleri-DETAYLI.pptx
+++ b/sunumlar/5-sinif-unite1-bilisim-temelleri-DETAYLI.pptx
@@ -5847,12 +5847,21 @@
           <a:noFill/>
         </p:spPr>
         <p:txBody>
-          <a:bodyPr wrap="square">
+          <a:bodyPr wrap="square" tIns="25400" bIns="25400" lIns="63500" rIns="63500">
             <a:spAutoFit/>
           </a:bodyPr>
           <a:lstStyle/>
           <a:p>
             <a:pPr algn="ctr">
+              <a:lnSpc>
+                <a:spcPct val="85000"/>
+              </a:lnSpc>
+              <a:spcBef>
+                <a:spcPts val="200"/>
+              </a:spcBef>
+              <a:spcAft>
+                <a:spcPts val="200"/>
+              </a:spcAft>
               <a:defRPr sz="5400" b="1">
                 <a:solidFill>
                   <a:srgbClr val="FFFFFF"/>
@@ -5860,6 +5869,7 @@
               </a:defRPr>
             </a:pPr>
             <a:r>
+              <a:rPr/>
               <a:t>📱 BİLİŞİM TEMELLERİ</a:t>
             </a:r>
           </a:p>
@@ -5882,12 +5892,21 @@
           <a:noFill/>
         </p:spPr>
         <p:txBody>
-          <a:bodyPr wrap="square">
+          <a:bodyPr wrap="square" tIns="25400" bIns="25400" lIns="63500" rIns="63500">
             <a:spAutoFit/>
           </a:bodyPr>
           <a:lstStyle/>
           <a:p>
             <a:pPr algn="ctr">
+              <a:lnSpc>
+                <a:spcPct val="85000"/>
+              </a:lnSpc>
+              <a:spcBef>
+                <a:spcPts val="200"/>
+              </a:spcBef>
+              <a:spcAft>
+                <a:spcPts val="200"/>
+              </a:spcAft>
               <a:defRPr sz="3200">
                 <a:solidFill>
                   <a:srgbClr val="FFFFFF"/>
@@ -5895,11 +5914,24 @@
               </a:defRPr>
             </a:pPr>
             <a:r>
+              <a:rPr/>
               <a:t>5. Sınıf - Ünite 1</a:t>
             </a:r>
           </a:p>
           <a:p>
-            <a:r>
+            <a:pPr>
+              <a:lnSpc>
+                <a:spcPct val="85000"/>
+              </a:lnSpc>
+              <a:spcBef>
+                <a:spcPts val="200"/>
+              </a:spcBef>
+              <a:spcAft>
+                <a:spcPts val="200"/>
+              </a:spcAft>
+            </a:pPr>
+            <a:r>
+              <a:rPr/>
               <a:t>9 Haftalık Kapsamlı Program</a:t>
             </a:r>
           </a:p>
@@ -5935,10 +5967,19 @@
         </p:nvSpPr>
         <p:spPr/>
         <p:txBody>
-          <a:bodyPr wrap="square"/>
+          <a:bodyPr wrap="square" tIns="25400" bIns="25400" lIns="63500" rIns="63500"/>
           <a:lstStyle/>
           <a:p>
             <a:pPr>
+              <a:lnSpc>
+                <a:spcPct val="85000"/>
+              </a:lnSpc>
+              <a:spcBef>
+                <a:spcPts val="200"/>
+              </a:spcBef>
+              <a:spcAft>
+                <a:spcPts val="200"/>
+              </a:spcAft>
               <a:defRPr sz="4000">
                 <a:solidFill>
                   <a:srgbClr val="667EEA"/>
@@ -5946,6 +5987,7 @@
               </a:defRPr>
             </a:pPr>
             <a:r>
+              <a:rPr/>
               <a:t>🔌 Anakart - Ana Kart</a:t>
             </a:r>
           </a:p>
@@ -5985,7 +6027,7 @@
           <a:noFill/>
         </p:spPr>
         <p:txBody>
-          <a:bodyPr wrap="square">
+          <a:bodyPr wrap="square" tIns="25400" bIns="25400" lIns="63500" rIns="63500">
             <a:spAutoFit/>
           </a:bodyPr>
           <a:lstStyle/>
@@ -6002,10 +6044,13 @@
           <a:p>
             <a:pPr>
               <a:lnSpc>
-                <a:spcPct val="90000"/>
-              </a:lnSpc>
-              <a:spcAft>
-                <a:spcPts val="300"/>
+                <a:spcPct val="85000"/>
+              </a:lnSpc>
+              <a:spcBef>
+                <a:spcPts val="200"/>
+              </a:spcBef>
+              <a:spcAft>
+                <a:spcPts val="200"/>
               </a:spcAft>
               <a:defRPr sz="2000"/>
             </a:pPr>
@@ -6028,10 +6073,13 @@
           <a:p>
             <a:pPr>
               <a:lnSpc>
-                <a:spcPct val="90000"/>
-              </a:lnSpc>
-              <a:spcAft>
-                <a:spcPts val="300"/>
+                <a:spcPct val="85000"/>
+              </a:lnSpc>
+              <a:spcBef>
+                <a:spcPts val="200"/>
+              </a:spcBef>
+              <a:spcAft>
+                <a:spcPts val="200"/>
               </a:spcAft>
               <a:defRPr sz="2000"/>
             </a:pPr>
@@ -6043,10 +6091,13 @@
           <a:p>
             <a:pPr>
               <a:lnSpc>
-                <a:spcPct val="90000"/>
-              </a:lnSpc>
-              <a:spcAft>
-                <a:spcPts val="300"/>
+                <a:spcPct val="85000"/>
+              </a:lnSpc>
+              <a:spcBef>
+                <a:spcPts val="200"/>
+              </a:spcBef>
+              <a:spcAft>
+                <a:spcPts val="200"/>
               </a:spcAft>
               <a:defRPr sz="2000"/>
             </a:pPr>
@@ -6058,10 +6109,13 @@
           <a:p>
             <a:pPr>
               <a:lnSpc>
-                <a:spcPct val="90000"/>
-              </a:lnSpc>
-              <a:spcAft>
-                <a:spcPts val="300"/>
+                <a:spcPct val="85000"/>
+              </a:lnSpc>
+              <a:spcBef>
+                <a:spcPts val="200"/>
+              </a:spcBef>
+              <a:spcAft>
+                <a:spcPts val="200"/>
               </a:spcAft>
               <a:defRPr sz="2000"/>
             </a:pPr>
@@ -6073,10 +6127,13 @@
           <a:p>
             <a:pPr>
               <a:lnSpc>
-                <a:spcPct val="90000"/>
-              </a:lnSpc>
-              <a:spcAft>
-                <a:spcPts val="300"/>
+                <a:spcPct val="85000"/>
+              </a:lnSpc>
+              <a:spcBef>
+                <a:spcPts val="200"/>
+              </a:spcBef>
+              <a:spcAft>
+                <a:spcPts val="200"/>
               </a:spcAft>
               <a:defRPr sz="2000"/>
             </a:pPr>
@@ -6088,10 +6145,13 @@
           <a:p>
             <a:pPr>
               <a:lnSpc>
-                <a:spcPct val="90000"/>
-              </a:lnSpc>
-              <a:spcAft>
-                <a:spcPts val="300"/>
+                <a:spcPct val="85000"/>
+              </a:lnSpc>
+              <a:spcBef>
+                <a:spcPts val="200"/>
+              </a:spcBef>
+              <a:spcAft>
+                <a:spcPts val="200"/>
               </a:spcAft>
               <a:defRPr sz="2000"/>
             </a:pPr>
@@ -6103,10 +6163,13 @@
           <a:p>
             <a:pPr>
               <a:lnSpc>
-                <a:spcPct val="90000"/>
-              </a:lnSpc>
-              <a:spcAft>
-                <a:spcPts val="300"/>
+                <a:spcPct val="85000"/>
+              </a:lnSpc>
+              <a:spcBef>
+                <a:spcPts val="200"/>
+              </a:spcBef>
+              <a:spcAft>
+                <a:spcPts val="200"/>
               </a:spcAft>
               <a:defRPr sz="2000"/>
             </a:pPr>
@@ -6129,10 +6192,13 @@
           <a:p>
             <a:pPr>
               <a:lnSpc>
-                <a:spcPct val="90000"/>
-              </a:lnSpc>
-              <a:spcAft>
-                <a:spcPts val="300"/>
+                <a:spcPct val="85000"/>
+              </a:lnSpc>
+              <a:spcBef>
+                <a:spcPts val="200"/>
+              </a:spcBef>
+              <a:spcAft>
+                <a:spcPts val="200"/>
               </a:spcAft>
               <a:defRPr sz="2000"/>
             </a:pPr>
@@ -6144,10 +6210,13 @@
           <a:p>
             <a:pPr>
               <a:lnSpc>
-                <a:spcPct val="90000"/>
-              </a:lnSpc>
-              <a:spcAft>
-                <a:spcPts val="300"/>
+                <a:spcPct val="85000"/>
+              </a:lnSpc>
+              <a:spcBef>
+                <a:spcPts val="200"/>
+              </a:spcBef>
+              <a:spcAft>
+                <a:spcPts val="200"/>
               </a:spcAft>
               <a:defRPr sz="2000"/>
             </a:pPr>
@@ -6159,10 +6228,13 @@
           <a:p>
             <a:pPr>
               <a:lnSpc>
-                <a:spcPct val="90000"/>
-              </a:lnSpc>
-              <a:spcAft>
-                <a:spcPts val="300"/>
+                <a:spcPct val="85000"/>
+              </a:lnSpc>
+              <a:spcBef>
+                <a:spcPts val="200"/>
+              </a:spcBef>
+              <a:spcAft>
+                <a:spcPts val="200"/>
               </a:spcAft>
               <a:defRPr sz="2000"/>
             </a:pPr>
@@ -6174,10 +6246,13 @@
           <a:p>
             <a:pPr>
               <a:lnSpc>
-                <a:spcPct val="90000"/>
-              </a:lnSpc>
-              <a:spcAft>
-                <a:spcPts val="300"/>
+                <a:spcPct val="85000"/>
+              </a:lnSpc>
+              <a:spcBef>
+                <a:spcPts val="200"/>
+              </a:spcBef>
+              <a:spcAft>
+                <a:spcPts val="200"/>
               </a:spcAft>
               <a:defRPr sz="2000"/>
             </a:pPr>
@@ -6189,10 +6264,13 @@
           <a:p>
             <a:pPr>
               <a:lnSpc>
-                <a:spcPct val="90000"/>
-              </a:lnSpc>
-              <a:spcAft>
-                <a:spcPts val="300"/>
+                <a:spcPct val="85000"/>
+              </a:lnSpc>
+              <a:spcBef>
+                <a:spcPts val="200"/>
+              </a:spcBef>
+              <a:spcAft>
+                <a:spcPts val="200"/>
               </a:spcAft>
               <a:defRPr sz="2000"/>
             </a:pPr>
@@ -6215,10 +6293,13 @@
           <a:p>
             <a:pPr>
               <a:lnSpc>
-                <a:spcPct val="90000"/>
-              </a:lnSpc>
-              <a:spcAft>
-                <a:spcPts val="300"/>
+                <a:spcPct val="85000"/>
+              </a:lnSpc>
+              <a:spcBef>
+                <a:spcPts val="200"/>
+              </a:spcBef>
+              <a:spcAft>
+                <a:spcPts val="200"/>
               </a:spcAft>
               <a:defRPr sz="2000"/>
             </a:pPr>
@@ -6230,10 +6311,13 @@
           <a:p>
             <a:pPr>
               <a:lnSpc>
-                <a:spcPct val="90000"/>
-              </a:lnSpc>
-              <a:spcAft>
-                <a:spcPts val="300"/>
+                <a:spcPct val="85000"/>
+              </a:lnSpc>
+              <a:spcBef>
+                <a:spcPts val="200"/>
+              </a:spcBef>
+              <a:spcAft>
+                <a:spcPts val="200"/>
               </a:spcAft>
               <a:defRPr sz="2000"/>
             </a:pPr>
@@ -6274,10 +6358,19 @@
         </p:nvSpPr>
         <p:spPr/>
         <p:txBody>
-          <a:bodyPr wrap="square"/>
+          <a:bodyPr wrap="square" tIns="25400" bIns="25400" lIns="63500" rIns="63500"/>
           <a:lstStyle/>
           <a:p>
             <a:pPr>
+              <a:lnSpc>
+                <a:spcPct val="85000"/>
+              </a:lnSpc>
+              <a:spcBef>
+                <a:spcPts val="200"/>
+              </a:spcBef>
+              <a:spcAft>
+                <a:spcPts val="200"/>
+              </a:spcAft>
               <a:defRPr sz="4000">
                 <a:solidFill>
                   <a:srgbClr val="667EEA"/>
@@ -6285,6 +6378,7 @@
               </a:defRPr>
             </a:pPr>
             <a:r>
+              <a:rPr/>
               <a:t>⌨️ Giriş ve Çıkış Birimleri</a:t>
             </a:r>
           </a:p>
@@ -6324,7 +6418,7 @@
           <a:noFill/>
         </p:spPr>
         <p:txBody>
-          <a:bodyPr wrap="square">
+          <a:bodyPr wrap="square" tIns="25400" bIns="25400" lIns="63500" rIns="63500">
             <a:spAutoFit/>
           </a:bodyPr>
           <a:lstStyle/>
@@ -6341,10 +6435,13 @@
           <a:p>
             <a:pPr>
               <a:lnSpc>
-                <a:spcPct val="90000"/>
-              </a:lnSpc>
-              <a:spcAft>
-                <a:spcPts val="300"/>
+                <a:spcPct val="85000"/>
+              </a:lnSpc>
+              <a:spcBef>
+                <a:spcPts val="200"/>
+              </a:spcBef>
+              <a:spcAft>
+                <a:spcPts val="200"/>
               </a:spcAft>
               <a:defRPr sz="2000"/>
             </a:pPr>
@@ -6356,10 +6453,13 @@
           <a:p>
             <a:pPr>
               <a:lnSpc>
-                <a:spcPct val="90000"/>
-              </a:lnSpc>
-              <a:spcAft>
-                <a:spcPts val="300"/>
+                <a:spcPct val="85000"/>
+              </a:lnSpc>
+              <a:spcBef>
+                <a:spcPts val="200"/>
+              </a:spcBef>
+              <a:spcAft>
+                <a:spcPts val="200"/>
               </a:spcAft>
               <a:defRPr sz="2000"/>
             </a:pPr>
@@ -6371,10 +6471,13 @@
           <a:p>
             <a:pPr>
               <a:lnSpc>
-                <a:spcPct val="90000"/>
-              </a:lnSpc>
-              <a:spcAft>
-                <a:spcPts val="300"/>
+                <a:spcPct val="85000"/>
+              </a:lnSpc>
+              <a:spcBef>
+                <a:spcPts val="200"/>
+              </a:spcBef>
+              <a:spcAft>
+                <a:spcPts val="200"/>
               </a:spcAft>
               <a:defRPr sz="2000"/>
             </a:pPr>
@@ -6386,10 +6489,13 @@
           <a:p>
             <a:pPr>
               <a:lnSpc>
-                <a:spcPct val="90000"/>
-              </a:lnSpc>
-              <a:spcAft>
-                <a:spcPts val="300"/>
+                <a:spcPct val="85000"/>
+              </a:lnSpc>
+              <a:spcBef>
+                <a:spcPts val="200"/>
+              </a:spcBef>
+              <a:spcAft>
+                <a:spcPts val="200"/>
               </a:spcAft>
               <a:defRPr sz="2000"/>
             </a:pPr>
@@ -6401,10 +6507,13 @@
           <a:p>
             <a:pPr>
               <a:lnSpc>
-                <a:spcPct val="90000"/>
-              </a:lnSpc>
-              <a:spcAft>
-                <a:spcPts val="300"/>
+                <a:spcPct val="85000"/>
+              </a:lnSpc>
+              <a:spcBef>
+                <a:spcPts val="200"/>
+              </a:spcBef>
+              <a:spcAft>
+                <a:spcPts val="200"/>
               </a:spcAft>
               <a:defRPr sz="2000"/>
             </a:pPr>
@@ -6416,10 +6525,13 @@
           <a:p>
             <a:pPr>
               <a:lnSpc>
-                <a:spcPct val="90000"/>
-              </a:lnSpc>
-              <a:spcAft>
-                <a:spcPts val="300"/>
+                <a:spcPct val="85000"/>
+              </a:lnSpc>
+              <a:spcBef>
+                <a:spcPts val="200"/>
+              </a:spcBef>
+              <a:spcAft>
+                <a:spcPts val="200"/>
               </a:spcAft>
               <a:defRPr sz="2000"/>
             </a:pPr>
@@ -6442,10 +6554,13 @@
           <a:p>
             <a:pPr>
               <a:lnSpc>
-                <a:spcPct val="90000"/>
-              </a:lnSpc>
-              <a:spcAft>
-                <a:spcPts val="300"/>
+                <a:spcPct val="85000"/>
+              </a:lnSpc>
+              <a:spcBef>
+                <a:spcPts val="200"/>
+              </a:spcBef>
+              <a:spcAft>
+                <a:spcPts val="200"/>
               </a:spcAft>
               <a:defRPr sz="2000"/>
             </a:pPr>
@@ -6457,10 +6572,13 @@
           <a:p>
             <a:pPr>
               <a:lnSpc>
-                <a:spcPct val="90000"/>
-              </a:lnSpc>
-              <a:spcAft>
-                <a:spcPts val="300"/>
+                <a:spcPct val="85000"/>
+              </a:lnSpc>
+              <a:spcBef>
+                <a:spcPts val="200"/>
+              </a:spcBef>
+              <a:spcAft>
+                <a:spcPts val="200"/>
               </a:spcAft>
               <a:defRPr sz="2000"/>
             </a:pPr>
@@ -6472,10 +6590,13 @@
           <a:p>
             <a:pPr>
               <a:lnSpc>
-                <a:spcPct val="90000"/>
-              </a:lnSpc>
-              <a:spcAft>
-                <a:spcPts val="300"/>
+                <a:spcPct val="85000"/>
+              </a:lnSpc>
+              <a:spcBef>
+                <a:spcPts val="200"/>
+              </a:spcBef>
+              <a:spcAft>
+                <a:spcPts val="200"/>
               </a:spcAft>
               <a:defRPr sz="2000"/>
             </a:pPr>
@@ -6487,10 +6608,13 @@
           <a:p>
             <a:pPr>
               <a:lnSpc>
-                <a:spcPct val="90000"/>
-              </a:lnSpc>
-              <a:spcAft>
-                <a:spcPts val="300"/>
+                <a:spcPct val="85000"/>
+              </a:lnSpc>
+              <a:spcBef>
+                <a:spcPts val="200"/>
+              </a:spcBef>
+              <a:spcAft>
+                <a:spcPts val="200"/>
               </a:spcAft>
               <a:defRPr sz="2000"/>
             </a:pPr>
@@ -6502,10 +6626,13 @@
           <a:p>
             <a:pPr>
               <a:lnSpc>
-                <a:spcPct val="90000"/>
-              </a:lnSpc>
-              <a:spcAft>
-                <a:spcPts val="300"/>
+                <a:spcPct val="85000"/>
+              </a:lnSpc>
+              <a:spcBef>
+                <a:spcPts val="200"/>
+              </a:spcBef>
+              <a:spcAft>
+                <a:spcPts val="200"/>
               </a:spcAft>
               <a:defRPr sz="2000"/>
             </a:pPr>
@@ -6528,10 +6655,13 @@
           <a:p>
             <a:pPr>
               <a:lnSpc>
-                <a:spcPct val="90000"/>
-              </a:lnSpc>
-              <a:spcAft>
-                <a:spcPts val="300"/>
+                <a:spcPct val="85000"/>
+              </a:lnSpc>
+              <a:spcBef>
+                <a:spcPts val="200"/>
+              </a:spcBef>
+              <a:spcAft>
+                <a:spcPts val="200"/>
               </a:spcAft>
               <a:defRPr sz="2000"/>
             </a:pPr>
@@ -6543,10 +6673,13 @@
           <a:p>
             <a:pPr>
               <a:lnSpc>
-                <a:spcPct val="90000"/>
-              </a:lnSpc>
-              <a:spcAft>
-                <a:spcPts val="300"/>
+                <a:spcPct val="85000"/>
+              </a:lnSpc>
+              <a:spcBef>
+                <a:spcPts val="200"/>
+              </a:spcBef>
+              <a:spcAft>
+                <a:spcPts val="200"/>
               </a:spcAft>
               <a:defRPr sz="2000"/>
             </a:pPr>
@@ -6558,10 +6691,13 @@
           <a:p>
             <a:pPr>
               <a:lnSpc>
-                <a:spcPct val="90000"/>
-              </a:lnSpc>
-              <a:spcAft>
-                <a:spcPts val="300"/>
+                <a:spcPct val="85000"/>
+              </a:lnSpc>
+              <a:spcBef>
+                <a:spcPts val="200"/>
+              </a:spcBef>
+              <a:spcAft>
+                <a:spcPts val="200"/>
               </a:spcAft>
               <a:defRPr sz="2000"/>
             </a:pPr>
@@ -6602,10 +6738,19 @@
         </p:nvSpPr>
         <p:spPr/>
         <p:txBody>
-          <a:bodyPr wrap="square"/>
+          <a:bodyPr wrap="square" tIns="25400" bIns="25400" lIns="63500" rIns="63500"/>
           <a:lstStyle/>
           <a:p>
             <a:pPr>
+              <a:lnSpc>
+                <a:spcPct val="85000"/>
+              </a:lnSpc>
+              <a:spcBef>
+                <a:spcPts val="200"/>
+              </a:spcBef>
+              <a:spcAft>
+                <a:spcPts val="200"/>
+              </a:spcAft>
               <a:defRPr sz="4000">
                 <a:solidFill>
                   <a:srgbClr val="667EEA"/>
@@ -6613,6 +6758,7 @@
               </a:defRPr>
             </a:pPr>
             <a:r>
+              <a:rPr/>
               <a:t>⚙️ İşletim Sistemi Nedir?</a:t>
             </a:r>
           </a:p>
@@ -6652,7 +6798,7 @@
           <a:noFill/>
         </p:spPr>
         <p:txBody>
-          <a:bodyPr wrap="square">
+          <a:bodyPr wrap="square" tIns="25400" bIns="25400" lIns="63500" rIns="63500">
             <a:spAutoFit/>
           </a:bodyPr>
           <a:lstStyle/>
@@ -6669,10 +6815,13 @@
           <a:p>
             <a:pPr>
               <a:lnSpc>
-                <a:spcPct val="90000"/>
-              </a:lnSpc>
-              <a:spcAft>
-                <a:spcPts val="300"/>
+                <a:spcPct val="85000"/>
+              </a:lnSpc>
+              <a:spcBef>
+                <a:spcPts val="200"/>
+              </a:spcBef>
+              <a:spcAft>
+                <a:spcPts val="200"/>
               </a:spcAft>
               <a:defRPr sz="2000"/>
             </a:pPr>
@@ -6695,10 +6844,13 @@
           <a:p>
             <a:pPr>
               <a:lnSpc>
-                <a:spcPct val="90000"/>
-              </a:lnSpc>
-              <a:spcAft>
-                <a:spcPts val="300"/>
+                <a:spcPct val="85000"/>
+              </a:lnSpc>
+              <a:spcBef>
+                <a:spcPts val="200"/>
+              </a:spcBef>
+              <a:spcAft>
+                <a:spcPts val="200"/>
               </a:spcAft>
               <a:defRPr sz="2000"/>
             </a:pPr>
@@ -6710,10 +6862,13 @@
           <a:p>
             <a:pPr>
               <a:lnSpc>
-                <a:spcPct val="90000"/>
-              </a:lnSpc>
-              <a:spcAft>
-                <a:spcPts val="300"/>
+                <a:spcPct val="85000"/>
+              </a:lnSpc>
+              <a:spcBef>
+                <a:spcPts val="200"/>
+              </a:spcBef>
+              <a:spcAft>
+                <a:spcPts val="200"/>
               </a:spcAft>
               <a:defRPr sz="2000"/>
             </a:pPr>
@@ -6725,10 +6880,13 @@
           <a:p>
             <a:pPr>
               <a:lnSpc>
-                <a:spcPct val="90000"/>
-              </a:lnSpc>
-              <a:spcAft>
-                <a:spcPts val="300"/>
+                <a:spcPct val="85000"/>
+              </a:lnSpc>
+              <a:spcBef>
+                <a:spcPts val="200"/>
+              </a:spcBef>
+              <a:spcAft>
+                <a:spcPts val="200"/>
               </a:spcAft>
               <a:defRPr sz="2000"/>
             </a:pPr>
@@ -6740,10 +6898,13 @@
           <a:p>
             <a:pPr>
               <a:lnSpc>
-                <a:spcPct val="90000"/>
-              </a:lnSpc>
-              <a:spcAft>
-                <a:spcPts val="300"/>
+                <a:spcPct val="85000"/>
+              </a:lnSpc>
+              <a:spcBef>
+                <a:spcPts val="200"/>
+              </a:spcBef>
+              <a:spcAft>
+                <a:spcPts val="200"/>
               </a:spcAft>
               <a:defRPr sz="2000"/>
             </a:pPr>
@@ -6755,10 +6916,13 @@
           <a:p>
             <a:pPr>
               <a:lnSpc>
-                <a:spcPct val="90000"/>
-              </a:lnSpc>
-              <a:spcAft>
-                <a:spcPts val="300"/>
+                <a:spcPct val="85000"/>
+              </a:lnSpc>
+              <a:spcBef>
+                <a:spcPts val="200"/>
+              </a:spcBef>
+              <a:spcAft>
+                <a:spcPts val="200"/>
               </a:spcAft>
               <a:defRPr sz="2000"/>
             </a:pPr>
@@ -6781,10 +6945,13 @@
           <a:p>
             <a:pPr>
               <a:lnSpc>
-                <a:spcPct val="90000"/>
-              </a:lnSpc>
-              <a:spcAft>
-                <a:spcPts val="300"/>
+                <a:spcPct val="85000"/>
+              </a:lnSpc>
+              <a:spcBef>
+                <a:spcPts val="200"/>
+              </a:spcBef>
+              <a:spcAft>
+                <a:spcPts val="200"/>
               </a:spcAft>
               <a:defRPr sz="2000"/>
             </a:pPr>
@@ -6796,10 +6963,13 @@
           <a:p>
             <a:pPr>
               <a:lnSpc>
-                <a:spcPct val="90000"/>
-              </a:lnSpc>
-              <a:spcAft>
-                <a:spcPts val="300"/>
+                <a:spcPct val="85000"/>
+              </a:lnSpc>
+              <a:spcBef>
+                <a:spcPts val="200"/>
+              </a:spcBef>
+              <a:spcAft>
+                <a:spcPts val="200"/>
               </a:spcAft>
               <a:defRPr sz="2000"/>
             </a:pPr>
@@ -6822,10 +6992,13 @@
           <a:p>
             <a:pPr>
               <a:lnSpc>
-                <a:spcPct val="90000"/>
-              </a:lnSpc>
-              <a:spcAft>
-                <a:spcPts val="300"/>
+                <a:spcPct val="85000"/>
+              </a:lnSpc>
+              <a:spcBef>
+                <a:spcPts val="200"/>
+              </a:spcBef>
+              <a:spcAft>
+                <a:spcPts val="200"/>
               </a:spcAft>
               <a:defRPr sz="2000"/>
             </a:pPr>
@@ -6837,10 +7010,13 @@
           <a:p>
             <a:pPr>
               <a:lnSpc>
-                <a:spcPct val="90000"/>
-              </a:lnSpc>
-              <a:spcAft>
-                <a:spcPts val="300"/>
+                <a:spcPct val="85000"/>
+              </a:lnSpc>
+              <a:spcBef>
+                <a:spcPts val="200"/>
+              </a:spcBef>
+              <a:spcAft>
+                <a:spcPts val="200"/>
               </a:spcAft>
               <a:defRPr sz="2000"/>
             </a:pPr>
@@ -6852,10 +7028,13 @@
           <a:p>
             <a:pPr>
               <a:lnSpc>
-                <a:spcPct val="90000"/>
-              </a:lnSpc>
-              <a:spcAft>
-                <a:spcPts val="300"/>
+                <a:spcPct val="85000"/>
+              </a:lnSpc>
+              <a:spcBef>
+                <a:spcPts val="200"/>
+              </a:spcBef>
+              <a:spcAft>
+                <a:spcPts val="200"/>
               </a:spcAft>
               <a:defRPr sz="2000"/>
             </a:pPr>
@@ -6867,10 +7046,13 @@
           <a:p>
             <a:pPr>
               <a:lnSpc>
-                <a:spcPct val="90000"/>
-              </a:lnSpc>
-              <a:spcAft>
-                <a:spcPts val="300"/>
+                <a:spcPct val="85000"/>
+              </a:lnSpc>
+              <a:spcBef>
+                <a:spcPts val="200"/>
+              </a:spcBef>
+              <a:spcAft>
+                <a:spcPts val="200"/>
               </a:spcAft>
               <a:defRPr sz="2000"/>
             </a:pPr>
@@ -6882,10 +7064,13 @@
           <a:p>
             <a:pPr>
               <a:lnSpc>
-                <a:spcPct val="90000"/>
-              </a:lnSpc>
-              <a:spcAft>
-                <a:spcPts val="300"/>
+                <a:spcPct val="85000"/>
+              </a:lnSpc>
+              <a:spcBef>
+                <a:spcPts val="200"/>
+              </a:spcBef>
+              <a:spcAft>
+                <a:spcPts val="200"/>
               </a:spcAft>
               <a:defRPr sz="2000"/>
             </a:pPr>
@@ -6926,10 +7111,19 @@
         </p:nvSpPr>
         <p:spPr/>
         <p:txBody>
-          <a:bodyPr wrap="square"/>
+          <a:bodyPr wrap="square" tIns="25400" bIns="25400" lIns="63500" rIns="63500"/>
           <a:lstStyle/>
           <a:p>
             <a:pPr>
+              <a:lnSpc>
+                <a:spcPct val="85000"/>
+              </a:lnSpc>
+              <a:spcBef>
+                <a:spcPts val="200"/>
+              </a:spcBef>
+              <a:spcAft>
+                <a:spcPts val="200"/>
+              </a:spcAft>
               <a:defRPr sz="4000">
                 <a:solidFill>
                   <a:srgbClr val="667EEA"/>
@@ -6937,6 +7131,7 @@
               </a:defRPr>
             </a:pPr>
             <a:r>
+              <a:rPr/>
               <a:t>🪟 Windows İşletim Sistemi</a:t>
             </a:r>
           </a:p>
@@ -6976,7 +7171,7 @@
           <a:noFill/>
         </p:spPr>
         <p:txBody>
-          <a:bodyPr wrap="square">
+          <a:bodyPr wrap="square" tIns="25400" bIns="25400" lIns="63500" rIns="63500">
             <a:spAutoFit/>
           </a:bodyPr>
           <a:lstStyle/>
@@ -6993,10 +7188,13 @@
           <a:p>
             <a:pPr>
               <a:lnSpc>
-                <a:spcPct val="90000"/>
-              </a:lnSpc>
-              <a:spcAft>
-                <a:spcPts val="300"/>
+                <a:spcPct val="85000"/>
+              </a:lnSpc>
+              <a:spcBef>
+                <a:spcPts val="200"/>
+              </a:spcBef>
+              <a:spcAft>
+                <a:spcPts val="200"/>
               </a:spcAft>
               <a:defRPr sz="2000"/>
             </a:pPr>
@@ -7019,10 +7217,13 @@
           <a:p>
             <a:pPr>
               <a:lnSpc>
-                <a:spcPct val="90000"/>
-              </a:lnSpc>
-              <a:spcAft>
-                <a:spcPts val="300"/>
+                <a:spcPct val="85000"/>
+              </a:lnSpc>
+              <a:spcBef>
+                <a:spcPts val="200"/>
+              </a:spcBef>
+              <a:spcAft>
+                <a:spcPts val="200"/>
               </a:spcAft>
               <a:defRPr sz="2000"/>
             </a:pPr>
@@ -7034,10 +7235,13 @@
           <a:p>
             <a:pPr>
               <a:lnSpc>
-                <a:spcPct val="90000"/>
-              </a:lnSpc>
-              <a:spcAft>
-                <a:spcPts val="300"/>
+                <a:spcPct val="85000"/>
+              </a:lnSpc>
+              <a:spcBef>
+                <a:spcPts val="200"/>
+              </a:spcBef>
+              <a:spcAft>
+                <a:spcPts val="200"/>
               </a:spcAft>
               <a:defRPr sz="2000"/>
             </a:pPr>
@@ -7049,10 +7253,13 @@
           <a:p>
             <a:pPr>
               <a:lnSpc>
-                <a:spcPct val="90000"/>
-              </a:lnSpc>
-              <a:spcAft>
-                <a:spcPts val="300"/>
+                <a:spcPct val="85000"/>
+              </a:lnSpc>
+              <a:spcBef>
+                <a:spcPts val="200"/>
+              </a:spcBef>
+              <a:spcAft>
+                <a:spcPts val="200"/>
               </a:spcAft>
               <a:defRPr sz="2000"/>
             </a:pPr>
@@ -7064,10 +7271,13 @@
           <a:p>
             <a:pPr>
               <a:lnSpc>
-                <a:spcPct val="90000"/>
-              </a:lnSpc>
-              <a:spcAft>
-                <a:spcPts val="300"/>
+                <a:spcPct val="85000"/>
+              </a:lnSpc>
+              <a:spcBef>
+                <a:spcPts val="200"/>
+              </a:spcBef>
+              <a:spcAft>
+                <a:spcPts val="200"/>
               </a:spcAft>
               <a:defRPr sz="2000"/>
             </a:pPr>
@@ -7079,10 +7289,13 @@
           <a:p>
             <a:pPr>
               <a:lnSpc>
-                <a:spcPct val="90000"/>
-              </a:lnSpc>
-              <a:spcAft>
-                <a:spcPts val="300"/>
+                <a:spcPct val="85000"/>
+              </a:lnSpc>
+              <a:spcBef>
+                <a:spcPts val="200"/>
+              </a:spcBef>
+              <a:spcAft>
+                <a:spcPts val="200"/>
               </a:spcAft>
               <a:defRPr sz="2000"/>
             </a:pPr>
@@ -7094,10 +7307,13 @@
           <a:p>
             <a:pPr>
               <a:lnSpc>
-                <a:spcPct val="90000"/>
-              </a:lnSpc>
-              <a:spcAft>
-                <a:spcPts val="300"/>
+                <a:spcPct val="85000"/>
+              </a:lnSpc>
+              <a:spcBef>
+                <a:spcPts val="200"/>
+              </a:spcBef>
+              <a:spcAft>
+                <a:spcPts val="200"/>
               </a:spcAft>
               <a:defRPr sz="2000"/>
             </a:pPr>
@@ -7120,10 +7336,13 @@
           <a:p>
             <a:pPr>
               <a:lnSpc>
-                <a:spcPct val="90000"/>
-              </a:lnSpc>
-              <a:spcAft>
-                <a:spcPts val="300"/>
+                <a:spcPct val="85000"/>
+              </a:lnSpc>
+              <a:spcBef>
+                <a:spcPts val="200"/>
+              </a:spcBef>
+              <a:spcAft>
+                <a:spcPts val="200"/>
               </a:spcAft>
               <a:defRPr sz="2000"/>
             </a:pPr>
@@ -7135,10 +7354,13 @@
           <a:p>
             <a:pPr>
               <a:lnSpc>
-                <a:spcPct val="90000"/>
-              </a:lnSpc>
-              <a:spcAft>
-                <a:spcPts val="300"/>
+                <a:spcPct val="85000"/>
+              </a:lnSpc>
+              <a:spcBef>
+                <a:spcPts val="200"/>
+              </a:spcBef>
+              <a:spcAft>
+                <a:spcPts val="200"/>
               </a:spcAft>
               <a:defRPr sz="2000"/>
             </a:pPr>
@@ -7150,10 +7372,13 @@
           <a:p>
             <a:pPr>
               <a:lnSpc>
-                <a:spcPct val="90000"/>
-              </a:lnSpc>
-              <a:spcAft>
-                <a:spcPts val="300"/>
+                <a:spcPct val="85000"/>
+              </a:lnSpc>
+              <a:spcBef>
+                <a:spcPts val="200"/>
+              </a:spcBef>
+              <a:spcAft>
+                <a:spcPts val="200"/>
               </a:spcAft>
               <a:defRPr sz="2000"/>
             </a:pPr>
@@ -7176,10 +7401,13 @@
           <a:p>
             <a:pPr>
               <a:lnSpc>
-                <a:spcPct val="90000"/>
-              </a:lnSpc>
-              <a:spcAft>
-                <a:spcPts val="300"/>
+                <a:spcPct val="85000"/>
+              </a:lnSpc>
+              <a:spcBef>
+                <a:spcPts val="200"/>
+              </a:spcBef>
+              <a:spcAft>
+                <a:spcPts val="200"/>
               </a:spcAft>
               <a:defRPr sz="2000"/>
             </a:pPr>
@@ -7191,10 +7419,13 @@
           <a:p>
             <a:pPr>
               <a:lnSpc>
-                <a:spcPct val="90000"/>
-              </a:lnSpc>
-              <a:spcAft>
-                <a:spcPts val="300"/>
+                <a:spcPct val="85000"/>
+              </a:lnSpc>
+              <a:spcBef>
+                <a:spcPts val="200"/>
+              </a:spcBef>
+              <a:spcAft>
+                <a:spcPts val="200"/>
               </a:spcAft>
               <a:defRPr sz="2000"/>
             </a:pPr>
@@ -7206,10 +7437,13 @@
           <a:p>
             <a:pPr>
               <a:lnSpc>
-                <a:spcPct val="90000"/>
-              </a:lnSpc>
-              <a:spcAft>
-                <a:spcPts val="300"/>
+                <a:spcPct val="85000"/>
+              </a:lnSpc>
+              <a:spcBef>
+                <a:spcPts val="200"/>
+              </a:spcBef>
+              <a:spcAft>
+                <a:spcPts val="200"/>
               </a:spcAft>
               <a:defRPr sz="2000"/>
             </a:pPr>
@@ -7221,10 +7455,13 @@
           <a:p>
             <a:pPr>
               <a:lnSpc>
-                <a:spcPct val="90000"/>
-              </a:lnSpc>
-              <a:spcAft>
-                <a:spcPts val="300"/>
+                <a:spcPct val="85000"/>
+              </a:lnSpc>
+              <a:spcBef>
+                <a:spcPts val="200"/>
+              </a:spcBef>
+              <a:spcAft>
+                <a:spcPts val="200"/>
               </a:spcAft>
               <a:defRPr sz="2000"/>
             </a:pPr>
@@ -7236,10 +7473,13 @@
           <a:p>
             <a:pPr>
               <a:lnSpc>
-                <a:spcPct val="90000"/>
-              </a:lnSpc>
-              <a:spcAft>
-                <a:spcPts val="300"/>
+                <a:spcPct val="85000"/>
+              </a:lnSpc>
+              <a:spcBef>
+                <a:spcPts val="200"/>
+              </a:spcBef>
+              <a:spcAft>
+                <a:spcPts val="200"/>
               </a:spcAft>
               <a:defRPr sz="2000"/>
             </a:pPr>
@@ -7280,10 +7520,19 @@
         </p:nvSpPr>
         <p:spPr/>
         <p:txBody>
-          <a:bodyPr wrap="square"/>
+          <a:bodyPr wrap="square" tIns="25400" bIns="25400" lIns="63500" rIns="63500"/>
           <a:lstStyle/>
           <a:p>
             <a:pPr>
+              <a:lnSpc>
+                <a:spcPct val="85000"/>
+              </a:lnSpc>
+              <a:spcBef>
+                <a:spcPts val="200"/>
+              </a:spcBef>
+              <a:spcAft>
+                <a:spcPts val="200"/>
+              </a:spcAft>
               <a:defRPr sz="4000">
                 <a:solidFill>
                   <a:srgbClr val="667EEA"/>
@@ -7291,6 +7540,7 @@
               </a:defRPr>
             </a:pPr>
             <a:r>
+              <a:rPr/>
               <a:t>📁 Dosya ve Klasör Nedir?</a:t>
             </a:r>
           </a:p>
@@ -7330,7 +7580,7 @@
           <a:noFill/>
         </p:spPr>
         <p:txBody>
-          <a:bodyPr wrap="square">
+          <a:bodyPr wrap="square" tIns="25400" bIns="25400" lIns="63500" rIns="63500">
             <a:spAutoFit/>
           </a:bodyPr>
           <a:lstStyle/>
@@ -7347,10 +7597,13 @@
           <a:p>
             <a:pPr>
               <a:lnSpc>
-                <a:spcPct val="90000"/>
-              </a:lnSpc>
-              <a:spcAft>
-                <a:spcPts val="300"/>
+                <a:spcPct val="85000"/>
+              </a:lnSpc>
+              <a:spcBef>
+                <a:spcPts val="200"/>
+              </a:spcBef>
+              <a:spcAft>
+                <a:spcPts val="200"/>
               </a:spcAft>
               <a:defRPr sz="2000"/>
             </a:pPr>
@@ -7362,10 +7615,13 @@
           <a:p>
             <a:pPr>
               <a:lnSpc>
-                <a:spcPct val="90000"/>
-              </a:lnSpc>
-              <a:spcAft>
-                <a:spcPts val="300"/>
+                <a:spcPct val="85000"/>
+              </a:lnSpc>
+              <a:spcBef>
+                <a:spcPts val="200"/>
+              </a:spcBef>
+              <a:spcAft>
+                <a:spcPts val="200"/>
               </a:spcAft>
               <a:defRPr sz="2000"/>
             </a:pPr>
@@ -7377,10 +7633,13 @@
           <a:p>
             <a:pPr>
               <a:lnSpc>
-                <a:spcPct val="90000"/>
-              </a:lnSpc>
-              <a:spcAft>
-                <a:spcPts val="300"/>
+                <a:spcPct val="85000"/>
+              </a:lnSpc>
+              <a:spcBef>
+                <a:spcPts val="200"/>
+              </a:spcBef>
+              <a:spcAft>
+                <a:spcPts val="200"/>
               </a:spcAft>
               <a:defRPr sz="2000"/>
             </a:pPr>
@@ -7403,10 +7662,13 @@
           <a:p>
             <a:pPr>
               <a:lnSpc>
-                <a:spcPct val="90000"/>
-              </a:lnSpc>
-              <a:spcAft>
-                <a:spcPts val="300"/>
+                <a:spcPct val="85000"/>
+              </a:lnSpc>
+              <a:spcBef>
+                <a:spcPts val="200"/>
+              </a:spcBef>
+              <a:spcAft>
+                <a:spcPts val="200"/>
               </a:spcAft>
               <a:defRPr sz="2000"/>
             </a:pPr>
@@ -7418,10 +7680,13 @@
           <a:p>
             <a:pPr>
               <a:lnSpc>
-                <a:spcPct val="90000"/>
-              </a:lnSpc>
-              <a:spcAft>
-                <a:spcPts val="300"/>
+                <a:spcPct val="85000"/>
+              </a:lnSpc>
+              <a:spcBef>
+                <a:spcPts val="200"/>
+              </a:spcBef>
+              <a:spcAft>
+                <a:spcPts val="200"/>
               </a:spcAft>
               <a:defRPr sz="2000"/>
             </a:pPr>
@@ -7433,10 +7698,13 @@
           <a:p>
             <a:pPr>
               <a:lnSpc>
-                <a:spcPct val="90000"/>
-              </a:lnSpc>
-              <a:spcAft>
-                <a:spcPts val="300"/>
+                <a:spcPct val="85000"/>
+              </a:lnSpc>
+              <a:spcBef>
+                <a:spcPts val="200"/>
+              </a:spcBef>
+              <a:spcAft>
+                <a:spcPts val="200"/>
               </a:spcAft>
               <a:defRPr sz="2000"/>
             </a:pPr>
@@ -7459,10 +7727,13 @@
           <a:p>
             <a:pPr>
               <a:lnSpc>
-                <a:spcPct val="90000"/>
-              </a:lnSpc>
-              <a:spcAft>
-                <a:spcPts val="300"/>
+                <a:spcPct val="85000"/>
+              </a:lnSpc>
+              <a:spcBef>
+                <a:spcPts val="200"/>
+              </a:spcBef>
+              <a:spcAft>
+                <a:spcPts val="200"/>
               </a:spcAft>
               <a:defRPr sz="2000"/>
             </a:pPr>
@@ -7474,10 +7745,13 @@
           <a:p>
             <a:pPr>
               <a:lnSpc>
-                <a:spcPct val="90000"/>
-              </a:lnSpc>
-              <a:spcAft>
-                <a:spcPts val="300"/>
+                <a:spcPct val="85000"/>
+              </a:lnSpc>
+              <a:spcBef>
+                <a:spcPts val="200"/>
+              </a:spcBef>
+              <a:spcAft>
+                <a:spcPts val="200"/>
               </a:spcAft>
               <a:defRPr sz="2000"/>
             </a:pPr>
@@ -7489,10 +7763,13 @@
           <a:p>
             <a:pPr>
               <a:lnSpc>
-                <a:spcPct val="90000"/>
-              </a:lnSpc>
-              <a:spcAft>
-                <a:spcPts val="300"/>
+                <a:spcPct val="85000"/>
+              </a:lnSpc>
+              <a:spcBef>
+                <a:spcPts val="200"/>
+              </a:spcBef>
+              <a:spcAft>
+                <a:spcPts val="200"/>
               </a:spcAft>
               <a:defRPr sz="2000"/>
             </a:pPr>
@@ -7504,10 +7781,13 @@
           <a:p>
             <a:pPr>
               <a:lnSpc>
-                <a:spcPct val="90000"/>
-              </a:lnSpc>
-              <a:spcAft>
-                <a:spcPts val="300"/>
+                <a:spcPct val="85000"/>
+              </a:lnSpc>
+              <a:spcBef>
+                <a:spcPts val="200"/>
+              </a:spcBef>
+              <a:spcAft>
+                <a:spcPts val="200"/>
               </a:spcAft>
               <a:defRPr sz="2000"/>
             </a:pPr>
@@ -7519,10 +7799,13 @@
           <a:p>
             <a:pPr>
               <a:lnSpc>
-                <a:spcPct val="90000"/>
-              </a:lnSpc>
-              <a:spcAft>
-                <a:spcPts val="300"/>
+                <a:spcPct val="85000"/>
+              </a:lnSpc>
+              <a:spcBef>
+                <a:spcPts val="200"/>
+              </a:spcBef>
+              <a:spcAft>
+                <a:spcPts val="200"/>
               </a:spcAft>
               <a:defRPr sz="2000"/>
             </a:pPr>
@@ -7534,10 +7817,13 @@
           <a:p>
             <a:pPr>
               <a:lnSpc>
-                <a:spcPct val="90000"/>
-              </a:lnSpc>
-              <a:spcAft>
-                <a:spcPts val="300"/>
+                <a:spcPct val="85000"/>
+              </a:lnSpc>
+              <a:spcBef>
+                <a:spcPts val="200"/>
+              </a:spcBef>
+              <a:spcAft>
+                <a:spcPts val="200"/>
               </a:spcAft>
               <a:defRPr sz="2000"/>
             </a:pPr>
@@ -7549,10 +7835,13 @@
           <a:p>
             <a:pPr>
               <a:lnSpc>
-                <a:spcPct val="90000"/>
-              </a:lnSpc>
-              <a:spcAft>
-                <a:spcPts val="300"/>
+                <a:spcPct val="85000"/>
+              </a:lnSpc>
+              <a:spcBef>
+                <a:spcPts val="200"/>
+              </a:spcBef>
+              <a:spcAft>
+                <a:spcPts val="200"/>
               </a:spcAft>
               <a:defRPr sz="2000"/>
             </a:pPr>
@@ -7564,10 +7853,13 @@
           <a:p>
             <a:pPr>
               <a:lnSpc>
-                <a:spcPct val="90000"/>
-              </a:lnSpc>
-              <a:spcAft>
-                <a:spcPts val="300"/>
+                <a:spcPct val="85000"/>
+              </a:lnSpc>
+              <a:spcBef>
+                <a:spcPts val="200"/>
+              </a:spcBef>
+              <a:spcAft>
+                <a:spcPts val="200"/>
               </a:spcAft>
               <a:defRPr sz="2000"/>
             </a:pPr>
@@ -7579,10 +7871,13 @@
           <a:p>
             <a:pPr>
               <a:lnSpc>
-                <a:spcPct val="90000"/>
-              </a:lnSpc>
-              <a:spcAft>
-                <a:spcPts val="300"/>
+                <a:spcPct val="85000"/>
+              </a:lnSpc>
+              <a:spcBef>
+                <a:spcPts val="200"/>
+              </a:spcBef>
+              <a:spcAft>
+                <a:spcPts val="200"/>
               </a:spcAft>
               <a:defRPr sz="2000"/>
             </a:pPr>
@@ -7623,10 +7918,19 @@
         </p:nvSpPr>
         <p:spPr/>
         <p:txBody>
-          <a:bodyPr wrap="square"/>
+          <a:bodyPr wrap="square" tIns="25400" bIns="25400" lIns="63500" rIns="63500"/>
           <a:lstStyle/>
           <a:p>
             <a:pPr>
+              <a:lnSpc>
+                <a:spcPct val="85000"/>
+              </a:lnSpc>
+              <a:spcBef>
+                <a:spcPts val="200"/>
+              </a:spcBef>
+              <a:spcAft>
+                <a:spcPts val="200"/>
+              </a:spcAft>
               <a:defRPr sz="4000">
                 <a:solidFill>
                   <a:srgbClr val="667EEA"/>
@@ -7634,6 +7938,7 @@
               </a:defRPr>
             </a:pPr>
             <a:r>
+              <a:rPr/>
               <a:t>🛠️ Dosya İşlemleri</a:t>
             </a:r>
           </a:p>
@@ -7673,7 +7978,7 @@
           <a:noFill/>
         </p:spPr>
         <p:txBody>
-          <a:bodyPr wrap="square">
+          <a:bodyPr wrap="square" tIns="25400" bIns="25400" lIns="63500" rIns="63500">
             <a:spAutoFit/>
           </a:bodyPr>
           <a:lstStyle/>
@@ -7690,10 +7995,13 @@
           <a:p>
             <a:pPr>
               <a:lnSpc>
-                <a:spcPct val="90000"/>
-              </a:lnSpc>
-              <a:spcAft>
-                <a:spcPts val="300"/>
+                <a:spcPct val="85000"/>
+              </a:lnSpc>
+              <a:spcBef>
+                <a:spcPts val="200"/>
+              </a:spcBef>
+              <a:spcAft>
+                <a:spcPts val="200"/>
               </a:spcAft>
               <a:defRPr sz="2000"/>
             </a:pPr>
@@ -7716,10 +8024,13 @@
           <a:p>
             <a:pPr>
               <a:lnSpc>
-                <a:spcPct val="90000"/>
-              </a:lnSpc>
-              <a:spcAft>
-                <a:spcPts val="300"/>
+                <a:spcPct val="85000"/>
+              </a:lnSpc>
+              <a:spcBef>
+                <a:spcPts val="200"/>
+              </a:spcBef>
+              <a:spcAft>
+                <a:spcPts val="200"/>
               </a:spcAft>
               <a:defRPr sz="2000"/>
             </a:pPr>
@@ -7731,10 +8042,13 @@
           <a:p>
             <a:pPr>
               <a:lnSpc>
-                <a:spcPct val="90000"/>
-              </a:lnSpc>
-              <a:spcAft>
-                <a:spcPts val="300"/>
+                <a:spcPct val="85000"/>
+              </a:lnSpc>
+              <a:spcBef>
+                <a:spcPts val="200"/>
+              </a:spcBef>
+              <a:spcAft>
+                <a:spcPts val="200"/>
               </a:spcAft>
               <a:defRPr sz="2000"/>
             </a:pPr>
@@ -7757,10 +8071,13 @@
           <a:p>
             <a:pPr>
               <a:lnSpc>
-                <a:spcPct val="90000"/>
-              </a:lnSpc>
-              <a:spcAft>
-                <a:spcPts val="300"/>
+                <a:spcPct val="85000"/>
+              </a:lnSpc>
+              <a:spcBef>
+                <a:spcPts val="200"/>
+              </a:spcBef>
+              <a:spcAft>
+                <a:spcPts val="200"/>
               </a:spcAft>
               <a:defRPr sz="2000"/>
             </a:pPr>
@@ -7772,10 +8089,13 @@
           <a:p>
             <a:pPr>
               <a:lnSpc>
-                <a:spcPct val="90000"/>
-              </a:lnSpc>
-              <a:spcAft>
-                <a:spcPts val="300"/>
+                <a:spcPct val="85000"/>
+              </a:lnSpc>
+              <a:spcBef>
+                <a:spcPts val="200"/>
+              </a:spcBef>
+              <a:spcAft>
+                <a:spcPts val="200"/>
               </a:spcAft>
               <a:defRPr sz="2000"/>
             </a:pPr>
@@ -7798,10 +8118,13 @@
           <a:p>
             <a:pPr>
               <a:lnSpc>
-                <a:spcPct val="90000"/>
-              </a:lnSpc>
-              <a:spcAft>
-                <a:spcPts val="300"/>
+                <a:spcPct val="85000"/>
+              </a:lnSpc>
+              <a:spcBef>
+                <a:spcPts val="200"/>
+              </a:spcBef>
+              <a:spcAft>
+                <a:spcPts val="200"/>
               </a:spcAft>
               <a:defRPr sz="2000"/>
             </a:pPr>
@@ -7813,10 +8136,13 @@
           <a:p>
             <a:pPr>
               <a:lnSpc>
-                <a:spcPct val="90000"/>
-              </a:lnSpc>
-              <a:spcAft>
-                <a:spcPts val="300"/>
+                <a:spcPct val="85000"/>
+              </a:lnSpc>
+              <a:spcBef>
+                <a:spcPts val="200"/>
+              </a:spcBef>
+              <a:spcAft>
+                <a:spcPts val="200"/>
               </a:spcAft>
               <a:defRPr sz="2000"/>
             </a:pPr>
@@ -7839,10 +8165,13 @@
           <a:p>
             <a:pPr>
               <a:lnSpc>
-                <a:spcPct val="90000"/>
-              </a:lnSpc>
-              <a:spcAft>
-                <a:spcPts val="300"/>
+                <a:spcPct val="85000"/>
+              </a:lnSpc>
+              <a:spcBef>
+                <a:spcPts val="200"/>
+              </a:spcBef>
+              <a:spcAft>
+                <a:spcPts val="200"/>
               </a:spcAft>
               <a:defRPr sz="2000"/>
             </a:pPr>
@@ -7854,10 +8183,13 @@
           <a:p>
             <a:pPr>
               <a:lnSpc>
-                <a:spcPct val="90000"/>
-              </a:lnSpc>
-              <a:spcAft>
-                <a:spcPts val="300"/>
+                <a:spcPct val="85000"/>
+              </a:lnSpc>
+              <a:spcBef>
+                <a:spcPts val="200"/>
+              </a:spcBef>
+              <a:spcAft>
+                <a:spcPts val="200"/>
               </a:spcAft>
               <a:defRPr sz="2000"/>
             </a:pPr>
@@ -7880,10 +8212,13 @@
           <a:p>
             <a:pPr>
               <a:lnSpc>
-                <a:spcPct val="90000"/>
-              </a:lnSpc>
-              <a:spcAft>
-                <a:spcPts val="300"/>
+                <a:spcPct val="85000"/>
+              </a:lnSpc>
+              <a:spcBef>
+                <a:spcPts val="200"/>
+              </a:spcBef>
+              <a:spcAft>
+                <a:spcPts val="200"/>
               </a:spcAft>
               <a:defRPr sz="2000"/>
             </a:pPr>
@@ -7895,10 +8230,13 @@
           <a:p>
             <a:pPr>
               <a:lnSpc>
-                <a:spcPct val="90000"/>
-              </a:lnSpc>
-              <a:spcAft>
-                <a:spcPts val="300"/>
+                <a:spcPct val="85000"/>
+              </a:lnSpc>
+              <a:spcBef>
+                <a:spcPts val="200"/>
+              </a:spcBef>
+              <a:spcAft>
+                <a:spcPts val="200"/>
               </a:spcAft>
               <a:defRPr sz="2000"/>
             </a:pPr>
@@ -7910,10 +8248,13 @@
           <a:p>
             <a:pPr>
               <a:lnSpc>
-                <a:spcPct val="90000"/>
-              </a:lnSpc>
-              <a:spcAft>
-                <a:spcPts val="300"/>
+                <a:spcPct val="85000"/>
+              </a:lnSpc>
+              <a:spcBef>
+                <a:spcPts val="200"/>
+              </a:spcBef>
+              <a:spcAft>
+                <a:spcPts val="200"/>
               </a:spcAft>
               <a:defRPr sz="2000"/>
             </a:pPr>
@@ -7936,10 +8277,13 @@
           <a:p>
             <a:pPr>
               <a:lnSpc>
-                <a:spcPct val="90000"/>
-              </a:lnSpc>
-              <a:spcAft>
-                <a:spcPts val="300"/>
+                <a:spcPct val="85000"/>
+              </a:lnSpc>
+              <a:spcBef>
+                <a:spcPts val="200"/>
+              </a:spcBef>
+              <a:spcAft>
+                <a:spcPts val="200"/>
               </a:spcAft>
               <a:defRPr sz="2000"/>
             </a:pPr>
@@ -7951,10 +8295,13 @@
           <a:p>
             <a:pPr>
               <a:lnSpc>
-                <a:spcPct val="90000"/>
-              </a:lnSpc>
-              <a:spcAft>
-                <a:spcPts val="300"/>
+                <a:spcPct val="85000"/>
+              </a:lnSpc>
+              <a:spcBef>
+                <a:spcPts val="200"/>
+              </a:spcBef>
+              <a:spcAft>
+                <a:spcPts val="200"/>
               </a:spcAft>
               <a:defRPr sz="2000"/>
             </a:pPr>
@@ -7995,10 +8342,19 @@
         </p:nvSpPr>
         <p:spPr/>
         <p:txBody>
-          <a:bodyPr wrap="square"/>
+          <a:bodyPr wrap="square" tIns="25400" bIns="25400" lIns="63500" rIns="63500"/>
           <a:lstStyle/>
           <a:p>
             <a:pPr>
+              <a:lnSpc>
+                <a:spcPct val="85000"/>
+              </a:lnSpc>
+              <a:spcBef>
+                <a:spcPts val="200"/>
+              </a:spcBef>
+              <a:spcAft>
+                <a:spcPts val="200"/>
+              </a:spcAft>
               <a:defRPr sz="4000">
                 <a:solidFill>
                   <a:srgbClr val="667EEA"/>
@@ -8006,6 +8362,7 @@
               </a:defRPr>
             </a:pPr>
             <a:r>
+              <a:rPr/>
               <a:t>💡 İyi Dosya Düzenleme İpuçları</a:t>
             </a:r>
           </a:p>
@@ -8045,7 +8402,7 @@
           <a:noFill/>
         </p:spPr>
         <p:txBody>
-          <a:bodyPr wrap="square">
+          <a:bodyPr wrap="square" tIns="25400" bIns="25400" lIns="63500" rIns="63500">
             <a:spAutoFit/>
           </a:bodyPr>
           <a:lstStyle/>
@@ -8062,10 +8419,13 @@
           <a:p>
             <a:pPr>
               <a:lnSpc>
-                <a:spcPct val="90000"/>
-              </a:lnSpc>
-              <a:spcAft>
-                <a:spcPts val="300"/>
+                <a:spcPct val="85000"/>
+              </a:lnSpc>
+              <a:spcBef>
+                <a:spcPts val="200"/>
+              </a:spcBef>
+              <a:spcAft>
+                <a:spcPts val="200"/>
               </a:spcAft>
               <a:defRPr sz="2000"/>
             </a:pPr>
@@ -8077,10 +8437,13 @@
           <a:p>
             <a:pPr>
               <a:lnSpc>
-                <a:spcPct val="90000"/>
-              </a:lnSpc>
-              <a:spcAft>
-                <a:spcPts val="300"/>
+                <a:spcPct val="85000"/>
+              </a:lnSpc>
+              <a:spcBef>
+                <a:spcPts val="200"/>
+              </a:spcBef>
+              <a:spcAft>
+                <a:spcPts val="200"/>
               </a:spcAft>
               <a:defRPr sz="2000"/>
             </a:pPr>
@@ -8092,10 +8455,13 @@
           <a:p>
             <a:pPr>
               <a:lnSpc>
-                <a:spcPct val="90000"/>
-              </a:lnSpc>
-              <a:spcAft>
-                <a:spcPts val="300"/>
+                <a:spcPct val="85000"/>
+              </a:lnSpc>
+              <a:spcBef>
+                <a:spcPts val="200"/>
+              </a:spcBef>
+              <a:spcAft>
+                <a:spcPts val="200"/>
               </a:spcAft>
               <a:defRPr sz="2000"/>
             </a:pPr>
@@ -8118,10 +8484,13 @@
           <a:p>
             <a:pPr>
               <a:lnSpc>
-                <a:spcPct val="90000"/>
-              </a:lnSpc>
-              <a:spcAft>
-                <a:spcPts val="300"/>
+                <a:spcPct val="85000"/>
+              </a:lnSpc>
+              <a:spcBef>
+                <a:spcPts val="200"/>
+              </a:spcBef>
+              <a:spcAft>
+                <a:spcPts val="200"/>
               </a:spcAft>
               <a:defRPr sz="2000"/>
             </a:pPr>
@@ -8133,10 +8502,13 @@
           <a:p>
             <a:pPr>
               <a:lnSpc>
-                <a:spcPct val="90000"/>
-              </a:lnSpc>
-              <a:spcAft>
-                <a:spcPts val="300"/>
+                <a:spcPct val="85000"/>
+              </a:lnSpc>
+              <a:spcBef>
+                <a:spcPts val="200"/>
+              </a:spcBef>
+              <a:spcAft>
+                <a:spcPts val="200"/>
               </a:spcAft>
               <a:defRPr sz="2000"/>
             </a:pPr>
@@ -8148,10 +8520,13 @@
           <a:p>
             <a:pPr>
               <a:lnSpc>
-                <a:spcPct val="90000"/>
-              </a:lnSpc>
-              <a:spcAft>
-                <a:spcPts val="300"/>
+                <a:spcPct val="85000"/>
+              </a:lnSpc>
+              <a:spcBef>
+                <a:spcPts val="200"/>
+              </a:spcBef>
+              <a:spcAft>
+                <a:spcPts val="200"/>
               </a:spcAft>
               <a:defRPr sz="2000"/>
             </a:pPr>
@@ -8163,10 +8538,13 @@
           <a:p>
             <a:pPr>
               <a:lnSpc>
-                <a:spcPct val="90000"/>
-              </a:lnSpc>
-              <a:spcAft>
-                <a:spcPts val="300"/>
+                <a:spcPct val="85000"/>
+              </a:lnSpc>
+              <a:spcBef>
+                <a:spcPts val="200"/>
+              </a:spcBef>
+              <a:spcAft>
+                <a:spcPts val="200"/>
               </a:spcAft>
               <a:defRPr sz="2000"/>
             </a:pPr>
@@ -8178,10 +8556,13 @@
           <a:p>
             <a:pPr>
               <a:lnSpc>
-                <a:spcPct val="90000"/>
-              </a:lnSpc>
-              <a:spcAft>
-                <a:spcPts val="300"/>
+                <a:spcPct val="85000"/>
+              </a:lnSpc>
+              <a:spcBef>
+                <a:spcPts val="200"/>
+              </a:spcBef>
+              <a:spcAft>
+                <a:spcPts val="200"/>
               </a:spcAft>
               <a:defRPr sz="2000"/>
             </a:pPr>
@@ -8193,10 +8574,13 @@
           <a:p>
             <a:pPr>
               <a:lnSpc>
-                <a:spcPct val="90000"/>
-              </a:lnSpc>
-              <a:spcAft>
-                <a:spcPts val="300"/>
+                <a:spcPct val="85000"/>
+              </a:lnSpc>
+              <a:spcBef>
+                <a:spcPts val="200"/>
+              </a:spcBef>
+              <a:spcAft>
+                <a:spcPts val="200"/>
               </a:spcAft>
               <a:defRPr sz="2000"/>
             </a:pPr>
@@ -8219,10 +8603,13 @@
           <a:p>
             <a:pPr>
               <a:lnSpc>
-                <a:spcPct val="90000"/>
-              </a:lnSpc>
-              <a:spcAft>
-                <a:spcPts val="300"/>
+                <a:spcPct val="85000"/>
+              </a:lnSpc>
+              <a:spcBef>
+                <a:spcPts val="200"/>
+              </a:spcBef>
+              <a:spcAft>
+                <a:spcPts val="200"/>
               </a:spcAft>
               <a:defRPr sz="2000"/>
             </a:pPr>
@@ -8234,10 +8621,13 @@
           <a:p>
             <a:pPr>
               <a:lnSpc>
-                <a:spcPct val="90000"/>
-              </a:lnSpc>
-              <a:spcAft>
-                <a:spcPts val="300"/>
+                <a:spcPct val="85000"/>
+              </a:lnSpc>
+              <a:spcBef>
+                <a:spcPts val="200"/>
+              </a:spcBef>
+              <a:spcAft>
+                <a:spcPts val="200"/>
               </a:spcAft>
               <a:defRPr sz="2000"/>
             </a:pPr>
@@ -8249,10 +8639,13 @@
           <a:p>
             <a:pPr>
               <a:lnSpc>
-                <a:spcPct val="90000"/>
-              </a:lnSpc>
-              <a:spcAft>
-                <a:spcPts val="300"/>
+                <a:spcPct val="85000"/>
+              </a:lnSpc>
+              <a:spcBef>
+                <a:spcPts val="200"/>
+              </a:spcBef>
+              <a:spcAft>
+                <a:spcPts val="200"/>
               </a:spcAft>
               <a:defRPr sz="2000"/>
             </a:pPr>
@@ -8275,10 +8668,13 @@
           <a:p>
             <a:pPr>
               <a:lnSpc>
-                <a:spcPct val="90000"/>
-              </a:lnSpc>
-              <a:spcAft>
-                <a:spcPts val="300"/>
+                <a:spcPct val="85000"/>
+              </a:lnSpc>
+              <a:spcBef>
+                <a:spcPts val="200"/>
+              </a:spcBef>
+              <a:spcAft>
+                <a:spcPts val="200"/>
               </a:spcAft>
               <a:defRPr sz="2000"/>
             </a:pPr>
@@ -8290,10 +8686,13 @@
           <a:p>
             <a:pPr>
               <a:lnSpc>
-                <a:spcPct val="90000"/>
-              </a:lnSpc>
-              <a:spcAft>
-                <a:spcPts val="300"/>
+                <a:spcPct val="85000"/>
+              </a:lnSpc>
+              <a:spcBef>
+                <a:spcPts val="200"/>
+              </a:spcBef>
+              <a:spcAft>
+                <a:spcPts val="200"/>
               </a:spcAft>
               <a:defRPr sz="2000"/>
             </a:pPr>
@@ -8305,10 +8704,13 @@
           <a:p>
             <a:pPr>
               <a:lnSpc>
-                <a:spcPct val="90000"/>
-              </a:lnSpc>
-              <a:spcAft>
-                <a:spcPts val="300"/>
+                <a:spcPct val="85000"/>
+              </a:lnSpc>
+              <a:spcBef>
+                <a:spcPts val="200"/>
+              </a:spcBef>
+              <a:spcAft>
+                <a:spcPts val="200"/>
               </a:spcAft>
               <a:defRPr sz="2000"/>
             </a:pPr>
@@ -8349,10 +8751,19 @@
         </p:nvSpPr>
         <p:spPr/>
         <p:txBody>
-          <a:bodyPr wrap="square"/>
+          <a:bodyPr wrap="square" tIns="25400" bIns="25400" lIns="63500" rIns="63500"/>
           <a:lstStyle/>
           <a:p>
             <a:pPr>
+              <a:lnSpc>
+                <a:spcPct val="85000"/>
+              </a:lnSpc>
+              <a:spcBef>
+                <a:spcPts val="200"/>
+              </a:spcBef>
+              <a:spcAft>
+                <a:spcPts val="200"/>
+              </a:spcAft>
               <a:defRPr sz="4000">
                 <a:solidFill>
                   <a:srgbClr val="667EEA"/>
@@ -8360,6 +8771,7 @@
               </a:defRPr>
             </a:pPr>
             <a:r>
+              <a:rPr/>
               <a:t>📝 Ünite Özeti</a:t>
             </a:r>
           </a:p>
@@ -8399,7 +8811,7 @@
           <a:noFill/>
         </p:spPr>
         <p:txBody>
-          <a:bodyPr wrap="square">
+          <a:bodyPr wrap="square" tIns="25400" bIns="25400" lIns="63500" rIns="63500">
             <a:spAutoFit/>
           </a:bodyPr>
           <a:lstStyle/>
@@ -8416,10 +8828,13 @@
           <a:p>
             <a:pPr>
               <a:lnSpc>
-                <a:spcPct val="90000"/>
-              </a:lnSpc>
-              <a:spcAft>
-                <a:spcPts val="300"/>
+                <a:spcPct val="85000"/>
+              </a:lnSpc>
+              <a:spcBef>
+                <a:spcPts val="200"/>
+              </a:spcBef>
+              <a:spcAft>
+                <a:spcPts val="200"/>
               </a:spcAft>
               <a:defRPr sz="2000"/>
             </a:pPr>
@@ -8442,10 +8857,13 @@
           <a:p>
             <a:pPr>
               <a:lnSpc>
-                <a:spcPct val="90000"/>
-              </a:lnSpc>
-              <a:spcAft>
-                <a:spcPts val="300"/>
+                <a:spcPct val="85000"/>
+              </a:lnSpc>
+              <a:spcBef>
+                <a:spcPts val="200"/>
+              </a:spcBef>
+              <a:spcAft>
+                <a:spcPts val="200"/>
               </a:spcAft>
               <a:defRPr sz="2000"/>
             </a:pPr>
@@ -8457,10 +8875,13 @@
           <a:p>
             <a:pPr>
               <a:lnSpc>
-                <a:spcPct val="90000"/>
-              </a:lnSpc>
-              <a:spcAft>
-                <a:spcPts val="300"/>
+                <a:spcPct val="85000"/>
+              </a:lnSpc>
+              <a:spcBef>
+                <a:spcPts val="200"/>
+              </a:spcBef>
+              <a:spcAft>
+                <a:spcPts val="200"/>
               </a:spcAft>
               <a:defRPr sz="2000"/>
             </a:pPr>
@@ -8472,10 +8893,13 @@
           <a:p>
             <a:pPr>
               <a:lnSpc>
-                <a:spcPct val="90000"/>
-              </a:lnSpc>
-              <a:spcAft>
-                <a:spcPts val="300"/>
+                <a:spcPct val="85000"/>
+              </a:lnSpc>
+              <a:spcBef>
+                <a:spcPts val="200"/>
+              </a:spcBef>
+              <a:spcAft>
+                <a:spcPts val="200"/>
               </a:spcAft>
               <a:defRPr sz="2000"/>
             </a:pPr>
@@ -8487,10 +8911,13 @@
           <a:p>
             <a:pPr>
               <a:lnSpc>
-                <a:spcPct val="90000"/>
-              </a:lnSpc>
-              <a:spcAft>
-                <a:spcPts val="300"/>
+                <a:spcPct val="85000"/>
+              </a:lnSpc>
+              <a:spcBef>
+                <a:spcPts val="200"/>
+              </a:spcBef>
+              <a:spcAft>
+                <a:spcPts val="200"/>
               </a:spcAft>
               <a:defRPr sz="2000"/>
             </a:pPr>
@@ -8502,10 +8929,13 @@
           <a:p>
             <a:pPr>
               <a:lnSpc>
-                <a:spcPct val="90000"/>
-              </a:lnSpc>
-              <a:spcAft>
-                <a:spcPts val="300"/>
+                <a:spcPct val="85000"/>
+              </a:lnSpc>
+              <a:spcBef>
+                <a:spcPts val="200"/>
+              </a:spcBef>
+              <a:spcAft>
+                <a:spcPts val="200"/>
               </a:spcAft>
               <a:defRPr sz="2000"/>
             </a:pPr>
@@ -8517,10 +8947,13 @@
           <a:p>
             <a:pPr>
               <a:lnSpc>
-                <a:spcPct val="90000"/>
-              </a:lnSpc>
-              <a:spcAft>
-                <a:spcPts val="300"/>
+                <a:spcPct val="85000"/>
+              </a:lnSpc>
+              <a:spcBef>
+                <a:spcPts val="200"/>
+              </a:spcBef>
+              <a:spcAft>
+                <a:spcPts val="200"/>
               </a:spcAft>
               <a:defRPr sz="2000"/>
             </a:pPr>
@@ -8532,10 +8965,13 @@
           <a:p>
             <a:pPr>
               <a:lnSpc>
-                <a:spcPct val="90000"/>
-              </a:lnSpc>
-              <a:spcAft>
-                <a:spcPts val="300"/>
+                <a:spcPct val="85000"/>
+              </a:lnSpc>
+              <a:spcBef>
+                <a:spcPts val="200"/>
+              </a:spcBef>
+              <a:spcAft>
+                <a:spcPts val="200"/>
               </a:spcAft>
               <a:defRPr sz="2000"/>
             </a:pPr>
@@ -8547,10 +8983,13 @@
           <a:p>
             <a:pPr>
               <a:lnSpc>
-                <a:spcPct val="90000"/>
-              </a:lnSpc>
-              <a:spcAft>
-                <a:spcPts val="300"/>
+                <a:spcPct val="85000"/>
+              </a:lnSpc>
+              <a:spcBef>
+                <a:spcPts val="200"/>
+              </a:spcBef>
+              <a:spcAft>
+                <a:spcPts val="200"/>
               </a:spcAft>
               <a:defRPr sz="2000"/>
             </a:pPr>
@@ -8562,10 +9001,13 @@
           <a:p>
             <a:pPr>
               <a:lnSpc>
-                <a:spcPct val="90000"/>
-              </a:lnSpc>
-              <a:spcAft>
-                <a:spcPts val="300"/>
+                <a:spcPct val="85000"/>
+              </a:lnSpc>
+              <a:spcBef>
+                <a:spcPts val="200"/>
+              </a:spcBef>
+              <a:spcAft>
+                <a:spcPts val="200"/>
               </a:spcAft>
               <a:defRPr sz="2000"/>
             </a:pPr>
@@ -8577,10 +9019,13 @@
           <a:p>
             <a:pPr>
               <a:lnSpc>
-                <a:spcPct val="90000"/>
-              </a:lnSpc>
-              <a:spcAft>
-                <a:spcPts val="300"/>
+                <a:spcPct val="85000"/>
+              </a:lnSpc>
+              <a:spcBef>
+                <a:spcPts val="200"/>
+              </a:spcBef>
+              <a:spcAft>
+                <a:spcPts val="200"/>
               </a:spcAft>
               <a:defRPr sz="2000"/>
             </a:pPr>
@@ -8603,10 +9048,13 @@
           <a:p>
             <a:pPr>
               <a:lnSpc>
-                <a:spcPct val="90000"/>
-              </a:lnSpc>
-              <a:spcAft>
-                <a:spcPts val="300"/>
+                <a:spcPct val="85000"/>
+              </a:lnSpc>
+              <a:spcBef>
+                <a:spcPts val="200"/>
+              </a:spcBef>
+              <a:spcAft>
+                <a:spcPts val="200"/>
               </a:spcAft>
               <a:defRPr sz="2000"/>
             </a:pPr>
@@ -8618,10 +9066,13 @@
           <a:p>
             <a:pPr>
               <a:lnSpc>
-                <a:spcPct val="90000"/>
-              </a:lnSpc>
-              <a:spcAft>
-                <a:spcPts val="300"/>
+                <a:spcPct val="85000"/>
+              </a:lnSpc>
+              <a:spcBef>
+                <a:spcPts val="200"/>
+              </a:spcBef>
+              <a:spcAft>
+                <a:spcPts val="200"/>
               </a:spcAft>
               <a:defRPr sz="2000"/>
             </a:pPr>
@@ -8633,10 +9084,13 @@
           <a:p>
             <a:pPr>
               <a:lnSpc>
-                <a:spcPct val="90000"/>
-              </a:lnSpc>
-              <a:spcAft>
-                <a:spcPts val="300"/>
+                <a:spcPct val="85000"/>
+              </a:lnSpc>
+              <a:spcBef>
+                <a:spcPts val="200"/>
+              </a:spcBef>
+              <a:spcAft>
+                <a:spcPts val="200"/>
               </a:spcAft>
               <a:defRPr sz="2000"/>
             </a:pPr>
@@ -8677,10 +9131,19 @@
         </p:nvSpPr>
         <p:spPr/>
         <p:txBody>
-          <a:bodyPr wrap="square"/>
+          <a:bodyPr wrap="square" tIns="25400" bIns="25400" lIns="63500" rIns="63500"/>
           <a:lstStyle/>
           <a:p>
             <a:pPr>
+              <a:lnSpc>
+                <a:spcPct val="85000"/>
+              </a:lnSpc>
+              <a:spcBef>
+                <a:spcPts val="200"/>
+              </a:spcBef>
+              <a:spcAft>
+                <a:spcPts val="200"/>
+              </a:spcAft>
               <a:defRPr sz="4000">
                 <a:solidFill>
                   <a:srgbClr val="667EEA"/>
@@ -8688,6 +9151,7 @@
               </a:defRPr>
             </a:pPr>
             <a:r>
+              <a:rPr/>
               <a:t>🎬 Kaynaklar ve Video Önerileri</a:t>
             </a:r>
           </a:p>
@@ -8727,7 +9191,7 @@
           <a:noFill/>
         </p:spPr>
         <p:txBody>
-          <a:bodyPr wrap="square">
+          <a:bodyPr wrap="square" tIns="25400" bIns="25400" lIns="63500" rIns="63500">
             <a:spAutoFit/>
           </a:bodyPr>
           <a:lstStyle/>
@@ -8744,10 +9208,13 @@
           <a:p>
             <a:pPr>
               <a:lnSpc>
-                <a:spcPct val="90000"/>
-              </a:lnSpc>
-              <a:spcAft>
-                <a:spcPts val="300"/>
+                <a:spcPct val="85000"/>
+              </a:lnSpc>
+              <a:spcBef>
+                <a:spcPts val="200"/>
+              </a:spcBef>
+              <a:spcAft>
+                <a:spcPts val="200"/>
               </a:spcAft>
               <a:defRPr sz="2000"/>
             </a:pPr>
@@ -8759,10 +9226,13 @@
           <a:p>
             <a:pPr>
               <a:lnSpc>
-                <a:spcPct val="90000"/>
-              </a:lnSpc>
-              <a:spcAft>
-                <a:spcPts val="300"/>
+                <a:spcPct val="85000"/>
+              </a:lnSpc>
+              <a:spcBef>
+                <a:spcPts val="200"/>
+              </a:spcBef>
+              <a:spcAft>
+                <a:spcPts val="200"/>
               </a:spcAft>
               <a:defRPr sz="2000"/>
             </a:pPr>
@@ -8774,10 +9244,13 @@
           <a:p>
             <a:pPr>
               <a:lnSpc>
-                <a:spcPct val="90000"/>
-              </a:lnSpc>
-              <a:spcAft>
-                <a:spcPts val="300"/>
+                <a:spcPct val="85000"/>
+              </a:lnSpc>
+              <a:spcBef>
+                <a:spcPts val="200"/>
+              </a:spcBef>
+              <a:spcAft>
+                <a:spcPts val="200"/>
               </a:spcAft>
               <a:defRPr sz="2000"/>
             </a:pPr>
@@ -8789,10 +9262,13 @@
           <a:p>
             <a:pPr>
               <a:lnSpc>
-                <a:spcPct val="90000"/>
-              </a:lnSpc>
-              <a:spcAft>
-                <a:spcPts val="300"/>
+                <a:spcPct val="85000"/>
+              </a:lnSpc>
+              <a:spcBef>
+                <a:spcPts val="200"/>
+              </a:spcBef>
+              <a:spcAft>
+                <a:spcPts val="200"/>
               </a:spcAft>
               <a:defRPr sz="2000"/>
             </a:pPr>
@@ -8804,10 +9280,13 @@
           <a:p>
             <a:pPr>
               <a:lnSpc>
-                <a:spcPct val="90000"/>
-              </a:lnSpc>
-              <a:spcAft>
-                <a:spcPts val="300"/>
+                <a:spcPct val="85000"/>
+              </a:lnSpc>
+              <a:spcBef>
+                <a:spcPts val="200"/>
+              </a:spcBef>
+              <a:spcAft>
+                <a:spcPts val="200"/>
               </a:spcAft>
               <a:defRPr sz="2000"/>
             </a:pPr>
@@ -8830,10 +9309,13 @@
           <a:p>
             <a:pPr>
               <a:lnSpc>
-                <a:spcPct val="90000"/>
-              </a:lnSpc>
-              <a:spcAft>
-                <a:spcPts val="300"/>
+                <a:spcPct val="85000"/>
+              </a:lnSpc>
+              <a:spcBef>
+                <a:spcPts val="200"/>
+              </a:spcBef>
+              <a:spcAft>
+                <a:spcPts val="200"/>
               </a:spcAft>
               <a:defRPr sz="2000"/>
             </a:pPr>
@@ -8845,10 +9327,13 @@
           <a:p>
             <a:pPr>
               <a:lnSpc>
-                <a:spcPct val="90000"/>
-              </a:lnSpc>
-              <a:spcAft>
-                <a:spcPts val="300"/>
+                <a:spcPct val="85000"/>
+              </a:lnSpc>
+              <a:spcBef>
+                <a:spcPts val="200"/>
+              </a:spcBef>
+              <a:spcAft>
+                <a:spcPts val="200"/>
               </a:spcAft>
               <a:defRPr sz="2000"/>
             </a:pPr>
@@ -8860,10 +9345,13 @@
           <a:p>
             <a:pPr>
               <a:lnSpc>
-                <a:spcPct val="90000"/>
-              </a:lnSpc>
-              <a:spcAft>
-                <a:spcPts val="300"/>
+                <a:spcPct val="85000"/>
+              </a:lnSpc>
+              <a:spcBef>
+                <a:spcPts val="200"/>
+              </a:spcBef>
+              <a:spcAft>
+                <a:spcPts val="200"/>
               </a:spcAft>
               <a:defRPr sz="2000"/>
             </a:pPr>
@@ -8875,10 +9363,13 @@
           <a:p>
             <a:pPr>
               <a:lnSpc>
-                <a:spcPct val="90000"/>
-              </a:lnSpc>
-              <a:spcAft>
-                <a:spcPts val="300"/>
+                <a:spcPct val="85000"/>
+              </a:lnSpc>
+              <a:spcBef>
+                <a:spcPts val="200"/>
+              </a:spcBef>
+              <a:spcAft>
+                <a:spcPts val="200"/>
               </a:spcAft>
               <a:defRPr sz="2000"/>
             </a:pPr>
@@ -8901,10 +9392,13 @@
           <a:p>
             <a:pPr>
               <a:lnSpc>
-                <a:spcPct val="90000"/>
-              </a:lnSpc>
-              <a:spcAft>
-                <a:spcPts val="300"/>
+                <a:spcPct val="85000"/>
+              </a:lnSpc>
+              <a:spcBef>
+                <a:spcPts val="200"/>
+              </a:spcBef>
+              <a:spcAft>
+                <a:spcPts val="200"/>
               </a:spcAft>
               <a:defRPr sz="2000"/>
             </a:pPr>
@@ -8916,10 +9410,13 @@
           <a:p>
             <a:pPr>
               <a:lnSpc>
-                <a:spcPct val="90000"/>
-              </a:lnSpc>
-              <a:spcAft>
-                <a:spcPts val="300"/>
+                <a:spcPct val="85000"/>
+              </a:lnSpc>
+              <a:spcBef>
+                <a:spcPts val="200"/>
+              </a:spcBef>
+              <a:spcAft>
+                <a:spcPts val="200"/>
               </a:spcAft>
               <a:defRPr sz="2000"/>
             </a:pPr>
@@ -8931,10 +9428,13 @@
           <a:p>
             <a:pPr>
               <a:lnSpc>
-                <a:spcPct val="90000"/>
-              </a:lnSpc>
-              <a:spcAft>
-                <a:spcPts val="300"/>
+                <a:spcPct val="85000"/>
+              </a:lnSpc>
+              <a:spcBef>
+                <a:spcPts val="200"/>
+              </a:spcBef>
+              <a:spcAft>
+                <a:spcPts val="200"/>
               </a:spcAft>
               <a:defRPr sz="2000"/>
             </a:pPr>
@@ -8957,10 +9457,13 @@
           <a:p>
             <a:pPr>
               <a:lnSpc>
-                <a:spcPct val="90000"/>
-              </a:lnSpc>
-              <a:spcAft>
-                <a:spcPts val="300"/>
+                <a:spcPct val="85000"/>
+              </a:lnSpc>
+              <a:spcBef>
+                <a:spcPts val="200"/>
+              </a:spcBef>
+              <a:spcAft>
+                <a:spcPts val="200"/>
               </a:spcAft>
               <a:defRPr sz="2000"/>
             </a:pPr>
@@ -8972,10 +9475,13 @@
           <a:p>
             <a:pPr>
               <a:lnSpc>
-                <a:spcPct val="90000"/>
-              </a:lnSpc>
-              <a:spcAft>
-                <a:spcPts val="300"/>
+                <a:spcPct val="85000"/>
+              </a:lnSpc>
+              <a:spcBef>
+                <a:spcPts val="200"/>
+              </a:spcBef>
+              <a:spcAft>
+                <a:spcPts val="200"/>
               </a:spcAft>
               <a:defRPr sz="2000"/>
             </a:pPr>
@@ -9029,12 +9535,21 @@
           <a:noFill/>
         </p:spPr>
         <p:txBody>
-          <a:bodyPr wrap="square">
+          <a:bodyPr wrap="square" tIns="25400" bIns="25400" lIns="63500" rIns="63500">
             <a:spAutoFit/>
           </a:bodyPr>
           <a:lstStyle/>
           <a:p>
             <a:pPr algn="ctr">
+              <a:lnSpc>
+                <a:spcPct val="85000"/>
+              </a:lnSpc>
+              <a:spcBef>
+                <a:spcPts val="200"/>
+              </a:spcBef>
+              <a:spcAft>
+                <a:spcPts val="200"/>
+              </a:spcAft>
               <a:defRPr sz="5400" b="1">
                 <a:solidFill>
                   <a:srgbClr val="FFFFFF"/>
@@ -9042,6 +9557,7 @@
               </a:defRPr>
             </a:pPr>
             <a:r>
+              <a:rPr/>
               <a:t>Teşekkürler! 🎉</a:t>
             </a:r>
           </a:p>
@@ -9064,12 +9580,21 @@
           <a:noFill/>
         </p:spPr>
         <p:txBody>
-          <a:bodyPr wrap="square">
+          <a:bodyPr wrap="square" tIns="25400" bIns="25400" lIns="63500" rIns="63500">
             <a:spAutoFit/>
           </a:bodyPr>
           <a:lstStyle/>
           <a:p>
             <a:pPr algn="ctr">
+              <a:lnSpc>
+                <a:spcPct val="85000"/>
+              </a:lnSpc>
+              <a:spcBef>
+                <a:spcPts val="200"/>
+              </a:spcBef>
+              <a:spcAft>
+                <a:spcPts val="200"/>
+              </a:spcAft>
               <a:defRPr sz="3200">
                 <a:solidFill>
                   <a:srgbClr val="FFFFFF"/>
@@ -9077,6 +9602,7 @@
               </a:defRPr>
             </a:pPr>
             <a:r>
+              <a:rPr/>
               <a:t>Bir sonraki derste görüşmek üzere!</a:t>
             </a:r>
           </a:p>
@@ -9112,10 +9638,19 @@
         </p:nvSpPr>
         <p:spPr/>
         <p:txBody>
-          <a:bodyPr wrap="square"/>
+          <a:bodyPr wrap="square" tIns="25400" bIns="25400" lIns="63500" rIns="63500"/>
           <a:lstStyle/>
           <a:p>
             <a:pPr>
+              <a:lnSpc>
+                <a:spcPct val="85000"/>
+              </a:lnSpc>
+              <a:spcBef>
+                <a:spcPts val="200"/>
+              </a:spcBef>
+              <a:spcAft>
+                <a:spcPts val="200"/>
+              </a:spcAft>
               <a:defRPr sz="4000">
                 <a:solidFill>
                   <a:srgbClr val="667EEA"/>
@@ -9123,6 +9658,7 @@
               </a:defRPr>
             </a:pPr>
             <a:r>
+              <a:rPr/>
               <a:t>📋 Ünite İçeriği</a:t>
             </a:r>
           </a:p>
@@ -9162,7 +9698,7 @@
           <a:noFill/>
         </p:spPr>
         <p:txBody>
-          <a:bodyPr wrap="square">
+          <a:bodyPr wrap="square" tIns="25400" bIns="25400" lIns="63500" rIns="63500">
             <a:spAutoFit/>
           </a:bodyPr>
           <a:lstStyle/>
@@ -9179,10 +9715,13 @@
           <a:p>
             <a:pPr>
               <a:lnSpc>
-                <a:spcPct val="90000"/>
-              </a:lnSpc>
-              <a:spcAft>
-                <a:spcPts val="300"/>
+                <a:spcPct val="85000"/>
+              </a:lnSpc>
+              <a:spcBef>
+                <a:spcPts val="200"/>
+              </a:spcBef>
+              <a:spcAft>
+                <a:spcPts val="200"/>
               </a:spcAft>
               <a:defRPr sz="2000"/>
             </a:pPr>
@@ -9194,10 +9733,13 @@
           <a:p>
             <a:pPr>
               <a:lnSpc>
-                <a:spcPct val="90000"/>
-              </a:lnSpc>
-              <a:spcAft>
-                <a:spcPts val="300"/>
+                <a:spcPct val="85000"/>
+              </a:lnSpc>
+              <a:spcBef>
+                <a:spcPts val="200"/>
+              </a:spcBef>
+              <a:spcAft>
+                <a:spcPts val="200"/>
               </a:spcAft>
               <a:defRPr sz="2000"/>
             </a:pPr>
@@ -9209,10 +9751,13 @@
           <a:p>
             <a:pPr>
               <a:lnSpc>
-                <a:spcPct val="90000"/>
-              </a:lnSpc>
-              <a:spcAft>
-                <a:spcPts val="300"/>
+                <a:spcPct val="85000"/>
+              </a:lnSpc>
+              <a:spcBef>
+                <a:spcPts val="200"/>
+              </a:spcBef>
+              <a:spcAft>
+                <a:spcPts val="200"/>
               </a:spcAft>
               <a:defRPr sz="2000"/>
             </a:pPr>
@@ -9235,10 +9780,13 @@
           <a:p>
             <a:pPr>
               <a:lnSpc>
-                <a:spcPct val="90000"/>
-              </a:lnSpc>
-              <a:spcAft>
-                <a:spcPts val="300"/>
+                <a:spcPct val="85000"/>
+              </a:lnSpc>
+              <a:spcBef>
+                <a:spcPts val="200"/>
+              </a:spcBef>
+              <a:spcAft>
+                <a:spcPts val="200"/>
               </a:spcAft>
               <a:defRPr sz="2000"/>
             </a:pPr>
@@ -9250,10 +9798,13 @@
           <a:p>
             <a:pPr>
               <a:lnSpc>
-                <a:spcPct val="90000"/>
-              </a:lnSpc>
-              <a:spcAft>
-                <a:spcPts val="300"/>
+                <a:spcPct val="85000"/>
+              </a:lnSpc>
+              <a:spcBef>
+                <a:spcPts val="200"/>
+              </a:spcBef>
+              <a:spcAft>
+                <a:spcPts val="200"/>
               </a:spcAft>
               <a:defRPr sz="2000"/>
             </a:pPr>
@@ -9265,10 +9816,13 @@
           <a:p>
             <a:pPr>
               <a:lnSpc>
-                <a:spcPct val="90000"/>
-              </a:lnSpc>
-              <a:spcAft>
-                <a:spcPts val="300"/>
+                <a:spcPct val="85000"/>
+              </a:lnSpc>
+              <a:spcBef>
+                <a:spcPts val="200"/>
+              </a:spcBef>
+              <a:spcAft>
+                <a:spcPts val="200"/>
               </a:spcAft>
               <a:defRPr sz="2000"/>
             </a:pPr>
@@ -9291,10 +9845,13 @@
           <a:p>
             <a:pPr>
               <a:lnSpc>
-                <a:spcPct val="90000"/>
-              </a:lnSpc>
-              <a:spcAft>
-                <a:spcPts val="300"/>
+                <a:spcPct val="85000"/>
+              </a:lnSpc>
+              <a:spcBef>
+                <a:spcPts val="200"/>
+              </a:spcBef>
+              <a:spcAft>
+                <a:spcPts val="200"/>
               </a:spcAft>
               <a:defRPr sz="2000"/>
             </a:pPr>
@@ -9306,10 +9863,13 @@
           <a:p>
             <a:pPr>
               <a:lnSpc>
-                <a:spcPct val="90000"/>
-              </a:lnSpc>
-              <a:spcAft>
-                <a:spcPts val="300"/>
+                <a:spcPct val="85000"/>
+              </a:lnSpc>
+              <a:spcBef>
+                <a:spcPts val="200"/>
+              </a:spcBef>
+              <a:spcAft>
+                <a:spcPts val="200"/>
               </a:spcAft>
               <a:defRPr sz="2000"/>
             </a:pPr>
@@ -9321,10 +9881,13 @@
           <a:p>
             <a:pPr>
               <a:lnSpc>
-                <a:spcPct val="90000"/>
-              </a:lnSpc>
-              <a:spcAft>
-                <a:spcPts val="300"/>
+                <a:spcPct val="85000"/>
+              </a:lnSpc>
+              <a:spcBef>
+                <a:spcPts val="200"/>
+              </a:spcBef>
+              <a:spcAft>
+                <a:spcPts val="200"/>
               </a:spcAft>
               <a:defRPr sz="2000"/>
             </a:pPr>
@@ -9347,10 +9910,13 @@
           <a:p>
             <a:pPr>
               <a:lnSpc>
-                <a:spcPct val="90000"/>
-              </a:lnSpc>
-              <a:spcAft>
-                <a:spcPts val="300"/>
+                <a:spcPct val="85000"/>
+              </a:lnSpc>
+              <a:spcBef>
+                <a:spcPts val="200"/>
+              </a:spcBef>
+              <a:spcAft>
+                <a:spcPts val="200"/>
               </a:spcAft>
               <a:defRPr sz="2000"/>
             </a:pPr>
@@ -9362,10 +9928,13 @@
           <a:p>
             <a:pPr>
               <a:lnSpc>
-                <a:spcPct val="90000"/>
-              </a:lnSpc>
-              <a:spcAft>
-                <a:spcPts val="300"/>
+                <a:spcPct val="85000"/>
+              </a:lnSpc>
+              <a:spcBef>
+                <a:spcPts val="200"/>
+              </a:spcBef>
+              <a:spcAft>
+                <a:spcPts val="200"/>
               </a:spcAft>
               <a:defRPr sz="2000"/>
             </a:pPr>
@@ -9377,10 +9946,13 @@
           <a:p>
             <a:pPr>
               <a:lnSpc>
-                <a:spcPct val="90000"/>
-              </a:lnSpc>
-              <a:spcAft>
-                <a:spcPts val="300"/>
+                <a:spcPct val="85000"/>
+              </a:lnSpc>
+              <a:spcBef>
+                <a:spcPts val="200"/>
+              </a:spcBef>
+              <a:spcAft>
+                <a:spcPts val="200"/>
               </a:spcAft>
               <a:defRPr sz="2000"/>
             </a:pPr>
@@ -9421,10 +9993,19 @@
         </p:nvSpPr>
         <p:spPr/>
         <p:txBody>
-          <a:bodyPr wrap="square"/>
+          <a:bodyPr wrap="square" tIns="25400" bIns="25400" lIns="63500" rIns="63500"/>
           <a:lstStyle/>
           <a:p>
             <a:pPr>
+              <a:lnSpc>
+                <a:spcPct val="85000"/>
+              </a:lnSpc>
+              <a:spcBef>
+                <a:spcPts val="200"/>
+              </a:spcBef>
+              <a:spcAft>
+                <a:spcPts val="200"/>
+              </a:spcAft>
               <a:defRPr sz="4000">
                 <a:solidFill>
                   <a:srgbClr val="667EEA"/>
@@ -9432,6 +10013,7 @@
               </a:defRPr>
             </a:pPr>
             <a:r>
+              <a:rPr/>
               <a:t>🌐 Bilişim Teknolojileri Nedir?</a:t>
             </a:r>
           </a:p>
@@ -9471,7 +10053,7 @@
           <a:noFill/>
         </p:spPr>
         <p:txBody>
-          <a:bodyPr wrap="square">
+          <a:bodyPr wrap="square" tIns="25400" bIns="25400" lIns="63500" rIns="63500">
             <a:spAutoFit/>
           </a:bodyPr>
           <a:lstStyle/>
@@ -9488,6 +10070,42 @@
           <a:p>
             <a:pPr>
               <a:lnSpc>
+                <a:spcPct val="85000"/>
+              </a:lnSpc>
+              <a:spcBef>
+                <a:spcPts val="200"/>
+              </a:spcBef>
+              <a:spcAft>
+                <a:spcPts val="200"/>
+              </a:spcAft>
+              <a:defRPr sz="2000"/>
+            </a:pPr>
+            <a:r>
+              <a:rPr sz="1600"/>
+              <a:t>✅ Tanım:</a:t>
+            </a:r>
+          </a:p>
+          <a:p>
+            <a:pPr>
+              <a:lnSpc>
+                <a:spcPct val="85000"/>
+              </a:lnSpc>
+              <a:spcBef>
+                <a:spcPts val="200"/>
+              </a:spcBef>
+              <a:spcAft>
+                <a:spcPts val="200"/>
+              </a:spcAft>
+              <a:defRPr sz="2000"/>
+            </a:pPr>
+            <a:r>
+              <a:rPr sz="1600"/>
+              <a:t>Bilgi ve iletişim teknolojilerinin tümünü kapsayan alan</a:t>
+            </a:r>
+          </a:p>
+          <a:p>
+            <a:pPr>
+              <a:lnSpc>
                 <a:spcPct val="90000"/>
               </a:lnSpc>
               <a:spcAft>
@@ -9495,8 +10113,95 @@
               </a:spcAft>
               <a:defRPr sz="2000"/>
             </a:pPr>
-            <a:r>
-              <a:t>✅ Tanım:</a:t>
+          </a:p>
+          <a:p>
+            <a:pPr>
+              <a:lnSpc>
+                <a:spcPct val="85000"/>
+              </a:lnSpc>
+              <a:spcBef>
+                <a:spcPts val="200"/>
+              </a:spcBef>
+              <a:spcAft>
+                <a:spcPts val="200"/>
+              </a:spcAft>
+              <a:defRPr sz="2000"/>
+            </a:pPr>
+            <a:r>
+              <a:rPr sz="1600"/>
+              <a:t>✅ Temel Bileşenler:</a:t>
+            </a:r>
+          </a:p>
+          <a:p>
+            <a:pPr>
+              <a:lnSpc>
+                <a:spcPct val="85000"/>
+              </a:lnSpc>
+              <a:spcBef>
+                <a:spcPts val="200"/>
+              </a:spcBef>
+              <a:spcAft>
+                <a:spcPts val="200"/>
+              </a:spcAft>
+              <a:defRPr sz="2000"/>
+            </a:pPr>
+            <a:r>
+              <a:rPr sz="1600"/>
+              <a:t>    • Donanım (Hardware)</a:t>
+            </a:r>
+          </a:p>
+          <a:p>
+            <a:pPr>
+              <a:lnSpc>
+                <a:spcPct val="85000"/>
+              </a:lnSpc>
+              <a:spcBef>
+                <a:spcPts val="200"/>
+              </a:spcBef>
+              <a:spcAft>
+                <a:spcPts val="200"/>
+              </a:spcAft>
+              <a:defRPr sz="2000"/>
+            </a:pPr>
+            <a:r>
+              <a:rPr sz="1600"/>
+              <a:t>    • Yazılım (Software)</a:t>
+            </a:r>
+          </a:p>
+          <a:p>
+            <a:pPr>
+              <a:lnSpc>
+                <a:spcPct val="85000"/>
+              </a:lnSpc>
+              <a:spcBef>
+                <a:spcPts val="200"/>
+              </a:spcBef>
+              <a:spcAft>
+                <a:spcPts val="200"/>
+              </a:spcAft>
+              <a:defRPr sz="2000"/>
+            </a:pPr>
+            <a:r>
+              <a:rPr sz="1600"/>
+              <a:t>    • Ağlar (Networks)</a:t>
+            </a:r>
+          </a:p>
+          <a:p>
+            <a:pPr>
+              <a:lnSpc>
+                <a:spcPct val="85000"/>
+              </a:lnSpc>
+              <a:spcBef>
+                <a:spcPts val="200"/>
+              </a:spcBef>
+              <a:spcAft>
+                <a:spcPts val="200"/>
+              </a:spcAft>
+              <a:defRPr sz="2000"/>
+            </a:pPr>
+            <a:r>
+              <a:rPr sz="1600"/>
+              <a:t>    • Veriler (Data)</a:t>
             </a:r>
           </a:p>
           <a:p>
@@ -9509,183 +10214,112 @@
               </a:spcAft>
               <a:defRPr sz="2000"/>
             </a:pPr>
-            <a:r>
-              <a:t>Bilgi ve iletişim teknolojilerinin tümünü kapsayan alan</a:t>
-            </a:r>
-          </a:p>
-          <a:p>
-            <a:pPr>
-              <a:lnSpc>
-                <a:spcPct val="90000"/>
-              </a:lnSpc>
-              <a:spcAft>
-                <a:spcPts val="300"/>
-              </a:spcAft>
-              <a:defRPr sz="2000"/>
-            </a:pPr>
-          </a:p>
-          <a:p>
-            <a:pPr>
-              <a:lnSpc>
-                <a:spcPct val="90000"/>
-              </a:lnSpc>
-              <a:spcAft>
-                <a:spcPts val="300"/>
-              </a:spcAft>
-              <a:defRPr sz="2000"/>
-            </a:pPr>
-            <a:r>
-              <a:t>✅ Temel Bileşenler:</a:t>
-            </a:r>
-          </a:p>
-          <a:p>
-            <a:pPr>
-              <a:lnSpc>
-                <a:spcPct val="90000"/>
-              </a:lnSpc>
-              <a:spcAft>
-                <a:spcPts val="300"/>
-              </a:spcAft>
-              <a:defRPr sz="2000"/>
-            </a:pPr>
-            <a:r>
-              <a:t>    • Donanım (Hardware)</a:t>
-            </a:r>
-          </a:p>
-          <a:p>
-            <a:pPr>
-              <a:lnSpc>
-                <a:spcPct val="90000"/>
-              </a:lnSpc>
-              <a:spcAft>
-                <a:spcPts val="300"/>
-              </a:spcAft>
-              <a:defRPr sz="2000"/>
-            </a:pPr>
-            <a:r>
-              <a:t>    • Yazılım (Software)</a:t>
-            </a:r>
-          </a:p>
-          <a:p>
-            <a:pPr>
-              <a:lnSpc>
-                <a:spcPct val="90000"/>
-              </a:lnSpc>
-              <a:spcAft>
-                <a:spcPts val="300"/>
-              </a:spcAft>
-              <a:defRPr sz="2000"/>
-            </a:pPr>
-            <a:r>
-              <a:t>    • Ağlar (Networks)</a:t>
-            </a:r>
-          </a:p>
-          <a:p>
-            <a:pPr>
-              <a:lnSpc>
-                <a:spcPct val="90000"/>
-              </a:lnSpc>
-              <a:spcAft>
-                <a:spcPts val="300"/>
-              </a:spcAft>
-              <a:defRPr sz="2000"/>
-            </a:pPr>
-            <a:r>
-              <a:t>    • Veriler (Data)</a:t>
-            </a:r>
-          </a:p>
-          <a:p>
-            <a:pPr>
-              <a:lnSpc>
-                <a:spcPct val="90000"/>
-              </a:lnSpc>
-              <a:spcAft>
-                <a:spcPts val="300"/>
-              </a:spcAft>
-              <a:defRPr sz="2000"/>
-            </a:pPr>
-          </a:p>
-          <a:p>
-            <a:pPr>
-              <a:lnSpc>
-                <a:spcPct val="90000"/>
-              </a:lnSpc>
-              <a:spcAft>
-                <a:spcPts val="300"/>
-              </a:spcAft>
-              <a:defRPr sz="2000"/>
-            </a:pPr>
-            <a:r>
+          </a:p>
+          <a:p>
+            <a:pPr>
+              <a:lnSpc>
+                <a:spcPct val="85000"/>
+              </a:lnSpc>
+              <a:spcBef>
+                <a:spcPts val="200"/>
+              </a:spcBef>
+              <a:spcAft>
+                <a:spcPts val="200"/>
+              </a:spcAft>
+              <a:defRPr sz="2000"/>
+            </a:pPr>
+            <a:r>
+              <a:rPr sz="1600"/>
               <a:t>✅ Kullanım Alanları:</a:t>
             </a:r>
           </a:p>
           <a:p>
             <a:pPr>
               <a:lnSpc>
-                <a:spcPct val="90000"/>
-              </a:lnSpc>
-              <a:spcAft>
-                <a:spcPts val="300"/>
-              </a:spcAft>
-              <a:defRPr sz="2000"/>
-            </a:pPr>
-            <a:r>
+                <a:spcPct val="85000"/>
+              </a:lnSpc>
+              <a:spcBef>
+                <a:spcPts val="200"/>
+              </a:spcBef>
+              <a:spcAft>
+                <a:spcPts val="200"/>
+              </a:spcAft>
+              <a:defRPr sz="2000"/>
+            </a:pPr>
+            <a:r>
+              <a:rPr sz="1600"/>
               <a:t>    • Eğitim</a:t>
             </a:r>
           </a:p>
           <a:p>
             <a:pPr>
               <a:lnSpc>
-                <a:spcPct val="90000"/>
-              </a:lnSpc>
-              <a:spcAft>
-                <a:spcPts val="300"/>
-              </a:spcAft>
-              <a:defRPr sz="2000"/>
-            </a:pPr>
-            <a:r>
+                <a:spcPct val="85000"/>
+              </a:lnSpc>
+              <a:spcBef>
+                <a:spcPts val="200"/>
+              </a:spcBef>
+              <a:spcAft>
+                <a:spcPts val="200"/>
+              </a:spcAft>
+              <a:defRPr sz="2000"/>
+            </a:pPr>
+            <a:r>
+              <a:rPr sz="1600"/>
               <a:t>    • Sağlık</a:t>
             </a:r>
           </a:p>
           <a:p>
             <a:pPr>
               <a:lnSpc>
-                <a:spcPct val="90000"/>
-              </a:lnSpc>
-              <a:spcAft>
-                <a:spcPts val="300"/>
-              </a:spcAft>
-              <a:defRPr sz="2000"/>
-            </a:pPr>
-            <a:r>
+                <a:spcPct val="85000"/>
+              </a:lnSpc>
+              <a:spcBef>
+                <a:spcPts val="200"/>
+              </a:spcBef>
+              <a:spcAft>
+                <a:spcPts val="200"/>
+              </a:spcAft>
+              <a:defRPr sz="2000"/>
+            </a:pPr>
+            <a:r>
+              <a:rPr sz="1600"/>
               <a:t>    • İletişim</a:t>
             </a:r>
           </a:p>
           <a:p>
             <a:pPr>
               <a:lnSpc>
-                <a:spcPct val="90000"/>
-              </a:lnSpc>
-              <a:spcAft>
-                <a:spcPts val="300"/>
-              </a:spcAft>
-              <a:defRPr sz="2000"/>
-            </a:pPr>
-            <a:r>
+                <a:spcPct val="85000"/>
+              </a:lnSpc>
+              <a:spcBef>
+                <a:spcPts val="200"/>
+              </a:spcBef>
+              <a:spcAft>
+                <a:spcPts val="200"/>
+              </a:spcAft>
+              <a:defRPr sz="2000"/>
+            </a:pPr>
+            <a:r>
+              <a:rPr sz="1600"/>
               <a:t>    • Eğlence</a:t>
             </a:r>
           </a:p>
           <a:p>
             <a:pPr>
               <a:lnSpc>
-                <a:spcPct val="90000"/>
-              </a:lnSpc>
-              <a:spcAft>
-                <a:spcPts val="300"/>
-              </a:spcAft>
-              <a:defRPr sz="2000"/>
-            </a:pPr>
-            <a:r>
+                <a:spcPct val="85000"/>
+              </a:lnSpc>
+              <a:spcBef>
+                <a:spcPts val="200"/>
+              </a:spcBef>
+              <a:spcAft>
+                <a:spcPts val="200"/>
+              </a:spcAft>
+              <a:defRPr sz="2000"/>
+            </a:pPr>
+            <a:r>
+              <a:rPr sz="1600"/>
               <a:t>    • İş dünyası</a:t>
             </a:r>
           </a:p>
@@ -9721,10 +10355,19 @@
         </p:nvSpPr>
         <p:spPr/>
         <p:txBody>
-          <a:bodyPr wrap="square"/>
+          <a:bodyPr wrap="square" tIns="25400" bIns="25400" lIns="63500" rIns="63500"/>
           <a:lstStyle/>
           <a:p>
             <a:pPr>
+              <a:lnSpc>
+                <a:spcPct val="85000"/>
+              </a:lnSpc>
+              <a:spcBef>
+                <a:spcPts val="200"/>
+              </a:spcBef>
+              <a:spcAft>
+                <a:spcPts val="200"/>
+              </a:spcAft>
               <a:defRPr sz="4000">
                 <a:solidFill>
                   <a:srgbClr val="667EEA"/>
@@ -9732,6 +10375,7 @@
               </a:defRPr>
             </a:pPr>
             <a:r>
+              <a:rPr/>
               <a:t>📊 Bilişim Teknolojilerinin Sınıflandırılması</a:t>
             </a:r>
           </a:p>
@@ -9771,7 +10415,7 @@
           <a:noFill/>
         </p:spPr>
         <p:txBody>
-          <a:bodyPr wrap="square">
+          <a:bodyPr wrap="square" tIns="25400" bIns="25400" lIns="63500" rIns="63500">
             <a:spAutoFit/>
           </a:bodyPr>
           <a:lstStyle/>
@@ -9788,10 +10432,13 @@
           <a:p>
             <a:pPr>
               <a:lnSpc>
-                <a:spcPct val="90000"/>
-              </a:lnSpc>
-              <a:spcAft>
-                <a:spcPts val="300"/>
+                <a:spcPct val="85000"/>
+              </a:lnSpc>
+              <a:spcBef>
+                <a:spcPts val="200"/>
+              </a:spcBef>
+              <a:spcAft>
+                <a:spcPts val="200"/>
               </a:spcAft>
               <a:defRPr sz="2000"/>
             </a:pPr>
@@ -9803,10 +10450,13 @@
           <a:p>
             <a:pPr>
               <a:lnSpc>
-                <a:spcPct val="90000"/>
-              </a:lnSpc>
-              <a:spcAft>
-                <a:spcPts val="300"/>
+                <a:spcPct val="85000"/>
+              </a:lnSpc>
+              <a:spcBef>
+                <a:spcPts val="200"/>
+              </a:spcBef>
+              <a:spcAft>
+                <a:spcPts val="200"/>
               </a:spcAft>
               <a:defRPr sz="2000"/>
             </a:pPr>
@@ -9818,10 +10468,13 @@
           <a:p>
             <a:pPr>
               <a:lnSpc>
-                <a:spcPct val="90000"/>
-              </a:lnSpc>
-              <a:spcAft>
-                <a:spcPts val="300"/>
+                <a:spcPct val="85000"/>
+              </a:lnSpc>
+              <a:spcBef>
+                <a:spcPts val="200"/>
+              </a:spcBef>
+              <a:spcAft>
+                <a:spcPts val="200"/>
               </a:spcAft>
               <a:defRPr sz="2000"/>
             </a:pPr>
@@ -9844,10 +10497,13 @@
           <a:p>
             <a:pPr>
               <a:lnSpc>
-                <a:spcPct val="90000"/>
-              </a:lnSpc>
-              <a:spcAft>
-                <a:spcPts val="300"/>
+                <a:spcPct val="85000"/>
+              </a:lnSpc>
+              <a:spcBef>
+                <a:spcPts val="200"/>
+              </a:spcBef>
+              <a:spcAft>
+                <a:spcPts val="200"/>
               </a:spcAft>
               <a:defRPr sz="2000"/>
             </a:pPr>
@@ -9859,10 +10515,13 @@
           <a:p>
             <a:pPr>
               <a:lnSpc>
-                <a:spcPct val="90000"/>
-              </a:lnSpc>
-              <a:spcAft>
-                <a:spcPts val="300"/>
+                <a:spcPct val="85000"/>
+              </a:lnSpc>
+              <a:spcBef>
+                <a:spcPts val="200"/>
+              </a:spcBef>
+              <a:spcAft>
+                <a:spcPts val="200"/>
               </a:spcAft>
               <a:defRPr sz="2000"/>
             </a:pPr>
@@ -9874,10 +10533,13 @@
           <a:p>
             <a:pPr>
               <a:lnSpc>
-                <a:spcPct val="90000"/>
-              </a:lnSpc>
-              <a:spcAft>
-                <a:spcPts val="300"/>
+                <a:spcPct val="85000"/>
+              </a:lnSpc>
+              <a:spcBef>
+                <a:spcPts val="200"/>
+              </a:spcBef>
+              <a:spcAft>
+                <a:spcPts val="200"/>
               </a:spcAft>
               <a:defRPr sz="2000"/>
             </a:pPr>
@@ -9889,10 +10551,13 @@
           <a:p>
             <a:pPr>
               <a:lnSpc>
-                <a:spcPct val="90000"/>
-              </a:lnSpc>
-              <a:spcAft>
-                <a:spcPts val="300"/>
+                <a:spcPct val="85000"/>
+              </a:lnSpc>
+              <a:spcBef>
+                <a:spcPts val="200"/>
+              </a:spcBef>
+              <a:spcAft>
+                <a:spcPts val="200"/>
               </a:spcAft>
               <a:defRPr sz="2000"/>
             </a:pPr>
@@ -9915,10 +10580,13 @@
           <a:p>
             <a:pPr>
               <a:lnSpc>
-                <a:spcPct val="90000"/>
-              </a:lnSpc>
-              <a:spcAft>
-                <a:spcPts val="300"/>
+                <a:spcPct val="85000"/>
+              </a:lnSpc>
+              <a:spcBef>
+                <a:spcPts val="200"/>
+              </a:spcBef>
+              <a:spcAft>
+                <a:spcPts val="200"/>
               </a:spcAft>
               <a:defRPr sz="2000"/>
             </a:pPr>
@@ -9930,10 +10598,13 @@
           <a:p>
             <a:pPr>
               <a:lnSpc>
-                <a:spcPct val="90000"/>
-              </a:lnSpc>
-              <a:spcAft>
-                <a:spcPts val="300"/>
+                <a:spcPct val="85000"/>
+              </a:lnSpc>
+              <a:spcBef>
+                <a:spcPts val="200"/>
+              </a:spcBef>
+              <a:spcAft>
+                <a:spcPts val="200"/>
               </a:spcAft>
               <a:defRPr sz="2000"/>
             </a:pPr>
@@ -9945,10 +10616,13 @@
           <a:p>
             <a:pPr>
               <a:lnSpc>
-                <a:spcPct val="90000"/>
-              </a:lnSpc>
-              <a:spcAft>
-                <a:spcPts val="300"/>
+                <a:spcPct val="85000"/>
+              </a:lnSpc>
+              <a:spcBef>
+                <a:spcPts val="200"/>
+              </a:spcBef>
+              <a:spcAft>
+                <a:spcPts val="200"/>
               </a:spcAft>
               <a:defRPr sz="2000"/>
             </a:pPr>
@@ -9960,10 +10634,13 @@
           <a:p>
             <a:pPr>
               <a:lnSpc>
-                <a:spcPct val="90000"/>
-              </a:lnSpc>
-              <a:spcAft>
-                <a:spcPts val="300"/>
+                <a:spcPct val="85000"/>
+              </a:lnSpc>
+              <a:spcBef>
+                <a:spcPts val="200"/>
+              </a:spcBef>
+              <a:spcAft>
+                <a:spcPts val="200"/>
               </a:spcAft>
               <a:defRPr sz="2000"/>
             </a:pPr>
@@ -9986,10 +10663,13 @@
           <a:p>
             <a:pPr>
               <a:lnSpc>
-                <a:spcPct val="90000"/>
-              </a:lnSpc>
-              <a:spcAft>
-                <a:spcPts val="300"/>
+                <a:spcPct val="85000"/>
+              </a:lnSpc>
+              <a:spcBef>
+                <a:spcPts val="200"/>
+              </a:spcBef>
+              <a:spcAft>
+                <a:spcPts val="200"/>
               </a:spcAft>
               <a:defRPr sz="2000"/>
             </a:pPr>
@@ -10001,10 +10681,13 @@
           <a:p>
             <a:pPr>
               <a:lnSpc>
-                <a:spcPct val="90000"/>
-              </a:lnSpc>
-              <a:spcAft>
-                <a:spcPts val="300"/>
+                <a:spcPct val="85000"/>
+              </a:lnSpc>
+              <a:spcBef>
+                <a:spcPts val="200"/>
+              </a:spcBef>
+              <a:spcAft>
+                <a:spcPts val="200"/>
               </a:spcAft>
               <a:defRPr sz="2000"/>
             </a:pPr>
@@ -10016,10 +10699,13 @@
           <a:p>
             <a:pPr>
               <a:lnSpc>
-                <a:spcPct val="90000"/>
-              </a:lnSpc>
-              <a:spcAft>
-                <a:spcPts val="300"/>
+                <a:spcPct val="85000"/>
+              </a:lnSpc>
+              <a:spcBef>
+                <a:spcPts val="200"/>
+              </a:spcBef>
+              <a:spcAft>
+                <a:spcPts val="200"/>
               </a:spcAft>
               <a:defRPr sz="2000"/>
             </a:pPr>
@@ -10060,10 +10746,19 @@
         </p:nvSpPr>
         <p:spPr/>
         <p:txBody>
-          <a:bodyPr wrap="square"/>
+          <a:bodyPr wrap="square" tIns="25400" bIns="25400" lIns="63500" rIns="63500"/>
           <a:lstStyle/>
           <a:p>
             <a:pPr>
+              <a:lnSpc>
+                <a:spcPct val="85000"/>
+              </a:lnSpc>
+              <a:spcBef>
+                <a:spcPts val="200"/>
+              </a:spcBef>
+              <a:spcAft>
+                <a:spcPts val="200"/>
+              </a:spcAft>
               <a:defRPr sz="4000">
                 <a:solidFill>
                   <a:srgbClr val="667EEA"/>
@@ -10071,6 +10766,7 @@
               </a:defRPr>
             </a:pPr>
             <a:r>
+              <a:rPr/>
               <a:t>🌟 Bilişim Teknolojilerinin Hayatımıza Etkileri</a:t>
             </a:r>
           </a:p>
@@ -10110,7 +10806,7 @@
           <a:noFill/>
         </p:spPr>
         <p:txBody>
-          <a:bodyPr wrap="square">
+          <a:bodyPr wrap="square" tIns="25400" bIns="25400" lIns="63500" rIns="63500">
             <a:spAutoFit/>
           </a:bodyPr>
           <a:lstStyle/>
@@ -10127,10 +10823,13 @@
           <a:p>
             <a:pPr>
               <a:lnSpc>
-                <a:spcPct val="90000"/>
-              </a:lnSpc>
-              <a:spcAft>
-                <a:spcPts val="300"/>
+                <a:spcPct val="85000"/>
+              </a:lnSpc>
+              <a:spcBef>
+                <a:spcPts val="200"/>
+              </a:spcBef>
+              <a:spcAft>
+                <a:spcPts val="200"/>
               </a:spcAft>
               <a:defRPr sz="2000"/>
             </a:pPr>
@@ -10142,10 +10841,13 @@
           <a:p>
             <a:pPr>
               <a:lnSpc>
-                <a:spcPct val="90000"/>
-              </a:lnSpc>
-              <a:spcAft>
-                <a:spcPts val="300"/>
+                <a:spcPct val="85000"/>
+              </a:lnSpc>
+              <a:spcBef>
+                <a:spcPts val="200"/>
+              </a:spcBef>
+              <a:spcAft>
+                <a:spcPts val="200"/>
               </a:spcAft>
               <a:defRPr sz="2000"/>
             </a:pPr>
@@ -10157,10 +10859,13 @@
           <a:p>
             <a:pPr>
               <a:lnSpc>
-                <a:spcPct val="90000"/>
-              </a:lnSpc>
-              <a:spcAft>
-                <a:spcPts val="300"/>
+                <a:spcPct val="85000"/>
+              </a:lnSpc>
+              <a:spcBef>
+                <a:spcPts val="200"/>
+              </a:spcBef>
+              <a:spcAft>
+                <a:spcPts val="200"/>
               </a:spcAft>
               <a:defRPr sz="2000"/>
             </a:pPr>
@@ -10172,10 +10877,13 @@
           <a:p>
             <a:pPr>
               <a:lnSpc>
-                <a:spcPct val="90000"/>
-              </a:lnSpc>
-              <a:spcAft>
-                <a:spcPts val="300"/>
+                <a:spcPct val="85000"/>
+              </a:lnSpc>
+              <a:spcBef>
+                <a:spcPts val="200"/>
+              </a:spcBef>
+              <a:spcAft>
+                <a:spcPts val="200"/>
               </a:spcAft>
               <a:defRPr sz="2000"/>
             </a:pPr>
@@ -10187,10 +10895,13 @@
           <a:p>
             <a:pPr>
               <a:lnSpc>
-                <a:spcPct val="90000"/>
-              </a:lnSpc>
-              <a:spcAft>
-                <a:spcPts val="300"/>
+                <a:spcPct val="85000"/>
+              </a:lnSpc>
+              <a:spcBef>
+                <a:spcPts val="200"/>
+              </a:spcBef>
+              <a:spcAft>
+                <a:spcPts val="200"/>
               </a:spcAft>
               <a:defRPr sz="2000"/>
             </a:pPr>
@@ -10213,10 +10924,13 @@
           <a:p>
             <a:pPr>
               <a:lnSpc>
-                <a:spcPct val="90000"/>
-              </a:lnSpc>
-              <a:spcAft>
-                <a:spcPts val="300"/>
+                <a:spcPct val="85000"/>
+              </a:lnSpc>
+              <a:spcBef>
+                <a:spcPts val="200"/>
+              </a:spcBef>
+              <a:spcAft>
+                <a:spcPts val="200"/>
               </a:spcAft>
               <a:defRPr sz="2000"/>
             </a:pPr>
@@ -10228,10 +10942,13 @@
           <a:p>
             <a:pPr>
               <a:lnSpc>
-                <a:spcPct val="90000"/>
-              </a:lnSpc>
-              <a:spcAft>
-                <a:spcPts val="300"/>
+                <a:spcPct val="85000"/>
+              </a:lnSpc>
+              <a:spcBef>
+                <a:spcPts val="200"/>
+              </a:spcBef>
+              <a:spcAft>
+                <a:spcPts val="200"/>
               </a:spcAft>
               <a:defRPr sz="2000"/>
             </a:pPr>
@@ -10243,10 +10960,13 @@
           <a:p>
             <a:pPr>
               <a:lnSpc>
-                <a:spcPct val="90000"/>
-              </a:lnSpc>
-              <a:spcAft>
-                <a:spcPts val="300"/>
+                <a:spcPct val="85000"/>
+              </a:lnSpc>
+              <a:spcBef>
+                <a:spcPts val="200"/>
+              </a:spcBef>
+              <a:spcAft>
+                <a:spcPts val="200"/>
               </a:spcAft>
               <a:defRPr sz="2000"/>
             </a:pPr>
@@ -10258,10 +10978,13 @@
           <a:p>
             <a:pPr>
               <a:lnSpc>
-                <a:spcPct val="90000"/>
-              </a:lnSpc>
-              <a:spcAft>
-                <a:spcPts val="300"/>
+                <a:spcPct val="85000"/>
+              </a:lnSpc>
+              <a:spcBef>
+                <a:spcPts val="200"/>
+              </a:spcBef>
+              <a:spcAft>
+                <a:spcPts val="200"/>
               </a:spcAft>
               <a:defRPr sz="2000"/>
             </a:pPr>
@@ -10273,10 +10996,13 @@
           <a:p>
             <a:pPr>
               <a:lnSpc>
-                <a:spcPct val="90000"/>
-              </a:lnSpc>
-              <a:spcAft>
-                <a:spcPts val="300"/>
+                <a:spcPct val="85000"/>
+              </a:lnSpc>
+              <a:spcBef>
+                <a:spcPts val="200"/>
+              </a:spcBef>
+              <a:spcAft>
+                <a:spcPts val="200"/>
               </a:spcAft>
               <a:defRPr sz="2000"/>
             </a:pPr>
@@ -10299,10 +11025,13 @@
           <a:p>
             <a:pPr>
               <a:lnSpc>
-                <a:spcPct val="90000"/>
-              </a:lnSpc>
-              <a:spcAft>
-                <a:spcPts val="300"/>
+                <a:spcPct val="85000"/>
+              </a:lnSpc>
+              <a:spcBef>
+                <a:spcPts val="200"/>
+              </a:spcBef>
+              <a:spcAft>
+                <a:spcPts val="200"/>
               </a:spcAft>
               <a:defRPr sz="2000"/>
             </a:pPr>
@@ -10314,10 +11043,13 @@
           <a:p>
             <a:pPr>
               <a:lnSpc>
-                <a:spcPct val="90000"/>
-              </a:lnSpc>
-              <a:spcAft>
-                <a:spcPts val="300"/>
+                <a:spcPct val="85000"/>
+              </a:lnSpc>
+              <a:spcBef>
+                <a:spcPts val="200"/>
+              </a:spcBef>
+              <a:spcAft>
+                <a:spcPts val="200"/>
               </a:spcAft>
               <a:defRPr sz="2000"/>
             </a:pPr>
@@ -10329,10 +11061,13 @@
           <a:p>
             <a:pPr>
               <a:lnSpc>
-                <a:spcPct val="90000"/>
-              </a:lnSpc>
-              <a:spcAft>
-                <a:spcPts val="300"/>
+                <a:spcPct val="85000"/>
+              </a:lnSpc>
+              <a:spcBef>
+                <a:spcPts val="200"/>
+              </a:spcBef>
+              <a:spcAft>
+                <a:spcPts val="200"/>
               </a:spcAft>
               <a:defRPr sz="2000"/>
             </a:pPr>
@@ -10344,10 +11079,13 @@
           <a:p>
             <a:pPr>
               <a:lnSpc>
-                <a:spcPct val="90000"/>
-              </a:lnSpc>
-              <a:spcAft>
-                <a:spcPts val="300"/>
+                <a:spcPct val="85000"/>
+              </a:lnSpc>
+              <a:spcBef>
+                <a:spcPts val="200"/>
+              </a:spcBef>
+              <a:spcAft>
+                <a:spcPts val="200"/>
               </a:spcAft>
               <a:defRPr sz="2000"/>
             </a:pPr>
@@ -10388,10 +11126,19 @@
         </p:nvSpPr>
         <p:spPr/>
         <p:txBody>
-          <a:bodyPr wrap="square"/>
+          <a:bodyPr wrap="square" tIns="25400" bIns="25400" lIns="63500" rIns="63500"/>
           <a:lstStyle/>
           <a:p>
             <a:pPr>
+              <a:lnSpc>
+                <a:spcPct val="85000"/>
+              </a:lnSpc>
+              <a:spcBef>
+                <a:spcPts val="200"/>
+              </a:spcBef>
+              <a:spcAft>
+                <a:spcPts val="200"/>
+              </a:spcAft>
               <a:defRPr sz="4000">
                 <a:solidFill>
                   <a:srgbClr val="667EEA"/>
@@ -10399,6 +11146,7 @@
               </a:defRPr>
             </a:pPr>
             <a:r>
+              <a:rPr/>
               <a:t>🖥️ Bilgisayar Sistemleri</a:t>
             </a:r>
           </a:p>
@@ -10438,7 +11186,7 @@
           <a:noFill/>
         </p:spPr>
         <p:txBody>
-          <a:bodyPr wrap="square">
+          <a:bodyPr wrap="square" tIns="25400" bIns="25400" lIns="63500" rIns="63500">
             <a:spAutoFit/>
           </a:bodyPr>
           <a:lstStyle/>
@@ -10455,10 +11203,13 @@
           <a:p>
             <a:pPr>
               <a:lnSpc>
-                <a:spcPct val="90000"/>
-              </a:lnSpc>
-              <a:spcAft>
-                <a:spcPts val="300"/>
+                <a:spcPct val="85000"/>
+              </a:lnSpc>
+              <a:spcBef>
+                <a:spcPts val="200"/>
+              </a:spcBef>
+              <a:spcAft>
+                <a:spcPts val="200"/>
               </a:spcAft>
               <a:defRPr sz="2000"/>
             </a:pPr>
@@ -10481,10 +11232,13 @@
           <a:p>
             <a:pPr>
               <a:lnSpc>
-                <a:spcPct val="90000"/>
-              </a:lnSpc>
-              <a:spcAft>
-                <a:spcPts val="300"/>
+                <a:spcPct val="85000"/>
+              </a:lnSpc>
+              <a:spcBef>
+                <a:spcPts val="200"/>
+              </a:spcBef>
+              <a:spcAft>
+                <a:spcPts val="200"/>
               </a:spcAft>
               <a:defRPr sz="2000"/>
             </a:pPr>
@@ -10496,10 +11250,13 @@
           <a:p>
             <a:pPr>
               <a:lnSpc>
-                <a:spcPct val="90000"/>
-              </a:lnSpc>
-              <a:spcAft>
-                <a:spcPts val="300"/>
+                <a:spcPct val="85000"/>
+              </a:lnSpc>
+              <a:spcBef>
+                <a:spcPts val="200"/>
+              </a:spcBef>
+              <a:spcAft>
+                <a:spcPts val="200"/>
               </a:spcAft>
               <a:defRPr sz="2000"/>
             </a:pPr>
@@ -10511,10 +11268,13 @@
           <a:p>
             <a:pPr>
               <a:lnSpc>
-                <a:spcPct val="90000"/>
-              </a:lnSpc>
-              <a:spcAft>
-                <a:spcPts val="300"/>
+                <a:spcPct val="85000"/>
+              </a:lnSpc>
+              <a:spcBef>
+                <a:spcPts val="200"/>
+              </a:spcBef>
+              <a:spcAft>
+                <a:spcPts val="200"/>
               </a:spcAft>
               <a:defRPr sz="2000"/>
             </a:pPr>
@@ -10537,10 +11297,13 @@
           <a:p>
             <a:pPr>
               <a:lnSpc>
-                <a:spcPct val="90000"/>
-              </a:lnSpc>
-              <a:spcAft>
-                <a:spcPts val="300"/>
+                <a:spcPct val="85000"/>
+              </a:lnSpc>
+              <a:spcBef>
+                <a:spcPts val="200"/>
+              </a:spcBef>
+              <a:spcAft>
+                <a:spcPts val="200"/>
               </a:spcAft>
               <a:defRPr sz="2000"/>
             </a:pPr>
@@ -10552,10 +11315,13 @@
           <a:p>
             <a:pPr>
               <a:lnSpc>
-                <a:spcPct val="90000"/>
-              </a:lnSpc>
-              <a:spcAft>
-                <a:spcPts val="300"/>
+                <a:spcPct val="85000"/>
+              </a:lnSpc>
+              <a:spcBef>
+                <a:spcPts val="200"/>
+              </a:spcBef>
+              <a:spcAft>
+                <a:spcPts val="200"/>
               </a:spcAft>
               <a:defRPr sz="2000"/>
             </a:pPr>
@@ -10567,10 +11333,13 @@
           <a:p>
             <a:pPr>
               <a:lnSpc>
-                <a:spcPct val="90000"/>
-              </a:lnSpc>
-              <a:spcAft>
-                <a:spcPts val="300"/>
+                <a:spcPct val="85000"/>
+              </a:lnSpc>
+              <a:spcBef>
+                <a:spcPts val="200"/>
+              </a:spcBef>
+              <a:spcAft>
+                <a:spcPts val="200"/>
               </a:spcAft>
               <a:defRPr sz="2000"/>
             </a:pPr>
@@ -10593,10 +11362,13 @@
           <a:p>
             <a:pPr>
               <a:lnSpc>
-                <a:spcPct val="90000"/>
-              </a:lnSpc>
-              <a:spcAft>
-                <a:spcPts val="300"/>
+                <a:spcPct val="85000"/>
+              </a:lnSpc>
+              <a:spcBef>
+                <a:spcPts val="200"/>
+              </a:spcBef>
+              <a:spcAft>
+                <a:spcPts val="200"/>
               </a:spcAft>
               <a:defRPr sz="2000"/>
             </a:pPr>
@@ -10608,10 +11380,13 @@
           <a:p>
             <a:pPr>
               <a:lnSpc>
-                <a:spcPct val="90000"/>
-              </a:lnSpc>
-              <a:spcAft>
-                <a:spcPts val="300"/>
+                <a:spcPct val="85000"/>
+              </a:lnSpc>
+              <a:spcBef>
+                <a:spcPts val="200"/>
+              </a:spcBef>
+              <a:spcAft>
+                <a:spcPts val="200"/>
               </a:spcAft>
               <a:defRPr sz="2000"/>
             </a:pPr>
@@ -10623,10 +11398,13 @@
           <a:p>
             <a:pPr>
               <a:lnSpc>
-                <a:spcPct val="90000"/>
-              </a:lnSpc>
-              <a:spcAft>
-                <a:spcPts val="300"/>
+                <a:spcPct val="85000"/>
+              </a:lnSpc>
+              <a:spcBef>
+                <a:spcPts val="200"/>
+              </a:spcBef>
+              <a:spcAft>
+                <a:spcPts val="200"/>
               </a:spcAft>
               <a:defRPr sz="2000"/>
             </a:pPr>
@@ -10667,10 +11445,19 @@
         </p:nvSpPr>
         <p:spPr/>
         <p:txBody>
-          <a:bodyPr wrap="square"/>
+          <a:bodyPr wrap="square" tIns="25400" bIns="25400" lIns="63500" rIns="63500"/>
           <a:lstStyle/>
           <a:p>
             <a:pPr>
+              <a:lnSpc>
+                <a:spcPct val="85000"/>
+              </a:lnSpc>
+              <a:spcBef>
+                <a:spcPts val="200"/>
+              </a:spcBef>
+              <a:spcAft>
+                <a:spcPts val="200"/>
+              </a:spcAft>
               <a:defRPr sz="4000">
                 <a:solidFill>
                   <a:srgbClr val="667EEA"/>
@@ -10678,6 +11465,7 @@
               </a:defRPr>
             </a:pPr>
             <a:r>
+              <a:rPr/>
               <a:t>🧠 İşlemci - Bilgisayarın Beyni</a:t>
             </a:r>
           </a:p>
@@ -10717,7 +11505,7 @@
           <a:noFill/>
         </p:spPr>
         <p:txBody>
-          <a:bodyPr wrap="square">
+          <a:bodyPr wrap="square" tIns="25400" bIns="25400" lIns="63500" rIns="63500">
             <a:spAutoFit/>
           </a:bodyPr>
           <a:lstStyle/>
@@ -10734,10 +11522,13 @@
           <a:p>
             <a:pPr>
               <a:lnSpc>
-                <a:spcPct val="90000"/>
-              </a:lnSpc>
-              <a:spcAft>
-                <a:spcPts val="300"/>
+                <a:spcPct val="85000"/>
+              </a:lnSpc>
+              <a:spcBef>
+                <a:spcPts val="200"/>
+              </a:spcBef>
+              <a:spcAft>
+                <a:spcPts val="200"/>
               </a:spcAft>
               <a:defRPr sz="2000"/>
             </a:pPr>
@@ -10760,10 +11551,13 @@
           <a:p>
             <a:pPr>
               <a:lnSpc>
-                <a:spcPct val="90000"/>
-              </a:lnSpc>
-              <a:spcAft>
-                <a:spcPts val="300"/>
+                <a:spcPct val="85000"/>
+              </a:lnSpc>
+              <a:spcBef>
+                <a:spcPts val="200"/>
+              </a:spcBef>
+              <a:spcAft>
+                <a:spcPts val="200"/>
               </a:spcAft>
               <a:defRPr sz="2000"/>
             </a:pPr>
@@ -10775,10 +11569,13 @@
           <a:p>
             <a:pPr>
               <a:lnSpc>
-                <a:spcPct val="90000"/>
-              </a:lnSpc>
-              <a:spcAft>
-                <a:spcPts val="300"/>
+                <a:spcPct val="85000"/>
+              </a:lnSpc>
+              <a:spcBef>
+                <a:spcPts val="200"/>
+              </a:spcBef>
+              <a:spcAft>
+                <a:spcPts val="200"/>
               </a:spcAft>
               <a:defRPr sz="2000"/>
             </a:pPr>
@@ -10790,10 +11587,13 @@
           <a:p>
             <a:pPr>
               <a:lnSpc>
-                <a:spcPct val="90000"/>
-              </a:lnSpc>
-              <a:spcAft>
-                <a:spcPts val="300"/>
+                <a:spcPct val="85000"/>
+              </a:lnSpc>
+              <a:spcBef>
+                <a:spcPts val="200"/>
+              </a:spcBef>
+              <a:spcAft>
+                <a:spcPts val="200"/>
               </a:spcAft>
               <a:defRPr sz="2000"/>
             </a:pPr>
@@ -10805,10 +11605,13 @@
           <a:p>
             <a:pPr>
               <a:lnSpc>
-                <a:spcPct val="90000"/>
-              </a:lnSpc>
-              <a:spcAft>
-                <a:spcPts val="300"/>
+                <a:spcPct val="85000"/>
+              </a:lnSpc>
+              <a:spcBef>
+                <a:spcPts val="200"/>
+              </a:spcBef>
+              <a:spcAft>
+                <a:spcPts val="200"/>
               </a:spcAft>
               <a:defRPr sz="2000"/>
             </a:pPr>
@@ -10831,10 +11634,13 @@
           <a:p>
             <a:pPr>
               <a:lnSpc>
-                <a:spcPct val="90000"/>
-              </a:lnSpc>
-              <a:spcAft>
-                <a:spcPts val="300"/>
+                <a:spcPct val="85000"/>
+              </a:lnSpc>
+              <a:spcBef>
+                <a:spcPts val="200"/>
+              </a:spcBef>
+              <a:spcAft>
+                <a:spcPts val="200"/>
               </a:spcAft>
               <a:defRPr sz="2000"/>
             </a:pPr>
@@ -10846,10 +11652,13 @@
           <a:p>
             <a:pPr>
               <a:lnSpc>
-                <a:spcPct val="90000"/>
-              </a:lnSpc>
-              <a:spcAft>
-                <a:spcPts val="300"/>
+                <a:spcPct val="85000"/>
+              </a:lnSpc>
+              <a:spcBef>
+                <a:spcPts val="200"/>
+              </a:spcBef>
+              <a:spcAft>
+                <a:spcPts val="200"/>
               </a:spcAft>
               <a:defRPr sz="2000"/>
             </a:pPr>
@@ -10861,10 +11670,13 @@
           <a:p>
             <a:pPr>
               <a:lnSpc>
-                <a:spcPct val="90000"/>
-              </a:lnSpc>
-              <a:spcAft>
-                <a:spcPts val="300"/>
+                <a:spcPct val="85000"/>
+              </a:lnSpc>
+              <a:spcBef>
+                <a:spcPts val="200"/>
+              </a:spcBef>
+              <a:spcAft>
+                <a:spcPts val="200"/>
               </a:spcAft>
               <a:defRPr sz="2000"/>
             </a:pPr>
@@ -10876,10 +11688,13 @@
           <a:p>
             <a:pPr>
               <a:lnSpc>
-                <a:spcPct val="90000"/>
-              </a:lnSpc>
-              <a:spcAft>
-                <a:spcPts val="300"/>
+                <a:spcPct val="85000"/>
+              </a:lnSpc>
+              <a:spcBef>
+                <a:spcPts val="200"/>
+              </a:spcBef>
+              <a:spcAft>
+                <a:spcPts val="200"/>
               </a:spcAft>
               <a:defRPr sz="2000"/>
             </a:pPr>
@@ -10902,10 +11717,13 @@
           <a:p>
             <a:pPr>
               <a:lnSpc>
-                <a:spcPct val="90000"/>
-              </a:lnSpc>
-              <a:spcAft>
-                <a:spcPts val="300"/>
+                <a:spcPct val="85000"/>
+              </a:lnSpc>
+              <a:spcBef>
+                <a:spcPts val="200"/>
+              </a:spcBef>
+              <a:spcAft>
+                <a:spcPts val="200"/>
               </a:spcAft>
               <a:defRPr sz="2000"/>
             </a:pPr>
@@ -10917,10 +11735,13 @@
           <a:p>
             <a:pPr>
               <a:lnSpc>
-                <a:spcPct val="90000"/>
-              </a:lnSpc>
-              <a:spcAft>
-                <a:spcPts val="300"/>
+                <a:spcPct val="85000"/>
+              </a:lnSpc>
+              <a:spcBef>
+                <a:spcPts val="200"/>
+              </a:spcBef>
+              <a:spcAft>
+                <a:spcPts val="200"/>
               </a:spcAft>
               <a:defRPr sz="2000"/>
             </a:pPr>
@@ -10943,10 +11764,13 @@
           <a:p>
             <a:pPr>
               <a:lnSpc>
-                <a:spcPct val="90000"/>
-              </a:lnSpc>
-              <a:spcAft>
-                <a:spcPts val="300"/>
+                <a:spcPct val="85000"/>
+              </a:lnSpc>
+              <a:spcBef>
+                <a:spcPts val="200"/>
+              </a:spcBef>
+              <a:spcAft>
+                <a:spcPts val="200"/>
               </a:spcAft>
               <a:defRPr sz="2000"/>
             </a:pPr>
@@ -10958,10 +11782,13 @@
           <a:p>
             <a:pPr>
               <a:lnSpc>
-                <a:spcPct val="90000"/>
-              </a:lnSpc>
-              <a:spcAft>
-                <a:spcPts val="300"/>
+                <a:spcPct val="85000"/>
+              </a:lnSpc>
+              <a:spcBef>
+                <a:spcPts val="200"/>
+              </a:spcBef>
+              <a:spcAft>
+                <a:spcPts val="200"/>
               </a:spcAft>
               <a:defRPr sz="2000"/>
             </a:pPr>
@@ -11002,10 +11829,19 @@
         </p:nvSpPr>
         <p:spPr/>
         <p:txBody>
-          <a:bodyPr wrap="square"/>
+          <a:bodyPr wrap="square" tIns="25400" bIns="25400" lIns="63500" rIns="63500"/>
           <a:lstStyle/>
           <a:p>
             <a:pPr>
+              <a:lnSpc>
+                <a:spcPct val="85000"/>
+              </a:lnSpc>
+              <a:spcBef>
+                <a:spcPts val="200"/>
+              </a:spcBef>
+              <a:spcAft>
+                <a:spcPts val="200"/>
+              </a:spcAft>
               <a:defRPr sz="4000">
                 <a:solidFill>
                   <a:srgbClr val="667EEA"/>
@@ -11013,6 +11849,7 @@
               </a:defRPr>
             </a:pPr>
             <a:r>
+              <a:rPr/>
               <a:t>🎯 RAM - Geçici Hafıza</a:t>
             </a:r>
           </a:p>
@@ -11052,7 +11889,7 @@
           <a:noFill/>
         </p:spPr>
         <p:txBody>
-          <a:bodyPr wrap="square">
+          <a:bodyPr wrap="square" tIns="25400" bIns="25400" lIns="63500" rIns="63500">
             <a:spAutoFit/>
           </a:bodyPr>
           <a:lstStyle/>
@@ -11069,10 +11906,13 @@
           <a:p>
             <a:pPr>
               <a:lnSpc>
-                <a:spcPct val="90000"/>
-              </a:lnSpc>
-              <a:spcAft>
-                <a:spcPts val="300"/>
+                <a:spcPct val="85000"/>
+              </a:lnSpc>
+              <a:spcBef>
+                <a:spcPts val="200"/>
+              </a:spcBef>
+              <a:spcAft>
+                <a:spcPts val="200"/>
               </a:spcAft>
               <a:defRPr sz="2000"/>
             </a:pPr>
@@ -11095,10 +11935,13 @@
           <a:p>
             <a:pPr>
               <a:lnSpc>
-                <a:spcPct val="90000"/>
-              </a:lnSpc>
-              <a:spcAft>
-                <a:spcPts val="300"/>
+                <a:spcPct val="85000"/>
+              </a:lnSpc>
+              <a:spcBef>
+                <a:spcPts val="200"/>
+              </a:spcBef>
+              <a:spcAft>
+                <a:spcPts val="200"/>
               </a:spcAft>
               <a:defRPr sz="2000"/>
             </a:pPr>
@@ -11110,10 +11953,13 @@
           <a:p>
             <a:pPr>
               <a:lnSpc>
-                <a:spcPct val="90000"/>
-              </a:lnSpc>
-              <a:spcAft>
-                <a:spcPts val="300"/>
+                <a:spcPct val="85000"/>
+              </a:lnSpc>
+              <a:spcBef>
+                <a:spcPts val="200"/>
+              </a:spcBef>
+              <a:spcAft>
+                <a:spcPts val="200"/>
               </a:spcAft>
               <a:defRPr sz="2000"/>
             </a:pPr>
@@ -11125,10 +11971,13 @@
           <a:p>
             <a:pPr>
               <a:lnSpc>
-                <a:spcPct val="90000"/>
-              </a:lnSpc>
-              <a:spcAft>
-                <a:spcPts val="300"/>
+                <a:spcPct val="85000"/>
+              </a:lnSpc>
+              <a:spcBef>
+                <a:spcPts val="200"/>
+              </a:spcBef>
+              <a:spcAft>
+                <a:spcPts val="200"/>
               </a:spcAft>
               <a:defRPr sz="2000"/>
             </a:pPr>
@@ -11140,10 +11989,13 @@
           <a:p>
             <a:pPr>
               <a:lnSpc>
-                <a:spcPct val="90000"/>
-              </a:lnSpc>
-              <a:spcAft>
-                <a:spcPts val="300"/>
+                <a:spcPct val="85000"/>
+              </a:lnSpc>
+              <a:spcBef>
+                <a:spcPts val="200"/>
+              </a:spcBef>
+              <a:spcAft>
+                <a:spcPts val="200"/>
               </a:spcAft>
               <a:defRPr sz="2000"/>
             </a:pPr>
@@ -11166,10 +12018,13 @@
           <a:p>
             <a:pPr>
               <a:lnSpc>
-                <a:spcPct val="90000"/>
-              </a:lnSpc>
-              <a:spcAft>
-                <a:spcPts val="300"/>
+                <a:spcPct val="85000"/>
+              </a:lnSpc>
+              <a:spcBef>
+                <a:spcPts val="200"/>
+              </a:spcBef>
+              <a:spcAft>
+                <a:spcPts val="200"/>
               </a:spcAft>
               <a:defRPr sz="2000"/>
             </a:pPr>
@@ -11181,10 +12036,13 @@
           <a:p>
             <a:pPr>
               <a:lnSpc>
-                <a:spcPct val="90000"/>
-              </a:lnSpc>
-              <a:spcAft>
-                <a:spcPts val="300"/>
+                <a:spcPct val="85000"/>
+              </a:lnSpc>
+              <a:spcBef>
+                <a:spcPts val="200"/>
+              </a:spcBef>
+              <a:spcAft>
+                <a:spcPts val="200"/>
               </a:spcAft>
               <a:defRPr sz="2000"/>
             </a:pPr>
@@ -11196,10 +12054,13 @@
           <a:p>
             <a:pPr>
               <a:lnSpc>
-                <a:spcPct val="90000"/>
-              </a:lnSpc>
-              <a:spcAft>
-                <a:spcPts val="300"/>
+                <a:spcPct val="85000"/>
+              </a:lnSpc>
+              <a:spcBef>
+                <a:spcPts val="200"/>
+              </a:spcBef>
+              <a:spcAft>
+                <a:spcPts val="200"/>
               </a:spcAft>
               <a:defRPr sz="2000"/>
             </a:pPr>
@@ -11222,10 +12083,13 @@
           <a:p>
             <a:pPr>
               <a:lnSpc>
-                <a:spcPct val="90000"/>
-              </a:lnSpc>
-              <a:spcAft>
-                <a:spcPts val="300"/>
+                <a:spcPct val="85000"/>
+              </a:lnSpc>
+              <a:spcBef>
+                <a:spcPts val="200"/>
+              </a:spcBef>
+              <a:spcAft>
+                <a:spcPts val="200"/>
               </a:spcAft>
               <a:defRPr sz="2000"/>
             </a:pPr>
@@ -11237,10 +12101,13 @@
           <a:p>
             <a:pPr>
               <a:lnSpc>
-                <a:spcPct val="90000"/>
-              </a:lnSpc>
-              <a:spcAft>
-                <a:spcPts val="300"/>
+                <a:spcPct val="85000"/>
+              </a:lnSpc>
+              <a:spcBef>
+                <a:spcPts val="200"/>
+              </a:spcBef>
+              <a:spcAft>
+                <a:spcPts val="200"/>
               </a:spcAft>
               <a:defRPr sz="2000"/>
             </a:pPr>
@@ -11252,10 +12119,13 @@
           <a:p>
             <a:pPr>
               <a:lnSpc>
-                <a:spcPct val="90000"/>
-              </a:lnSpc>
-              <a:spcAft>
-                <a:spcPts val="300"/>
+                <a:spcPct val="85000"/>
+              </a:lnSpc>
+              <a:spcBef>
+                <a:spcPts val="200"/>
+              </a:spcBef>
+              <a:spcAft>
+                <a:spcPts val="200"/>
               </a:spcAft>
               <a:defRPr sz="2000"/>
             </a:pPr>
@@ -11267,10 +12137,13 @@
           <a:p>
             <a:pPr>
               <a:lnSpc>
-                <a:spcPct val="90000"/>
-              </a:lnSpc>
-              <a:spcAft>
-                <a:spcPts val="300"/>
+                <a:spcPct val="85000"/>
+              </a:lnSpc>
+              <a:spcBef>
+                <a:spcPts val="200"/>
+              </a:spcBef>
+              <a:spcAft>
+                <a:spcPts val="200"/>
               </a:spcAft>
               <a:defRPr sz="2000"/>
             </a:pPr>
@@ -11293,10 +12166,13 @@
           <a:p>
             <a:pPr>
               <a:lnSpc>
-                <a:spcPct val="90000"/>
-              </a:lnSpc>
-              <a:spcAft>
-                <a:spcPts val="300"/>
+                <a:spcPct val="85000"/>
+              </a:lnSpc>
+              <a:spcBef>
+                <a:spcPts val="200"/>
+              </a:spcBef>
+              <a:spcAft>
+                <a:spcPts val="200"/>
               </a:spcAft>
               <a:defRPr sz="2000"/>
             </a:pPr>
@@ -11308,10 +12184,13 @@
           <a:p>
             <a:pPr>
               <a:lnSpc>
-                <a:spcPct val="90000"/>
-              </a:lnSpc>
-              <a:spcAft>
-                <a:spcPts val="300"/>
+                <a:spcPct val="85000"/>
+              </a:lnSpc>
+              <a:spcBef>
+                <a:spcPts val="200"/>
+              </a:spcBef>
+              <a:spcAft>
+                <a:spcPts val="200"/>
               </a:spcAft>
               <a:defRPr sz="2000"/>
             </a:pPr>
@@ -11352,10 +12231,19 @@
         </p:nvSpPr>
         <p:spPr/>
         <p:txBody>
-          <a:bodyPr wrap="square"/>
+          <a:bodyPr wrap="square" tIns="25400" bIns="25400" lIns="63500" rIns="63500"/>
           <a:lstStyle/>
           <a:p>
             <a:pPr>
+              <a:lnSpc>
+                <a:spcPct val="85000"/>
+              </a:lnSpc>
+              <a:spcBef>
+                <a:spcPts val="200"/>
+              </a:spcBef>
+              <a:spcAft>
+                <a:spcPts val="200"/>
+              </a:spcAft>
               <a:defRPr sz="4000">
                 <a:solidFill>
                   <a:srgbClr val="667EEA"/>
@@ -11363,6 +12251,7 @@
               </a:defRPr>
             </a:pPr>
             <a:r>
+              <a:rPr/>
               <a:t>💾 Kalıcı Hafıza - Hard Disk &amp; SSD</a:t>
             </a:r>
           </a:p>
@@ -11402,7 +12291,7 @@
           <a:noFill/>
         </p:spPr>
         <p:txBody>
-          <a:bodyPr wrap="square">
+          <a:bodyPr wrap="square" tIns="25400" bIns="25400" lIns="63500" rIns="63500">
             <a:spAutoFit/>
           </a:bodyPr>
           <a:lstStyle/>
@@ -11419,10 +12308,13 @@
           <a:p>
             <a:pPr>
               <a:lnSpc>
-                <a:spcPct val="90000"/>
-              </a:lnSpc>
-              <a:spcAft>
-                <a:spcPts val="300"/>
+                <a:spcPct val="85000"/>
+              </a:lnSpc>
+              <a:spcBef>
+                <a:spcPts val="200"/>
+              </a:spcBef>
+              <a:spcAft>
+                <a:spcPts val="200"/>
               </a:spcAft>
               <a:defRPr sz="2000"/>
             </a:pPr>
@@ -11434,10 +12326,13 @@
           <a:p>
             <a:pPr>
               <a:lnSpc>
-                <a:spcPct val="90000"/>
-              </a:lnSpc>
-              <a:spcAft>
-                <a:spcPts val="300"/>
+                <a:spcPct val="85000"/>
+              </a:lnSpc>
+              <a:spcBef>
+                <a:spcPts val="200"/>
+              </a:spcBef>
+              <a:spcAft>
+                <a:spcPts val="200"/>
               </a:spcAft>
               <a:defRPr sz="2000"/>
             </a:pPr>
@@ -11449,10 +12344,13 @@
           <a:p>
             <a:pPr>
               <a:lnSpc>
-                <a:spcPct val="90000"/>
-              </a:lnSpc>
-              <a:spcAft>
-                <a:spcPts val="300"/>
+                <a:spcPct val="85000"/>
+              </a:lnSpc>
+              <a:spcBef>
+                <a:spcPts val="200"/>
+              </a:spcBef>
+              <a:spcAft>
+                <a:spcPts val="200"/>
               </a:spcAft>
               <a:defRPr sz="2000"/>
             </a:pPr>
@@ -11464,10 +12362,13 @@
           <a:p>
             <a:pPr>
               <a:lnSpc>
-                <a:spcPct val="90000"/>
-              </a:lnSpc>
-              <a:spcAft>
-                <a:spcPts val="300"/>
+                <a:spcPct val="85000"/>
+              </a:lnSpc>
+              <a:spcBef>
+                <a:spcPts val="200"/>
+              </a:spcBef>
+              <a:spcAft>
+                <a:spcPts val="200"/>
               </a:spcAft>
               <a:defRPr sz="2000"/>
             </a:pPr>
@@ -11490,10 +12391,13 @@
           <a:p>
             <a:pPr>
               <a:lnSpc>
-                <a:spcPct val="90000"/>
-              </a:lnSpc>
-              <a:spcAft>
-                <a:spcPts val="300"/>
+                <a:spcPct val="85000"/>
+              </a:lnSpc>
+              <a:spcBef>
+                <a:spcPts val="200"/>
+              </a:spcBef>
+              <a:spcAft>
+                <a:spcPts val="200"/>
               </a:spcAft>
               <a:defRPr sz="2000"/>
             </a:pPr>
@@ -11505,10 +12409,13 @@
           <a:p>
             <a:pPr>
               <a:lnSpc>
-                <a:spcPct val="90000"/>
-              </a:lnSpc>
-              <a:spcAft>
-                <a:spcPts val="300"/>
+                <a:spcPct val="85000"/>
+              </a:lnSpc>
+              <a:spcBef>
+                <a:spcPts val="200"/>
+              </a:spcBef>
+              <a:spcAft>
+                <a:spcPts val="200"/>
               </a:spcAft>
               <a:defRPr sz="2000"/>
             </a:pPr>
@@ -11520,10 +12427,13 @@
           <a:p>
             <a:pPr>
               <a:lnSpc>
-                <a:spcPct val="90000"/>
-              </a:lnSpc>
-              <a:spcAft>
-                <a:spcPts val="300"/>
+                <a:spcPct val="85000"/>
+              </a:lnSpc>
+              <a:spcBef>
+                <a:spcPts val="200"/>
+              </a:spcBef>
+              <a:spcAft>
+                <a:spcPts val="200"/>
               </a:spcAft>
               <a:defRPr sz="2000"/>
             </a:pPr>
@@ -11535,10 +12445,13 @@
           <a:p>
             <a:pPr>
               <a:lnSpc>
-                <a:spcPct val="90000"/>
-              </a:lnSpc>
-              <a:spcAft>
-                <a:spcPts val="300"/>
+                <a:spcPct val="85000"/>
+              </a:lnSpc>
+              <a:spcBef>
+                <a:spcPts val="200"/>
+              </a:spcBef>
+              <a:spcAft>
+                <a:spcPts val="200"/>
               </a:spcAft>
               <a:defRPr sz="2000"/>
             </a:pPr>
@@ -11561,10 +12474,13 @@
           <a:p>
             <a:pPr>
               <a:lnSpc>
-                <a:spcPct val="90000"/>
-              </a:lnSpc>
-              <a:spcAft>
-                <a:spcPts val="300"/>
+                <a:spcPct val="85000"/>
+              </a:lnSpc>
+              <a:spcBef>
+                <a:spcPts val="200"/>
+              </a:spcBef>
+              <a:spcAft>
+                <a:spcPts val="200"/>
               </a:spcAft>
               <a:defRPr sz="2000"/>
             </a:pPr>
@@ -11576,10 +12492,13 @@
           <a:p>
             <a:pPr>
               <a:lnSpc>
-                <a:spcPct val="90000"/>
-              </a:lnSpc>
-              <a:spcAft>
-                <a:spcPts val="300"/>
+                <a:spcPct val="85000"/>
+              </a:lnSpc>
+              <a:spcBef>
+                <a:spcPts val="200"/>
+              </a:spcBef>
+              <a:spcAft>
+                <a:spcPts val="200"/>
               </a:spcAft>
               <a:defRPr sz="2000"/>
             </a:pPr>
@@ -11602,10 +12521,13 @@
           <a:p>
             <a:pPr>
               <a:lnSpc>
-                <a:spcPct val="90000"/>
-              </a:lnSpc>
-              <a:spcAft>
-                <a:spcPts val="300"/>
+                <a:spcPct val="85000"/>
+              </a:lnSpc>
+              <a:spcBef>
+                <a:spcPts val="200"/>
+              </a:spcBef>
+              <a:spcAft>
+                <a:spcPts val="200"/>
               </a:spcAft>
               <a:defRPr sz="2000"/>
             </a:pPr>
@@ -11617,10 +12539,13 @@
           <a:p>
             <a:pPr>
               <a:lnSpc>
-                <a:spcPct val="90000"/>
-              </a:lnSpc>
-              <a:spcAft>
-                <a:spcPts val="300"/>
+                <a:spcPct val="85000"/>
+              </a:lnSpc>
+              <a:spcBef>
+                <a:spcPts val="200"/>
+              </a:spcBef>
+              <a:spcAft>
+                <a:spcPts val="200"/>
               </a:spcAft>
               <a:defRPr sz="2000"/>
             </a:pPr>
@@ -11643,10 +12568,13 @@
           <a:p>
             <a:pPr>
               <a:lnSpc>
-                <a:spcPct val="90000"/>
-              </a:lnSpc>
-              <a:spcAft>
-                <a:spcPts val="300"/>
+                <a:spcPct val="85000"/>
+              </a:lnSpc>
+              <a:spcBef>
+                <a:spcPts val="200"/>
+              </a:spcBef>
+              <a:spcAft>
+                <a:spcPts val="200"/>
               </a:spcAft>
               <a:defRPr sz="2000"/>
             </a:pPr>
